--- a/html/seminar/DhroovPandey_NeurIPS18_SEAL_slides.pptx
+++ b/html/seminar/DhroovPandey_NeurIPS18_SEAL_slides.pptx
@@ -4,22 +4,28 @@
   <p:sldMasterIdLst>
     <p:sldMasterId id="2147483648" r:id="rId1"/>
   </p:sldMasterIdLst>
+  <p:notesMasterIdLst>
+    <p:notesMasterId r:id="rId20"/>
+  </p:notesMasterIdLst>
   <p:sldIdLst>
     <p:sldId id="256" r:id="rId2"/>
     <p:sldId id="257" r:id="rId3"/>
     <p:sldId id="258" r:id="rId4"/>
     <p:sldId id="259" r:id="rId5"/>
     <p:sldId id="260" r:id="rId6"/>
-    <p:sldId id="261" r:id="rId7"/>
-    <p:sldId id="262" r:id="rId8"/>
-    <p:sldId id="263" r:id="rId9"/>
-    <p:sldId id="264" r:id="rId10"/>
-    <p:sldId id="265" r:id="rId11"/>
-    <p:sldId id="269" r:id="rId12"/>
-    <p:sldId id="266" r:id="rId13"/>
-    <p:sldId id="267" r:id="rId14"/>
-    <p:sldId id="268" r:id="rId15"/>
-    <p:sldId id="270" r:id="rId16"/>
+    <p:sldId id="271" r:id="rId7"/>
+    <p:sldId id="272" r:id="rId8"/>
+    <p:sldId id="261" r:id="rId9"/>
+    <p:sldId id="262" r:id="rId10"/>
+    <p:sldId id="263" r:id="rId11"/>
+    <p:sldId id="264" r:id="rId12"/>
+    <p:sldId id="265" r:id="rId13"/>
+    <p:sldId id="269" r:id="rId14"/>
+    <p:sldId id="266" r:id="rId15"/>
+    <p:sldId id="267" r:id="rId16"/>
+    <p:sldId id="268" r:id="rId17"/>
+    <p:sldId id="270" r:id="rId18"/>
+    <p:sldId id="273" r:id="rId19"/>
   </p:sldIdLst>
   <p:sldSz cx="12192000" cy="6858000"/>
   <p:notesSz cx="6858000" cy="9144000"/>
@@ -126,6 +132,355 @@
 </p:presentation>
 </file>
 
+<file path=ppt/notesMasters/notesMaster1.xml><?xml version="1.0" encoding="utf-8"?>
+<p:notesMaster xmlns:a="http://schemas.openxmlformats.org/drawingml/2006/main" xmlns:r="http://schemas.openxmlformats.org/officeDocument/2006/relationships" xmlns:p="http://schemas.openxmlformats.org/presentationml/2006/main">
+  <p:cSld>
+    <p:bg>
+      <p:bgRef idx="1001">
+        <a:schemeClr val="bg1"/>
+      </p:bgRef>
+    </p:bg>
+    <p:spTree>
+      <p:nvGrpSpPr>
+        <p:cNvPr id="1" name=""/>
+        <p:cNvGrpSpPr/>
+        <p:nvPr/>
+      </p:nvGrpSpPr>
+      <p:grpSpPr>
+        <a:xfrm>
+          <a:off x="0" y="0"/>
+          <a:ext cx="0" cy="0"/>
+          <a:chOff x="0" y="0"/>
+          <a:chExt cx="0" cy="0"/>
+        </a:xfrm>
+      </p:grpSpPr>
+      <p:sp>
+        <p:nvSpPr>
+          <p:cNvPr id="2" name="Header Placeholder 1"/>
+          <p:cNvSpPr>
+            <a:spLocks noGrp="1"/>
+          </p:cNvSpPr>
+          <p:nvPr>
+            <p:ph type="hdr" sz="quarter"/>
+          </p:nvPr>
+        </p:nvSpPr>
+        <p:spPr>
+          <a:xfrm>
+            <a:off x="0" y="0"/>
+            <a:ext cx="2971800" cy="458788"/>
+          </a:xfrm>
+          <a:prstGeom prst="rect">
+            <a:avLst/>
+          </a:prstGeom>
+        </p:spPr>
+        <p:txBody>
+          <a:bodyPr vert="horz" lIns="91440" tIns="45720" rIns="91440" bIns="45720" rtlCol="0"/>
+          <a:lstStyle>
+            <a:lvl1pPr algn="l">
+              <a:defRPr sz="1200"/>
+            </a:lvl1pPr>
+          </a:lstStyle>
+          <a:p>
+            <a:endParaRPr lang="en-US"/>
+          </a:p>
+        </p:txBody>
+      </p:sp>
+      <p:sp>
+        <p:nvSpPr>
+          <p:cNvPr id="3" name="Date Placeholder 2"/>
+          <p:cNvSpPr>
+            <a:spLocks noGrp="1"/>
+          </p:cNvSpPr>
+          <p:nvPr>
+            <p:ph type="dt" idx="1"/>
+          </p:nvPr>
+        </p:nvSpPr>
+        <p:spPr>
+          <a:xfrm>
+            <a:off x="3884613" y="0"/>
+            <a:ext cx="2971800" cy="458788"/>
+          </a:xfrm>
+          <a:prstGeom prst="rect">
+            <a:avLst/>
+          </a:prstGeom>
+        </p:spPr>
+        <p:txBody>
+          <a:bodyPr vert="horz" lIns="91440" tIns="45720" rIns="91440" bIns="45720" rtlCol="0"/>
+          <a:lstStyle>
+            <a:lvl1pPr algn="r">
+              <a:defRPr sz="1200"/>
+            </a:lvl1pPr>
+          </a:lstStyle>
+          <a:p>
+            <a:fld id="{7A7AF9C8-54E6-8344-AB2A-C2B64A8F42B4}" type="datetimeFigureOut">
+              <a:rPr lang="en-US" smtClean="0"/>
+              <a:t>7/2/24</a:t>
+            </a:fld>
+            <a:endParaRPr lang="en-US"/>
+          </a:p>
+        </p:txBody>
+      </p:sp>
+      <p:sp>
+        <p:nvSpPr>
+          <p:cNvPr id="4" name="Slide Image Placeholder 3"/>
+          <p:cNvSpPr>
+            <a:spLocks noGrp="1" noRot="1" noChangeAspect="1"/>
+          </p:cNvSpPr>
+          <p:nvPr>
+            <p:ph type="sldImg" idx="2"/>
+          </p:nvPr>
+        </p:nvSpPr>
+        <p:spPr>
+          <a:xfrm>
+            <a:off x="685800" y="1143000"/>
+            <a:ext cx="5486400" cy="3086100"/>
+          </a:xfrm>
+          <a:prstGeom prst="rect">
+            <a:avLst/>
+          </a:prstGeom>
+          <a:noFill/>
+          <a:ln w="12700">
+            <a:solidFill>
+              <a:prstClr val="black"/>
+            </a:solidFill>
+          </a:ln>
+        </p:spPr>
+        <p:txBody>
+          <a:bodyPr vert="horz" lIns="91440" tIns="45720" rIns="91440" bIns="45720" rtlCol="0" anchor="ctr"/>
+          <a:lstStyle/>
+          <a:p>
+            <a:endParaRPr lang="en-US"/>
+          </a:p>
+        </p:txBody>
+      </p:sp>
+      <p:sp>
+        <p:nvSpPr>
+          <p:cNvPr id="5" name="Notes Placeholder 4"/>
+          <p:cNvSpPr>
+            <a:spLocks noGrp="1"/>
+          </p:cNvSpPr>
+          <p:nvPr>
+            <p:ph type="body" sz="quarter" idx="3"/>
+          </p:nvPr>
+        </p:nvSpPr>
+        <p:spPr>
+          <a:xfrm>
+            <a:off x="685800" y="4400550"/>
+            <a:ext cx="5486400" cy="3600450"/>
+          </a:xfrm>
+          <a:prstGeom prst="rect">
+            <a:avLst/>
+          </a:prstGeom>
+        </p:spPr>
+        <p:txBody>
+          <a:bodyPr vert="horz" lIns="91440" tIns="45720" rIns="91440" bIns="45720" rtlCol="0"/>
+          <a:lstStyle/>
+          <a:p>
+            <a:pPr lvl="0"/>
+            <a:r>
+              <a:rPr lang="en-US"/>
+              <a:t>Click to edit Master text styles</a:t>
+            </a:r>
+          </a:p>
+          <a:p>
+            <a:pPr lvl="1"/>
+            <a:r>
+              <a:rPr lang="en-US"/>
+              <a:t>Second level</a:t>
+            </a:r>
+          </a:p>
+          <a:p>
+            <a:pPr lvl="2"/>
+            <a:r>
+              <a:rPr lang="en-US"/>
+              <a:t>Third level</a:t>
+            </a:r>
+          </a:p>
+          <a:p>
+            <a:pPr lvl="3"/>
+            <a:r>
+              <a:rPr lang="en-US"/>
+              <a:t>Fourth level</a:t>
+            </a:r>
+          </a:p>
+          <a:p>
+            <a:pPr lvl="4"/>
+            <a:r>
+              <a:rPr lang="en-US"/>
+              <a:t>Fifth level</a:t>
+            </a:r>
+          </a:p>
+        </p:txBody>
+      </p:sp>
+      <p:sp>
+        <p:nvSpPr>
+          <p:cNvPr id="6" name="Footer Placeholder 5"/>
+          <p:cNvSpPr>
+            <a:spLocks noGrp="1"/>
+          </p:cNvSpPr>
+          <p:nvPr>
+            <p:ph type="ftr" sz="quarter" idx="4"/>
+          </p:nvPr>
+        </p:nvSpPr>
+        <p:spPr>
+          <a:xfrm>
+            <a:off x="0" y="8685213"/>
+            <a:ext cx="2971800" cy="458787"/>
+          </a:xfrm>
+          <a:prstGeom prst="rect">
+            <a:avLst/>
+          </a:prstGeom>
+        </p:spPr>
+        <p:txBody>
+          <a:bodyPr vert="horz" lIns="91440" tIns="45720" rIns="91440" bIns="45720" rtlCol="0" anchor="b"/>
+          <a:lstStyle>
+            <a:lvl1pPr algn="l">
+              <a:defRPr sz="1200"/>
+            </a:lvl1pPr>
+          </a:lstStyle>
+          <a:p>
+            <a:endParaRPr lang="en-US"/>
+          </a:p>
+        </p:txBody>
+      </p:sp>
+      <p:sp>
+        <p:nvSpPr>
+          <p:cNvPr id="7" name="Slide Number Placeholder 6"/>
+          <p:cNvSpPr>
+            <a:spLocks noGrp="1"/>
+          </p:cNvSpPr>
+          <p:nvPr>
+            <p:ph type="sldNum" sz="quarter" idx="5"/>
+          </p:nvPr>
+        </p:nvSpPr>
+        <p:spPr>
+          <a:xfrm>
+            <a:off x="3884613" y="8685213"/>
+            <a:ext cx="2971800" cy="458787"/>
+          </a:xfrm>
+          <a:prstGeom prst="rect">
+            <a:avLst/>
+          </a:prstGeom>
+        </p:spPr>
+        <p:txBody>
+          <a:bodyPr vert="horz" lIns="91440" tIns="45720" rIns="91440" bIns="45720" rtlCol="0" anchor="b"/>
+          <a:lstStyle>
+            <a:lvl1pPr algn="r">
+              <a:defRPr sz="1200"/>
+            </a:lvl1pPr>
+          </a:lstStyle>
+          <a:p>
+            <a:fld id="{2ABF38A3-6D44-104B-819B-08D5BED16F69}" type="slidenum">
+              <a:rPr lang="en-US" smtClean="0"/>
+              <a:t>‹#›</a:t>
+            </a:fld>
+            <a:endParaRPr lang="en-US"/>
+          </a:p>
+        </p:txBody>
+      </p:sp>
+    </p:spTree>
+    <p:extLst>
+      <p:ext uri="{BB962C8B-B14F-4D97-AF65-F5344CB8AC3E}">
+        <p14:creationId xmlns:p14="http://schemas.microsoft.com/office/powerpoint/2010/main" val="208250177"/>
+      </p:ext>
+    </p:extLst>
+  </p:cSld>
+  <p:clrMap bg1="lt1" tx1="dk1" bg2="lt2" tx2="dk2" accent1="accent1" accent2="accent2" accent3="accent3" accent4="accent4" accent5="accent5" accent6="accent6" hlink="hlink" folHlink="folHlink"/>
+  <p:notesStyle>
+    <a:lvl1pPr marL="0" algn="l" defTabSz="914400" rtl="0" eaLnBrk="1" latinLnBrk="0" hangingPunct="1">
+      <a:defRPr sz="1200" kern="1200">
+        <a:solidFill>
+          <a:schemeClr val="tx1"/>
+        </a:solidFill>
+        <a:latin typeface="+mn-lt"/>
+        <a:ea typeface="+mn-ea"/>
+        <a:cs typeface="+mn-cs"/>
+      </a:defRPr>
+    </a:lvl1pPr>
+    <a:lvl2pPr marL="457200" algn="l" defTabSz="914400" rtl="0" eaLnBrk="1" latinLnBrk="0" hangingPunct="1">
+      <a:defRPr sz="1200" kern="1200">
+        <a:solidFill>
+          <a:schemeClr val="tx1"/>
+        </a:solidFill>
+        <a:latin typeface="+mn-lt"/>
+        <a:ea typeface="+mn-ea"/>
+        <a:cs typeface="+mn-cs"/>
+      </a:defRPr>
+    </a:lvl2pPr>
+    <a:lvl3pPr marL="914400" algn="l" defTabSz="914400" rtl="0" eaLnBrk="1" latinLnBrk="0" hangingPunct="1">
+      <a:defRPr sz="1200" kern="1200">
+        <a:solidFill>
+          <a:schemeClr val="tx1"/>
+        </a:solidFill>
+        <a:latin typeface="+mn-lt"/>
+        <a:ea typeface="+mn-ea"/>
+        <a:cs typeface="+mn-cs"/>
+      </a:defRPr>
+    </a:lvl3pPr>
+    <a:lvl4pPr marL="1371600" algn="l" defTabSz="914400" rtl="0" eaLnBrk="1" latinLnBrk="0" hangingPunct="1">
+      <a:defRPr sz="1200" kern="1200">
+        <a:solidFill>
+          <a:schemeClr val="tx1"/>
+        </a:solidFill>
+        <a:latin typeface="+mn-lt"/>
+        <a:ea typeface="+mn-ea"/>
+        <a:cs typeface="+mn-cs"/>
+      </a:defRPr>
+    </a:lvl4pPr>
+    <a:lvl5pPr marL="1828800" algn="l" defTabSz="914400" rtl="0" eaLnBrk="1" latinLnBrk="0" hangingPunct="1">
+      <a:defRPr sz="1200" kern="1200">
+        <a:solidFill>
+          <a:schemeClr val="tx1"/>
+        </a:solidFill>
+        <a:latin typeface="+mn-lt"/>
+        <a:ea typeface="+mn-ea"/>
+        <a:cs typeface="+mn-cs"/>
+      </a:defRPr>
+    </a:lvl5pPr>
+    <a:lvl6pPr marL="2286000" algn="l" defTabSz="914400" rtl="0" eaLnBrk="1" latinLnBrk="0" hangingPunct="1">
+      <a:defRPr sz="1200" kern="1200">
+        <a:solidFill>
+          <a:schemeClr val="tx1"/>
+        </a:solidFill>
+        <a:latin typeface="+mn-lt"/>
+        <a:ea typeface="+mn-ea"/>
+        <a:cs typeface="+mn-cs"/>
+      </a:defRPr>
+    </a:lvl6pPr>
+    <a:lvl7pPr marL="2743200" algn="l" defTabSz="914400" rtl="0" eaLnBrk="1" latinLnBrk="0" hangingPunct="1">
+      <a:defRPr sz="1200" kern="1200">
+        <a:solidFill>
+          <a:schemeClr val="tx1"/>
+        </a:solidFill>
+        <a:latin typeface="+mn-lt"/>
+        <a:ea typeface="+mn-ea"/>
+        <a:cs typeface="+mn-cs"/>
+      </a:defRPr>
+    </a:lvl7pPr>
+    <a:lvl8pPr marL="3200400" algn="l" defTabSz="914400" rtl="0" eaLnBrk="1" latinLnBrk="0" hangingPunct="1">
+      <a:defRPr sz="1200" kern="1200">
+        <a:solidFill>
+          <a:schemeClr val="tx1"/>
+        </a:solidFill>
+        <a:latin typeface="+mn-lt"/>
+        <a:ea typeface="+mn-ea"/>
+        <a:cs typeface="+mn-cs"/>
+      </a:defRPr>
+    </a:lvl8pPr>
+    <a:lvl9pPr marL="3657600" algn="l" defTabSz="914400" rtl="0" eaLnBrk="1" latinLnBrk="0" hangingPunct="1">
+      <a:defRPr sz="1200" kern="1200">
+        <a:solidFill>
+          <a:schemeClr val="tx1"/>
+        </a:solidFill>
+        <a:latin typeface="+mn-lt"/>
+        <a:ea typeface="+mn-ea"/>
+        <a:cs typeface="+mn-cs"/>
+      </a:defRPr>
+    </a:lvl9pPr>
+  </p:notesStyle>
+</p:notesMaster>
+</file>
+
 <file path=ppt/slideLayouts/slideLayout1.xml><?xml version="1.0" encoding="utf-8"?>
 <p:sldLayout xmlns:a="http://schemas.openxmlformats.org/drawingml/2006/main" xmlns:r="http://schemas.openxmlformats.org/officeDocument/2006/relationships" xmlns:p="http://schemas.openxmlformats.org/presentationml/2006/main" type="title" preserve="1">
   <p:cSld name="Title Slide">
@@ -271,9 +626,9 @@
           <a:bodyPr/>
           <a:lstStyle/>
           <a:p>
-            <a:fld id="{E34E2910-B65F-4D8B-828A-2C07693511C2}" type="datetimeFigureOut">
+            <a:fld id="{29CAA2AA-926D-5B42-AAA4-856586692C55}" type="datetime1">
               <a:rPr lang="en-US" smtClean="0"/>
-              <a:t>10/11/23</a:t>
+              <a:t>7/2/24</a:t>
             </a:fld>
             <a:endParaRPr lang="en-US"/>
           </a:p>
@@ -469,9 +824,9 @@
           <a:bodyPr/>
           <a:lstStyle/>
           <a:p>
-            <a:fld id="{E34E2910-B65F-4D8B-828A-2C07693511C2}" type="datetimeFigureOut">
+            <a:fld id="{08C11DCE-FEBD-D547-969D-6AD548D6AC2F}" type="datetime1">
               <a:rPr lang="en-US" smtClean="0"/>
-              <a:t>10/11/23</a:t>
+              <a:t>7/2/24</a:t>
             </a:fld>
             <a:endParaRPr lang="en-US"/>
           </a:p>
@@ -677,9 +1032,9 @@
           <a:bodyPr/>
           <a:lstStyle/>
           <a:p>
-            <a:fld id="{E34E2910-B65F-4D8B-828A-2C07693511C2}" type="datetimeFigureOut">
+            <a:fld id="{B84CB30E-2062-004A-BD1C-3E8E40A5482C}" type="datetime1">
               <a:rPr lang="en-US" smtClean="0"/>
-              <a:t>10/11/23</a:t>
+              <a:t>7/2/24</a:t>
             </a:fld>
             <a:endParaRPr lang="en-US"/>
           </a:p>
@@ -875,9 +1230,9 @@
           <a:bodyPr/>
           <a:lstStyle/>
           <a:p>
-            <a:fld id="{E34E2910-B65F-4D8B-828A-2C07693511C2}" type="datetimeFigureOut">
+            <a:fld id="{A00C8B2C-0212-5240-A16D-E41F06F06623}" type="datetime1">
               <a:rPr lang="en-US" smtClean="0"/>
-              <a:t>10/11/23</a:t>
+              <a:t>7/2/24</a:t>
             </a:fld>
             <a:endParaRPr lang="en-US"/>
           </a:p>
@@ -1150,9 +1505,9 @@
           <a:bodyPr/>
           <a:lstStyle/>
           <a:p>
-            <a:fld id="{E34E2910-B65F-4D8B-828A-2C07693511C2}" type="datetimeFigureOut">
+            <a:fld id="{0ADD38FB-2FFB-2F4E-849D-218DFD378209}" type="datetime1">
               <a:rPr lang="en-US" smtClean="0"/>
-              <a:t>10/11/23</a:t>
+              <a:t>7/2/24</a:t>
             </a:fld>
             <a:endParaRPr lang="en-US"/>
           </a:p>
@@ -1415,9 +1770,9 @@
           <a:bodyPr/>
           <a:lstStyle/>
           <a:p>
-            <a:fld id="{E34E2910-B65F-4D8B-828A-2C07693511C2}" type="datetimeFigureOut">
+            <a:fld id="{FF7F85E0-025B-C24F-935E-ED56D3754DA1}" type="datetime1">
               <a:rPr lang="en-US" smtClean="0"/>
-              <a:t>10/11/23</a:t>
+              <a:t>7/2/24</a:t>
             </a:fld>
             <a:endParaRPr lang="en-US"/>
           </a:p>
@@ -1827,9 +2182,9 @@
           <a:bodyPr/>
           <a:lstStyle/>
           <a:p>
-            <a:fld id="{E34E2910-B65F-4D8B-828A-2C07693511C2}" type="datetimeFigureOut">
+            <a:fld id="{BD5C97BA-B6DE-DC44-B364-58547C4DE7D6}" type="datetime1">
               <a:rPr lang="en-US" smtClean="0"/>
-              <a:t>10/11/23</a:t>
+              <a:t>7/2/24</a:t>
             </a:fld>
             <a:endParaRPr lang="en-US"/>
           </a:p>
@@ -1968,9 +2323,9 @@
           <a:bodyPr/>
           <a:lstStyle/>
           <a:p>
-            <a:fld id="{E34E2910-B65F-4D8B-828A-2C07693511C2}" type="datetimeFigureOut">
+            <a:fld id="{3EFF6974-0B67-0043-94CE-0106CD104F31}" type="datetime1">
               <a:rPr lang="en-US" smtClean="0"/>
-              <a:t>10/11/23</a:t>
+              <a:t>7/2/24</a:t>
             </a:fld>
             <a:endParaRPr lang="en-US"/>
           </a:p>
@@ -2081,9 +2436,9 @@
           <a:bodyPr/>
           <a:lstStyle/>
           <a:p>
-            <a:fld id="{E34E2910-B65F-4D8B-828A-2C07693511C2}" type="datetimeFigureOut">
+            <a:fld id="{11EE6ED0-9FAE-F148-A80E-D4F4611843C9}" type="datetime1">
               <a:rPr lang="en-US" smtClean="0"/>
-              <a:t>10/11/23</a:t>
+              <a:t>7/2/24</a:t>
             </a:fld>
             <a:endParaRPr lang="en-US"/>
           </a:p>
@@ -2392,9 +2747,9 @@
           <a:bodyPr/>
           <a:lstStyle/>
           <a:p>
-            <a:fld id="{E34E2910-B65F-4D8B-828A-2C07693511C2}" type="datetimeFigureOut">
+            <a:fld id="{6A2AA2FF-0756-1C4D-8521-0B0D8996523B}" type="datetime1">
               <a:rPr lang="en-US" smtClean="0"/>
-              <a:t>10/11/23</a:t>
+              <a:t>7/2/24</a:t>
             </a:fld>
             <a:endParaRPr lang="en-US"/>
           </a:p>
@@ -2680,9 +3035,9 @@
           <a:bodyPr/>
           <a:lstStyle/>
           <a:p>
-            <a:fld id="{E34E2910-B65F-4D8B-828A-2C07693511C2}" type="datetimeFigureOut">
+            <a:fld id="{B212297B-AAFB-5540-949F-6820F151EF96}" type="datetime1">
               <a:rPr lang="en-US" smtClean="0"/>
-              <a:t>10/11/23</a:t>
+              <a:t>7/2/24</a:t>
             </a:fld>
             <a:endParaRPr lang="en-US"/>
           </a:p>
@@ -2921,9 +3276,9 @@
             </a:lvl1pPr>
           </a:lstStyle>
           <a:p>
-            <a:fld id="{E34E2910-B65F-4D8B-828A-2C07693511C2}" type="datetimeFigureOut">
+            <a:fld id="{410E58C6-02F9-E943-94C3-0D3727E70B36}" type="datetime1">
               <a:rPr lang="en-US" smtClean="0"/>
-              <a:t>10/11/23</a:t>
+              <a:t>7/2/24</a:t>
             </a:fld>
             <a:endParaRPr lang="en-US"/>
           </a:p>
@@ -3040,6 +3395,7 @@
     <p:sldLayoutId id="2147483658" r:id="rId10"/>
     <p:sldLayoutId id="2147483659" r:id="rId11"/>
   </p:sldLayoutIdLst>
+  <p:hf hdr="0" ftr="0" dt="0"/>
   <p:txStyles>
     <p:titleStyle>
       <a:lvl1pPr algn="l" defTabSz="914400" rtl="0" eaLnBrk="1" latinLnBrk="0" hangingPunct="1">
@@ -3423,9 +3779,39 @@
               <a:t>Dhroov</a:t>
             </a:r>
             <a:r>
-              <a:rPr lang="en-US" dirty="0"/>
+              <a:rPr lang="en-US"/>
               <a:t> Pandey</a:t>
             </a:r>
+            <a:endParaRPr lang="en-US" dirty="0"/>
+          </a:p>
+        </p:txBody>
+      </p:sp>
+      <p:sp>
+        <p:nvSpPr>
+          <p:cNvPr id="4" name="Slide Number Placeholder 3">
+            <a:extLst>
+              <a:ext uri="{FF2B5EF4-FFF2-40B4-BE49-F238E27FC236}">
+                <a16:creationId xmlns:a16="http://schemas.microsoft.com/office/drawing/2014/main" id="{A66322A1-5F57-0CFF-E0AB-2A131AF12142}"/>
+              </a:ext>
+            </a:extLst>
+          </p:cNvPr>
+          <p:cNvSpPr>
+            <a:spLocks noGrp="1"/>
+          </p:cNvSpPr>
+          <p:nvPr>
+            <p:ph type="sldNum" sz="quarter" idx="12"/>
+          </p:nvPr>
+        </p:nvSpPr>
+        <p:spPr/>
+        <p:txBody>
+          <a:bodyPr/>
+          <a:lstStyle/>
+          <a:p>
+            <a:fld id="{673E80D0-5A67-47DD-9B76-4E24E60624C0}" type="slidenum">
+              <a:rPr lang="en-US" smtClean="0"/>
+              <a:t>1</a:t>
+            </a:fld>
+            <a:endParaRPr lang="en-US"/>
           </a:p>
         </p:txBody>
       </p:sp>
@@ -3459,6 +3845,3394 @@
           <a:chExt cx="0" cy="0"/>
         </a:xfrm>
       </p:grpSpPr>
+      <mc:AlternateContent xmlns:mc="http://schemas.openxmlformats.org/markup-compatibility/2006" xmlns:a14="http://schemas.microsoft.com/office/drawing/2010/main">
+        <mc:Choice Requires="a14">
+          <p:sp>
+            <p:nvSpPr>
+              <p:cNvPr id="2" name="Title 1">
+                <a:extLst>
+                  <a:ext uri="{FF2B5EF4-FFF2-40B4-BE49-F238E27FC236}">
+                    <a16:creationId xmlns:a16="http://schemas.microsoft.com/office/drawing/2014/main" id="{A3BCBA83-9409-0509-9965-A9ADD1304CFC}"/>
+                  </a:ext>
+                </a:extLst>
+              </p:cNvPr>
+              <p:cNvSpPr>
+                <a:spLocks noGrp="1"/>
+              </p:cNvSpPr>
+              <p:nvPr>
+                <p:ph type="title"/>
+              </p:nvPr>
+            </p:nvSpPr>
+            <p:spPr/>
+            <p:txBody>
+              <a:bodyPr/>
+              <a:lstStyle/>
+              <a:p>
+                <a:r>
+                  <a:rPr lang="en-US" dirty="0"/>
+                  <a:t>Proving that Katz index is </a:t>
+                </a:r>
+                <a14:m>
+                  <m:oMath xmlns:m="http://schemas.openxmlformats.org/officeDocument/2006/math">
+                    <m:r>
+                      <a:rPr lang="en-US" i="1" smtClean="0">
+                        <a:latin typeface="Cambria Math" panose="02040503050406030204" pitchFamily="18" charset="0"/>
+                        <a:ea typeface="Cambria Math" panose="02040503050406030204" pitchFamily="18" charset="0"/>
+                      </a:rPr>
+                      <m:t>𝛾</m:t>
+                    </m:r>
+                    <m:r>
+                      <a:rPr lang="en-US" b="0" i="1" smtClean="0">
+                        <a:latin typeface="Cambria Math" panose="02040503050406030204" pitchFamily="18" charset="0"/>
+                        <a:ea typeface="Cambria Math" panose="02040503050406030204" pitchFamily="18" charset="0"/>
+                      </a:rPr>
+                      <m:t>−</m:t>
+                    </m:r>
+                    <m:r>
+                      <a:rPr lang="en-US" b="0" i="1" smtClean="0">
+                        <a:latin typeface="Cambria Math" panose="02040503050406030204" pitchFamily="18" charset="0"/>
+                        <a:ea typeface="Cambria Math" panose="02040503050406030204" pitchFamily="18" charset="0"/>
+                      </a:rPr>
+                      <m:t>𝑑𝑒𝑐𝑎𝑦𝑖𝑛𝑔</m:t>
+                    </m:r>
+                  </m:oMath>
+                </a14:m>
+                <a:endParaRPr lang="en-US" dirty="0"/>
+              </a:p>
+            </p:txBody>
+          </p:sp>
+        </mc:Choice>
+        <mc:Fallback xmlns="">
+          <p:sp>
+            <p:nvSpPr>
+              <p:cNvPr id="2" name="Title 1">
+                <a:extLst>
+                  <a:ext uri="{FF2B5EF4-FFF2-40B4-BE49-F238E27FC236}">
+                    <a16:creationId xmlns:a16="http://schemas.microsoft.com/office/drawing/2014/main" id="{A3BCBA83-9409-0509-9965-A9ADD1304CFC}"/>
+                  </a:ext>
+                </a:extLst>
+              </p:cNvPr>
+              <p:cNvSpPr>
+                <a:spLocks noGrp="1" noRot="1" noChangeAspect="1" noMove="1" noResize="1" noEditPoints="1" noAdjustHandles="1" noChangeArrowheads="1" noChangeShapeType="1" noTextEdit="1"/>
+              </p:cNvSpPr>
+              <p:nvPr>
+                <p:ph type="title"/>
+              </p:nvPr>
+            </p:nvSpPr>
+            <p:spPr>
+              <a:blipFill>
+                <a:blip r:embed="rId2"/>
+                <a:stretch>
+                  <a:fillRect l="-2377"/>
+                </a:stretch>
+              </a:blipFill>
+            </p:spPr>
+            <p:txBody>
+              <a:bodyPr/>
+              <a:lstStyle/>
+              <a:p>
+                <a:r>
+                  <a:rPr lang="en-US">
+                    <a:noFill/>
+                  </a:rPr>
+                  <a:t> </a:t>
+                </a:r>
+              </a:p>
+            </p:txBody>
+          </p:sp>
+        </mc:Fallback>
+      </mc:AlternateContent>
+      <mc:AlternateContent xmlns:mc="http://schemas.openxmlformats.org/markup-compatibility/2006" xmlns:a14="http://schemas.microsoft.com/office/drawing/2010/main">
+        <mc:Choice Requires="a14">
+          <p:sp>
+            <p:nvSpPr>
+              <p:cNvPr id="3" name="TextBox 2">
+                <a:extLst>
+                  <a:ext uri="{FF2B5EF4-FFF2-40B4-BE49-F238E27FC236}">
+                    <a16:creationId xmlns:a16="http://schemas.microsoft.com/office/drawing/2014/main" id="{49E08EE0-1B5F-79C8-3FDE-03CC933AC366}"/>
+                  </a:ext>
+                </a:extLst>
+              </p:cNvPr>
+              <p:cNvSpPr txBox="1"/>
+              <p:nvPr/>
+            </p:nvSpPr>
+            <p:spPr>
+              <a:xfrm>
+                <a:off x="961053" y="1940767"/>
+                <a:ext cx="10207690" cy="4085670"/>
+              </a:xfrm>
+              <a:prstGeom prst="rect">
+                <a:avLst/>
+              </a:prstGeom>
+              <a:noFill/>
+            </p:spPr>
+            <p:txBody>
+              <a:bodyPr wrap="square" rtlCol="0">
+                <a:spAutoFit/>
+              </a:bodyPr>
+              <a:lstStyle/>
+              <a:p>
+                <a:pPr/>
+                <a14:m>
+                  <m:oMathPara xmlns:m="http://schemas.openxmlformats.org/officeDocument/2006/math">
+                    <m:oMathParaPr>
+                      <m:jc m:val="centerGroup"/>
+                    </m:oMathParaPr>
+                    <m:oMath xmlns:m="http://schemas.openxmlformats.org/officeDocument/2006/math">
+                      <m:r>
+                        <a:rPr lang="en-US" b="0" i="1" smtClean="0">
+                          <a:latin typeface="Cambria Math" panose="02040503050406030204" pitchFamily="18" charset="0"/>
+                        </a:rPr>
+                        <m:t>𝐾𝑎𝑡𝑧</m:t>
+                      </m:r>
+                      <m:r>
+                        <a:rPr lang="en-US" b="0" i="1" smtClean="0">
+                          <a:latin typeface="Cambria Math" panose="02040503050406030204" pitchFamily="18" charset="0"/>
+                        </a:rPr>
+                        <m:t> </m:t>
+                      </m:r>
+                      <m:r>
+                        <a:rPr lang="en-US" b="0" i="1" smtClean="0">
+                          <a:latin typeface="Cambria Math" panose="02040503050406030204" pitchFamily="18" charset="0"/>
+                        </a:rPr>
+                        <m:t>𝐼𝑛𝑑𝑒𝑥</m:t>
+                      </m:r>
+                      <m:r>
+                        <a:rPr lang="en-US" b="0" i="1" smtClean="0">
+                          <a:latin typeface="Cambria Math" panose="02040503050406030204" pitchFamily="18" charset="0"/>
+                        </a:rPr>
+                        <m:t> </m:t>
+                      </m:r>
+                      <m:r>
+                        <a:rPr lang="en-US" b="0" i="1" smtClean="0">
+                          <a:latin typeface="Cambria Math" panose="02040503050406030204" pitchFamily="18" charset="0"/>
+                        </a:rPr>
+                        <m:t>𝑖𝑠</m:t>
+                      </m:r>
+                      <m:r>
+                        <a:rPr lang="en-US" b="0" i="1" smtClean="0">
+                          <a:latin typeface="Cambria Math" panose="02040503050406030204" pitchFamily="18" charset="0"/>
+                        </a:rPr>
+                        <m:t> </m:t>
+                      </m:r>
+                      <m:r>
+                        <a:rPr lang="en-US" b="0" i="1" smtClean="0">
+                          <a:latin typeface="Cambria Math" panose="02040503050406030204" pitchFamily="18" charset="0"/>
+                        </a:rPr>
+                        <m:t>𝑑𝑒𝑓𝑖𝑛𝑒𝑑</m:t>
+                      </m:r>
+                      <m:r>
+                        <a:rPr lang="en-US" b="0" i="1" smtClean="0">
+                          <a:latin typeface="Cambria Math" panose="02040503050406030204" pitchFamily="18" charset="0"/>
+                        </a:rPr>
+                        <m:t> </m:t>
+                      </m:r>
+                      <m:r>
+                        <a:rPr lang="en-US" b="0" i="1" smtClean="0">
+                          <a:latin typeface="Cambria Math" panose="02040503050406030204" pitchFamily="18" charset="0"/>
+                        </a:rPr>
+                        <m:t>𝑎𝑠</m:t>
+                      </m:r>
+                      <m:r>
+                        <a:rPr lang="en-US" b="0" i="1" smtClean="0">
+                          <a:latin typeface="Cambria Math" panose="02040503050406030204" pitchFamily="18" charset="0"/>
+                        </a:rPr>
+                        <m:t> </m:t>
+                      </m:r>
+                      <m:sSub>
+                        <m:sSubPr>
+                          <m:ctrlPr>
+                            <a:rPr lang="en-US" b="0" i="1" smtClean="0">
+                              <a:latin typeface="Cambria Math" panose="02040503050406030204" pitchFamily="18" charset="0"/>
+                            </a:rPr>
+                          </m:ctrlPr>
+                        </m:sSubPr>
+                        <m:e>
+                          <m:r>
+                            <a:rPr lang="en-US" b="0" i="1" smtClean="0">
+                              <a:latin typeface="Cambria Math" panose="02040503050406030204" pitchFamily="18" charset="0"/>
+                            </a:rPr>
+                            <m:t>𝐾𝑎𝑡𝑧</m:t>
+                          </m:r>
+                        </m:e>
+                        <m:sub>
+                          <m:r>
+                            <a:rPr lang="en-US" b="0" i="1" smtClean="0">
+                              <a:latin typeface="Cambria Math" panose="02040503050406030204" pitchFamily="18" charset="0"/>
+                            </a:rPr>
+                            <m:t>𝑥</m:t>
+                          </m:r>
+                          <m:r>
+                            <a:rPr lang="en-US" b="0" i="1" smtClean="0">
+                              <a:latin typeface="Cambria Math" panose="02040503050406030204" pitchFamily="18" charset="0"/>
+                            </a:rPr>
+                            <m:t>,</m:t>
+                          </m:r>
+                          <m:r>
+                            <a:rPr lang="en-US" b="0" i="1" smtClean="0">
+                              <a:latin typeface="Cambria Math" panose="02040503050406030204" pitchFamily="18" charset="0"/>
+                            </a:rPr>
+                            <m:t>𝑦</m:t>
+                          </m:r>
+                        </m:sub>
+                      </m:sSub>
+                      <m:r>
+                        <a:rPr lang="en-US" b="0" i="1" smtClean="0">
+                          <a:latin typeface="Cambria Math" panose="02040503050406030204" pitchFamily="18" charset="0"/>
+                        </a:rPr>
+                        <m:t>=</m:t>
+                      </m:r>
+                      <m:nary>
+                        <m:naryPr>
+                          <m:chr m:val="∑"/>
+                          <m:ctrlPr>
+                            <a:rPr lang="en-US" b="0" i="1" smtClean="0">
+                              <a:latin typeface="Cambria Math" panose="02040503050406030204" pitchFamily="18" charset="0"/>
+                            </a:rPr>
+                          </m:ctrlPr>
+                        </m:naryPr>
+                        <m:sub>
+                          <m:r>
+                            <m:rPr>
+                              <m:brk m:alnAt="23"/>
+                            </m:rPr>
+                            <a:rPr lang="en-US" b="0" i="1" smtClean="0">
+                              <a:latin typeface="Cambria Math" panose="02040503050406030204" pitchFamily="18" charset="0"/>
+                            </a:rPr>
+                            <m:t>𝑙</m:t>
+                          </m:r>
+                          <m:r>
+                            <a:rPr lang="en-US" b="0" i="1" smtClean="0">
+                              <a:latin typeface="Cambria Math" panose="02040503050406030204" pitchFamily="18" charset="0"/>
+                            </a:rPr>
+                            <m:t>=1</m:t>
+                          </m:r>
+                        </m:sub>
+                        <m:sup>
+                          <m:r>
+                            <a:rPr lang="en-US" b="0" i="1" smtClean="0">
+                              <a:latin typeface="Cambria Math" panose="02040503050406030204" pitchFamily="18" charset="0"/>
+                              <a:ea typeface="Cambria Math" panose="02040503050406030204" pitchFamily="18" charset="0"/>
+                            </a:rPr>
+                            <m:t>∞</m:t>
+                          </m:r>
+                        </m:sup>
+                        <m:e>
+                          <m:sSup>
+                            <m:sSupPr>
+                              <m:ctrlPr>
+                                <a:rPr lang="en-US" b="0" i="1" smtClean="0">
+                                  <a:latin typeface="Cambria Math" panose="02040503050406030204" pitchFamily="18" charset="0"/>
+                                </a:rPr>
+                              </m:ctrlPr>
+                            </m:sSupPr>
+                            <m:e>
+                              <m:r>
+                                <a:rPr lang="en-US" b="0" i="1" smtClean="0">
+                                  <a:latin typeface="Cambria Math" panose="02040503050406030204" pitchFamily="18" charset="0"/>
+                                  <a:ea typeface="Cambria Math" panose="02040503050406030204" pitchFamily="18" charset="0"/>
+                                </a:rPr>
+                                <m:t>𝛽</m:t>
+                              </m:r>
+                            </m:e>
+                            <m:sup>
+                              <m:r>
+                                <a:rPr lang="en-US" b="0" i="1" smtClean="0">
+                                  <a:latin typeface="Cambria Math" panose="02040503050406030204" pitchFamily="18" charset="0"/>
+                                </a:rPr>
+                                <m:t>𝑙</m:t>
+                              </m:r>
+                            </m:sup>
+                          </m:sSup>
+                          <m:r>
+                            <a:rPr lang="en-US" b="0" i="1" smtClean="0">
+                              <a:latin typeface="Cambria Math" panose="02040503050406030204" pitchFamily="18" charset="0"/>
+                            </a:rPr>
+                            <m:t>|</m:t>
+                          </m:r>
+                          <m:sSup>
+                            <m:sSupPr>
+                              <m:ctrlPr>
+                                <a:rPr lang="en-US" b="0" i="1" smtClean="0">
+                                  <a:latin typeface="Cambria Math" panose="02040503050406030204" pitchFamily="18" charset="0"/>
+                                </a:rPr>
+                              </m:ctrlPr>
+                            </m:sSupPr>
+                            <m:e>
+                              <m:r>
+                                <a:rPr lang="en-US" b="0" i="1" smtClean="0">
+                                  <a:latin typeface="Cambria Math" panose="02040503050406030204" pitchFamily="18" charset="0"/>
+                                </a:rPr>
+                                <m:t>𝑤𝑎𝑙𝑘𝑠</m:t>
+                              </m:r>
+                            </m:e>
+                            <m:sup>
+                              <m:r>
+                                <a:rPr lang="en-US" b="0" i="1" smtClean="0">
+                                  <a:latin typeface="Cambria Math" panose="02040503050406030204" pitchFamily="18" charset="0"/>
+                                </a:rPr>
+                                <m:t>&lt;</m:t>
+                              </m:r>
+                              <m:r>
+                                <a:rPr lang="en-US" b="0" i="1" smtClean="0">
+                                  <a:latin typeface="Cambria Math" panose="02040503050406030204" pitchFamily="18" charset="0"/>
+                                </a:rPr>
+                                <m:t>𝑙</m:t>
+                              </m:r>
+                              <m:r>
+                                <a:rPr lang="en-US" b="0" i="1" smtClean="0">
+                                  <a:latin typeface="Cambria Math" panose="02040503050406030204" pitchFamily="18" charset="0"/>
+                                </a:rPr>
+                                <m:t>&gt;</m:t>
+                              </m:r>
+                            </m:sup>
+                          </m:sSup>
+                          <m:r>
+                            <a:rPr lang="en-US" b="0" i="1" smtClean="0">
+                              <a:latin typeface="Cambria Math" panose="02040503050406030204" pitchFamily="18" charset="0"/>
+                            </a:rPr>
+                            <m:t>(</m:t>
+                          </m:r>
+                          <m:r>
+                            <a:rPr lang="en-US" b="0" i="1" smtClean="0">
+                              <a:latin typeface="Cambria Math" panose="02040503050406030204" pitchFamily="18" charset="0"/>
+                            </a:rPr>
+                            <m:t>𝑥</m:t>
+                          </m:r>
+                          <m:r>
+                            <a:rPr lang="en-US" b="0" i="1" smtClean="0">
+                              <a:latin typeface="Cambria Math" panose="02040503050406030204" pitchFamily="18" charset="0"/>
+                            </a:rPr>
+                            <m:t>,</m:t>
+                          </m:r>
+                          <m:r>
+                            <a:rPr lang="en-US" b="0" i="1" smtClean="0">
+                              <a:latin typeface="Cambria Math" panose="02040503050406030204" pitchFamily="18" charset="0"/>
+                            </a:rPr>
+                            <m:t>𝑦</m:t>
+                          </m:r>
+                          <m:r>
+                            <a:rPr lang="en-US" b="0" i="1" smtClean="0">
+                              <a:latin typeface="Cambria Math" panose="02040503050406030204" pitchFamily="18" charset="0"/>
+                            </a:rPr>
+                            <m:t>)|</m:t>
+                          </m:r>
+                        </m:e>
+                      </m:nary>
+                      <m:r>
+                        <a:rPr lang="en-US" b="0" i="1" smtClean="0">
+                          <a:latin typeface="Cambria Math" panose="02040503050406030204" pitchFamily="18" charset="0"/>
+                        </a:rPr>
+                        <m:t>=</m:t>
+                      </m:r>
+                      <m:nary>
+                        <m:naryPr>
+                          <m:chr m:val="∑"/>
+                          <m:ctrlPr>
+                            <a:rPr lang="en-US" i="1">
+                              <a:latin typeface="Cambria Math" panose="02040503050406030204" pitchFamily="18" charset="0"/>
+                            </a:rPr>
+                          </m:ctrlPr>
+                        </m:naryPr>
+                        <m:sub>
+                          <m:r>
+                            <m:rPr>
+                              <m:brk m:alnAt="23"/>
+                            </m:rPr>
+                            <a:rPr lang="en-US" i="1">
+                              <a:latin typeface="Cambria Math" panose="02040503050406030204" pitchFamily="18" charset="0"/>
+                            </a:rPr>
+                            <m:t>𝑙</m:t>
+                          </m:r>
+                          <m:r>
+                            <a:rPr lang="en-US" i="1">
+                              <a:latin typeface="Cambria Math" panose="02040503050406030204" pitchFamily="18" charset="0"/>
+                            </a:rPr>
+                            <m:t>=1</m:t>
+                          </m:r>
+                        </m:sub>
+                        <m:sup>
+                          <m:r>
+                            <a:rPr lang="en-US" i="1">
+                              <a:latin typeface="Cambria Math" panose="02040503050406030204" pitchFamily="18" charset="0"/>
+                              <a:ea typeface="Cambria Math" panose="02040503050406030204" pitchFamily="18" charset="0"/>
+                            </a:rPr>
+                            <m:t>∞</m:t>
+                          </m:r>
+                        </m:sup>
+                        <m:e>
+                          <m:sSup>
+                            <m:sSupPr>
+                              <m:ctrlPr>
+                                <a:rPr lang="en-US" i="1">
+                                  <a:latin typeface="Cambria Math" panose="02040503050406030204" pitchFamily="18" charset="0"/>
+                                </a:rPr>
+                              </m:ctrlPr>
+                            </m:sSupPr>
+                            <m:e>
+                              <m:r>
+                                <a:rPr lang="en-US" i="1">
+                                  <a:latin typeface="Cambria Math" panose="02040503050406030204" pitchFamily="18" charset="0"/>
+                                  <a:ea typeface="Cambria Math" panose="02040503050406030204" pitchFamily="18" charset="0"/>
+                                </a:rPr>
+                                <m:t>𝛽</m:t>
+                              </m:r>
+                            </m:e>
+                            <m:sup>
+                              <m:r>
+                                <a:rPr lang="en-US" i="1">
+                                  <a:latin typeface="Cambria Math" panose="02040503050406030204" pitchFamily="18" charset="0"/>
+                                </a:rPr>
+                                <m:t>𝑙</m:t>
+                              </m:r>
+                            </m:sup>
+                          </m:sSup>
+                          <m:r>
+                            <a:rPr lang="en-US" i="1">
+                              <a:latin typeface="Cambria Math" panose="02040503050406030204" pitchFamily="18" charset="0"/>
+                            </a:rPr>
+                            <m:t>|</m:t>
+                          </m:r>
+                          <m:sSup>
+                            <m:sSupPr>
+                              <m:ctrlPr>
+                                <a:rPr lang="en-US" i="1" smtClean="0">
+                                  <a:latin typeface="Cambria Math" panose="02040503050406030204" pitchFamily="18" charset="0"/>
+                                </a:rPr>
+                              </m:ctrlPr>
+                            </m:sSupPr>
+                            <m:e>
+                              <m:r>
+                                <a:rPr lang="en-US" b="0" i="1" smtClean="0">
+                                  <a:latin typeface="Cambria Math" panose="02040503050406030204" pitchFamily="18" charset="0"/>
+                                </a:rPr>
+                                <m:t>[</m:t>
+                              </m:r>
+                              <m:r>
+                                <a:rPr lang="en-US" b="0" i="1" smtClean="0">
+                                  <a:latin typeface="Cambria Math" panose="02040503050406030204" pitchFamily="18" charset="0"/>
+                                </a:rPr>
+                                <m:t>𝐴</m:t>
+                              </m:r>
+                            </m:e>
+                            <m:sup>
+                              <m:r>
+                                <a:rPr lang="en-US" i="1">
+                                  <a:latin typeface="Cambria Math" panose="02040503050406030204" pitchFamily="18" charset="0"/>
+                                </a:rPr>
+                                <m:t>𝑙</m:t>
+                              </m:r>
+                            </m:sup>
+                          </m:sSup>
+                          <m:r>
+                            <a:rPr lang="en-US" b="0" i="1" smtClean="0">
+                              <a:latin typeface="Cambria Math" panose="02040503050406030204" pitchFamily="18" charset="0"/>
+                            </a:rPr>
+                            <m:t>]</m:t>
+                          </m:r>
+                          <m:r>
+                            <a:rPr lang="en-US" i="1">
+                              <a:latin typeface="Cambria Math" panose="02040503050406030204" pitchFamily="18" charset="0"/>
+                            </a:rPr>
+                            <m:t>(</m:t>
+                          </m:r>
+                          <m:r>
+                            <a:rPr lang="en-US" i="1">
+                              <a:latin typeface="Cambria Math" panose="02040503050406030204" pitchFamily="18" charset="0"/>
+                            </a:rPr>
+                            <m:t>𝑥</m:t>
+                          </m:r>
+                          <m:r>
+                            <a:rPr lang="en-US" i="1">
+                              <a:latin typeface="Cambria Math" panose="02040503050406030204" pitchFamily="18" charset="0"/>
+                            </a:rPr>
+                            <m:t>,</m:t>
+                          </m:r>
+                          <m:r>
+                            <a:rPr lang="en-US" i="1">
+                              <a:latin typeface="Cambria Math" panose="02040503050406030204" pitchFamily="18" charset="0"/>
+                            </a:rPr>
+                            <m:t>𝑦</m:t>
+                          </m:r>
+                          <m:r>
+                            <a:rPr lang="en-US" i="1">
+                              <a:latin typeface="Cambria Math" panose="02040503050406030204" pitchFamily="18" charset="0"/>
+                            </a:rPr>
+                            <m:t>)|</m:t>
+                          </m:r>
+                        </m:e>
+                      </m:nary>
+                      <m:r>
+                        <a:rPr lang="en-US" b="0" i="1" smtClean="0">
+                          <a:latin typeface="Cambria Math" panose="02040503050406030204" pitchFamily="18" charset="0"/>
+                        </a:rPr>
+                        <m:t> </m:t>
+                      </m:r>
+                      <m:r>
+                        <a:rPr lang="en-US" b="0" i="1" smtClean="0">
+                          <a:latin typeface="Cambria Math" panose="02040503050406030204" pitchFamily="18" charset="0"/>
+                        </a:rPr>
+                        <m:t>𝑤h𝑒𝑟𝑒</m:t>
+                      </m:r>
+                      <m:r>
+                        <a:rPr lang="en-US" b="0" i="1" smtClean="0">
+                          <a:latin typeface="Cambria Math" panose="02040503050406030204" pitchFamily="18" charset="0"/>
+                        </a:rPr>
+                        <m:t>, </m:t>
+                      </m:r>
+                      <m:sSup>
+                        <m:sSupPr>
+                          <m:ctrlPr>
+                            <a:rPr lang="en-US" i="1">
+                              <a:latin typeface="Cambria Math" panose="02040503050406030204" pitchFamily="18" charset="0"/>
+                            </a:rPr>
+                          </m:ctrlPr>
+                        </m:sSupPr>
+                        <m:e>
+                          <m:r>
+                            <a:rPr lang="en-US" i="1">
+                              <a:latin typeface="Cambria Math" panose="02040503050406030204" pitchFamily="18" charset="0"/>
+                            </a:rPr>
+                            <m:t>𝑤𝑎𝑙𝑘𝑠</m:t>
+                          </m:r>
+                        </m:e>
+                        <m:sup>
+                          <m:r>
+                            <a:rPr lang="en-US" i="1">
+                              <a:latin typeface="Cambria Math" panose="02040503050406030204" pitchFamily="18" charset="0"/>
+                            </a:rPr>
+                            <m:t>&lt;</m:t>
+                          </m:r>
+                          <m:r>
+                            <a:rPr lang="en-US" i="1">
+                              <a:latin typeface="Cambria Math" panose="02040503050406030204" pitchFamily="18" charset="0"/>
+                            </a:rPr>
+                            <m:t>𝑙</m:t>
+                          </m:r>
+                          <m:r>
+                            <a:rPr lang="en-US" i="1">
+                              <a:latin typeface="Cambria Math" panose="02040503050406030204" pitchFamily="18" charset="0"/>
+                            </a:rPr>
+                            <m:t>&gt;</m:t>
+                          </m:r>
+                        </m:sup>
+                      </m:sSup>
+                      <m:d>
+                        <m:dPr>
+                          <m:ctrlPr>
+                            <a:rPr lang="en-US" i="1">
+                              <a:latin typeface="Cambria Math" panose="02040503050406030204" pitchFamily="18" charset="0"/>
+                            </a:rPr>
+                          </m:ctrlPr>
+                        </m:dPr>
+                        <m:e>
+                          <m:r>
+                            <a:rPr lang="en-US" i="1">
+                              <a:latin typeface="Cambria Math" panose="02040503050406030204" pitchFamily="18" charset="0"/>
+                            </a:rPr>
+                            <m:t>𝑥</m:t>
+                          </m:r>
+                          <m:r>
+                            <a:rPr lang="en-US" i="1">
+                              <a:latin typeface="Cambria Math" panose="02040503050406030204" pitchFamily="18" charset="0"/>
+                            </a:rPr>
+                            <m:t>,</m:t>
+                          </m:r>
+                          <m:r>
+                            <a:rPr lang="en-US" i="1">
+                              <a:latin typeface="Cambria Math" panose="02040503050406030204" pitchFamily="18" charset="0"/>
+                            </a:rPr>
+                            <m:t>𝑦</m:t>
+                          </m:r>
+                        </m:e>
+                      </m:d>
+                    </m:oMath>
+                  </m:oMathPara>
+                </a14:m>
+                <a:endParaRPr lang="en-US" dirty="0"/>
+              </a:p>
+              <a:p>
+                <a:pPr/>
+                <a14:m>
+                  <m:oMathPara xmlns:m="http://schemas.openxmlformats.org/officeDocument/2006/math">
+                    <m:oMathParaPr>
+                      <m:jc m:val="centerGroup"/>
+                    </m:oMathParaPr>
+                    <m:oMath xmlns:m="http://schemas.openxmlformats.org/officeDocument/2006/math">
+                      <m:r>
+                        <a:rPr lang="en-US" b="0" i="1" smtClean="0">
+                          <a:latin typeface="Cambria Math" panose="02040503050406030204" pitchFamily="18" charset="0"/>
+                        </a:rPr>
+                        <m:t>𝑖𝑠</m:t>
+                      </m:r>
+                      <m:r>
+                        <a:rPr lang="en-US" b="0" i="1" smtClean="0">
+                          <a:latin typeface="Cambria Math" panose="02040503050406030204" pitchFamily="18" charset="0"/>
+                        </a:rPr>
+                        <m:t> </m:t>
+                      </m:r>
+                      <m:r>
+                        <a:rPr lang="en-US" b="0" i="1" smtClean="0">
+                          <a:latin typeface="Cambria Math" panose="02040503050406030204" pitchFamily="18" charset="0"/>
+                        </a:rPr>
+                        <m:t>𝑡h𝑒</m:t>
+                      </m:r>
+                      <m:r>
+                        <a:rPr lang="en-US" b="0" i="1" smtClean="0">
+                          <a:latin typeface="Cambria Math" panose="02040503050406030204" pitchFamily="18" charset="0"/>
+                        </a:rPr>
+                        <m:t> </m:t>
+                      </m:r>
+                      <m:r>
+                        <a:rPr lang="en-US" b="0" i="1" smtClean="0">
+                          <a:latin typeface="Cambria Math" panose="02040503050406030204" pitchFamily="18" charset="0"/>
+                        </a:rPr>
+                        <m:t>𝑠𝑒𝑡</m:t>
+                      </m:r>
+                      <m:r>
+                        <a:rPr lang="en-US" b="0" i="1" smtClean="0">
+                          <a:latin typeface="Cambria Math" panose="02040503050406030204" pitchFamily="18" charset="0"/>
+                        </a:rPr>
+                        <m:t> </m:t>
+                      </m:r>
+                      <m:r>
+                        <a:rPr lang="en-US" b="0" i="1" smtClean="0">
+                          <a:latin typeface="Cambria Math" panose="02040503050406030204" pitchFamily="18" charset="0"/>
+                        </a:rPr>
+                        <m:t>𝑜𝑓</m:t>
+                      </m:r>
+                      <m:r>
+                        <a:rPr lang="en-US" b="0" i="1" smtClean="0">
+                          <a:latin typeface="Cambria Math" panose="02040503050406030204" pitchFamily="18" charset="0"/>
+                        </a:rPr>
+                        <m:t> </m:t>
+                      </m:r>
+                      <m:r>
+                        <a:rPr lang="en-US" b="0" i="1" smtClean="0">
+                          <a:latin typeface="Cambria Math" panose="02040503050406030204" pitchFamily="18" charset="0"/>
+                        </a:rPr>
+                        <m:t>𝑙𝑒𝑛𝑔𝑡h</m:t>
+                      </m:r>
+                      <m:r>
+                        <a:rPr lang="en-US" b="0" i="1" smtClean="0">
+                          <a:latin typeface="Cambria Math" panose="02040503050406030204" pitchFamily="18" charset="0"/>
+                        </a:rPr>
+                        <m:t> </m:t>
+                      </m:r>
+                      <m:r>
+                        <a:rPr lang="en-US" b="0" i="1" smtClean="0">
+                          <a:latin typeface="Cambria Math" panose="02040503050406030204" pitchFamily="18" charset="0"/>
+                        </a:rPr>
+                        <m:t>𝑙</m:t>
+                      </m:r>
+                      <m:r>
+                        <a:rPr lang="en-US" b="0" i="1" smtClean="0">
+                          <a:latin typeface="Cambria Math" panose="02040503050406030204" pitchFamily="18" charset="0"/>
+                        </a:rPr>
+                        <m:t> </m:t>
+                      </m:r>
+                      <m:r>
+                        <a:rPr lang="en-US" b="0" i="1" smtClean="0">
+                          <a:latin typeface="Cambria Math" panose="02040503050406030204" pitchFamily="18" charset="0"/>
+                        </a:rPr>
+                        <m:t>𝑤𝑎𝑙𝑘𝑠</m:t>
+                      </m:r>
+                      <m:r>
+                        <a:rPr lang="en-US" b="0" i="1" smtClean="0">
+                          <a:latin typeface="Cambria Math" panose="02040503050406030204" pitchFamily="18" charset="0"/>
+                        </a:rPr>
+                        <m:t> </m:t>
+                      </m:r>
+                      <m:r>
+                        <a:rPr lang="en-US" b="0" i="1" smtClean="0">
+                          <a:latin typeface="Cambria Math" panose="02040503050406030204" pitchFamily="18" charset="0"/>
+                        </a:rPr>
+                        <m:t>𝑏𝑒𝑡𝑤𝑒𝑒𝑛</m:t>
+                      </m:r>
+                      <m:r>
+                        <a:rPr lang="en-US" b="0" i="1" smtClean="0">
+                          <a:latin typeface="Cambria Math" panose="02040503050406030204" pitchFamily="18" charset="0"/>
+                        </a:rPr>
+                        <m:t> </m:t>
+                      </m:r>
+                      <m:r>
+                        <a:rPr lang="en-US" b="0" i="1" smtClean="0">
+                          <a:latin typeface="Cambria Math" panose="02040503050406030204" pitchFamily="18" charset="0"/>
+                        </a:rPr>
+                        <m:t>𝑥</m:t>
+                      </m:r>
+                      <m:r>
+                        <a:rPr lang="en-US" b="0" i="1" smtClean="0">
+                          <a:latin typeface="Cambria Math" panose="02040503050406030204" pitchFamily="18" charset="0"/>
+                        </a:rPr>
+                        <m:t> &amp; </m:t>
+                      </m:r>
+                      <m:r>
+                        <a:rPr lang="en-US" b="0" i="1" smtClean="0">
+                          <a:latin typeface="Cambria Math" panose="02040503050406030204" pitchFamily="18" charset="0"/>
+                        </a:rPr>
+                        <m:t>𝑦</m:t>
+                      </m:r>
+                      <m:r>
+                        <a:rPr lang="en-US" b="0" i="1" smtClean="0">
+                          <a:latin typeface="Cambria Math" panose="02040503050406030204" pitchFamily="18" charset="0"/>
+                        </a:rPr>
+                        <m:t>, </m:t>
+                      </m:r>
+                      <m:r>
+                        <a:rPr lang="en-US" b="0" i="1" smtClean="0">
+                          <a:latin typeface="Cambria Math" panose="02040503050406030204" pitchFamily="18" charset="0"/>
+                        </a:rPr>
+                        <m:t>𝑎𝑛𝑑</m:t>
+                      </m:r>
+                      <m:r>
+                        <a:rPr lang="en-US" b="0" i="1" smtClean="0">
+                          <a:latin typeface="Cambria Math" panose="02040503050406030204" pitchFamily="18" charset="0"/>
+                        </a:rPr>
+                        <m:t> </m:t>
+                      </m:r>
+                      <m:sSup>
+                        <m:sSupPr>
+                          <m:ctrlPr>
+                            <a:rPr lang="en-US" b="0" i="1" smtClean="0">
+                              <a:latin typeface="Cambria Math" panose="02040503050406030204" pitchFamily="18" charset="0"/>
+                            </a:rPr>
+                          </m:ctrlPr>
+                        </m:sSupPr>
+                        <m:e>
+                          <m:r>
+                            <a:rPr lang="en-US" b="0" i="1" smtClean="0">
+                              <a:latin typeface="Cambria Math" panose="02040503050406030204" pitchFamily="18" charset="0"/>
+                            </a:rPr>
+                            <m:t>𝐴</m:t>
+                          </m:r>
+                        </m:e>
+                        <m:sup>
+                          <m:r>
+                            <a:rPr lang="en-US" b="0" i="1" smtClean="0">
+                              <a:latin typeface="Cambria Math" panose="02040503050406030204" pitchFamily="18" charset="0"/>
+                            </a:rPr>
+                            <m:t>𝑙</m:t>
+                          </m:r>
+                        </m:sup>
+                      </m:sSup>
+                      <m:r>
+                        <a:rPr lang="en-US" b="0" i="1" smtClean="0">
+                          <a:latin typeface="Cambria Math" panose="02040503050406030204" pitchFamily="18" charset="0"/>
+                        </a:rPr>
+                        <m:t> </m:t>
+                      </m:r>
+                      <m:r>
+                        <a:rPr lang="en-US" b="0" i="1" smtClean="0">
+                          <a:latin typeface="Cambria Math" panose="02040503050406030204" pitchFamily="18" charset="0"/>
+                        </a:rPr>
+                        <m:t>𝑖𝑠</m:t>
+                      </m:r>
+                      <m:r>
+                        <a:rPr lang="en-US" b="0" i="1" smtClean="0">
+                          <a:latin typeface="Cambria Math" panose="02040503050406030204" pitchFamily="18" charset="0"/>
+                        </a:rPr>
+                        <m:t> </m:t>
+                      </m:r>
+                      <m:r>
+                        <a:rPr lang="en-US" b="0" i="1" smtClean="0">
+                          <a:latin typeface="Cambria Math" panose="02040503050406030204" pitchFamily="18" charset="0"/>
+                        </a:rPr>
+                        <m:t>𝑡h𝑒</m:t>
+                      </m:r>
+                      <m:r>
+                        <a:rPr lang="en-US" b="0" i="1" smtClean="0">
+                          <a:latin typeface="Cambria Math" panose="02040503050406030204" pitchFamily="18" charset="0"/>
+                        </a:rPr>
+                        <m:t> </m:t>
+                      </m:r>
+                      <m:r>
+                        <a:rPr lang="en-US" b="0" i="1" smtClean="0">
+                          <a:latin typeface="Cambria Math" panose="02040503050406030204" pitchFamily="18" charset="0"/>
+                        </a:rPr>
+                        <m:t>𝑎𝑑𝑗𝑎𝑐𝑒𝑛𝑐𝑦</m:t>
+                      </m:r>
+                      <m:r>
+                        <a:rPr lang="en-US" b="0" i="1" smtClean="0">
+                          <a:latin typeface="Cambria Math" panose="02040503050406030204" pitchFamily="18" charset="0"/>
+                        </a:rPr>
+                        <m:t> </m:t>
+                      </m:r>
+                      <m:r>
+                        <a:rPr lang="en-US" b="0" i="1" smtClean="0">
+                          <a:latin typeface="Cambria Math" panose="02040503050406030204" pitchFamily="18" charset="0"/>
+                        </a:rPr>
+                        <m:t>𝑚𝑎𝑡𝑟𝑖𝑥</m:t>
+                      </m:r>
+                      <m:r>
+                        <a:rPr lang="en-US" b="0" i="1" smtClean="0">
+                          <a:latin typeface="Cambria Math" panose="02040503050406030204" pitchFamily="18" charset="0"/>
+                        </a:rPr>
+                        <m:t> </m:t>
+                      </m:r>
+                      <m:r>
+                        <a:rPr lang="en-US" b="0" i="1" smtClean="0">
+                          <a:latin typeface="Cambria Math" panose="02040503050406030204" pitchFamily="18" charset="0"/>
+                        </a:rPr>
+                        <m:t>𝑡𝑜</m:t>
+                      </m:r>
+                      <m:r>
+                        <a:rPr lang="en-US" b="0" i="1" smtClean="0">
+                          <a:latin typeface="Cambria Math" panose="02040503050406030204" pitchFamily="18" charset="0"/>
+                        </a:rPr>
+                        <m:t> </m:t>
+                      </m:r>
+                      <m:r>
+                        <a:rPr lang="en-US" b="0" i="1" smtClean="0">
+                          <a:latin typeface="Cambria Math" panose="02040503050406030204" pitchFamily="18" charset="0"/>
+                        </a:rPr>
+                        <m:t>𝑡h𝑒</m:t>
+                      </m:r>
+                      <m:r>
+                        <a:rPr lang="en-US" b="0" i="1" smtClean="0">
+                          <a:latin typeface="Cambria Math" panose="02040503050406030204" pitchFamily="18" charset="0"/>
+                        </a:rPr>
+                        <m:t> </m:t>
+                      </m:r>
+                      <m:r>
+                        <a:rPr lang="en-US" b="0" i="1" smtClean="0">
+                          <a:latin typeface="Cambria Math" panose="02040503050406030204" pitchFamily="18" charset="0"/>
+                        </a:rPr>
+                        <m:t>𝑙𝑡h</m:t>
+                      </m:r>
+                      <m:r>
+                        <a:rPr lang="en-US" b="0" i="1" smtClean="0">
+                          <a:latin typeface="Cambria Math" panose="02040503050406030204" pitchFamily="18" charset="0"/>
+                        </a:rPr>
+                        <m:t> </m:t>
+                      </m:r>
+                      <m:r>
+                        <a:rPr lang="en-US" b="0" i="1" smtClean="0">
+                          <a:latin typeface="Cambria Math" panose="02040503050406030204" pitchFamily="18" charset="0"/>
+                        </a:rPr>
+                        <m:t>𝑝𝑜𝑤𝑒𝑟</m:t>
+                      </m:r>
+                    </m:oMath>
+                  </m:oMathPara>
+                </a14:m>
+                <a:endParaRPr lang="en-US" b="0" dirty="0"/>
+              </a:p>
+              <a:p>
+                <a:pPr/>
+                <a14:m>
+                  <m:oMathPara xmlns:m="http://schemas.openxmlformats.org/officeDocument/2006/math">
+                    <m:oMathParaPr>
+                      <m:jc m:val="left"/>
+                    </m:oMathParaPr>
+                    <m:oMath xmlns:m="http://schemas.openxmlformats.org/officeDocument/2006/math">
+                      <m:r>
+                        <a:rPr lang="en-US" b="0" i="1" smtClean="0">
+                          <a:latin typeface="Cambria Math" panose="02040503050406030204" pitchFamily="18" charset="0"/>
+                        </a:rPr>
+                        <m:t>𝐿𝑒𝑚𝑚𝑎</m:t>
+                      </m:r>
+                      <m:r>
+                        <a:rPr lang="en-US" b="0" i="1" smtClean="0">
+                          <a:latin typeface="Cambria Math" panose="02040503050406030204" pitchFamily="18" charset="0"/>
+                        </a:rPr>
+                        <m:t>:</m:t>
+                      </m:r>
+                      <m:r>
+                        <a:rPr lang="en-US" b="0" i="1" smtClean="0">
+                          <a:latin typeface="Cambria Math" panose="02040503050406030204" pitchFamily="18" charset="0"/>
+                        </a:rPr>
+                        <m:t>𝐴𝑛𝑦</m:t>
+                      </m:r>
+                      <m:r>
+                        <a:rPr lang="en-US" b="0" i="1" smtClean="0">
+                          <a:latin typeface="Cambria Math" panose="02040503050406030204" pitchFamily="18" charset="0"/>
+                        </a:rPr>
+                        <m:t> </m:t>
+                      </m:r>
+                      <m:r>
+                        <a:rPr lang="en-US" b="0" i="1" smtClean="0">
+                          <a:latin typeface="Cambria Math" panose="02040503050406030204" pitchFamily="18" charset="0"/>
+                        </a:rPr>
+                        <m:t>𝑤𝑎𝑙𝑘</m:t>
+                      </m:r>
+                      <m:r>
+                        <a:rPr lang="en-US" b="0" i="1" smtClean="0">
+                          <a:latin typeface="Cambria Math" panose="02040503050406030204" pitchFamily="18" charset="0"/>
+                        </a:rPr>
+                        <m:t> </m:t>
+                      </m:r>
+                      <m:r>
+                        <a:rPr lang="en-US" b="0" i="1" smtClean="0">
+                          <a:latin typeface="Cambria Math" panose="02040503050406030204" pitchFamily="18" charset="0"/>
+                        </a:rPr>
+                        <m:t>𝑏𝑒𝑡𝑤𝑒𝑒𝑛</m:t>
+                      </m:r>
+                      <m:r>
+                        <a:rPr lang="en-US" b="0" i="1" smtClean="0">
+                          <a:latin typeface="Cambria Math" panose="02040503050406030204" pitchFamily="18" charset="0"/>
+                        </a:rPr>
+                        <m:t> </m:t>
+                      </m:r>
+                      <m:r>
+                        <a:rPr lang="en-US" b="0" i="1" smtClean="0">
+                          <a:latin typeface="Cambria Math" panose="02040503050406030204" pitchFamily="18" charset="0"/>
+                        </a:rPr>
+                        <m:t>𝑥</m:t>
+                      </m:r>
+                      <m:r>
+                        <a:rPr lang="en-US" b="0" i="1" smtClean="0">
+                          <a:latin typeface="Cambria Math" panose="02040503050406030204" pitchFamily="18" charset="0"/>
+                        </a:rPr>
+                        <m:t> &amp; </m:t>
+                      </m:r>
+                      <m:r>
+                        <a:rPr lang="en-US" b="0" i="1" smtClean="0">
+                          <a:latin typeface="Cambria Math" panose="02040503050406030204" pitchFamily="18" charset="0"/>
+                        </a:rPr>
+                        <m:t>𝑦</m:t>
+                      </m:r>
+                      <m:r>
+                        <a:rPr lang="en-US" b="0" i="1" smtClean="0">
+                          <a:latin typeface="Cambria Math" panose="02040503050406030204" pitchFamily="18" charset="0"/>
+                        </a:rPr>
+                        <m:t> </m:t>
+                      </m:r>
+                      <m:r>
+                        <a:rPr lang="en-US" b="0" i="1" smtClean="0">
+                          <a:latin typeface="Cambria Math" panose="02040503050406030204" pitchFamily="18" charset="0"/>
+                        </a:rPr>
+                        <m:t>𝑤𝑖𝑡h</m:t>
+                      </m:r>
+                      <m:r>
+                        <a:rPr lang="en-US" b="0" i="1" smtClean="0">
+                          <a:latin typeface="Cambria Math" panose="02040503050406030204" pitchFamily="18" charset="0"/>
+                        </a:rPr>
+                        <m:t> </m:t>
+                      </m:r>
+                      <m:r>
+                        <a:rPr lang="en-US" b="0" i="1" smtClean="0">
+                          <a:latin typeface="Cambria Math" panose="02040503050406030204" pitchFamily="18" charset="0"/>
+                        </a:rPr>
+                        <m:t>𝑙𝑒𝑛𝑔𝑡h</m:t>
+                      </m:r>
+                      <m:r>
+                        <a:rPr lang="en-US" b="0" i="1" smtClean="0">
+                          <a:latin typeface="Cambria Math" panose="02040503050406030204" pitchFamily="18" charset="0"/>
+                        </a:rPr>
+                        <m:t> </m:t>
+                      </m:r>
+                      <m:r>
+                        <a:rPr lang="en-US" b="0" i="1" smtClean="0">
+                          <a:latin typeface="Cambria Math" panose="02040503050406030204" pitchFamily="18" charset="0"/>
+                        </a:rPr>
+                        <m:t>𝑙</m:t>
+                      </m:r>
+                      <m:r>
+                        <a:rPr lang="en-US" b="0" i="1" smtClean="0">
+                          <a:latin typeface="Cambria Math" panose="02040503050406030204" pitchFamily="18" charset="0"/>
+                        </a:rPr>
+                        <m:t>≤2</m:t>
+                      </m:r>
+                      <m:r>
+                        <a:rPr lang="en-US" b="0" i="1" smtClean="0">
+                          <a:latin typeface="Cambria Math" panose="02040503050406030204" pitchFamily="18" charset="0"/>
+                        </a:rPr>
+                        <m:t>h</m:t>
+                      </m:r>
+                      <m:r>
+                        <a:rPr lang="en-US" b="0" i="1" smtClean="0">
+                          <a:latin typeface="Cambria Math" panose="02040503050406030204" pitchFamily="18" charset="0"/>
+                        </a:rPr>
+                        <m:t>+1 </m:t>
+                      </m:r>
+                      <m:r>
+                        <a:rPr lang="en-US" b="0" i="1" smtClean="0">
+                          <a:latin typeface="Cambria Math" panose="02040503050406030204" pitchFamily="18" charset="0"/>
+                        </a:rPr>
+                        <m:t>𝑖𝑠</m:t>
+                      </m:r>
+                      <m:r>
+                        <a:rPr lang="en-US" b="0" i="1" smtClean="0">
+                          <a:latin typeface="Cambria Math" panose="02040503050406030204" pitchFamily="18" charset="0"/>
+                        </a:rPr>
+                        <m:t> </m:t>
+                      </m:r>
+                      <m:r>
+                        <a:rPr lang="en-US" b="0" i="1" smtClean="0">
+                          <a:latin typeface="Cambria Math" panose="02040503050406030204" pitchFamily="18" charset="0"/>
+                        </a:rPr>
+                        <m:t>𝑖𝑛𝑐𝑙𝑢𝑑𝑒𝑑</m:t>
+                      </m:r>
+                      <m:r>
+                        <a:rPr lang="en-US" b="0" i="1" smtClean="0">
+                          <a:latin typeface="Cambria Math" panose="02040503050406030204" pitchFamily="18" charset="0"/>
+                        </a:rPr>
+                        <m:t> </m:t>
+                      </m:r>
+                      <m:r>
+                        <a:rPr lang="en-US" b="0" i="1" smtClean="0">
+                          <a:latin typeface="Cambria Math" panose="02040503050406030204" pitchFamily="18" charset="0"/>
+                        </a:rPr>
+                        <m:t>𝑖𝑛</m:t>
+                      </m:r>
+                      <m:r>
+                        <a:rPr lang="en-US" b="0" i="1" smtClean="0">
+                          <a:latin typeface="Cambria Math" panose="02040503050406030204" pitchFamily="18" charset="0"/>
+                        </a:rPr>
+                        <m:t> </m:t>
+                      </m:r>
+                      <m:sSubSup>
+                        <m:sSubSupPr>
+                          <m:ctrlPr>
+                            <a:rPr lang="en-US" b="0" i="1" smtClean="0">
+                              <a:latin typeface="Cambria Math" panose="02040503050406030204" pitchFamily="18" charset="0"/>
+                            </a:rPr>
+                          </m:ctrlPr>
+                        </m:sSubSupPr>
+                        <m:e>
+                          <m:r>
+                            <a:rPr lang="en-US" b="0" i="1" smtClean="0">
+                              <a:latin typeface="Cambria Math" panose="02040503050406030204" pitchFamily="18" charset="0"/>
+                            </a:rPr>
+                            <m:t>𝐺</m:t>
+                          </m:r>
+                        </m:e>
+                        <m:sub>
+                          <m:r>
+                            <a:rPr lang="en-US" b="0" i="1" smtClean="0">
+                              <a:latin typeface="Cambria Math" panose="02040503050406030204" pitchFamily="18" charset="0"/>
+                            </a:rPr>
+                            <m:t>𝑥</m:t>
+                          </m:r>
+                          <m:r>
+                            <a:rPr lang="en-US" b="0" i="1" smtClean="0">
+                              <a:latin typeface="Cambria Math" panose="02040503050406030204" pitchFamily="18" charset="0"/>
+                            </a:rPr>
+                            <m:t>,</m:t>
+                          </m:r>
+                          <m:r>
+                            <a:rPr lang="en-US" b="0" i="1" smtClean="0">
+                              <a:latin typeface="Cambria Math" panose="02040503050406030204" pitchFamily="18" charset="0"/>
+                            </a:rPr>
+                            <m:t>𝑦</m:t>
+                          </m:r>
+                        </m:sub>
+                        <m:sup>
+                          <m:r>
+                            <a:rPr lang="en-US" b="0" i="1" smtClean="0">
+                              <a:latin typeface="Cambria Math" panose="02040503050406030204" pitchFamily="18" charset="0"/>
+                            </a:rPr>
+                            <m:t>h</m:t>
+                          </m:r>
+                        </m:sup>
+                      </m:sSubSup>
+                    </m:oMath>
+                  </m:oMathPara>
+                </a14:m>
+                <a:endParaRPr lang="en-US" b="0" dirty="0"/>
+              </a:p>
+              <a:p>
+                <a:pPr/>
+                <a14:m>
+                  <m:oMathPara xmlns:m="http://schemas.openxmlformats.org/officeDocument/2006/math">
+                    <m:oMathParaPr>
+                      <m:jc m:val="left"/>
+                    </m:oMathParaPr>
+                    <m:oMath xmlns:m="http://schemas.openxmlformats.org/officeDocument/2006/math">
+                      <m:r>
+                        <a:rPr lang="en-US" b="0" i="1" smtClean="0">
+                          <a:latin typeface="Cambria Math" panose="02040503050406030204" pitchFamily="18" charset="0"/>
+                        </a:rPr>
+                        <m:t>𝑃𝑟𝑜𝑜𝑓</m:t>
+                      </m:r>
+                      <m:r>
+                        <a:rPr lang="en-US" b="0" i="1" smtClean="0">
+                          <a:latin typeface="Cambria Math" panose="02040503050406030204" pitchFamily="18" charset="0"/>
+                        </a:rPr>
+                        <m:t>:</m:t>
+                      </m:r>
+                      <m:r>
+                        <a:rPr lang="en-US" b="0" i="1" smtClean="0">
+                          <a:latin typeface="Cambria Math" panose="02040503050406030204" pitchFamily="18" charset="0"/>
+                        </a:rPr>
+                        <m:t>𝐿𝑒𝑡</m:t>
+                      </m:r>
+                      <m:r>
+                        <a:rPr lang="en-US" b="0" i="1" smtClean="0">
+                          <a:latin typeface="Cambria Math" panose="02040503050406030204" pitchFamily="18" charset="0"/>
+                        </a:rPr>
+                        <m:t> </m:t>
+                      </m:r>
+                      <m:r>
+                        <a:rPr lang="en-US" b="0" i="1" smtClean="0">
+                          <a:latin typeface="Cambria Math" panose="02040503050406030204" pitchFamily="18" charset="0"/>
+                        </a:rPr>
+                        <m:t>𝑤</m:t>
+                      </m:r>
+                      <m:r>
+                        <a:rPr lang="en-US" b="0" i="1" smtClean="0">
+                          <a:latin typeface="Cambria Math" panose="02040503050406030204" pitchFamily="18" charset="0"/>
+                        </a:rPr>
+                        <m:t>= &lt;</m:t>
+                      </m:r>
+                      <m:r>
+                        <a:rPr lang="en-US" b="0" i="1" smtClean="0">
+                          <a:latin typeface="Cambria Math" panose="02040503050406030204" pitchFamily="18" charset="0"/>
+                        </a:rPr>
+                        <m:t>𝑥</m:t>
+                      </m:r>
+                      <m:r>
+                        <a:rPr lang="en-US" b="0" i="1" smtClean="0">
+                          <a:latin typeface="Cambria Math" panose="02040503050406030204" pitchFamily="18" charset="0"/>
+                        </a:rPr>
+                        <m:t>,</m:t>
+                      </m:r>
+                      <m:sSub>
+                        <m:sSubPr>
+                          <m:ctrlPr>
+                            <a:rPr lang="en-US" b="0" i="1" smtClean="0">
+                              <a:latin typeface="Cambria Math" panose="02040503050406030204" pitchFamily="18" charset="0"/>
+                            </a:rPr>
+                          </m:ctrlPr>
+                        </m:sSubPr>
+                        <m:e>
+                          <m:r>
+                            <a:rPr lang="en-US" b="0" i="1" smtClean="0">
+                              <a:latin typeface="Cambria Math" panose="02040503050406030204" pitchFamily="18" charset="0"/>
+                            </a:rPr>
+                            <m:t>𝑣</m:t>
+                          </m:r>
+                        </m:e>
+                        <m:sub>
+                          <m:r>
+                            <a:rPr lang="en-US" b="0" i="1" smtClean="0">
+                              <a:latin typeface="Cambria Math" panose="02040503050406030204" pitchFamily="18" charset="0"/>
+                            </a:rPr>
+                            <m:t>1</m:t>
+                          </m:r>
+                        </m:sub>
+                      </m:sSub>
+                      <m:r>
+                        <a:rPr lang="en-US" b="0" i="1" smtClean="0">
+                          <a:latin typeface="Cambria Math" panose="02040503050406030204" pitchFamily="18" charset="0"/>
+                        </a:rPr>
+                        <m:t>,</m:t>
+                      </m:r>
+                      <m:sSub>
+                        <m:sSubPr>
+                          <m:ctrlPr>
+                            <a:rPr lang="en-US" i="1">
+                              <a:latin typeface="Cambria Math" panose="02040503050406030204" pitchFamily="18" charset="0"/>
+                            </a:rPr>
+                          </m:ctrlPr>
+                        </m:sSubPr>
+                        <m:e>
+                          <m:r>
+                            <a:rPr lang="en-US" i="1">
+                              <a:latin typeface="Cambria Math" panose="02040503050406030204" pitchFamily="18" charset="0"/>
+                            </a:rPr>
+                            <m:t>𝑣</m:t>
+                          </m:r>
+                        </m:e>
+                        <m:sub>
+                          <m:r>
+                            <a:rPr lang="en-US" b="0" i="1" smtClean="0">
+                              <a:latin typeface="Cambria Math" panose="02040503050406030204" pitchFamily="18" charset="0"/>
+                            </a:rPr>
+                            <m:t>2</m:t>
+                          </m:r>
+                        </m:sub>
+                      </m:sSub>
+                      <m:r>
+                        <a:rPr lang="en-US" b="0" i="1" smtClean="0">
+                          <a:latin typeface="Cambria Math" panose="02040503050406030204" pitchFamily="18" charset="0"/>
+                        </a:rPr>
+                        <m:t>,…,</m:t>
+                      </m:r>
+                      <m:sSub>
+                        <m:sSubPr>
+                          <m:ctrlPr>
+                            <a:rPr lang="en-US" i="1">
+                              <a:latin typeface="Cambria Math" panose="02040503050406030204" pitchFamily="18" charset="0"/>
+                            </a:rPr>
+                          </m:ctrlPr>
+                        </m:sSubPr>
+                        <m:e>
+                          <m:r>
+                            <a:rPr lang="en-US" i="1">
+                              <a:latin typeface="Cambria Math" panose="02040503050406030204" pitchFamily="18" charset="0"/>
+                            </a:rPr>
+                            <m:t>𝑣</m:t>
+                          </m:r>
+                        </m:e>
+                        <m:sub>
+                          <m:r>
+                            <a:rPr lang="en-US" b="0" i="1" smtClean="0">
+                              <a:latin typeface="Cambria Math" panose="02040503050406030204" pitchFamily="18" charset="0"/>
+                            </a:rPr>
+                            <m:t>𝑙</m:t>
+                          </m:r>
+                          <m:r>
+                            <a:rPr lang="en-US" b="0" i="1" smtClean="0">
+                              <a:latin typeface="Cambria Math" panose="02040503050406030204" pitchFamily="18" charset="0"/>
+                            </a:rPr>
+                            <m:t>−1</m:t>
+                          </m:r>
+                        </m:sub>
+                      </m:sSub>
+                      <m:r>
+                        <a:rPr lang="en-US" b="0" i="1" smtClean="0">
+                          <a:latin typeface="Cambria Math" panose="02040503050406030204" pitchFamily="18" charset="0"/>
+                        </a:rPr>
+                        <m:t>,</m:t>
+                      </m:r>
+                      <m:r>
+                        <a:rPr lang="en-US" b="0" i="1" smtClean="0">
+                          <a:latin typeface="Cambria Math" panose="02040503050406030204" pitchFamily="18" charset="0"/>
+                        </a:rPr>
+                        <m:t>𝑦</m:t>
+                      </m:r>
+                      <m:r>
+                        <a:rPr lang="en-US" b="0" i="1" smtClean="0">
+                          <a:latin typeface="Cambria Math" panose="02040503050406030204" pitchFamily="18" charset="0"/>
+                        </a:rPr>
+                        <m:t>&gt;</m:t>
+                      </m:r>
+                      <m:r>
+                        <a:rPr lang="en-US" b="0" i="1" smtClean="0">
+                          <a:latin typeface="Cambria Math" panose="02040503050406030204" pitchFamily="18" charset="0"/>
+                        </a:rPr>
+                        <m:t>𝑏𝑒</m:t>
+                      </m:r>
+                      <m:r>
+                        <a:rPr lang="en-US" b="0" i="1" smtClean="0">
+                          <a:latin typeface="Cambria Math" panose="02040503050406030204" pitchFamily="18" charset="0"/>
+                        </a:rPr>
+                        <m:t> </m:t>
+                      </m:r>
+                      <m:r>
+                        <a:rPr lang="en-US" b="0" i="1" smtClean="0">
+                          <a:latin typeface="Cambria Math" panose="02040503050406030204" pitchFamily="18" charset="0"/>
+                        </a:rPr>
+                        <m:t>𝑎</m:t>
+                      </m:r>
+                      <m:r>
+                        <a:rPr lang="en-US" b="0" i="1" smtClean="0">
+                          <a:latin typeface="Cambria Math" panose="02040503050406030204" pitchFamily="18" charset="0"/>
+                        </a:rPr>
+                        <m:t> </m:t>
+                      </m:r>
+                      <m:r>
+                        <a:rPr lang="en-US" b="0" i="1" smtClean="0">
+                          <a:latin typeface="Cambria Math" panose="02040503050406030204" pitchFamily="18" charset="0"/>
+                        </a:rPr>
+                        <m:t>𝑤𝑎𝑙𝑘</m:t>
+                      </m:r>
+                      <m:r>
+                        <a:rPr lang="en-US" b="0" i="1" smtClean="0">
+                          <a:latin typeface="Cambria Math" panose="02040503050406030204" pitchFamily="18" charset="0"/>
+                        </a:rPr>
+                        <m:t> </m:t>
+                      </m:r>
+                      <m:r>
+                        <a:rPr lang="en-US" b="0" i="1" smtClean="0">
+                          <a:latin typeface="Cambria Math" panose="02040503050406030204" pitchFamily="18" charset="0"/>
+                        </a:rPr>
+                        <m:t>𝑜𝑓</m:t>
+                      </m:r>
+                      <m:r>
+                        <a:rPr lang="en-US" b="0" i="1" smtClean="0">
+                          <a:latin typeface="Cambria Math" panose="02040503050406030204" pitchFamily="18" charset="0"/>
+                        </a:rPr>
+                        <m:t> </m:t>
+                      </m:r>
+                      <m:r>
+                        <a:rPr lang="en-US" b="0" i="1" smtClean="0">
+                          <a:latin typeface="Cambria Math" panose="02040503050406030204" pitchFamily="18" charset="0"/>
+                        </a:rPr>
+                        <m:t>𝑙𝑒𝑛𝑔𝑡h</m:t>
+                      </m:r>
+                      <m:r>
+                        <a:rPr lang="en-US" b="0" i="1" smtClean="0">
+                          <a:latin typeface="Cambria Math" panose="02040503050406030204" pitchFamily="18" charset="0"/>
+                        </a:rPr>
+                        <m:t> 2</m:t>
+                      </m:r>
+                      <m:r>
+                        <a:rPr lang="en-US" b="0" i="1" smtClean="0">
+                          <a:latin typeface="Cambria Math" panose="02040503050406030204" pitchFamily="18" charset="0"/>
+                        </a:rPr>
+                        <m:t>h</m:t>
+                      </m:r>
+                      <m:r>
+                        <a:rPr lang="en-US" b="0" i="1" smtClean="0">
+                          <a:latin typeface="Cambria Math" panose="02040503050406030204" pitchFamily="18" charset="0"/>
+                        </a:rPr>
+                        <m:t>+1, </m:t>
+                      </m:r>
+                      <m:r>
+                        <a:rPr lang="en-US" b="0" i="1" smtClean="0">
+                          <a:latin typeface="Cambria Math" panose="02040503050406030204" pitchFamily="18" charset="0"/>
+                        </a:rPr>
+                        <m:t>𝑠𝑜</m:t>
+                      </m:r>
+                      <m:r>
+                        <a:rPr lang="en-US" b="0" i="1" smtClean="0">
+                          <a:latin typeface="Cambria Math" panose="02040503050406030204" pitchFamily="18" charset="0"/>
+                        </a:rPr>
+                        <m:t>, </m:t>
+                      </m:r>
+                      <m:r>
+                        <a:rPr lang="en-US" b="0" i="1" smtClean="0">
+                          <a:latin typeface="Cambria Math" panose="02040503050406030204" pitchFamily="18" charset="0"/>
+                        </a:rPr>
+                        <m:t>𝑓𝑜𝑟</m:t>
+                      </m:r>
+                      <m:r>
+                        <a:rPr lang="en-US" b="0" i="1" smtClean="0">
+                          <a:latin typeface="Cambria Math" panose="02040503050406030204" pitchFamily="18" charset="0"/>
+                        </a:rPr>
+                        <m:t> </m:t>
+                      </m:r>
+                      <m:r>
+                        <a:rPr lang="en-US" b="0" i="1" smtClean="0">
+                          <a:latin typeface="Cambria Math" panose="02040503050406030204" pitchFamily="18" charset="0"/>
+                        </a:rPr>
+                        <m:t>𝑎𝑛𝑦</m:t>
+                      </m:r>
+                      <m:r>
+                        <a:rPr lang="en-US" b="0" i="1" smtClean="0">
+                          <a:latin typeface="Cambria Math" panose="02040503050406030204" pitchFamily="18" charset="0"/>
+                        </a:rPr>
+                        <m:t> </m:t>
+                      </m:r>
+                      <m:sSub>
+                        <m:sSubPr>
+                          <m:ctrlPr>
+                            <a:rPr lang="en-US" i="1">
+                              <a:latin typeface="Cambria Math" panose="02040503050406030204" pitchFamily="18" charset="0"/>
+                            </a:rPr>
+                          </m:ctrlPr>
+                        </m:sSubPr>
+                        <m:e>
+                          <m:r>
+                            <a:rPr lang="en-US" i="1">
+                              <a:latin typeface="Cambria Math" panose="02040503050406030204" pitchFamily="18" charset="0"/>
+                            </a:rPr>
+                            <m:t>𝑣</m:t>
+                          </m:r>
+                        </m:e>
+                        <m:sub>
+                          <m:r>
+                            <a:rPr lang="en-US" b="0" i="1" smtClean="0">
+                              <a:latin typeface="Cambria Math" panose="02040503050406030204" pitchFamily="18" charset="0"/>
+                            </a:rPr>
+                            <m:t>𝑖</m:t>
+                          </m:r>
+                        </m:sub>
+                      </m:sSub>
+                      <m:r>
+                        <a:rPr lang="en-US" i="1">
+                          <a:latin typeface="Cambria Math" panose="02040503050406030204" pitchFamily="18" charset="0"/>
+                          <a:ea typeface="Cambria Math" panose="02040503050406030204" pitchFamily="18" charset="0"/>
+                        </a:rPr>
+                        <m:t>∈</m:t>
+                      </m:r>
+                      <m:r>
+                        <a:rPr lang="en-US" b="0" i="1" smtClean="0">
+                          <a:latin typeface="Cambria Math" panose="02040503050406030204" pitchFamily="18" charset="0"/>
+                          <a:ea typeface="Cambria Math" panose="02040503050406030204" pitchFamily="18" charset="0"/>
+                        </a:rPr>
+                        <m:t>𝑤</m:t>
+                      </m:r>
+                      <m:r>
+                        <a:rPr lang="en-US" b="0" i="1" smtClean="0">
+                          <a:latin typeface="Cambria Math" panose="02040503050406030204" pitchFamily="18" charset="0"/>
+                          <a:ea typeface="Cambria Math" panose="02040503050406030204" pitchFamily="18" charset="0"/>
+                        </a:rPr>
+                        <m:t>, </m:t>
+                      </m:r>
+                      <m:r>
+                        <a:rPr lang="en-US" b="0" i="1" smtClean="0">
+                          <a:latin typeface="Cambria Math" panose="02040503050406030204" pitchFamily="18" charset="0"/>
+                          <a:ea typeface="Cambria Math" panose="02040503050406030204" pitchFamily="18" charset="0"/>
+                        </a:rPr>
+                        <m:t>𝑒𝑖𝑡h𝑒𝑟</m:t>
+                      </m:r>
+                      <m:r>
+                        <a:rPr lang="en-US" b="0" i="1" smtClean="0">
+                          <a:latin typeface="Cambria Math" panose="02040503050406030204" pitchFamily="18" charset="0"/>
+                          <a:ea typeface="Cambria Math" panose="02040503050406030204" pitchFamily="18" charset="0"/>
+                        </a:rPr>
+                        <m:t> </m:t>
+                      </m:r>
+                      <m:r>
+                        <a:rPr lang="en-US" b="0" i="1" smtClean="0">
+                          <a:latin typeface="Cambria Math" panose="02040503050406030204" pitchFamily="18" charset="0"/>
+                          <a:ea typeface="Cambria Math" panose="02040503050406030204" pitchFamily="18" charset="0"/>
+                        </a:rPr>
+                        <m:t>𝑑</m:t>
+                      </m:r>
+                      <m:d>
+                        <m:dPr>
+                          <m:ctrlPr>
+                            <a:rPr lang="en-US" b="0" i="1" smtClean="0">
+                              <a:latin typeface="Cambria Math" panose="02040503050406030204" pitchFamily="18" charset="0"/>
+                              <a:ea typeface="Cambria Math" panose="02040503050406030204" pitchFamily="18" charset="0"/>
+                            </a:rPr>
+                          </m:ctrlPr>
+                        </m:dPr>
+                        <m:e>
+                          <m:sSub>
+                            <m:sSubPr>
+                              <m:ctrlPr>
+                                <a:rPr lang="en-US" i="1">
+                                  <a:latin typeface="Cambria Math" panose="02040503050406030204" pitchFamily="18" charset="0"/>
+                                </a:rPr>
+                              </m:ctrlPr>
+                            </m:sSubPr>
+                            <m:e>
+                              <m:r>
+                                <a:rPr lang="en-US" i="1">
+                                  <a:latin typeface="Cambria Math" panose="02040503050406030204" pitchFamily="18" charset="0"/>
+                                </a:rPr>
+                                <m:t>𝑣</m:t>
+                              </m:r>
+                            </m:e>
+                            <m:sub>
+                              <m:r>
+                                <a:rPr lang="en-US" b="0" i="1" smtClean="0">
+                                  <a:latin typeface="Cambria Math" panose="02040503050406030204" pitchFamily="18" charset="0"/>
+                                </a:rPr>
+                                <m:t>𝑖</m:t>
+                              </m:r>
+                            </m:sub>
+                          </m:sSub>
+                          <m:r>
+                            <a:rPr lang="en-US" b="0" i="1" smtClean="0">
+                              <a:latin typeface="Cambria Math" panose="02040503050406030204" pitchFamily="18" charset="0"/>
+                            </a:rPr>
+                            <m:t>,</m:t>
+                          </m:r>
+                          <m:r>
+                            <a:rPr lang="en-US" b="0" i="1" smtClean="0">
+                              <a:latin typeface="Cambria Math" panose="02040503050406030204" pitchFamily="18" charset="0"/>
+                            </a:rPr>
+                            <m:t>𝑥</m:t>
+                          </m:r>
+                        </m:e>
+                      </m:d>
+                      <m:r>
+                        <a:rPr lang="en-US" b="0" i="1" smtClean="0">
+                          <a:latin typeface="Cambria Math" panose="02040503050406030204" pitchFamily="18" charset="0"/>
+                        </a:rPr>
+                        <m:t>≤</m:t>
+                      </m:r>
+                      <m:r>
+                        <a:rPr lang="en-US" b="0" i="1" smtClean="0">
+                          <a:latin typeface="Cambria Math" panose="02040503050406030204" pitchFamily="18" charset="0"/>
+                        </a:rPr>
+                        <m:t>h</m:t>
+                      </m:r>
+                      <m:r>
+                        <a:rPr lang="en-US" b="0" i="1" smtClean="0">
+                          <a:latin typeface="Cambria Math" panose="02040503050406030204" pitchFamily="18" charset="0"/>
+                        </a:rPr>
+                        <m:t> </m:t>
+                      </m:r>
+                      <m:r>
+                        <a:rPr lang="en-US" b="0" i="1" smtClean="0">
+                          <a:latin typeface="Cambria Math" panose="02040503050406030204" pitchFamily="18" charset="0"/>
+                        </a:rPr>
+                        <m:t>𝑜𝑟𝑑</m:t>
+                      </m:r>
+                      <m:d>
+                        <m:dPr>
+                          <m:ctrlPr>
+                            <a:rPr lang="en-US" i="1">
+                              <a:latin typeface="Cambria Math" panose="02040503050406030204" pitchFamily="18" charset="0"/>
+                              <a:ea typeface="Cambria Math" panose="02040503050406030204" pitchFamily="18" charset="0"/>
+                            </a:rPr>
+                          </m:ctrlPr>
+                        </m:dPr>
+                        <m:e>
+                          <m:sSub>
+                            <m:sSubPr>
+                              <m:ctrlPr>
+                                <a:rPr lang="en-US" i="1">
+                                  <a:latin typeface="Cambria Math" panose="02040503050406030204" pitchFamily="18" charset="0"/>
+                                </a:rPr>
+                              </m:ctrlPr>
+                            </m:sSubPr>
+                            <m:e>
+                              <m:r>
+                                <a:rPr lang="en-US" i="1">
+                                  <a:latin typeface="Cambria Math" panose="02040503050406030204" pitchFamily="18" charset="0"/>
+                                </a:rPr>
+                                <m:t>𝑣</m:t>
+                              </m:r>
+                            </m:e>
+                            <m:sub>
+                              <m:r>
+                                <a:rPr lang="en-US" i="1">
+                                  <a:latin typeface="Cambria Math" panose="02040503050406030204" pitchFamily="18" charset="0"/>
+                                </a:rPr>
+                                <m:t>𝑖</m:t>
+                              </m:r>
+                            </m:sub>
+                          </m:sSub>
+                          <m:r>
+                            <a:rPr lang="en-US" i="1">
+                              <a:latin typeface="Cambria Math" panose="02040503050406030204" pitchFamily="18" charset="0"/>
+                            </a:rPr>
+                            <m:t>,</m:t>
+                          </m:r>
+                          <m:r>
+                            <a:rPr lang="en-US" b="0" i="1" smtClean="0">
+                              <a:latin typeface="Cambria Math" panose="02040503050406030204" pitchFamily="18" charset="0"/>
+                            </a:rPr>
+                            <m:t>𝑦</m:t>
+                          </m:r>
+                        </m:e>
+                      </m:d>
+                      <m:r>
+                        <a:rPr lang="en-US" i="1">
+                          <a:latin typeface="Cambria Math" panose="02040503050406030204" pitchFamily="18" charset="0"/>
+                        </a:rPr>
+                        <m:t>≤</m:t>
+                      </m:r>
+                      <m:r>
+                        <a:rPr lang="en-US" i="1">
+                          <a:latin typeface="Cambria Math" panose="02040503050406030204" pitchFamily="18" charset="0"/>
+                        </a:rPr>
+                        <m:t>h</m:t>
+                      </m:r>
+                      <m:r>
+                        <a:rPr lang="en-US" b="0" i="1" smtClean="0">
+                          <a:latin typeface="Cambria Math" panose="02040503050406030204" pitchFamily="18" charset="0"/>
+                        </a:rPr>
+                        <m:t>, </m:t>
+                      </m:r>
+                      <m:r>
+                        <a:rPr lang="en-US" b="0" i="1" smtClean="0">
+                          <a:latin typeface="Cambria Math" panose="02040503050406030204" pitchFamily="18" charset="0"/>
+                        </a:rPr>
+                        <m:t>𝑎𝑛𝑑</m:t>
+                      </m:r>
+                      <m:r>
+                        <a:rPr lang="en-US" b="0" i="1" smtClean="0">
+                          <a:latin typeface="Cambria Math" panose="02040503050406030204" pitchFamily="18" charset="0"/>
+                        </a:rPr>
+                        <m:t> </m:t>
+                      </m:r>
+                      <m:r>
+                        <a:rPr lang="en-US" b="0" i="1" smtClean="0">
+                          <a:latin typeface="Cambria Math" panose="02040503050406030204" pitchFamily="18" charset="0"/>
+                        </a:rPr>
+                        <m:t>𝑡h𝑒𝑟𝑒𝑓𝑜𝑟𝑒</m:t>
+                      </m:r>
+                      <m:r>
+                        <a:rPr lang="en-US" b="0" i="1" smtClean="0">
+                          <a:latin typeface="Cambria Math" panose="02040503050406030204" pitchFamily="18" charset="0"/>
+                        </a:rPr>
+                        <m:t>,</m:t>
+                      </m:r>
+                      <m:sSub>
+                        <m:sSubPr>
+                          <m:ctrlPr>
+                            <a:rPr lang="en-US" i="1">
+                              <a:latin typeface="Cambria Math" panose="02040503050406030204" pitchFamily="18" charset="0"/>
+                            </a:rPr>
+                          </m:ctrlPr>
+                        </m:sSubPr>
+                        <m:e>
+                          <m:r>
+                            <a:rPr lang="en-US" i="1">
+                              <a:latin typeface="Cambria Math" panose="02040503050406030204" pitchFamily="18" charset="0"/>
+                            </a:rPr>
+                            <m:t>𝑣</m:t>
+                          </m:r>
+                        </m:e>
+                        <m:sub>
+                          <m:r>
+                            <a:rPr lang="en-US" i="1">
+                              <a:latin typeface="Cambria Math" panose="02040503050406030204" pitchFamily="18" charset="0"/>
+                            </a:rPr>
+                            <m:t>𝑖</m:t>
+                          </m:r>
+                        </m:sub>
+                      </m:sSub>
+                      <m:r>
+                        <a:rPr lang="en-US" i="1" smtClean="0">
+                          <a:latin typeface="Cambria Math" panose="02040503050406030204" pitchFamily="18" charset="0"/>
+                          <a:ea typeface="Cambria Math" panose="02040503050406030204" pitchFamily="18" charset="0"/>
+                        </a:rPr>
+                        <m:t>∈</m:t>
+                      </m:r>
+                      <m:d>
+                        <m:dPr>
+                          <m:begChr m:val="{"/>
+                          <m:endChr m:val="}"/>
+                          <m:ctrlPr>
+                            <a:rPr lang="en-US" b="0" i="1" smtClean="0">
+                              <a:latin typeface="Cambria Math" panose="02040503050406030204" pitchFamily="18" charset="0"/>
+                              <a:ea typeface="Cambria Math" panose="02040503050406030204" pitchFamily="18" charset="0"/>
+                            </a:rPr>
+                          </m:ctrlPr>
+                        </m:dPr>
+                        <m:e>
+                          <m:r>
+                            <a:rPr lang="en-US" b="0" i="1" smtClean="0">
+                              <a:latin typeface="Cambria Math" panose="02040503050406030204" pitchFamily="18" charset="0"/>
+                              <a:ea typeface="Cambria Math" panose="02040503050406030204" pitchFamily="18" charset="0"/>
+                            </a:rPr>
+                            <m:t>h</m:t>
+                          </m:r>
+                          <m:r>
+                            <a:rPr lang="en-US" b="0" i="1" smtClean="0">
+                              <a:latin typeface="Cambria Math" panose="02040503050406030204" pitchFamily="18" charset="0"/>
+                              <a:ea typeface="Cambria Math" panose="02040503050406030204" pitchFamily="18" charset="0"/>
+                            </a:rPr>
+                            <m:t>−</m:t>
+                          </m:r>
+                          <m:r>
+                            <a:rPr lang="en-US" b="0" i="1" smtClean="0">
+                              <a:latin typeface="Cambria Math" panose="02040503050406030204" pitchFamily="18" charset="0"/>
+                              <a:ea typeface="Cambria Math" panose="02040503050406030204" pitchFamily="18" charset="0"/>
+                            </a:rPr>
+                            <m:t>h𝑜𝑝</m:t>
+                          </m:r>
+                          <m:r>
+                            <a:rPr lang="en-US" b="0" i="1" smtClean="0">
+                              <a:latin typeface="Cambria Math" panose="02040503050406030204" pitchFamily="18" charset="0"/>
+                              <a:ea typeface="Cambria Math" panose="02040503050406030204" pitchFamily="18" charset="0"/>
+                            </a:rPr>
+                            <m:t> </m:t>
+                          </m:r>
+                          <m:r>
+                            <a:rPr lang="en-US" b="0" i="1" smtClean="0">
+                              <a:latin typeface="Cambria Math" panose="02040503050406030204" pitchFamily="18" charset="0"/>
+                              <a:ea typeface="Cambria Math" panose="02040503050406030204" pitchFamily="18" charset="0"/>
+                            </a:rPr>
+                            <m:t>𝑛𝑒𝑖𝑔h𝑏𝑜𝑟h𝑜𝑜𝑑</m:t>
+                          </m:r>
+                          <m:r>
+                            <a:rPr lang="en-US" b="0" i="1" smtClean="0">
+                              <a:latin typeface="Cambria Math" panose="02040503050406030204" pitchFamily="18" charset="0"/>
+                              <a:ea typeface="Cambria Math" panose="02040503050406030204" pitchFamily="18" charset="0"/>
+                            </a:rPr>
+                            <m:t> </m:t>
+                          </m:r>
+                          <m:r>
+                            <a:rPr lang="en-US" b="0" i="1" smtClean="0">
+                              <a:latin typeface="Cambria Math" panose="02040503050406030204" pitchFamily="18" charset="0"/>
+                              <a:ea typeface="Cambria Math" panose="02040503050406030204" pitchFamily="18" charset="0"/>
+                            </a:rPr>
+                            <m:t>𝑜𝑓</m:t>
+                          </m:r>
+                          <m:r>
+                            <a:rPr lang="en-US" b="0" i="1" smtClean="0">
+                              <a:latin typeface="Cambria Math" panose="02040503050406030204" pitchFamily="18" charset="0"/>
+                              <a:ea typeface="Cambria Math" panose="02040503050406030204" pitchFamily="18" charset="0"/>
+                            </a:rPr>
+                            <m:t> </m:t>
+                          </m:r>
+                          <m:r>
+                            <a:rPr lang="en-US" b="0" i="1" smtClean="0">
+                              <a:latin typeface="Cambria Math" panose="02040503050406030204" pitchFamily="18" charset="0"/>
+                              <a:ea typeface="Cambria Math" panose="02040503050406030204" pitchFamily="18" charset="0"/>
+                            </a:rPr>
+                            <m:t>𝑥</m:t>
+                          </m:r>
+                          <m:r>
+                            <a:rPr lang="en-US" b="0" i="1" smtClean="0">
+                              <a:latin typeface="Cambria Math" panose="02040503050406030204" pitchFamily="18" charset="0"/>
+                              <a:ea typeface="Cambria Math" panose="02040503050406030204" pitchFamily="18" charset="0"/>
+                            </a:rPr>
+                            <m:t> </m:t>
+                          </m:r>
+                          <m:r>
+                            <a:rPr lang="en-US" b="0" i="1" smtClean="0">
+                              <a:latin typeface="Cambria Math" panose="02040503050406030204" pitchFamily="18" charset="0"/>
+                              <a:ea typeface="Cambria Math" panose="02040503050406030204" pitchFamily="18" charset="0"/>
+                            </a:rPr>
+                            <m:t>𝑜𝑟</m:t>
+                          </m:r>
+                          <m:r>
+                            <a:rPr lang="en-US" b="0" i="1" smtClean="0">
+                              <a:latin typeface="Cambria Math" panose="02040503050406030204" pitchFamily="18" charset="0"/>
+                              <a:ea typeface="Cambria Math" panose="02040503050406030204" pitchFamily="18" charset="0"/>
+                            </a:rPr>
+                            <m:t> </m:t>
+                          </m:r>
+                          <m:r>
+                            <a:rPr lang="en-US" b="0" i="1" smtClean="0">
+                              <a:latin typeface="Cambria Math" panose="02040503050406030204" pitchFamily="18" charset="0"/>
+                              <a:ea typeface="Cambria Math" panose="02040503050406030204" pitchFamily="18" charset="0"/>
+                            </a:rPr>
+                            <m:t>𝑦</m:t>
+                          </m:r>
+                        </m:e>
+                      </m:d>
+                      <m:r>
+                        <a:rPr lang="en-US" b="0" i="1" smtClean="0">
+                          <a:latin typeface="Cambria Math" panose="02040503050406030204" pitchFamily="18" charset="0"/>
+                          <a:ea typeface="Cambria Math" panose="02040503050406030204" pitchFamily="18" charset="0"/>
+                        </a:rPr>
+                        <m:t> </m:t>
+                      </m:r>
+                      <m:r>
+                        <a:rPr lang="en-US" b="0" i="1" smtClean="0">
+                          <a:latin typeface="Cambria Math" panose="02040503050406030204" pitchFamily="18" charset="0"/>
+                          <a:ea typeface="Cambria Math" panose="02040503050406030204" pitchFamily="18" charset="0"/>
+                        </a:rPr>
+                        <m:t>𝑤h𝑖𝑐h</m:t>
+                      </m:r>
+                      <m:r>
+                        <a:rPr lang="en-US" b="0" i="1" smtClean="0">
+                          <a:latin typeface="Cambria Math" panose="02040503050406030204" pitchFamily="18" charset="0"/>
+                          <a:ea typeface="Cambria Math" panose="02040503050406030204" pitchFamily="18" charset="0"/>
+                        </a:rPr>
+                        <m:t> </m:t>
+                      </m:r>
+                      <m:r>
+                        <a:rPr lang="en-US" b="0" i="1" smtClean="0">
+                          <a:latin typeface="Cambria Math" panose="02040503050406030204" pitchFamily="18" charset="0"/>
+                          <a:ea typeface="Cambria Math" panose="02040503050406030204" pitchFamily="18" charset="0"/>
+                        </a:rPr>
+                        <m:t>𝑚𝑒𝑎𝑛𝑠</m:t>
+                      </m:r>
+                      <m:sSub>
+                        <m:sSubPr>
+                          <m:ctrlPr>
+                            <a:rPr lang="en-US" i="1">
+                              <a:latin typeface="Cambria Math" panose="02040503050406030204" pitchFamily="18" charset="0"/>
+                            </a:rPr>
+                          </m:ctrlPr>
+                        </m:sSubPr>
+                        <m:e>
+                          <m:r>
+                            <a:rPr lang="en-US" b="0" i="1" smtClean="0">
+                              <a:latin typeface="Cambria Math" panose="02040503050406030204" pitchFamily="18" charset="0"/>
+                            </a:rPr>
+                            <m:t> </m:t>
+                          </m:r>
+                          <m:r>
+                            <a:rPr lang="en-US" i="1">
+                              <a:latin typeface="Cambria Math" panose="02040503050406030204" pitchFamily="18" charset="0"/>
+                            </a:rPr>
+                            <m:t>𝑣</m:t>
+                          </m:r>
+                        </m:e>
+                        <m:sub>
+                          <m:r>
+                            <a:rPr lang="en-US" i="1">
+                              <a:latin typeface="Cambria Math" panose="02040503050406030204" pitchFamily="18" charset="0"/>
+                            </a:rPr>
+                            <m:t>𝑖</m:t>
+                          </m:r>
+                        </m:sub>
+                      </m:sSub>
+                      <m:r>
+                        <a:rPr lang="en-US" i="1" smtClean="0">
+                          <a:latin typeface="Cambria Math" panose="02040503050406030204" pitchFamily="18" charset="0"/>
+                          <a:ea typeface="Cambria Math" panose="02040503050406030204" pitchFamily="18" charset="0"/>
+                        </a:rPr>
+                        <m:t>∈</m:t>
+                      </m:r>
+                      <m:sSubSup>
+                        <m:sSubSupPr>
+                          <m:ctrlPr>
+                            <a:rPr lang="en-US" i="1">
+                              <a:latin typeface="Cambria Math" panose="02040503050406030204" pitchFamily="18" charset="0"/>
+                            </a:rPr>
+                          </m:ctrlPr>
+                        </m:sSubSupPr>
+                        <m:e>
+                          <m:r>
+                            <a:rPr lang="en-US" i="1">
+                              <a:latin typeface="Cambria Math" panose="02040503050406030204" pitchFamily="18" charset="0"/>
+                            </a:rPr>
+                            <m:t>𝐺</m:t>
+                          </m:r>
+                        </m:e>
+                        <m:sub>
+                          <m:r>
+                            <a:rPr lang="en-US" i="1">
+                              <a:latin typeface="Cambria Math" panose="02040503050406030204" pitchFamily="18" charset="0"/>
+                            </a:rPr>
+                            <m:t>𝑥</m:t>
+                          </m:r>
+                          <m:r>
+                            <a:rPr lang="en-US" i="1">
+                              <a:latin typeface="Cambria Math" panose="02040503050406030204" pitchFamily="18" charset="0"/>
+                            </a:rPr>
+                            <m:t>,</m:t>
+                          </m:r>
+                          <m:r>
+                            <a:rPr lang="en-US" i="1">
+                              <a:latin typeface="Cambria Math" panose="02040503050406030204" pitchFamily="18" charset="0"/>
+                            </a:rPr>
+                            <m:t>𝑦</m:t>
+                          </m:r>
+                        </m:sub>
+                        <m:sup>
+                          <m:r>
+                            <a:rPr lang="en-US" i="1">
+                              <a:latin typeface="Cambria Math" panose="02040503050406030204" pitchFamily="18" charset="0"/>
+                            </a:rPr>
+                            <m:t>h</m:t>
+                          </m:r>
+                        </m:sup>
+                      </m:sSubSup>
+                    </m:oMath>
+                  </m:oMathPara>
+                </a14:m>
+                <a:endParaRPr lang="en-US" b="0" dirty="0"/>
+              </a:p>
+              <a:p>
+                <a:pPr/>
+                <a14:m>
+                  <m:oMathPara xmlns:m="http://schemas.openxmlformats.org/officeDocument/2006/math">
+                    <m:oMathParaPr>
+                      <m:jc m:val="left"/>
+                    </m:oMathParaPr>
+                    <m:oMath xmlns:m="http://schemas.openxmlformats.org/officeDocument/2006/math">
+                      <m:r>
+                        <a:rPr lang="en-US" b="0" i="1" smtClean="0">
+                          <a:latin typeface="Cambria Math" panose="02040503050406030204" pitchFamily="18" charset="0"/>
+                        </a:rPr>
+                        <m:t>𝑆𝑒𝑡𝑡𝑖𝑛𝑔</m:t>
+                      </m:r>
+                      <m:r>
+                        <a:rPr lang="en-US" b="0" i="1" smtClean="0">
+                          <a:latin typeface="Cambria Math" panose="02040503050406030204" pitchFamily="18" charset="0"/>
+                        </a:rPr>
+                        <m:t> </m:t>
+                      </m:r>
+                      <m:r>
+                        <a:rPr lang="en-US" b="0" i="1" smtClean="0">
+                          <a:latin typeface="Cambria Math" panose="02040503050406030204" pitchFamily="18" charset="0"/>
+                          <a:ea typeface="Cambria Math" panose="02040503050406030204" pitchFamily="18" charset="0"/>
+                        </a:rPr>
+                        <m:t>𝛾</m:t>
+                      </m:r>
+                      <m:r>
+                        <a:rPr lang="en-US" b="0" i="1" smtClean="0">
+                          <a:latin typeface="Cambria Math" panose="02040503050406030204" pitchFamily="18" charset="0"/>
+                          <a:ea typeface="Cambria Math" panose="02040503050406030204" pitchFamily="18" charset="0"/>
+                        </a:rPr>
+                        <m:t>=</m:t>
+                      </m:r>
+                      <m:r>
+                        <a:rPr lang="en-US" b="0" i="1" smtClean="0">
+                          <a:latin typeface="Cambria Math" panose="02040503050406030204" pitchFamily="18" charset="0"/>
+                          <a:ea typeface="Cambria Math" panose="02040503050406030204" pitchFamily="18" charset="0"/>
+                        </a:rPr>
+                        <m:t>𝛽</m:t>
+                      </m:r>
+                      <m:r>
+                        <a:rPr lang="en-US" b="0" i="1" smtClean="0">
+                          <a:latin typeface="Cambria Math" panose="02040503050406030204" pitchFamily="18" charset="0"/>
+                          <a:ea typeface="Cambria Math" panose="02040503050406030204" pitchFamily="18" charset="0"/>
+                        </a:rPr>
+                        <m:t> &amp; </m:t>
+                      </m:r>
+                      <m:r>
+                        <a:rPr lang="en-US" b="0" i="1" smtClean="0">
+                          <a:latin typeface="Cambria Math" panose="02040503050406030204" pitchFamily="18" charset="0"/>
+                          <a:ea typeface="Cambria Math" panose="02040503050406030204" pitchFamily="18" charset="0"/>
+                        </a:rPr>
+                        <m:t>𝜂</m:t>
+                      </m:r>
+                      <m:r>
+                        <a:rPr lang="en-US" b="0" i="1" smtClean="0">
+                          <a:latin typeface="Cambria Math" panose="02040503050406030204" pitchFamily="18" charset="0"/>
+                          <a:ea typeface="Cambria Math" panose="02040503050406030204" pitchFamily="18" charset="0"/>
+                        </a:rPr>
+                        <m:t>=1 </m:t>
+                      </m:r>
+                      <m:r>
+                        <a:rPr lang="en-US" b="0" i="1" smtClean="0">
+                          <a:latin typeface="Cambria Math" panose="02040503050406030204" pitchFamily="18" charset="0"/>
+                          <a:ea typeface="Cambria Math" panose="02040503050406030204" pitchFamily="18" charset="0"/>
+                        </a:rPr>
+                        <m:t>𝑎𝑛𝑑</m:t>
+                      </m:r>
+                      <m:r>
+                        <a:rPr lang="en-US" b="0" i="1" smtClean="0">
+                          <a:latin typeface="Cambria Math" panose="02040503050406030204" pitchFamily="18" charset="0"/>
+                          <a:ea typeface="Cambria Math" panose="02040503050406030204" pitchFamily="18" charset="0"/>
+                        </a:rPr>
+                        <m:t> </m:t>
+                      </m:r>
+                      <m:r>
+                        <a:rPr lang="en-US" b="0" i="1" smtClean="0">
+                          <a:latin typeface="Cambria Math" panose="02040503050406030204" pitchFamily="18" charset="0"/>
+                          <a:ea typeface="Cambria Math" panose="02040503050406030204" pitchFamily="18" charset="0"/>
+                        </a:rPr>
+                        <m:t>𝑓</m:t>
+                      </m:r>
+                      <m:d>
+                        <m:dPr>
+                          <m:ctrlPr>
+                            <a:rPr lang="en-US" b="0" i="1" smtClean="0">
+                              <a:latin typeface="Cambria Math" panose="02040503050406030204" pitchFamily="18" charset="0"/>
+                              <a:ea typeface="Cambria Math" panose="02040503050406030204" pitchFamily="18" charset="0"/>
+                            </a:rPr>
+                          </m:ctrlPr>
+                        </m:dPr>
+                        <m:e>
+                          <m:r>
+                            <a:rPr lang="en-US" b="0" i="1" smtClean="0">
+                              <a:latin typeface="Cambria Math" panose="02040503050406030204" pitchFamily="18" charset="0"/>
+                              <a:ea typeface="Cambria Math" panose="02040503050406030204" pitchFamily="18" charset="0"/>
+                            </a:rPr>
+                            <m:t>𝑥</m:t>
+                          </m:r>
+                          <m:r>
+                            <a:rPr lang="en-US" b="0" i="1" smtClean="0">
+                              <a:latin typeface="Cambria Math" panose="02040503050406030204" pitchFamily="18" charset="0"/>
+                              <a:ea typeface="Cambria Math" panose="02040503050406030204" pitchFamily="18" charset="0"/>
+                            </a:rPr>
+                            <m:t>,</m:t>
+                          </m:r>
+                          <m:r>
+                            <a:rPr lang="en-US" b="0" i="1" smtClean="0">
+                              <a:latin typeface="Cambria Math" panose="02040503050406030204" pitchFamily="18" charset="0"/>
+                              <a:ea typeface="Cambria Math" panose="02040503050406030204" pitchFamily="18" charset="0"/>
+                            </a:rPr>
+                            <m:t>𝑦</m:t>
+                          </m:r>
+                          <m:r>
+                            <a:rPr lang="en-US" b="0" i="1" smtClean="0">
+                              <a:latin typeface="Cambria Math" panose="02040503050406030204" pitchFamily="18" charset="0"/>
+                              <a:ea typeface="Cambria Math" panose="02040503050406030204" pitchFamily="18" charset="0"/>
+                            </a:rPr>
+                            <m:t>,</m:t>
+                          </m:r>
+                          <m:r>
+                            <a:rPr lang="en-US" b="0" i="1" smtClean="0">
+                              <a:latin typeface="Cambria Math" panose="02040503050406030204" pitchFamily="18" charset="0"/>
+                              <a:ea typeface="Cambria Math" panose="02040503050406030204" pitchFamily="18" charset="0"/>
+                            </a:rPr>
+                            <m:t>𝑙</m:t>
+                          </m:r>
+                        </m:e>
+                      </m:d>
+                      <m:r>
+                        <a:rPr lang="en-US" b="0" i="1" smtClean="0">
+                          <a:latin typeface="Cambria Math" panose="02040503050406030204" pitchFamily="18" charset="0"/>
+                          <a:ea typeface="Cambria Math" panose="02040503050406030204" pitchFamily="18" charset="0"/>
+                        </a:rPr>
+                        <m:t>=</m:t>
+                      </m:r>
+                      <m:d>
+                        <m:dPr>
+                          <m:begChr m:val="|"/>
+                          <m:endChr m:val="|"/>
+                          <m:ctrlPr>
+                            <a:rPr lang="en-US" i="1">
+                              <a:latin typeface="Cambria Math" panose="02040503050406030204" pitchFamily="18" charset="0"/>
+                            </a:rPr>
+                          </m:ctrlPr>
+                        </m:dPr>
+                        <m:e>
+                          <m:sSup>
+                            <m:sSupPr>
+                              <m:ctrlPr>
+                                <a:rPr lang="en-US" i="1">
+                                  <a:latin typeface="Cambria Math" panose="02040503050406030204" pitchFamily="18" charset="0"/>
+                                </a:rPr>
+                              </m:ctrlPr>
+                            </m:sSupPr>
+                            <m:e>
+                              <m:r>
+                                <a:rPr lang="en-US" i="1">
+                                  <a:latin typeface="Cambria Math" panose="02040503050406030204" pitchFamily="18" charset="0"/>
+                                </a:rPr>
+                                <m:t>𝑤𝑎𝑙𝑘𝑠</m:t>
+                              </m:r>
+                            </m:e>
+                            <m:sup>
+                              <m:r>
+                                <a:rPr lang="en-US" i="1">
+                                  <a:latin typeface="Cambria Math" panose="02040503050406030204" pitchFamily="18" charset="0"/>
+                                </a:rPr>
+                                <m:t>&lt;</m:t>
+                              </m:r>
+                              <m:r>
+                                <a:rPr lang="en-US" i="1">
+                                  <a:latin typeface="Cambria Math" panose="02040503050406030204" pitchFamily="18" charset="0"/>
+                                </a:rPr>
+                                <m:t>𝑙</m:t>
+                              </m:r>
+                              <m:r>
+                                <a:rPr lang="en-US" i="1">
+                                  <a:latin typeface="Cambria Math" panose="02040503050406030204" pitchFamily="18" charset="0"/>
+                                </a:rPr>
+                                <m:t>&gt;</m:t>
+                              </m:r>
+                            </m:sup>
+                          </m:sSup>
+                          <m:d>
+                            <m:dPr>
+                              <m:ctrlPr>
+                                <a:rPr lang="en-US" i="1">
+                                  <a:latin typeface="Cambria Math" panose="02040503050406030204" pitchFamily="18" charset="0"/>
+                                </a:rPr>
+                              </m:ctrlPr>
+                            </m:dPr>
+                            <m:e>
+                              <m:r>
+                                <a:rPr lang="en-US" i="1">
+                                  <a:latin typeface="Cambria Math" panose="02040503050406030204" pitchFamily="18" charset="0"/>
+                                </a:rPr>
+                                <m:t>𝑥</m:t>
+                              </m:r>
+                              <m:r>
+                                <a:rPr lang="en-US" i="1">
+                                  <a:latin typeface="Cambria Math" panose="02040503050406030204" pitchFamily="18" charset="0"/>
+                                </a:rPr>
+                                <m:t>,</m:t>
+                              </m:r>
+                              <m:r>
+                                <a:rPr lang="en-US" i="1">
+                                  <a:latin typeface="Cambria Math" panose="02040503050406030204" pitchFamily="18" charset="0"/>
+                                </a:rPr>
+                                <m:t>𝑦</m:t>
+                              </m:r>
+                            </m:e>
+                          </m:d>
+                        </m:e>
+                      </m:d>
+                      <m:r>
+                        <a:rPr lang="en-US" b="0" i="1" smtClean="0">
+                          <a:latin typeface="Cambria Math" panose="02040503050406030204" pitchFamily="18" charset="0"/>
+                        </a:rPr>
+                        <m:t>, </m:t>
+                      </m:r>
+                      <m:r>
+                        <a:rPr lang="en-US" b="0" i="1" smtClean="0">
+                          <a:latin typeface="Cambria Math" panose="02040503050406030204" pitchFamily="18" charset="0"/>
+                        </a:rPr>
+                        <m:t>𝑏𝑦</m:t>
+                      </m:r>
+                      <m:r>
+                        <a:rPr lang="en-US" b="0" i="1" smtClean="0">
+                          <a:latin typeface="Cambria Math" panose="02040503050406030204" pitchFamily="18" charset="0"/>
+                        </a:rPr>
+                        <m:t> </m:t>
+                      </m:r>
+                      <m:r>
+                        <a:rPr lang="en-US" b="0" i="1" smtClean="0">
+                          <a:latin typeface="Cambria Math" panose="02040503050406030204" pitchFamily="18" charset="0"/>
+                        </a:rPr>
+                        <m:t>𝑙𝑒𝑚𝑚𝑎</m:t>
+                      </m:r>
+                      <m:r>
+                        <a:rPr lang="en-US" b="0" i="1" smtClean="0">
+                          <a:latin typeface="Cambria Math" panose="02040503050406030204" pitchFamily="18" charset="0"/>
+                        </a:rPr>
+                        <m:t>,  </m:t>
+                      </m:r>
+                      <m:d>
+                        <m:dPr>
+                          <m:begChr m:val="|"/>
+                          <m:endChr m:val="|"/>
+                          <m:ctrlPr>
+                            <a:rPr lang="en-US" i="1">
+                              <a:latin typeface="Cambria Math" panose="02040503050406030204" pitchFamily="18" charset="0"/>
+                            </a:rPr>
+                          </m:ctrlPr>
+                        </m:dPr>
+                        <m:e>
+                          <m:sSup>
+                            <m:sSupPr>
+                              <m:ctrlPr>
+                                <a:rPr lang="en-US" i="1">
+                                  <a:latin typeface="Cambria Math" panose="02040503050406030204" pitchFamily="18" charset="0"/>
+                                </a:rPr>
+                              </m:ctrlPr>
+                            </m:sSupPr>
+                            <m:e>
+                              <m:r>
+                                <a:rPr lang="en-US" i="1">
+                                  <a:latin typeface="Cambria Math" panose="02040503050406030204" pitchFamily="18" charset="0"/>
+                                </a:rPr>
+                                <m:t>𝑤𝑎𝑙𝑘𝑠</m:t>
+                              </m:r>
+                            </m:e>
+                            <m:sup>
+                              <m:r>
+                                <a:rPr lang="en-US" i="1">
+                                  <a:latin typeface="Cambria Math" panose="02040503050406030204" pitchFamily="18" charset="0"/>
+                                </a:rPr>
+                                <m:t>&lt;</m:t>
+                              </m:r>
+                              <m:r>
+                                <a:rPr lang="en-US" i="1">
+                                  <a:latin typeface="Cambria Math" panose="02040503050406030204" pitchFamily="18" charset="0"/>
+                                </a:rPr>
+                                <m:t>𝑙</m:t>
+                              </m:r>
+                              <m:r>
+                                <a:rPr lang="en-US" i="1">
+                                  <a:latin typeface="Cambria Math" panose="02040503050406030204" pitchFamily="18" charset="0"/>
+                                </a:rPr>
+                                <m:t>&gt;</m:t>
+                              </m:r>
+                            </m:sup>
+                          </m:sSup>
+                          <m:d>
+                            <m:dPr>
+                              <m:ctrlPr>
+                                <a:rPr lang="en-US" i="1">
+                                  <a:latin typeface="Cambria Math" panose="02040503050406030204" pitchFamily="18" charset="0"/>
+                                </a:rPr>
+                              </m:ctrlPr>
+                            </m:dPr>
+                            <m:e>
+                              <m:r>
+                                <a:rPr lang="en-US" i="1">
+                                  <a:latin typeface="Cambria Math" panose="02040503050406030204" pitchFamily="18" charset="0"/>
+                                </a:rPr>
+                                <m:t>𝑥</m:t>
+                              </m:r>
+                              <m:r>
+                                <a:rPr lang="en-US" i="1">
+                                  <a:latin typeface="Cambria Math" panose="02040503050406030204" pitchFamily="18" charset="0"/>
+                                </a:rPr>
+                                <m:t>,</m:t>
+                              </m:r>
+                              <m:r>
+                                <a:rPr lang="en-US" i="1">
+                                  <a:latin typeface="Cambria Math" panose="02040503050406030204" pitchFamily="18" charset="0"/>
+                                </a:rPr>
+                                <m:t>𝑦</m:t>
+                              </m:r>
+                            </m:e>
+                          </m:d>
+                        </m:e>
+                      </m:d>
+                      <m:r>
+                        <a:rPr lang="en-US" b="0" i="1" smtClean="0">
+                          <a:latin typeface="Cambria Math" panose="02040503050406030204" pitchFamily="18" charset="0"/>
+                        </a:rPr>
+                        <m:t> </m:t>
+                      </m:r>
+                      <m:r>
+                        <a:rPr lang="en-US" b="0" i="1" smtClean="0">
+                          <a:latin typeface="Cambria Math" panose="02040503050406030204" pitchFamily="18" charset="0"/>
+                        </a:rPr>
+                        <m:t>𝑖𝑠</m:t>
+                      </m:r>
+                      <m:r>
+                        <a:rPr lang="en-US" b="0" i="1" smtClean="0">
+                          <a:latin typeface="Cambria Math" panose="02040503050406030204" pitchFamily="18" charset="0"/>
+                        </a:rPr>
+                        <m:t> </m:t>
+                      </m:r>
+                      <m:r>
+                        <a:rPr lang="en-US" b="0" i="1" smtClean="0">
+                          <a:latin typeface="Cambria Math" panose="02040503050406030204" pitchFamily="18" charset="0"/>
+                        </a:rPr>
+                        <m:t>𝑐𝑎𝑙𝑐𝑢𝑙𝑎𝑏𝑙𝑒</m:t>
+                      </m:r>
+                      <m:r>
+                        <a:rPr lang="en-US" b="0" i="1" smtClean="0">
+                          <a:latin typeface="Cambria Math" panose="02040503050406030204" pitchFamily="18" charset="0"/>
+                        </a:rPr>
+                        <m:t> </m:t>
+                      </m:r>
+                      <m:r>
+                        <a:rPr lang="en-US" b="0" i="1" smtClean="0">
+                          <a:latin typeface="Cambria Math" panose="02040503050406030204" pitchFamily="18" charset="0"/>
+                        </a:rPr>
+                        <m:t>𝑓𝑟𝑜𝑚</m:t>
+                      </m:r>
+                      <m:sSubSup>
+                        <m:sSubSupPr>
+                          <m:ctrlPr>
+                            <a:rPr lang="en-US" i="1">
+                              <a:latin typeface="Cambria Math" panose="02040503050406030204" pitchFamily="18" charset="0"/>
+                            </a:rPr>
+                          </m:ctrlPr>
+                        </m:sSubSupPr>
+                        <m:e>
+                          <m:r>
+                            <a:rPr lang="en-US" b="0" i="1" smtClean="0">
+                              <a:latin typeface="Cambria Math" panose="02040503050406030204" pitchFamily="18" charset="0"/>
+                            </a:rPr>
+                            <m:t> </m:t>
+                          </m:r>
+                          <m:r>
+                            <a:rPr lang="en-US" i="1">
+                              <a:latin typeface="Cambria Math" panose="02040503050406030204" pitchFamily="18" charset="0"/>
+                            </a:rPr>
+                            <m:t>𝐺</m:t>
+                          </m:r>
+                        </m:e>
+                        <m:sub>
+                          <m:r>
+                            <a:rPr lang="en-US" i="1">
+                              <a:latin typeface="Cambria Math" panose="02040503050406030204" pitchFamily="18" charset="0"/>
+                            </a:rPr>
+                            <m:t>𝑥</m:t>
+                          </m:r>
+                          <m:r>
+                            <a:rPr lang="en-US" i="1">
+                              <a:latin typeface="Cambria Math" panose="02040503050406030204" pitchFamily="18" charset="0"/>
+                            </a:rPr>
+                            <m:t>,</m:t>
+                          </m:r>
+                          <m:r>
+                            <a:rPr lang="en-US" i="1">
+                              <a:latin typeface="Cambria Math" panose="02040503050406030204" pitchFamily="18" charset="0"/>
+                            </a:rPr>
+                            <m:t>𝑦</m:t>
+                          </m:r>
+                        </m:sub>
+                        <m:sup>
+                          <m:r>
+                            <a:rPr lang="en-US" i="1">
+                              <a:latin typeface="Cambria Math" panose="02040503050406030204" pitchFamily="18" charset="0"/>
+                            </a:rPr>
+                            <m:t>h</m:t>
+                          </m:r>
+                        </m:sup>
+                      </m:sSubSup>
+                      <m:r>
+                        <a:rPr lang="en-US" b="0" i="1" smtClean="0">
+                          <a:latin typeface="Cambria Math" panose="02040503050406030204" pitchFamily="18" charset="0"/>
+                        </a:rPr>
+                        <m:t> </m:t>
+                      </m:r>
+                      <m:r>
+                        <a:rPr lang="en-US" b="0" i="1" smtClean="0">
+                          <a:latin typeface="Cambria Math" panose="02040503050406030204" pitchFamily="18" charset="0"/>
+                        </a:rPr>
+                        <m:t>𝑎𝑛𝑑</m:t>
+                      </m:r>
+                      <m:r>
+                        <a:rPr lang="en-US" b="0" i="1" smtClean="0">
+                          <a:latin typeface="Cambria Math" panose="02040503050406030204" pitchFamily="18" charset="0"/>
+                        </a:rPr>
+                        <m:t> </m:t>
+                      </m:r>
+                      <m:r>
+                        <a:rPr lang="en-US" b="0" i="1" smtClean="0">
+                          <a:latin typeface="Cambria Math" panose="02040503050406030204" pitchFamily="18" charset="0"/>
+                        </a:rPr>
+                        <m:t>𝑠𝑜</m:t>
+                      </m:r>
+                      <m:r>
+                        <a:rPr lang="en-US" b="0" i="1" smtClean="0">
+                          <a:latin typeface="Cambria Math" panose="02040503050406030204" pitchFamily="18" charset="0"/>
+                        </a:rPr>
+                        <m:t> </m:t>
+                      </m:r>
+                      <m:r>
+                        <a:rPr lang="en-US" b="0" i="1" smtClean="0">
+                          <a:latin typeface="Cambria Math" panose="02040503050406030204" pitchFamily="18" charset="0"/>
+                        </a:rPr>
+                        <m:t>𝑖𝑡</m:t>
+                      </m:r>
+                      <m:r>
+                        <a:rPr lang="en-US" b="0" i="1" smtClean="0">
+                          <a:latin typeface="Cambria Math" panose="02040503050406030204" pitchFamily="18" charset="0"/>
+                        </a:rPr>
+                        <m:t> </m:t>
+                      </m:r>
+                      <m:r>
+                        <a:rPr lang="en-US" b="0" i="1" smtClean="0">
+                          <a:latin typeface="Cambria Math" panose="02040503050406030204" pitchFamily="18" charset="0"/>
+                        </a:rPr>
+                        <m:t>𝑠𝑎𝑡𝑖𝑠𝑓𝑖𝑒𝑠</m:t>
+                      </m:r>
+                      <m:r>
+                        <a:rPr lang="en-US" b="0" i="1" smtClean="0">
+                          <a:latin typeface="Cambria Math" panose="02040503050406030204" pitchFamily="18" charset="0"/>
+                        </a:rPr>
+                        <m:t> </m:t>
+                      </m:r>
+                      <m:r>
+                        <a:rPr lang="en-US" b="0" i="1" smtClean="0">
+                          <a:latin typeface="Cambria Math" panose="02040503050406030204" pitchFamily="18" charset="0"/>
+                        </a:rPr>
+                        <m:t>𝑝𝑟𝑜𝑝𝑒𝑟𝑡𝑦</m:t>
+                      </m:r>
+                      <m:r>
+                        <a:rPr lang="en-US" b="0" i="1" smtClean="0">
+                          <a:latin typeface="Cambria Math" panose="02040503050406030204" pitchFamily="18" charset="0"/>
+                        </a:rPr>
+                        <m:t> 2. </m:t>
+                      </m:r>
+                    </m:oMath>
+                  </m:oMathPara>
+                </a14:m>
+                <a:endParaRPr lang="en-US" b="0" i="1" dirty="0">
+                  <a:latin typeface="Cambria Math" panose="02040503050406030204" pitchFamily="18" charset="0"/>
+                </a:endParaRPr>
+              </a:p>
+              <a:p>
+                <a:pPr/>
+                <a14:m>
+                  <m:oMathPara xmlns:m="http://schemas.openxmlformats.org/officeDocument/2006/math">
+                    <m:oMathParaPr>
+                      <m:jc m:val="left"/>
+                    </m:oMathParaPr>
+                    <m:oMath xmlns:m="http://schemas.openxmlformats.org/officeDocument/2006/math">
+                      <m:r>
+                        <a:rPr lang="en-US" b="0" i="1" smtClean="0">
+                          <a:latin typeface="Cambria Math" panose="02040503050406030204" pitchFamily="18" charset="0"/>
+                        </a:rPr>
+                        <m:t>𝐼𝑡</m:t>
+                      </m:r>
+                      <m:r>
+                        <a:rPr lang="en-US" b="0" i="1" smtClean="0">
+                          <a:latin typeface="Cambria Math" panose="02040503050406030204" pitchFamily="18" charset="0"/>
+                        </a:rPr>
+                        <m:t> </m:t>
+                      </m:r>
+                      <m:r>
+                        <a:rPr lang="en-US" b="0" i="1" smtClean="0">
+                          <a:latin typeface="Cambria Math" panose="02040503050406030204" pitchFamily="18" charset="0"/>
+                        </a:rPr>
+                        <m:t>𝑠𝑎𝑡𝑖𝑠𝑓𝑖𝑒𝑠</m:t>
+                      </m:r>
+                      <m:r>
+                        <a:rPr lang="en-US" b="0" i="1" smtClean="0">
+                          <a:latin typeface="Cambria Math" panose="02040503050406030204" pitchFamily="18" charset="0"/>
+                        </a:rPr>
+                        <m:t> </m:t>
+                      </m:r>
+                      <m:r>
+                        <a:rPr lang="en-US" b="0" i="1" smtClean="0">
+                          <a:latin typeface="Cambria Math" panose="02040503050406030204" pitchFamily="18" charset="0"/>
+                        </a:rPr>
+                        <m:t>𝑝𝑟𝑜𝑝𝑒𝑟𝑡𝑦</m:t>
+                      </m:r>
+                      <m:r>
+                        <a:rPr lang="en-US" b="0" i="1" smtClean="0">
+                          <a:latin typeface="Cambria Math" panose="02040503050406030204" pitchFamily="18" charset="0"/>
+                        </a:rPr>
+                        <m:t> 1 </m:t>
+                      </m:r>
+                      <m:r>
+                        <a:rPr lang="en-US" b="0" i="1" smtClean="0">
+                          <a:latin typeface="Cambria Math" panose="02040503050406030204" pitchFamily="18" charset="0"/>
+                        </a:rPr>
+                        <m:t>𝑏𝑒𝑐𝑎𝑢𝑠𝑒</m:t>
+                      </m:r>
+                      <m:r>
+                        <a:rPr lang="en-US" b="0" i="1" smtClean="0">
+                          <a:latin typeface="Cambria Math" panose="02040503050406030204" pitchFamily="18" charset="0"/>
+                        </a:rPr>
+                        <m:t> </m:t>
+                      </m:r>
+                    </m:oMath>
+                  </m:oMathPara>
+                </a14:m>
+                <a:endParaRPr lang="en-US" b="0" dirty="0"/>
+              </a:p>
+              <a:p>
+                <a:pPr/>
+                <a14:m>
+                  <m:oMathPara xmlns:m="http://schemas.openxmlformats.org/officeDocument/2006/math">
+                    <m:oMathParaPr>
+                      <m:jc m:val="left"/>
+                    </m:oMathParaPr>
+                    <m:oMath xmlns:m="http://schemas.openxmlformats.org/officeDocument/2006/math">
+                      <m:d>
+                        <m:dPr>
+                          <m:begChr m:val="|"/>
+                          <m:endChr m:val="|"/>
+                          <m:ctrlPr>
+                            <a:rPr lang="en-US" b="0" i="1" smtClean="0">
+                              <a:latin typeface="Cambria Math" panose="02040503050406030204" pitchFamily="18" charset="0"/>
+                            </a:rPr>
+                          </m:ctrlPr>
+                        </m:dPr>
+                        <m:e>
+                          <m:sSup>
+                            <m:sSupPr>
+                              <m:ctrlPr>
+                                <a:rPr lang="en-US" i="1">
+                                  <a:latin typeface="Cambria Math" panose="02040503050406030204" pitchFamily="18" charset="0"/>
+                                </a:rPr>
+                              </m:ctrlPr>
+                            </m:sSupPr>
+                            <m:e>
+                              <m:r>
+                                <a:rPr lang="en-US" i="1">
+                                  <a:latin typeface="Cambria Math" panose="02040503050406030204" pitchFamily="18" charset="0"/>
+                                </a:rPr>
+                                <m:t>𝑤𝑎𝑙𝑘𝑠</m:t>
+                              </m:r>
+                            </m:e>
+                            <m:sup>
+                              <m:r>
+                                <a:rPr lang="en-US" i="1">
+                                  <a:latin typeface="Cambria Math" panose="02040503050406030204" pitchFamily="18" charset="0"/>
+                                </a:rPr>
+                                <m:t>&lt;</m:t>
+                              </m:r>
+                              <m:r>
+                                <a:rPr lang="en-US" i="1">
+                                  <a:latin typeface="Cambria Math" panose="02040503050406030204" pitchFamily="18" charset="0"/>
+                                </a:rPr>
+                                <m:t>𝑙</m:t>
+                              </m:r>
+                              <m:r>
+                                <a:rPr lang="en-US" i="1">
+                                  <a:latin typeface="Cambria Math" panose="02040503050406030204" pitchFamily="18" charset="0"/>
+                                </a:rPr>
+                                <m:t>&gt;</m:t>
+                              </m:r>
+                            </m:sup>
+                          </m:sSup>
+                          <m:d>
+                            <m:dPr>
+                              <m:ctrlPr>
+                                <a:rPr lang="en-US" i="1">
+                                  <a:latin typeface="Cambria Math" panose="02040503050406030204" pitchFamily="18" charset="0"/>
+                                </a:rPr>
+                              </m:ctrlPr>
+                            </m:dPr>
+                            <m:e>
+                              <m:r>
+                                <a:rPr lang="en-US" i="1">
+                                  <a:latin typeface="Cambria Math" panose="02040503050406030204" pitchFamily="18" charset="0"/>
+                                </a:rPr>
+                                <m:t>𝑥</m:t>
+                              </m:r>
+                              <m:r>
+                                <a:rPr lang="en-US" i="1">
+                                  <a:latin typeface="Cambria Math" panose="02040503050406030204" pitchFamily="18" charset="0"/>
+                                </a:rPr>
+                                <m:t>,</m:t>
+                              </m:r>
+                              <m:r>
+                                <a:rPr lang="en-US" i="1">
+                                  <a:latin typeface="Cambria Math" panose="02040503050406030204" pitchFamily="18" charset="0"/>
+                                </a:rPr>
+                                <m:t>𝑦</m:t>
+                              </m:r>
+                            </m:e>
+                          </m:d>
+                        </m:e>
+                      </m:d>
+                      <m:r>
+                        <a:rPr lang="en-US" b="0" i="1" smtClean="0">
+                          <a:latin typeface="Cambria Math" panose="02040503050406030204" pitchFamily="18" charset="0"/>
+                        </a:rPr>
+                        <m:t> </m:t>
+                      </m:r>
+                      <m:r>
+                        <a:rPr lang="en-US" b="0" i="1" smtClean="0">
+                          <a:latin typeface="Cambria Math" panose="02040503050406030204" pitchFamily="18" charset="0"/>
+                        </a:rPr>
+                        <m:t>𝑖𝑠</m:t>
+                      </m:r>
+                      <m:r>
+                        <a:rPr lang="en-US" b="0" i="1" smtClean="0">
+                          <a:latin typeface="Cambria Math" panose="02040503050406030204" pitchFamily="18" charset="0"/>
+                        </a:rPr>
+                        <m:t> </m:t>
+                      </m:r>
+                      <m:r>
+                        <a:rPr lang="en-US" b="0" i="1" smtClean="0">
+                          <a:latin typeface="Cambria Math" panose="02040503050406030204" pitchFamily="18" charset="0"/>
+                        </a:rPr>
+                        <m:t>𝑏𝑜𝑢𝑛𝑑𝑒𝑑</m:t>
+                      </m:r>
+                      <m:r>
+                        <a:rPr lang="en-US" b="0" i="1" smtClean="0">
+                          <a:latin typeface="Cambria Math" panose="02040503050406030204" pitchFamily="18" charset="0"/>
+                        </a:rPr>
+                        <m:t> </m:t>
+                      </m:r>
+                      <m:r>
+                        <a:rPr lang="en-US" b="0" i="1" smtClean="0">
+                          <a:latin typeface="Cambria Math" panose="02040503050406030204" pitchFamily="18" charset="0"/>
+                        </a:rPr>
+                        <m:t>𝑏𝑦</m:t>
+                      </m:r>
+                      <m:r>
+                        <a:rPr lang="en-US" b="0" i="1" smtClean="0">
+                          <a:latin typeface="Cambria Math" panose="02040503050406030204" pitchFamily="18" charset="0"/>
+                        </a:rPr>
+                        <m:t> </m:t>
+                      </m:r>
+                      <m:sSup>
+                        <m:sSupPr>
+                          <m:ctrlPr>
+                            <a:rPr lang="en-US" b="0" i="1" smtClean="0">
+                              <a:latin typeface="Cambria Math" panose="02040503050406030204" pitchFamily="18" charset="0"/>
+                            </a:rPr>
+                          </m:ctrlPr>
+                        </m:sSupPr>
+                        <m:e>
+                          <m:r>
+                            <a:rPr lang="en-US" b="0" i="1" smtClean="0">
+                              <a:latin typeface="Cambria Math" panose="02040503050406030204" pitchFamily="18" charset="0"/>
+                            </a:rPr>
+                            <m:t>𝑑</m:t>
+                          </m:r>
+                        </m:e>
+                        <m:sup>
+                          <m:r>
+                            <a:rPr lang="en-US" b="0" i="1" smtClean="0">
+                              <a:latin typeface="Cambria Math" panose="02040503050406030204" pitchFamily="18" charset="0"/>
+                            </a:rPr>
+                            <m:t>𝑙</m:t>
+                          </m:r>
+                        </m:sup>
+                      </m:sSup>
+                      <m:r>
+                        <a:rPr lang="en-US" b="0" i="1" smtClean="0">
+                          <a:latin typeface="Cambria Math" panose="02040503050406030204" pitchFamily="18" charset="0"/>
+                        </a:rPr>
+                        <m:t> </m:t>
+                      </m:r>
+                      <m:r>
+                        <a:rPr lang="en-US" b="0" i="1" smtClean="0">
+                          <a:latin typeface="Cambria Math" panose="02040503050406030204" pitchFamily="18" charset="0"/>
+                        </a:rPr>
+                        <m:t>𝑤h𝑒𝑟𝑒</m:t>
+                      </m:r>
+                      <m:r>
+                        <a:rPr lang="en-US" b="0" i="1" smtClean="0">
+                          <a:latin typeface="Cambria Math" panose="02040503050406030204" pitchFamily="18" charset="0"/>
+                        </a:rPr>
+                        <m:t> </m:t>
+                      </m:r>
+                      <m:r>
+                        <a:rPr lang="en-US" b="0" i="1" smtClean="0">
+                          <a:latin typeface="Cambria Math" panose="02040503050406030204" pitchFamily="18" charset="0"/>
+                        </a:rPr>
+                        <m:t>𝑑</m:t>
+                      </m:r>
+                      <m:r>
+                        <a:rPr lang="en-US" b="0" i="1" smtClean="0">
+                          <a:latin typeface="Cambria Math" panose="02040503050406030204" pitchFamily="18" charset="0"/>
+                        </a:rPr>
+                        <m:t> </m:t>
+                      </m:r>
+                      <m:r>
+                        <a:rPr lang="en-US" b="0" i="1" smtClean="0">
+                          <a:latin typeface="Cambria Math" panose="02040503050406030204" pitchFamily="18" charset="0"/>
+                        </a:rPr>
+                        <m:t>𝑖𝑠</m:t>
+                      </m:r>
+                      <m:r>
+                        <a:rPr lang="en-US" b="0" i="1" smtClean="0">
+                          <a:latin typeface="Cambria Math" panose="02040503050406030204" pitchFamily="18" charset="0"/>
+                        </a:rPr>
+                        <m:t> </m:t>
+                      </m:r>
+                      <m:r>
+                        <a:rPr lang="en-US" b="0" i="1" smtClean="0">
+                          <a:latin typeface="Cambria Math" panose="02040503050406030204" pitchFamily="18" charset="0"/>
+                        </a:rPr>
+                        <m:t>𝑡h𝑒</m:t>
+                      </m:r>
+                      <m:r>
+                        <a:rPr lang="en-US" b="0" i="1" smtClean="0">
+                          <a:latin typeface="Cambria Math" panose="02040503050406030204" pitchFamily="18" charset="0"/>
+                        </a:rPr>
+                        <m:t> </m:t>
+                      </m:r>
+                      <m:r>
+                        <a:rPr lang="en-US" b="0" i="1" smtClean="0">
+                          <a:latin typeface="Cambria Math" panose="02040503050406030204" pitchFamily="18" charset="0"/>
+                        </a:rPr>
+                        <m:t>𝑚𝑎𝑥𝑖𝑚𝑢𝑚</m:t>
+                      </m:r>
+                      <m:r>
+                        <a:rPr lang="en-US" b="0" i="1" smtClean="0">
+                          <a:latin typeface="Cambria Math" panose="02040503050406030204" pitchFamily="18" charset="0"/>
+                        </a:rPr>
+                        <m:t> </m:t>
+                      </m:r>
+                      <m:r>
+                        <a:rPr lang="en-US" b="0" i="1" smtClean="0">
+                          <a:latin typeface="Cambria Math" panose="02040503050406030204" pitchFamily="18" charset="0"/>
+                        </a:rPr>
+                        <m:t>𝑛𝑜𝑑𝑒</m:t>
+                      </m:r>
+                      <m:r>
+                        <a:rPr lang="en-US" b="0" i="1" smtClean="0">
+                          <a:latin typeface="Cambria Math" panose="02040503050406030204" pitchFamily="18" charset="0"/>
+                        </a:rPr>
+                        <m:t> </m:t>
+                      </m:r>
+                      <m:r>
+                        <a:rPr lang="en-US" b="0" i="1" smtClean="0">
+                          <a:latin typeface="Cambria Math" panose="02040503050406030204" pitchFamily="18" charset="0"/>
+                        </a:rPr>
+                        <m:t>𝑑𝑒𝑔𝑟𝑒𝑒</m:t>
+                      </m:r>
+                      <m:r>
+                        <a:rPr lang="en-US" b="0" i="1" smtClean="0">
+                          <a:latin typeface="Cambria Math" panose="02040503050406030204" pitchFamily="18" charset="0"/>
+                        </a:rPr>
+                        <m:t> </m:t>
+                      </m:r>
+                      <m:r>
+                        <a:rPr lang="en-US" b="0" i="1" smtClean="0">
+                          <a:latin typeface="Cambria Math" panose="02040503050406030204" pitchFamily="18" charset="0"/>
+                        </a:rPr>
+                        <m:t>𝑜𝑓</m:t>
+                      </m:r>
+                      <m:r>
+                        <a:rPr lang="en-US" b="0" i="1" smtClean="0">
+                          <a:latin typeface="Cambria Math" panose="02040503050406030204" pitchFamily="18" charset="0"/>
+                        </a:rPr>
+                        <m:t> </m:t>
+                      </m:r>
+                      <m:r>
+                        <a:rPr lang="en-US" b="0" i="1" smtClean="0">
+                          <a:latin typeface="Cambria Math" panose="02040503050406030204" pitchFamily="18" charset="0"/>
+                        </a:rPr>
+                        <m:t>𝑡h𝑒</m:t>
+                      </m:r>
+                      <m:r>
+                        <a:rPr lang="en-US" b="0" i="1" smtClean="0">
+                          <a:latin typeface="Cambria Math" panose="02040503050406030204" pitchFamily="18" charset="0"/>
+                        </a:rPr>
+                        <m:t> </m:t>
+                      </m:r>
+                      <m:r>
+                        <a:rPr lang="en-US" b="0" i="1" smtClean="0">
+                          <a:latin typeface="Cambria Math" panose="02040503050406030204" pitchFamily="18" charset="0"/>
+                        </a:rPr>
+                        <m:t>𝑛𝑒𝑡𝑤𝑜𝑟𝑘</m:t>
+                      </m:r>
+                      <m:r>
+                        <a:rPr lang="en-US" b="0" i="1" smtClean="0">
+                          <a:latin typeface="Cambria Math" panose="02040503050406030204" pitchFamily="18" charset="0"/>
+                        </a:rPr>
+                        <m:t>;</m:t>
+                      </m:r>
+                    </m:oMath>
+                  </m:oMathPara>
+                </a14:m>
+                <a:endParaRPr lang="en-US" b="0" dirty="0"/>
+              </a:p>
+              <a:p>
+                <a:pPr/>
+                <a14:m>
+                  <m:oMathPara xmlns:m="http://schemas.openxmlformats.org/officeDocument/2006/math">
+                    <m:oMathParaPr>
+                      <m:jc m:val="left"/>
+                    </m:oMathParaPr>
+                    <m:oMath xmlns:m="http://schemas.openxmlformats.org/officeDocument/2006/math">
+                      <m:r>
+                        <a:rPr lang="en-US" b="0" i="1" smtClean="0">
+                          <a:latin typeface="Cambria Math" panose="02040503050406030204" pitchFamily="18" charset="0"/>
+                        </a:rPr>
+                        <m:t>𝑆𝑒𝑡𝑡𝑖𝑛𝑔</m:t>
+                      </m:r>
+                      <m:r>
+                        <a:rPr lang="en-US" b="0" i="1" smtClean="0">
+                          <a:latin typeface="Cambria Math" panose="02040503050406030204" pitchFamily="18" charset="0"/>
+                        </a:rPr>
+                        <m:t> </m:t>
+                      </m:r>
+                      <m:r>
+                        <a:rPr lang="en-US" b="0" i="1" smtClean="0">
+                          <a:latin typeface="Cambria Math" panose="02040503050406030204" pitchFamily="18" charset="0"/>
+                          <a:ea typeface="Cambria Math" panose="02040503050406030204" pitchFamily="18" charset="0"/>
+                        </a:rPr>
+                        <m:t>𝜆</m:t>
+                      </m:r>
+                      <m:r>
+                        <a:rPr lang="en-US" b="0" i="1" smtClean="0">
+                          <a:latin typeface="Cambria Math" panose="02040503050406030204" pitchFamily="18" charset="0"/>
+                          <a:ea typeface="Cambria Math" panose="02040503050406030204" pitchFamily="18" charset="0"/>
+                        </a:rPr>
+                        <m:t>=</m:t>
+                      </m:r>
+                      <m:r>
+                        <a:rPr lang="en-US" b="0" i="1" smtClean="0">
+                          <a:latin typeface="Cambria Math" panose="02040503050406030204" pitchFamily="18" charset="0"/>
+                          <a:ea typeface="Cambria Math" panose="02040503050406030204" pitchFamily="18" charset="0"/>
+                        </a:rPr>
+                        <m:t>𝑑</m:t>
+                      </m:r>
+                      <m:r>
+                        <a:rPr lang="en-US" b="0" i="1" smtClean="0">
+                          <a:latin typeface="Cambria Math" panose="02040503050406030204" pitchFamily="18" charset="0"/>
+                          <a:ea typeface="Cambria Math" panose="02040503050406030204" pitchFamily="18" charset="0"/>
+                        </a:rPr>
+                        <m:t> </m:t>
+                      </m:r>
+                      <m:r>
+                        <a:rPr lang="en-US" b="0" i="1" smtClean="0">
+                          <a:latin typeface="Cambria Math" panose="02040503050406030204" pitchFamily="18" charset="0"/>
+                          <a:ea typeface="Cambria Math" panose="02040503050406030204" pitchFamily="18" charset="0"/>
+                        </a:rPr>
+                        <m:t>𝑦𝑖𝑒𝑙𝑑𝑠</m:t>
+                      </m:r>
+                      <m:r>
+                        <a:rPr lang="en-US" b="0" i="1" smtClean="0">
+                          <a:latin typeface="Cambria Math" panose="02040503050406030204" pitchFamily="18" charset="0"/>
+                          <a:ea typeface="Cambria Math" panose="02040503050406030204" pitchFamily="18" charset="0"/>
+                        </a:rPr>
+                        <m:t> </m:t>
+                      </m:r>
+                      <m:r>
+                        <a:rPr lang="en-US" b="0" i="1" smtClean="0">
+                          <a:latin typeface="Cambria Math" panose="02040503050406030204" pitchFamily="18" charset="0"/>
+                          <a:ea typeface="Cambria Math" panose="02040503050406030204" pitchFamily="18" charset="0"/>
+                        </a:rPr>
+                        <m:t>𝑎</m:t>
+                      </m:r>
+                      <m:r>
+                        <a:rPr lang="en-US" b="0" i="1" smtClean="0">
+                          <a:latin typeface="Cambria Math" panose="02040503050406030204" pitchFamily="18" charset="0"/>
+                          <a:ea typeface="Cambria Math" panose="02040503050406030204" pitchFamily="18" charset="0"/>
+                        </a:rPr>
+                        <m:t> </m:t>
+                      </m:r>
+                      <m:r>
+                        <a:rPr lang="en-US" b="0" i="1" smtClean="0">
+                          <a:latin typeface="Cambria Math" panose="02040503050406030204" pitchFamily="18" charset="0"/>
+                          <a:ea typeface="Cambria Math" panose="02040503050406030204" pitchFamily="18" charset="0"/>
+                        </a:rPr>
+                        <m:t>𝛾</m:t>
+                      </m:r>
+                      <m:r>
+                        <a:rPr lang="en-US" b="0" i="1" smtClean="0">
+                          <a:latin typeface="Cambria Math" panose="02040503050406030204" pitchFamily="18" charset="0"/>
+                          <a:ea typeface="Cambria Math" panose="02040503050406030204" pitchFamily="18" charset="0"/>
+                        </a:rPr>
+                        <m:t>−</m:t>
+                      </m:r>
+                      <m:r>
+                        <a:rPr lang="en-US" b="0" i="1" smtClean="0">
+                          <a:latin typeface="Cambria Math" panose="02040503050406030204" pitchFamily="18" charset="0"/>
+                          <a:ea typeface="Cambria Math" panose="02040503050406030204" pitchFamily="18" charset="0"/>
+                        </a:rPr>
+                        <m:t>𝑑𝑒𝑐𝑎𝑦𝑖𝑛𝑔</m:t>
+                      </m:r>
+                      <m:r>
+                        <a:rPr lang="en-US" b="0" i="1" smtClean="0">
+                          <a:latin typeface="Cambria Math" panose="02040503050406030204" pitchFamily="18" charset="0"/>
+                          <a:ea typeface="Cambria Math" panose="02040503050406030204" pitchFamily="18" charset="0"/>
+                        </a:rPr>
+                        <m:t> </m:t>
+                      </m:r>
+                      <m:r>
+                        <a:rPr lang="en-US" b="0" i="1" smtClean="0">
+                          <a:latin typeface="Cambria Math" panose="02040503050406030204" pitchFamily="18" charset="0"/>
+                          <a:ea typeface="Cambria Math" panose="02040503050406030204" pitchFamily="18" charset="0"/>
+                        </a:rPr>
+                        <m:t>h𝑒𝑢𝑟𝑖𝑠𝑡𝑖𝑐</m:t>
+                      </m:r>
+                      <m:r>
+                        <a:rPr lang="en-US" b="0" i="1" smtClean="0">
+                          <a:latin typeface="Cambria Math" panose="02040503050406030204" pitchFamily="18" charset="0"/>
+                          <a:ea typeface="Cambria Math" panose="02040503050406030204" pitchFamily="18" charset="0"/>
+                        </a:rPr>
+                        <m:t> </m:t>
+                      </m:r>
+                      <m:r>
+                        <a:rPr lang="en-US" b="0" i="1" smtClean="0">
+                          <a:latin typeface="Cambria Math" panose="02040503050406030204" pitchFamily="18" charset="0"/>
+                          <a:ea typeface="Cambria Math" panose="02040503050406030204" pitchFamily="18" charset="0"/>
+                        </a:rPr>
+                        <m:t>𝑎𝑠</m:t>
+                      </m:r>
+                      <m:r>
+                        <a:rPr lang="en-US" b="0" i="1" smtClean="0">
+                          <a:latin typeface="Cambria Math" panose="02040503050406030204" pitchFamily="18" charset="0"/>
+                          <a:ea typeface="Cambria Math" panose="02040503050406030204" pitchFamily="18" charset="0"/>
+                        </a:rPr>
+                        <m:t> </m:t>
+                      </m:r>
+                      <m:r>
+                        <a:rPr lang="en-US" b="0" i="1" smtClean="0">
+                          <a:latin typeface="Cambria Math" panose="02040503050406030204" pitchFamily="18" charset="0"/>
+                          <a:ea typeface="Cambria Math" panose="02040503050406030204" pitchFamily="18" charset="0"/>
+                        </a:rPr>
+                        <m:t>𝑙𝑜𝑛𝑔</m:t>
+                      </m:r>
+                      <m:r>
+                        <a:rPr lang="en-US" b="0" i="1" smtClean="0">
+                          <a:latin typeface="Cambria Math" panose="02040503050406030204" pitchFamily="18" charset="0"/>
+                          <a:ea typeface="Cambria Math" panose="02040503050406030204" pitchFamily="18" charset="0"/>
+                        </a:rPr>
+                        <m:t> </m:t>
+                      </m:r>
+                      <m:r>
+                        <a:rPr lang="en-US" b="0" i="1" smtClean="0">
+                          <a:latin typeface="Cambria Math" panose="02040503050406030204" pitchFamily="18" charset="0"/>
+                          <a:ea typeface="Cambria Math" panose="02040503050406030204" pitchFamily="18" charset="0"/>
+                        </a:rPr>
+                        <m:t>𝑎𝑠</m:t>
+                      </m:r>
+                      <m:r>
+                        <a:rPr lang="en-US" b="0" i="1" smtClean="0">
+                          <a:latin typeface="Cambria Math" panose="02040503050406030204" pitchFamily="18" charset="0"/>
+                          <a:ea typeface="Cambria Math" panose="02040503050406030204" pitchFamily="18" charset="0"/>
+                        </a:rPr>
+                        <m:t> </m:t>
+                      </m:r>
+                      <m:r>
+                        <a:rPr lang="en-US" b="0" i="1" smtClean="0">
+                          <a:latin typeface="Cambria Math" panose="02040503050406030204" pitchFamily="18" charset="0"/>
+                          <a:ea typeface="Cambria Math" panose="02040503050406030204" pitchFamily="18" charset="0"/>
+                        </a:rPr>
+                        <m:t>𝑑</m:t>
+                      </m:r>
+                      <m:r>
+                        <a:rPr lang="en-US" b="0" i="1" smtClean="0">
+                          <a:latin typeface="Cambria Math" panose="02040503050406030204" pitchFamily="18" charset="0"/>
+                          <a:ea typeface="Cambria Math" panose="02040503050406030204" pitchFamily="18" charset="0"/>
+                        </a:rPr>
+                        <m:t>&lt;</m:t>
+                      </m:r>
+                      <m:f>
+                        <m:fPr>
+                          <m:ctrlPr>
+                            <a:rPr lang="en-US" b="0" i="1" smtClean="0">
+                              <a:latin typeface="Cambria Math" panose="02040503050406030204" pitchFamily="18" charset="0"/>
+                              <a:ea typeface="Cambria Math" panose="02040503050406030204" pitchFamily="18" charset="0"/>
+                            </a:rPr>
+                          </m:ctrlPr>
+                        </m:fPr>
+                        <m:num>
+                          <m:r>
+                            <a:rPr lang="en-US" b="0" i="1" smtClean="0">
+                              <a:latin typeface="Cambria Math" panose="02040503050406030204" pitchFamily="18" charset="0"/>
+                              <a:ea typeface="Cambria Math" panose="02040503050406030204" pitchFamily="18" charset="0"/>
+                            </a:rPr>
+                            <m:t>1</m:t>
+                          </m:r>
+                        </m:num>
+                        <m:den>
+                          <m:r>
+                            <a:rPr lang="en-US" b="0" i="1" smtClean="0">
+                              <a:latin typeface="Cambria Math" panose="02040503050406030204" pitchFamily="18" charset="0"/>
+                              <a:ea typeface="Cambria Math" panose="02040503050406030204" pitchFamily="18" charset="0"/>
+                            </a:rPr>
+                            <m:t>𝛽</m:t>
+                          </m:r>
+                        </m:den>
+                      </m:f>
+                      <m:r>
+                        <a:rPr lang="en-US" b="0" i="1" smtClean="0">
+                          <a:latin typeface="Cambria Math" panose="02040503050406030204" pitchFamily="18" charset="0"/>
+                          <a:ea typeface="Cambria Math" panose="02040503050406030204" pitchFamily="18" charset="0"/>
+                        </a:rPr>
+                        <m:t>, </m:t>
+                      </m:r>
+                      <m:r>
+                        <a:rPr lang="en-US" b="0" i="1" smtClean="0">
+                          <a:latin typeface="Cambria Math" panose="02040503050406030204" pitchFamily="18" charset="0"/>
+                          <a:ea typeface="Cambria Math" panose="02040503050406030204" pitchFamily="18" charset="0"/>
+                        </a:rPr>
+                        <m:t>𝑖𝑛</m:t>
+                      </m:r>
+                      <m:r>
+                        <a:rPr lang="en-US" b="0" i="1" smtClean="0">
+                          <a:latin typeface="Cambria Math" panose="02040503050406030204" pitchFamily="18" charset="0"/>
+                          <a:ea typeface="Cambria Math" panose="02040503050406030204" pitchFamily="18" charset="0"/>
+                        </a:rPr>
+                        <m:t> </m:t>
+                      </m:r>
+                      <m:r>
+                        <a:rPr lang="en-US" b="0" i="1" smtClean="0">
+                          <a:latin typeface="Cambria Math" panose="02040503050406030204" pitchFamily="18" charset="0"/>
+                          <a:ea typeface="Cambria Math" panose="02040503050406030204" pitchFamily="18" charset="0"/>
+                        </a:rPr>
+                        <m:t>𝑚𝑜𝑠𝑡</m:t>
+                      </m:r>
+                      <m:r>
+                        <a:rPr lang="en-US" b="0" i="1" smtClean="0">
+                          <a:latin typeface="Cambria Math" panose="02040503050406030204" pitchFamily="18" charset="0"/>
+                          <a:ea typeface="Cambria Math" panose="02040503050406030204" pitchFamily="18" charset="0"/>
+                        </a:rPr>
+                        <m:t> </m:t>
+                      </m:r>
+                      <m:r>
+                        <a:rPr lang="en-US" b="0" i="1" smtClean="0">
+                          <a:latin typeface="Cambria Math" panose="02040503050406030204" pitchFamily="18" charset="0"/>
+                          <a:ea typeface="Cambria Math" panose="02040503050406030204" pitchFamily="18" charset="0"/>
+                        </a:rPr>
+                        <m:t>𝑐𝑎𝑠𝑒𝑠</m:t>
+                      </m:r>
+                      <m:r>
+                        <a:rPr lang="en-US" b="0" i="1" smtClean="0">
+                          <a:latin typeface="Cambria Math" panose="02040503050406030204" pitchFamily="18" charset="0"/>
+                          <a:ea typeface="Cambria Math" panose="02040503050406030204" pitchFamily="18" charset="0"/>
+                        </a:rPr>
+                        <m:t> </m:t>
+                      </m:r>
+                      <m:r>
+                        <a:rPr lang="en-US" b="0" i="1" smtClean="0">
+                          <a:latin typeface="Cambria Math" panose="02040503050406030204" pitchFamily="18" charset="0"/>
+                          <a:ea typeface="Cambria Math" panose="02040503050406030204" pitchFamily="18" charset="0"/>
+                        </a:rPr>
+                        <m:t>𝛽</m:t>
+                      </m:r>
+                      <m:r>
+                        <a:rPr lang="en-US" b="0" i="1" smtClean="0">
+                          <a:latin typeface="Cambria Math" panose="02040503050406030204" pitchFamily="18" charset="0"/>
+                          <a:ea typeface="Cambria Math" panose="02040503050406030204" pitchFamily="18" charset="0"/>
+                        </a:rPr>
+                        <m:t>≤5</m:t>
+                      </m:r>
+                      <m:r>
+                        <a:rPr lang="en-US" b="0" i="1" smtClean="0">
+                          <a:latin typeface="Cambria Math" panose="02040503050406030204" pitchFamily="18" charset="0"/>
+                          <a:ea typeface="Cambria Math" panose="02040503050406030204" pitchFamily="18" charset="0"/>
+                        </a:rPr>
+                        <m:t>𝑒</m:t>
+                      </m:r>
+                      <m:r>
+                        <a:rPr lang="en-US" b="0" i="1" smtClean="0">
+                          <a:latin typeface="Cambria Math" panose="02040503050406030204" pitchFamily="18" charset="0"/>
+                          <a:ea typeface="Cambria Math" panose="02040503050406030204" pitchFamily="18" charset="0"/>
+                        </a:rPr>
+                        <m:t>−4 </m:t>
+                      </m:r>
+                      <m:r>
+                        <a:rPr lang="en-US" b="0" i="1" smtClean="0">
+                          <a:latin typeface="Cambria Math" panose="02040503050406030204" pitchFamily="18" charset="0"/>
+                          <a:ea typeface="Cambria Math" panose="02040503050406030204" pitchFamily="18" charset="0"/>
+                        </a:rPr>
+                        <m:t>𝑎𝑛𝑑</m:t>
+                      </m:r>
+                      <m:r>
+                        <a:rPr lang="en-US" b="0" i="1" smtClean="0">
+                          <a:latin typeface="Cambria Math" panose="02040503050406030204" pitchFamily="18" charset="0"/>
+                          <a:ea typeface="Cambria Math" panose="02040503050406030204" pitchFamily="18" charset="0"/>
+                        </a:rPr>
+                        <m:t> </m:t>
+                      </m:r>
+                      <m:r>
+                        <a:rPr lang="en-US" b="0" i="1" smtClean="0">
+                          <a:latin typeface="Cambria Math" panose="02040503050406030204" pitchFamily="18" charset="0"/>
+                          <a:ea typeface="Cambria Math" panose="02040503050406030204" pitchFamily="18" charset="0"/>
+                        </a:rPr>
+                        <m:t>𝑡h𝑒</m:t>
+                      </m:r>
+                      <m:r>
+                        <a:rPr lang="en-US" b="0" i="1" smtClean="0">
+                          <a:latin typeface="Cambria Math" panose="02040503050406030204" pitchFamily="18" charset="0"/>
+                          <a:ea typeface="Cambria Math" panose="02040503050406030204" pitchFamily="18" charset="0"/>
+                        </a:rPr>
+                        <m:t> </m:t>
+                      </m:r>
+                      <m:r>
+                        <a:rPr lang="en-US" b="0" i="1" smtClean="0">
+                          <a:latin typeface="Cambria Math" panose="02040503050406030204" pitchFamily="18" charset="0"/>
+                          <a:ea typeface="Cambria Math" panose="02040503050406030204" pitchFamily="18" charset="0"/>
+                        </a:rPr>
+                        <m:t>𝑐𝑜𝑛𝑑𝑖𝑡𝑖𝑜𝑛</m:t>
+                      </m:r>
+                      <m:r>
+                        <a:rPr lang="en-US" b="0" i="1" smtClean="0">
+                          <a:latin typeface="Cambria Math" panose="02040503050406030204" pitchFamily="18" charset="0"/>
+                          <a:ea typeface="Cambria Math" panose="02040503050406030204" pitchFamily="18" charset="0"/>
+                        </a:rPr>
+                        <m:t> </m:t>
+                      </m:r>
+                      <m:r>
+                        <a:rPr lang="en-US" b="0" i="1" smtClean="0">
+                          <a:latin typeface="Cambria Math" panose="02040503050406030204" pitchFamily="18" charset="0"/>
+                          <a:ea typeface="Cambria Math" panose="02040503050406030204" pitchFamily="18" charset="0"/>
+                        </a:rPr>
+                        <m:t>𝑖𝑠</m:t>
+                      </m:r>
+                      <m:r>
+                        <a:rPr lang="en-US" b="0" i="1" smtClean="0">
+                          <a:latin typeface="Cambria Math" panose="02040503050406030204" pitchFamily="18" charset="0"/>
+                          <a:ea typeface="Cambria Math" panose="02040503050406030204" pitchFamily="18" charset="0"/>
+                        </a:rPr>
+                        <m:t> </m:t>
+                      </m:r>
+                      <m:r>
+                        <a:rPr lang="en-US" b="0" i="1" smtClean="0">
+                          <a:latin typeface="Cambria Math" panose="02040503050406030204" pitchFamily="18" charset="0"/>
+                          <a:ea typeface="Cambria Math" panose="02040503050406030204" pitchFamily="18" charset="0"/>
+                        </a:rPr>
+                        <m:t>𝑓𝑢𝑙𝑓𝑖𝑙𝑙𝑒𝑑</m:t>
+                      </m:r>
+                      <m:r>
+                        <a:rPr lang="en-US" b="0" i="1" smtClean="0">
+                          <a:latin typeface="Cambria Math" panose="02040503050406030204" pitchFamily="18" charset="0"/>
+                          <a:ea typeface="Cambria Math" panose="02040503050406030204" pitchFamily="18" charset="0"/>
+                        </a:rPr>
+                        <m:t>.</m:t>
+                      </m:r>
+                    </m:oMath>
+                  </m:oMathPara>
+                </a14:m>
+                <a:endParaRPr lang="en-US" b="0" dirty="0"/>
+              </a:p>
+            </p:txBody>
+          </p:sp>
+        </mc:Choice>
+        <mc:Fallback xmlns="">
+          <p:sp>
+            <p:nvSpPr>
+              <p:cNvPr id="3" name="TextBox 2">
+                <a:extLst>
+                  <a:ext uri="{FF2B5EF4-FFF2-40B4-BE49-F238E27FC236}">
+                    <a16:creationId xmlns:a16="http://schemas.microsoft.com/office/drawing/2014/main" id="{49E08EE0-1B5F-79C8-3FDE-03CC933AC366}"/>
+                  </a:ext>
+                </a:extLst>
+              </p:cNvPr>
+              <p:cNvSpPr txBox="1">
+                <a:spLocks noRot="1" noChangeAspect="1" noMove="1" noResize="1" noEditPoints="1" noAdjustHandles="1" noChangeArrowheads="1" noChangeShapeType="1" noTextEdit="1"/>
+              </p:cNvSpPr>
+              <p:nvPr/>
+            </p:nvSpPr>
+            <p:spPr>
+              <a:xfrm>
+                <a:off x="961053" y="1940767"/>
+                <a:ext cx="10207690" cy="4085670"/>
+              </a:xfrm>
+              <a:prstGeom prst="rect">
+                <a:avLst/>
+              </a:prstGeom>
+              <a:blipFill>
+                <a:blip r:embed="rId3"/>
+                <a:stretch>
+                  <a:fillRect l="-179" b="-298"/>
+                </a:stretch>
+              </a:blipFill>
+            </p:spPr>
+            <p:txBody>
+              <a:bodyPr/>
+              <a:lstStyle/>
+              <a:p>
+                <a:r>
+                  <a:rPr lang="en-US">
+                    <a:noFill/>
+                  </a:rPr>
+                  <a:t> </a:t>
+                </a:r>
+              </a:p>
+            </p:txBody>
+          </p:sp>
+        </mc:Fallback>
+      </mc:AlternateContent>
+      <p:sp>
+        <p:nvSpPr>
+          <p:cNvPr id="4" name="Slide Number Placeholder 3">
+            <a:extLst>
+              <a:ext uri="{FF2B5EF4-FFF2-40B4-BE49-F238E27FC236}">
+                <a16:creationId xmlns:a16="http://schemas.microsoft.com/office/drawing/2014/main" id="{D828F8BC-3AD7-DF9C-2D10-59DFD3EDE759}"/>
+              </a:ext>
+            </a:extLst>
+          </p:cNvPr>
+          <p:cNvSpPr>
+            <a:spLocks noGrp="1"/>
+          </p:cNvSpPr>
+          <p:nvPr>
+            <p:ph type="sldNum" sz="quarter" idx="12"/>
+          </p:nvPr>
+        </p:nvSpPr>
+        <p:spPr/>
+        <p:txBody>
+          <a:bodyPr/>
+          <a:lstStyle/>
+          <a:p>
+            <a:fld id="{673E80D0-5A67-47DD-9B76-4E24E60624C0}" type="slidenum">
+              <a:rPr lang="en-US" smtClean="0"/>
+              <a:t>10</a:t>
+            </a:fld>
+            <a:endParaRPr lang="en-US"/>
+          </a:p>
+        </p:txBody>
+      </p:sp>
+    </p:spTree>
+    <p:extLst>
+      <p:ext uri="{BB962C8B-B14F-4D97-AF65-F5344CB8AC3E}">
+        <p14:creationId xmlns:p14="http://schemas.microsoft.com/office/powerpoint/2010/main" val="2344924657"/>
+      </p:ext>
+    </p:extLst>
+  </p:cSld>
+  <p:clrMapOvr>
+    <a:masterClrMapping/>
+  </p:clrMapOvr>
+</p:sld>
+</file>
+
+<file path=ppt/slides/slide11.xml><?xml version="1.0" encoding="utf-8"?>
+<p:sld xmlns:a="http://schemas.openxmlformats.org/drawingml/2006/main" xmlns:r="http://schemas.openxmlformats.org/officeDocument/2006/relationships" xmlns:p="http://schemas.openxmlformats.org/presentationml/2006/main">
+  <p:cSld>
+    <p:spTree>
+      <p:nvGrpSpPr>
+        <p:cNvPr id="1" name=""/>
+        <p:cNvGrpSpPr/>
+        <p:nvPr/>
+      </p:nvGrpSpPr>
+      <p:grpSpPr>
+        <a:xfrm>
+          <a:off x="0" y="0"/>
+          <a:ext cx="0" cy="0"/>
+          <a:chOff x="0" y="0"/>
+          <a:chExt cx="0" cy="0"/>
+        </a:xfrm>
+      </p:grpSpPr>
+      <p:sp>
+        <p:nvSpPr>
+          <p:cNvPr id="2" name="Title 1">
+            <a:extLst>
+              <a:ext uri="{FF2B5EF4-FFF2-40B4-BE49-F238E27FC236}">
+                <a16:creationId xmlns:a16="http://schemas.microsoft.com/office/drawing/2014/main" id="{53460740-BA33-CEE1-45C1-D620BCE2EBF8}"/>
+              </a:ext>
+            </a:extLst>
+          </p:cNvPr>
+          <p:cNvSpPr>
+            <a:spLocks noGrp="1"/>
+          </p:cNvSpPr>
+          <p:nvPr>
+            <p:ph type="title"/>
+          </p:nvPr>
+        </p:nvSpPr>
+        <p:spPr/>
+        <p:txBody>
+          <a:bodyPr/>
+          <a:lstStyle/>
+          <a:p>
+            <a:r>
+              <a:rPr lang="en-US" dirty="0"/>
+              <a:t>Important Conclusion</a:t>
+            </a:r>
+          </a:p>
+        </p:txBody>
+      </p:sp>
+      <mc:AlternateContent xmlns:mc="http://schemas.openxmlformats.org/markup-compatibility/2006" xmlns:a14="http://schemas.microsoft.com/office/drawing/2010/main">
+        <mc:Choice Requires="a14">
+          <p:sp>
+            <p:nvSpPr>
+              <p:cNvPr id="3" name="TextBox 2">
+                <a:extLst>
+                  <a:ext uri="{FF2B5EF4-FFF2-40B4-BE49-F238E27FC236}">
+                    <a16:creationId xmlns:a16="http://schemas.microsoft.com/office/drawing/2014/main" id="{EFDFEB1D-F712-C8A8-6388-CF1182EF0331}"/>
+                  </a:ext>
+                </a:extLst>
+              </p:cNvPr>
+              <p:cNvSpPr txBox="1"/>
+              <p:nvPr/>
+            </p:nvSpPr>
+            <p:spPr>
+              <a:xfrm>
+                <a:off x="838200" y="1856792"/>
+                <a:ext cx="10115939" cy="2862322"/>
+              </a:xfrm>
+              <a:prstGeom prst="rect">
+                <a:avLst/>
+              </a:prstGeom>
+              <a:noFill/>
+            </p:spPr>
+            <p:txBody>
+              <a:bodyPr wrap="square" rtlCol="0">
+                <a:spAutoFit/>
+              </a:bodyPr>
+              <a:lstStyle/>
+              <a:p>
+                <a:r>
+                  <a:rPr lang="en-US" dirty="0"/>
+                  <a:t>The paper contains proofs regarding PageRank &amp; </a:t>
+                </a:r>
+                <a:r>
+                  <a:rPr lang="en-US" dirty="0" err="1"/>
+                  <a:t>SimRank</a:t>
+                </a:r>
+                <a:r>
+                  <a:rPr lang="en-US" dirty="0"/>
+                  <a:t> being </a:t>
+                </a:r>
+                <a14:m>
+                  <m:oMath xmlns:m="http://schemas.openxmlformats.org/officeDocument/2006/math">
+                    <m:r>
+                      <a:rPr lang="en-US" i="1" smtClean="0">
+                        <a:latin typeface="Cambria Math" panose="02040503050406030204" pitchFamily="18" charset="0"/>
+                        <a:ea typeface="Cambria Math" panose="02040503050406030204" pitchFamily="18" charset="0"/>
+                      </a:rPr>
+                      <m:t>𝛾</m:t>
+                    </m:r>
+                    <m:r>
+                      <a:rPr lang="en-US" b="0" i="1" smtClean="0">
+                        <a:latin typeface="Cambria Math" panose="02040503050406030204" pitchFamily="18" charset="0"/>
+                        <a:ea typeface="Cambria Math" panose="02040503050406030204" pitchFamily="18" charset="0"/>
+                      </a:rPr>
+                      <m:t>−</m:t>
+                    </m:r>
+                    <m:r>
+                      <a:rPr lang="en-US" b="0" i="1" smtClean="0">
+                        <a:latin typeface="Cambria Math" panose="02040503050406030204" pitchFamily="18" charset="0"/>
+                        <a:ea typeface="Cambria Math" panose="02040503050406030204" pitchFamily="18" charset="0"/>
+                      </a:rPr>
+                      <m:t>𝑑𝑒𝑐𝑎𝑦𝑖𝑛𝑔</m:t>
+                    </m:r>
+                    <m:r>
+                      <a:rPr lang="en-US" b="0" i="1" smtClean="0">
+                        <a:latin typeface="Cambria Math" panose="02040503050406030204" pitchFamily="18" charset="0"/>
+                        <a:ea typeface="Cambria Math" panose="02040503050406030204" pitchFamily="18" charset="0"/>
+                      </a:rPr>
+                      <m:t> </m:t>
+                    </m:r>
+                    <m:r>
+                      <a:rPr lang="en-US" b="0" i="1" smtClean="0">
+                        <a:latin typeface="Cambria Math" panose="02040503050406030204" pitchFamily="18" charset="0"/>
+                        <a:ea typeface="Cambria Math" panose="02040503050406030204" pitchFamily="18" charset="0"/>
+                      </a:rPr>
+                      <m:t>h𝑒𝑢𝑟𝑖𝑠𝑡𝑖𝑐𝑠</m:t>
+                    </m:r>
+                  </m:oMath>
+                </a14:m>
+                <a:r>
+                  <a:rPr lang="en-US" dirty="0"/>
+                  <a:t> </a:t>
+                </a:r>
+              </a:p>
+              <a:p>
+                <a:endParaRPr lang="en-US" dirty="0"/>
+              </a:p>
+              <a:p>
+                <a:r>
+                  <a:rPr lang="en-US" dirty="0"/>
+                  <a:t>Therefore, high hop neighborhoods are not required for approximating high order heuristics and the neural networks can utilize low h-hop neighborhoods to yield high performance. </a:t>
+                </a:r>
+              </a:p>
+              <a:p>
+                <a:endParaRPr lang="en-US" dirty="0"/>
+              </a:p>
+              <a:p>
+                <a:endParaRPr lang="en-US" dirty="0"/>
+              </a:p>
+              <a:p>
+                <a:endParaRPr lang="en-US" dirty="0"/>
+              </a:p>
+              <a:p>
+                <a:r>
+                  <a:rPr lang="en-US" dirty="0"/>
+                  <a:t>Intuition for the theory:</a:t>
+                </a:r>
+              </a:p>
+              <a:p>
+                <a:r>
+                  <a:rPr lang="en-US" dirty="0"/>
+                  <a:t>It is reasonable that nodes located far away in a network would have little impact on the target nodes compared to closer ones.</a:t>
+                </a:r>
+              </a:p>
+            </p:txBody>
+          </p:sp>
+        </mc:Choice>
+        <mc:Fallback xmlns="">
+          <p:sp>
+            <p:nvSpPr>
+              <p:cNvPr id="3" name="TextBox 2">
+                <a:extLst>
+                  <a:ext uri="{FF2B5EF4-FFF2-40B4-BE49-F238E27FC236}">
+                    <a16:creationId xmlns:a16="http://schemas.microsoft.com/office/drawing/2014/main" id="{EFDFEB1D-F712-C8A8-6388-CF1182EF0331}"/>
+                  </a:ext>
+                </a:extLst>
+              </p:cNvPr>
+              <p:cNvSpPr txBox="1">
+                <a:spLocks noRot="1" noChangeAspect="1" noMove="1" noResize="1" noEditPoints="1" noAdjustHandles="1" noChangeArrowheads="1" noChangeShapeType="1" noTextEdit="1"/>
+              </p:cNvSpPr>
+              <p:nvPr/>
+            </p:nvSpPr>
+            <p:spPr>
+              <a:xfrm>
+                <a:off x="838200" y="1856792"/>
+                <a:ext cx="10115939" cy="2862322"/>
+              </a:xfrm>
+              <a:prstGeom prst="rect">
+                <a:avLst/>
+              </a:prstGeom>
+              <a:blipFill>
+                <a:blip r:embed="rId2"/>
+                <a:stretch>
+                  <a:fillRect l="-627" t="-885" b="-2655"/>
+                </a:stretch>
+              </a:blipFill>
+            </p:spPr>
+            <p:txBody>
+              <a:bodyPr/>
+              <a:lstStyle/>
+              <a:p>
+                <a:r>
+                  <a:rPr lang="en-US">
+                    <a:noFill/>
+                  </a:rPr>
+                  <a:t> </a:t>
+                </a:r>
+              </a:p>
+            </p:txBody>
+          </p:sp>
+        </mc:Fallback>
+      </mc:AlternateContent>
+      <p:sp>
+        <p:nvSpPr>
+          <p:cNvPr id="4" name="Slide Number Placeholder 3">
+            <a:extLst>
+              <a:ext uri="{FF2B5EF4-FFF2-40B4-BE49-F238E27FC236}">
+                <a16:creationId xmlns:a16="http://schemas.microsoft.com/office/drawing/2014/main" id="{533322F0-3BC1-A2DB-D32C-352FCFF28FFD}"/>
+              </a:ext>
+            </a:extLst>
+          </p:cNvPr>
+          <p:cNvSpPr>
+            <a:spLocks noGrp="1"/>
+          </p:cNvSpPr>
+          <p:nvPr>
+            <p:ph type="sldNum" sz="quarter" idx="12"/>
+          </p:nvPr>
+        </p:nvSpPr>
+        <p:spPr/>
+        <p:txBody>
+          <a:bodyPr/>
+          <a:lstStyle/>
+          <a:p>
+            <a:fld id="{673E80D0-5A67-47DD-9B76-4E24E60624C0}" type="slidenum">
+              <a:rPr lang="en-US" smtClean="0"/>
+              <a:t>11</a:t>
+            </a:fld>
+            <a:endParaRPr lang="en-US"/>
+          </a:p>
+        </p:txBody>
+      </p:sp>
+    </p:spTree>
+    <p:extLst>
+      <p:ext uri="{BB962C8B-B14F-4D97-AF65-F5344CB8AC3E}">
+        <p14:creationId xmlns:p14="http://schemas.microsoft.com/office/powerpoint/2010/main" val="3150898851"/>
+      </p:ext>
+    </p:extLst>
+  </p:cSld>
+  <p:clrMapOvr>
+    <a:masterClrMapping/>
+  </p:clrMapOvr>
+</p:sld>
+</file>
+
+<file path=ppt/slides/slide12.xml><?xml version="1.0" encoding="utf-8"?>
+<p:sld xmlns:a="http://schemas.openxmlformats.org/drawingml/2006/main" xmlns:r="http://schemas.openxmlformats.org/officeDocument/2006/relationships" xmlns:p="http://schemas.openxmlformats.org/presentationml/2006/main">
+  <p:cSld>
+    <p:spTree>
+      <p:nvGrpSpPr>
+        <p:cNvPr id="1" name=""/>
+        <p:cNvGrpSpPr/>
+        <p:nvPr/>
+      </p:nvGrpSpPr>
+      <p:grpSpPr>
+        <a:xfrm>
+          <a:off x="0" y="0"/>
+          <a:ext cx="0" cy="0"/>
+          <a:chOff x="0" y="0"/>
+          <a:chExt cx="0" cy="0"/>
+        </a:xfrm>
+      </p:grpSpPr>
       <p:sp>
         <p:nvSpPr>
           <p:cNvPr id="2" name="Title 1">
@@ -3564,6 +7338,35 @@
           </a:p>
         </p:txBody>
       </p:sp>
+      <p:sp>
+        <p:nvSpPr>
+          <p:cNvPr id="4" name="Slide Number Placeholder 3">
+            <a:extLst>
+              <a:ext uri="{FF2B5EF4-FFF2-40B4-BE49-F238E27FC236}">
+                <a16:creationId xmlns:a16="http://schemas.microsoft.com/office/drawing/2014/main" id="{390018CC-4FEF-9840-3A25-71FFB94F8CD2}"/>
+              </a:ext>
+            </a:extLst>
+          </p:cNvPr>
+          <p:cNvSpPr>
+            <a:spLocks noGrp="1"/>
+          </p:cNvSpPr>
+          <p:nvPr>
+            <p:ph type="sldNum" sz="quarter" idx="12"/>
+          </p:nvPr>
+        </p:nvSpPr>
+        <p:spPr/>
+        <p:txBody>
+          <a:bodyPr/>
+          <a:lstStyle/>
+          <a:p>
+            <a:fld id="{673E80D0-5A67-47DD-9B76-4E24E60624C0}" type="slidenum">
+              <a:rPr lang="en-US" smtClean="0"/>
+              <a:t>12</a:t>
+            </a:fld>
+            <a:endParaRPr lang="en-US"/>
+          </a:p>
+        </p:txBody>
+      </p:sp>
     </p:spTree>
     <p:extLst>
       <p:ext uri="{BB962C8B-B14F-4D97-AF65-F5344CB8AC3E}">
@@ -3577,7 +7380,7 @@
 </p:sld>
 </file>
 
-<file path=ppt/slides/slide11.xml><?xml version="1.0" encoding="utf-8"?>
+<file path=ppt/slides/slide13.xml><?xml version="1.0" encoding="utf-8"?>
 <p:sld xmlns:a="http://schemas.openxmlformats.org/drawingml/2006/main" xmlns:r="http://schemas.openxmlformats.org/officeDocument/2006/relationships" xmlns:p="http://schemas.openxmlformats.org/presentationml/2006/main">
   <p:cSld>
     <p:bg>
@@ -3733,6 +7536,35 @@
           </a:prstGeom>
         </p:spPr>
       </p:pic>
+      <p:sp>
+        <p:nvSpPr>
+          <p:cNvPr id="3" name="Slide Number Placeholder 2">
+            <a:extLst>
+              <a:ext uri="{FF2B5EF4-FFF2-40B4-BE49-F238E27FC236}">
+                <a16:creationId xmlns:a16="http://schemas.microsoft.com/office/drawing/2014/main" id="{1092438D-4ED3-3B36-BF96-DDE54CC4ACDC}"/>
+              </a:ext>
+            </a:extLst>
+          </p:cNvPr>
+          <p:cNvSpPr>
+            <a:spLocks noGrp="1"/>
+          </p:cNvSpPr>
+          <p:nvPr>
+            <p:ph type="sldNum" sz="quarter" idx="12"/>
+          </p:nvPr>
+        </p:nvSpPr>
+        <p:spPr/>
+        <p:txBody>
+          <a:bodyPr/>
+          <a:lstStyle/>
+          <a:p>
+            <a:fld id="{673E80D0-5A67-47DD-9B76-4E24E60624C0}" type="slidenum">
+              <a:rPr lang="en-US" smtClean="0"/>
+              <a:t>13</a:t>
+            </a:fld>
+            <a:endParaRPr lang="en-US"/>
+          </a:p>
+        </p:txBody>
+      </p:sp>
     </p:spTree>
     <p:extLst>
       <p:ext uri="{BB962C8B-B14F-4D97-AF65-F5344CB8AC3E}">
@@ -3746,7 +7578,7 @@
 </p:sld>
 </file>
 
-<file path=ppt/slides/slide12.xml><?xml version="1.0" encoding="utf-8"?>
+<file path=ppt/slides/slide14.xml><?xml version="1.0" encoding="utf-8"?>
 <p:sld xmlns:a="http://schemas.openxmlformats.org/drawingml/2006/main" xmlns:r="http://schemas.openxmlformats.org/officeDocument/2006/relationships" xmlns:p="http://schemas.openxmlformats.org/presentationml/2006/main">
   <p:cSld>
     <p:spTree>
@@ -5700,7 +9532,7 @@
           <a:p>
             <a:r>
               <a:rPr lang="en-US" dirty="0"/>
-              <a:t>Both the link prediction nodes and union the sets.</a:t>
+              <a:t>both the link prediction nodes and union the sets.</a:t>
             </a:r>
           </a:p>
           <a:p>
@@ -5711,6 +9543,35 @@
               <a:rPr lang="en-US" dirty="0"/>
               <a:t>Can be extracted using BFT.</a:t>
             </a:r>
+          </a:p>
+        </p:txBody>
+      </p:sp>
+      <p:sp>
+        <p:nvSpPr>
+          <p:cNvPr id="23" name="Slide Number Placeholder 22">
+            <a:extLst>
+              <a:ext uri="{FF2B5EF4-FFF2-40B4-BE49-F238E27FC236}">
+                <a16:creationId xmlns:a16="http://schemas.microsoft.com/office/drawing/2014/main" id="{CCF78C44-DF1C-60B1-D7E3-7EA49CCA4134}"/>
+              </a:ext>
+            </a:extLst>
+          </p:cNvPr>
+          <p:cNvSpPr>
+            <a:spLocks noGrp="1"/>
+          </p:cNvSpPr>
+          <p:nvPr>
+            <p:ph type="sldNum" sz="quarter" idx="12"/>
+          </p:nvPr>
+        </p:nvSpPr>
+        <p:spPr/>
+        <p:txBody>
+          <a:bodyPr/>
+          <a:lstStyle/>
+          <a:p>
+            <a:fld id="{673E80D0-5A67-47DD-9B76-4E24E60624C0}" type="slidenum">
+              <a:rPr lang="en-US" smtClean="0"/>
+              <a:t>14</a:t>
+            </a:fld>
+            <a:endParaRPr lang="en-US"/>
           </a:p>
         </p:txBody>
       </p:sp>
@@ -5727,7 +9588,7 @@
 </p:sld>
 </file>
 
-<file path=ppt/slides/slide13.xml><?xml version="1.0" encoding="utf-8"?>
+<file path=ppt/slides/slide15.xml><?xml version="1.0" encoding="utf-8"?>
 <p:sld xmlns:a="http://schemas.openxmlformats.org/drawingml/2006/main" xmlns:r="http://schemas.openxmlformats.org/officeDocument/2006/relationships" xmlns:p="http://schemas.openxmlformats.org/presentationml/2006/main">
   <p:cSld>
     <p:spTree>
@@ -5829,7 +9690,7 @@
             </a:pPr>
             <a:r>
               <a:rPr lang="en-US" dirty="0"/>
-              <a:t>Node Embeddings</a:t>
+              <a:t>Node Embeddings(Node2Vec)</a:t>
             </a:r>
           </a:p>
           <a:p>
@@ -6413,6 +10274,35 @@
           </a:p>
         </p:txBody>
       </p:sp>
+      <p:sp>
+        <p:nvSpPr>
+          <p:cNvPr id="8" name="Slide Number Placeholder 7">
+            <a:extLst>
+              <a:ext uri="{FF2B5EF4-FFF2-40B4-BE49-F238E27FC236}">
+                <a16:creationId xmlns:a16="http://schemas.microsoft.com/office/drawing/2014/main" id="{C3451576-6947-3B8D-3C2A-07C6193FE50E}"/>
+              </a:ext>
+            </a:extLst>
+          </p:cNvPr>
+          <p:cNvSpPr>
+            <a:spLocks noGrp="1"/>
+          </p:cNvSpPr>
+          <p:nvPr>
+            <p:ph type="sldNum" sz="quarter" idx="12"/>
+          </p:nvPr>
+        </p:nvSpPr>
+        <p:spPr/>
+        <p:txBody>
+          <a:bodyPr/>
+          <a:lstStyle/>
+          <a:p>
+            <a:fld id="{673E80D0-5A67-47DD-9B76-4E24E60624C0}" type="slidenum">
+              <a:rPr lang="en-US" smtClean="0"/>
+              <a:t>15</a:t>
+            </a:fld>
+            <a:endParaRPr lang="en-US"/>
+          </a:p>
+        </p:txBody>
+      </p:sp>
     </p:spTree>
     <p:extLst>
       <p:ext uri="{BB962C8B-B14F-4D97-AF65-F5344CB8AC3E}">
@@ -6426,7 +10316,7 @@
 </p:sld>
 </file>
 
-<file path=ppt/slides/slide14.xml><?xml version="1.0" encoding="utf-8"?>
+<file path=ppt/slides/slide16.xml><?xml version="1.0" encoding="utf-8"?>
 <p:sld xmlns:a="http://schemas.openxmlformats.org/drawingml/2006/main" xmlns:r="http://schemas.openxmlformats.org/officeDocument/2006/relationships" xmlns:p="http://schemas.openxmlformats.org/presentationml/2006/main">
   <p:cSld>
     <p:spTree>
@@ -8525,6 +12415,35 @@
           </a:fontRef>
         </p:style>
       </p:cxnSp>
+      <p:sp>
+        <p:nvSpPr>
+          <p:cNvPr id="6" name="Slide Number Placeholder 5">
+            <a:extLst>
+              <a:ext uri="{FF2B5EF4-FFF2-40B4-BE49-F238E27FC236}">
+                <a16:creationId xmlns:a16="http://schemas.microsoft.com/office/drawing/2014/main" id="{084A8259-8338-5F9C-95D6-77C0B4994020}"/>
+              </a:ext>
+            </a:extLst>
+          </p:cNvPr>
+          <p:cNvSpPr>
+            <a:spLocks noGrp="1"/>
+          </p:cNvSpPr>
+          <p:nvPr>
+            <p:ph type="sldNum" sz="quarter" idx="12"/>
+          </p:nvPr>
+        </p:nvSpPr>
+        <p:spPr/>
+        <p:txBody>
+          <a:bodyPr/>
+          <a:lstStyle/>
+          <a:p>
+            <a:fld id="{673E80D0-5A67-47DD-9B76-4E24E60624C0}" type="slidenum">
+              <a:rPr lang="en-US" smtClean="0"/>
+              <a:t>16</a:t>
+            </a:fld>
+            <a:endParaRPr lang="en-US"/>
+          </a:p>
+        </p:txBody>
+      </p:sp>
     </p:spTree>
     <p:extLst>
       <p:ext uri="{BB962C8B-B14F-4D97-AF65-F5344CB8AC3E}">
@@ -8538,7 +12457,7 @@
 </p:sld>
 </file>
 
-<file path=ppt/slides/slide15.xml><?xml version="1.0" encoding="utf-8"?>
+<file path=ppt/slides/slide17.xml><?xml version="1.0" encoding="utf-8"?>
 <p:sld xmlns:a="http://schemas.openxmlformats.org/drawingml/2006/main" xmlns:r="http://schemas.openxmlformats.org/officeDocument/2006/relationships" xmlns:p="http://schemas.openxmlformats.org/presentationml/2006/main">
   <p:cSld>
     <p:spTree>
@@ -8613,7 +12532,7 @@
           <a:p>
             <a:r>
               <a:rPr lang="en-US" dirty="0"/>
-              <a:t>SEAL uses a standard GNN and doesn’t make any innovations in this domain.</a:t>
+              <a:t>SEAL uses a standard DGCNN GNN and doesn’t make any innovations in this domain, leaving it to future work.</a:t>
             </a:r>
           </a:p>
           <a:p>
@@ -10243,10 +14162,1127 @@
           </a:p>
         </p:txBody>
       </p:sp>
+      <p:sp>
+        <p:nvSpPr>
+          <p:cNvPr id="5" name="Slide Number Placeholder 4">
+            <a:extLst>
+              <a:ext uri="{FF2B5EF4-FFF2-40B4-BE49-F238E27FC236}">
+                <a16:creationId xmlns:a16="http://schemas.microsoft.com/office/drawing/2014/main" id="{89E305BB-5F35-BA62-DA22-F9E3D4E66E84}"/>
+              </a:ext>
+            </a:extLst>
+          </p:cNvPr>
+          <p:cNvSpPr>
+            <a:spLocks noGrp="1"/>
+          </p:cNvSpPr>
+          <p:nvPr>
+            <p:ph type="sldNum" sz="quarter" idx="12"/>
+          </p:nvPr>
+        </p:nvSpPr>
+        <p:spPr/>
+        <p:txBody>
+          <a:bodyPr/>
+          <a:lstStyle/>
+          <a:p>
+            <a:fld id="{673E80D0-5A67-47DD-9B76-4E24E60624C0}" type="slidenum">
+              <a:rPr lang="en-US" smtClean="0"/>
+              <a:t>17</a:t>
+            </a:fld>
+            <a:endParaRPr lang="en-US"/>
+          </a:p>
+        </p:txBody>
+      </p:sp>
     </p:spTree>
     <p:extLst>
       <p:ext uri="{BB962C8B-B14F-4D97-AF65-F5344CB8AC3E}">
         <p14:creationId xmlns:p14="http://schemas.microsoft.com/office/powerpoint/2010/main" val="2809084355"/>
+      </p:ext>
+    </p:extLst>
+  </p:cSld>
+  <p:clrMapOvr>
+    <a:masterClrMapping/>
+  </p:clrMapOvr>
+</p:sld>
+</file>
+
+<file path=ppt/slides/slide18.xml><?xml version="1.0" encoding="utf-8"?>
+<p:sld xmlns:a="http://schemas.openxmlformats.org/drawingml/2006/main" xmlns:r="http://schemas.openxmlformats.org/officeDocument/2006/relationships" xmlns:p="http://schemas.openxmlformats.org/presentationml/2006/main">
+  <p:cSld>
+    <p:spTree>
+      <p:nvGrpSpPr>
+        <p:cNvPr id="1" name=""/>
+        <p:cNvGrpSpPr/>
+        <p:nvPr/>
+      </p:nvGrpSpPr>
+      <p:grpSpPr>
+        <a:xfrm>
+          <a:off x="0" y="0"/>
+          <a:ext cx="0" cy="0"/>
+          <a:chOff x="0" y="0"/>
+          <a:chExt cx="0" cy="0"/>
+        </a:xfrm>
+      </p:grpSpPr>
+      <p:sp>
+        <p:nvSpPr>
+          <p:cNvPr id="2" name="Title 1">
+            <a:extLst>
+              <a:ext uri="{FF2B5EF4-FFF2-40B4-BE49-F238E27FC236}">
+                <a16:creationId xmlns:a16="http://schemas.microsoft.com/office/drawing/2014/main" id="{5B13BDF2-7C5C-D5CA-B2E2-92B9A1596C9F}"/>
+              </a:ext>
+            </a:extLst>
+          </p:cNvPr>
+          <p:cNvSpPr>
+            <a:spLocks noGrp="1"/>
+          </p:cNvSpPr>
+          <p:nvPr>
+            <p:ph type="title"/>
+          </p:nvPr>
+        </p:nvSpPr>
+        <p:spPr/>
+        <p:txBody>
+          <a:bodyPr/>
+          <a:lstStyle/>
+          <a:p>
+            <a:r>
+              <a:rPr lang="en-US" dirty="0"/>
+              <a:t>DGCNN Architecture</a:t>
+            </a:r>
+          </a:p>
+        </p:txBody>
+      </p:sp>
+      <p:sp>
+        <p:nvSpPr>
+          <p:cNvPr id="3" name="Oval 2">
+            <a:extLst>
+              <a:ext uri="{FF2B5EF4-FFF2-40B4-BE49-F238E27FC236}">
+                <a16:creationId xmlns:a16="http://schemas.microsoft.com/office/drawing/2014/main" id="{C8CFB7F8-B2AB-FDD3-8BAD-3E3C6DA11629}"/>
+              </a:ext>
+            </a:extLst>
+          </p:cNvPr>
+          <p:cNvSpPr/>
+          <p:nvPr/>
+        </p:nvSpPr>
+        <p:spPr>
+          <a:xfrm>
+            <a:off x="1103586" y="2007476"/>
+            <a:ext cx="872359" cy="851338"/>
+          </a:xfrm>
+          <a:prstGeom prst="ellipse">
+            <a:avLst/>
+          </a:prstGeom>
+        </p:spPr>
+        <p:style>
+          <a:lnRef idx="2">
+            <a:schemeClr val="accent1">
+              <a:shade val="15000"/>
+            </a:schemeClr>
+          </a:lnRef>
+          <a:fillRef idx="1">
+            <a:schemeClr val="accent1"/>
+          </a:fillRef>
+          <a:effectRef idx="0">
+            <a:schemeClr val="accent1"/>
+          </a:effectRef>
+          <a:fontRef idx="minor">
+            <a:schemeClr val="lt1"/>
+          </a:fontRef>
+        </p:style>
+        <p:txBody>
+          <a:bodyPr rtlCol="0" anchor="ctr"/>
+          <a:lstStyle/>
+          <a:p>
+            <a:pPr algn="ctr"/>
+            <a:r>
+              <a:rPr lang="en-US" dirty="0"/>
+              <a:t>GCN</a:t>
+            </a:r>
+          </a:p>
+        </p:txBody>
+      </p:sp>
+      <p:sp>
+        <p:nvSpPr>
+          <p:cNvPr id="4" name="Oval 3">
+            <a:extLst>
+              <a:ext uri="{FF2B5EF4-FFF2-40B4-BE49-F238E27FC236}">
+                <a16:creationId xmlns:a16="http://schemas.microsoft.com/office/drawing/2014/main" id="{91735DE7-C675-B08F-F294-91B660D32D37}"/>
+              </a:ext>
+            </a:extLst>
+          </p:cNvPr>
+          <p:cNvSpPr/>
+          <p:nvPr/>
+        </p:nvSpPr>
+        <p:spPr>
+          <a:xfrm>
+            <a:off x="1557790" y="2853544"/>
+            <a:ext cx="872359" cy="851338"/>
+          </a:xfrm>
+          <a:prstGeom prst="ellipse">
+            <a:avLst/>
+          </a:prstGeom>
+        </p:spPr>
+        <p:style>
+          <a:lnRef idx="2">
+            <a:schemeClr val="accent1">
+              <a:shade val="15000"/>
+            </a:schemeClr>
+          </a:lnRef>
+          <a:fillRef idx="1">
+            <a:schemeClr val="accent1"/>
+          </a:fillRef>
+          <a:effectRef idx="0">
+            <a:schemeClr val="accent1"/>
+          </a:effectRef>
+          <a:fontRef idx="minor">
+            <a:schemeClr val="lt1"/>
+          </a:fontRef>
+        </p:style>
+        <p:txBody>
+          <a:bodyPr rtlCol="0" anchor="ctr"/>
+          <a:lstStyle/>
+          <a:p>
+            <a:pPr algn="ctr"/>
+            <a:r>
+              <a:rPr lang="en-US" dirty="0"/>
+              <a:t>GCN</a:t>
+            </a:r>
+          </a:p>
+        </p:txBody>
+      </p:sp>
+      <p:sp>
+        <p:nvSpPr>
+          <p:cNvPr id="5" name="Oval 4">
+            <a:extLst>
+              <a:ext uri="{FF2B5EF4-FFF2-40B4-BE49-F238E27FC236}">
+                <a16:creationId xmlns:a16="http://schemas.microsoft.com/office/drawing/2014/main" id="{A4502685-9A94-C4F9-C606-33E587C60578}"/>
+              </a:ext>
+            </a:extLst>
+          </p:cNvPr>
+          <p:cNvSpPr/>
+          <p:nvPr/>
+        </p:nvSpPr>
+        <p:spPr>
+          <a:xfrm>
+            <a:off x="1975944" y="3710152"/>
+            <a:ext cx="872359" cy="851338"/>
+          </a:xfrm>
+          <a:prstGeom prst="ellipse">
+            <a:avLst/>
+          </a:prstGeom>
+        </p:spPr>
+        <p:style>
+          <a:lnRef idx="2">
+            <a:schemeClr val="accent1">
+              <a:shade val="15000"/>
+            </a:schemeClr>
+          </a:lnRef>
+          <a:fillRef idx="1">
+            <a:schemeClr val="accent1"/>
+          </a:fillRef>
+          <a:effectRef idx="0">
+            <a:schemeClr val="accent1"/>
+          </a:effectRef>
+          <a:fontRef idx="minor">
+            <a:schemeClr val="lt1"/>
+          </a:fontRef>
+        </p:style>
+        <p:txBody>
+          <a:bodyPr rtlCol="0" anchor="ctr"/>
+          <a:lstStyle/>
+          <a:p>
+            <a:pPr algn="ctr"/>
+            <a:r>
+              <a:rPr lang="en-US" dirty="0"/>
+              <a:t>GCN</a:t>
+            </a:r>
+          </a:p>
+        </p:txBody>
+      </p:sp>
+      <p:sp>
+        <p:nvSpPr>
+          <p:cNvPr id="6" name="Oval 5">
+            <a:extLst>
+              <a:ext uri="{FF2B5EF4-FFF2-40B4-BE49-F238E27FC236}">
+                <a16:creationId xmlns:a16="http://schemas.microsoft.com/office/drawing/2014/main" id="{927B31C4-BBD1-5439-8A87-6C0F0A32A746}"/>
+              </a:ext>
+            </a:extLst>
+          </p:cNvPr>
+          <p:cNvSpPr/>
+          <p:nvPr/>
+        </p:nvSpPr>
+        <p:spPr>
+          <a:xfrm>
+            <a:off x="2412123" y="4561490"/>
+            <a:ext cx="872359" cy="851338"/>
+          </a:xfrm>
+          <a:prstGeom prst="ellipse">
+            <a:avLst/>
+          </a:prstGeom>
+        </p:spPr>
+        <p:style>
+          <a:lnRef idx="2">
+            <a:schemeClr val="accent1">
+              <a:shade val="15000"/>
+            </a:schemeClr>
+          </a:lnRef>
+          <a:fillRef idx="1">
+            <a:schemeClr val="accent1"/>
+          </a:fillRef>
+          <a:effectRef idx="0">
+            <a:schemeClr val="accent1"/>
+          </a:effectRef>
+          <a:fontRef idx="minor">
+            <a:schemeClr val="lt1"/>
+          </a:fontRef>
+        </p:style>
+        <p:txBody>
+          <a:bodyPr rtlCol="0" anchor="ctr"/>
+          <a:lstStyle/>
+          <a:p>
+            <a:pPr algn="ctr"/>
+            <a:r>
+              <a:rPr lang="en-US" dirty="0"/>
+              <a:t>GCN</a:t>
+            </a:r>
+          </a:p>
+        </p:txBody>
+      </p:sp>
+      <p:sp>
+        <p:nvSpPr>
+          <p:cNvPr id="7" name="Rectangle 6">
+            <a:extLst>
+              <a:ext uri="{FF2B5EF4-FFF2-40B4-BE49-F238E27FC236}">
+                <a16:creationId xmlns:a16="http://schemas.microsoft.com/office/drawing/2014/main" id="{DFF6FB41-9C28-BB8C-41AF-459132D56A9A}"/>
+              </a:ext>
+            </a:extLst>
+          </p:cNvPr>
+          <p:cNvSpPr/>
+          <p:nvPr/>
+        </p:nvSpPr>
+        <p:spPr>
+          <a:xfrm>
+            <a:off x="4214648" y="1870841"/>
+            <a:ext cx="441435" cy="3289738"/>
+          </a:xfrm>
+          <a:prstGeom prst="rect">
+            <a:avLst/>
+          </a:prstGeom>
+        </p:spPr>
+        <p:style>
+          <a:lnRef idx="2">
+            <a:schemeClr val="accent1">
+              <a:shade val="15000"/>
+            </a:schemeClr>
+          </a:lnRef>
+          <a:fillRef idx="1">
+            <a:schemeClr val="accent1"/>
+          </a:fillRef>
+          <a:effectRef idx="0">
+            <a:schemeClr val="accent1"/>
+          </a:effectRef>
+          <a:fontRef idx="minor">
+            <a:schemeClr val="lt1"/>
+          </a:fontRef>
+        </p:style>
+        <p:txBody>
+          <a:bodyPr rtlCol="0" anchor="ctr"/>
+          <a:lstStyle/>
+          <a:p>
+            <a:pPr algn="ctr"/>
+            <a:endParaRPr lang="en-US"/>
+          </a:p>
+        </p:txBody>
+      </p:sp>
+      <p:sp>
+        <p:nvSpPr>
+          <p:cNvPr id="8" name="TextBox 7">
+            <a:extLst>
+              <a:ext uri="{FF2B5EF4-FFF2-40B4-BE49-F238E27FC236}">
+                <a16:creationId xmlns:a16="http://schemas.microsoft.com/office/drawing/2014/main" id="{57A25127-27B6-0316-CE7F-5B64DA07EC01}"/>
+              </a:ext>
+            </a:extLst>
+          </p:cNvPr>
+          <p:cNvSpPr txBox="1"/>
+          <p:nvPr/>
+        </p:nvSpPr>
+        <p:spPr>
+          <a:xfrm rot="16200000">
+            <a:off x="3660474" y="3331043"/>
+            <a:ext cx="1549783" cy="369332"/>
+          </a:xfrm>
+          <a:prstGeom prst="rect">
+            <a:avLst/>
+          </a:prstGeom>
+          <a:noFill/>
+        </p:spPr>
+        <p:txBody>
+          <a:bodyPr wrap="none" rtlCol="0">
+            <a:spAutoFit/>
+          </a:bodyPr>
+          <a:lstStyle/>
+          <a:p>
+            <a:r>
+              <a:rPr lang="en-US" dirty="0"/>
+              <a:t>Concatenation</a:t>
+            </a:r>
+          </a:p>
+        </p:txBody>
+      </p:sp>
+      <p:cxnSp>
+        <p:nvCxnSpPr>
+          <p:cNvPr id="10" name="Straight Arrow Connector 9">
+            <a:extLst>
+              <a:ext uri="{FF2B5EF4-FFF2-40B4-BE49-F238E27FC236}">
+                <a16:creationId xmlns:a16="http://schemas.microsoft.com/office/drawing/2014/main" id="{C20ED5E9-91AB-3E4E-F64C-E021B447A142}"/>
+              </a:ext>
+            </a:extLst>
+          </p:cNvPr>
+          <p:cNvCxnSpPr>
+            <a:stCxn id="3" idx="4"/>
+            <a:endCxn id="4" idx="1"/>
+          </p:cNvCxnSpPr>
+          <p:nvPr/>
+        </p:nvCxnSpPr>
+        <p:spPr>
+          <a:xfrm>
+            <a:off x="1539766" y="2858814"/>
+            <a:ext cx="145778" cy="119406"/>
+          </a:xfrm>
+          <a:prstGeom prst="straightConnector1">
+            <a:avLst/>
+          </a:prstGeom>
+          <a:ln>
+            <a:tailEnd type="triangle"/>
+          </a:ln>
+        </p:spPr>
+        <p:style>
+          <a:lnRef idx="3">
+            <a:schemeClr val="accent6"/>
+          </a:lnRef>
+          <a:fillRef idx="0">
+            <a:schemeClr val="accent6"/>
+          </a:fillRef>
+          <a:effectRef idx="2">
+            <a:schemeClr val="accent6"/>
+          </a:effectRef>
+          <a:fontRef idx="minor">
+            <a:schemeClr val="tx1"/>
+          </a:fontRef>
+        </p:style>
+      </p:cxnSp>
+      <p:cxnSp>
+        <p:nvCxnSpPr>
+          <p:cNvPr id="11" name="Straight Arrow Connector 10">
+            <a:extLst>
+              <a:ext uri="{FF2B5EF4-FFF2-40B4-BE49-F238E27FC236}">
+                <a16:creationId xmlns:a16="http://schemas.microsoft.com/office/drawing/2014/main" id="{7F6E8C3B-9F0B-AA5B-3277-52139B0C6D8E}"/>
+              </a:ext>
+            </a:extLst>
+          </p:cNvPr>
+          <p:cNvCxnSpPr>
+            <a:cxnSpLocks/>
+            <a:stCxn id="4" idx="5"/>
+            <a:endCxn id="5" idx="0"/>
+          </p:cNvCxnSpPr>
+          <p:nvPr/>
+        </p:nvCxnSpPr>
+        <p:spPr>
+          <a:xfrm>
+            <a:off x="2302395" y="3580206"/>
+            <a:ext cx="109729" cy="129946"/>
+          </a:xfrm>
+          <a:prstGeom prst="straightConnector1">
+            <a:avLst/>
+          </a:prstGeom>
+          <a:ln>
+            <a:tailEnd type="triangle"/>
+          </a:ln>
+        </p:spPr>
+        <p:style>
+          <a:lnRef idx="3">
+            <a:schemeClr val="accent6"/>
+          </a:lnRef>
+          <a:fillRef idx="0">
+            <a:schemeClr val="accent6"/>
+          </a:fillRef>
+          <a:effectRef idx="2">
+            <a:schemeClr val="accent6"/>
+          </a:effectRef>
+          <a:fontRef idx="minor">
+            <a:schemeClr val="tx1"/>
+          </a:fontRef>
+        </p:style>
+      </p:cxnSp>
+      <p:cxnSp>
+        <p:nvCxnSpPr>
+          <p:cNvPr id="18" name="Straight Arrow Connector 17">
+            <a:extLst>
+              <a:ext uri="{FF2B5EF4-FFF2-40B4-BE49-F238E27FC236}">
+                <a16:creationId xmlns:a16="http://schemas.microsoft.com/office/drawing/2014/main" id="{C0148EB2-7CD7-148C-8A81-50FC29FB67C3}"/>
+              </a:ext>
+            </a:extLst>
+          </p:cNvPr>
+          <p:cNvCxnSpPr>
+            <a:stCxn id="5" idx="4"/>
+            <a:endCxn id="6" idx="1"/>
+          </p:cNvCxnSpPr>
+          <p:nvPr/>
+        </p:nvCxnSpPr>
+        <p:spPr>
+          <a:xfrm>
+            <a:off x="2412124" y="4561490"/>
+            <a:ext cx="127753" cy="124676"/>
+          </a:xfrm>
+          <a:prstGeom prst="straightConnector1">
+            <a:avLst/>
+          </a:prstGeom>
+          <a:ln>
+            <a:tailEnd type="triangle"/>
+          </a:ln>
+        </p:spPr>
+        <p:style>
+          <a:lnRef idx="3">
+            <a:schemeClr val="accent6"/>
+          </a:lnRef>
+          <a:fillRef idx="0">
+            <a:schemeClr val="accent6"/>
+          </a:fillRef>
+          <a:effectRef idx="2">
+            <a:schemeClr val="accent6"/>
+          </a:effectRef>
+          <a:fontRef idx="minor">
+            <a:schemeClr val="tx1"/>
+          </a:fontRef>
+        </p:style>
+      </p:cxnSp>
+      <p:cxnSp>
+        <p:nvCxnSpPr>
+          <p:cNvPr id="20" name="Straight Arrow Connector 19">
+            <a:extLst>
+              <a:ext uri="{FF2B5EF4-FFF2-40B4-BE49-F238E27FC236}">
+                <a16:creationId xmlns:a16="http://schemas.microsoft.com/office/drawing/2014/main" id="{7D59ADF0-81A9-5FFE-04AB-B05EC99B2270}"/>
+              </a:ext>
+            </a:extLst>
+          </p:cNvPr>
+          <p:cNvCxnSpPr>
+            <a:stCxn id="3" idx="6"/>
+          </p:cNvCxnSpPr>
+          <p:nvPr/>
+        </p:nvCxnSpPr>
+        <p:spPr>
+          <a:xfrm>
+            <a:off x="1975945" y="2433145"/>
+            <a:ext cx="2274754" cy="0"/>
+          </a:xfrm>
+          <a:prstGeom prst="straightConnector1">
+            <a:avLst/>
+          </a:prstGeom>
+          <a:ln>
+            <a:tailEnd type="triangle"/>
+          </a:ln>
+        </p:spPr>
+        <p:style>
+          <a:lnRef idx="3">
+            <a:schemeClr val="accent6"/>
+          </a:lnRef>
+          <a:fillRef idx="0">
+            <a:schemeClr val="accent6"/>
+          </a:fillRef>
+          <a:effectRef idx="2">
+            <a:schemeClr val="accent6"/>
+          </a:effectRef>
+          <a:fontRef idx="minor">
+            <a:schemeClr val="tx1"/>
+          </a:fontRef>
+        </p:style>
+      </p:cxnSp>
+      <p:cxnSp>
+        <p:nvCxnSpPr>
+          <p:cNvPr id="22" name="Straight Arrow Connector 21">
+            <a:extLst>
+              <a:ext uri="{FF2B5EF4-FFF2-40B4-BE49-F238E27FC236}">
+                <a16:creationId xmlns:a16="http://schemas.microsoft.com/office/drawing/2014/main" id="{51766A9E-9813-616A-803C-45169BE9084D}"/>
+              </a:ext>
+            </a:extLst>
+          </p:cNvPr>
+          <p:cNvCxnSpPr>
+            <a:stCxn id="4" idx="6"/>
+          </p:cNvCxnSpPr>
+          <p:nvPr/>
+        </p:nvCxnSpPr>
+        <p:spPr>
+          <a:xfrm>
+            <a:off x="2430149" y="3279213"/>
+            <a:ext cx="1820550" cy="0"/>
+          </a:xfrm>
+          <a:prstGeom prst="straightConnector1">
+            <a:avLst/>
+          </a:prstGeom>
+          <a:ln>
+            <a:tailEnd type="triangle"/>
+          </a:ln>
+        </p:spPr>
+        <p:style>
+          <a:lnRef idx="3">
+            <a:schemeClr val="accent6"/>
+          </a:lnRef>
+          <a:fillRef idx="0">
+            <a:schemeClr val="accent6"/>
+          </a:fillRef>
+          <a:effectRef idx="2">
+            <a:schemeClr val="accent6"/>
+          </a:effectRef>
+          <a:fontRef idx="minor">
+            <a:schemeClr val="tx1"/>
+          </a:fontRef>
+        </p:style>
+      </p:cxnSp>
+      <p:cxnSp>
+        <p:nvCxnSpPr>
+          <p:cNvPr id="24" name="Straight Arrow Connector 23">
+            <a:extLst>
+              <a:ext uri="{FF2B5EF4-FFF2-40B4-BE49-F238E27FC236}">
+                <a16:creationId xmlns:a16="http://schemas.microsoft.com/office/drawing/2014/main" id="{B4542BF1-0FE6-5137-787F-54F6B4724083}"/>
+              </a:ext>
+            </a:extLst>
+          </p:cNvPr>
+          <p:cNvCxnSpPr>
+            <a:stCxn id="5" idx="6"/>
+          </p:cNvCxnSpPr>
+          <p:nvPr/>
+        </p:nvCxnSpPr>
+        <p:spPr>
+          <a:xfrm>
+            <a:off x="2848303" y="4135821"/>
+            <a:ext cx="1366345" cy="0"/>
+          </a:xfrm>
+          <a:prstGeom prst="straightConnector1">
+            <a:avLst/>
+          </a:prstGeom>
+          <a:ln>
+            <a:tailEnd type="triangle"/>
+          </a:ln>
+        </p:spPr>
+        <p:style>
+          <a:lnRef idx="3">
+            <a:schemeClr val="accent6"/>
+          </a:lnRef>
+          <a:fillRef idx="0">
+            <a:schemeClr val="accent6"/>
+          </a:fillRef>
+          <a:effectRef idx="2">
+            <a:schemeClr val="accent6"/>
+          </a:effectRef>
+          <a:fontRef idx="minor">
+            <a:schemeClr val="tx1"/>
+          </a:fontRef>
+        </p:style>
+      </p:cxnSp>
+      <p:cxnSp>
+        <p:nvCxnSpPr>
+          <p:cNvPr id="26" name="Straight Arrow Connector 25">
+            <a:extLst>
+              <a:ext uri="{FF2B5EF4-FFF2-40B4-BE49-F238E27FC236}">
+                <a16:creationId xmlns:a16="http://schemas.microsoft.com/office/drawing/2014/main" id="{B89E1BBD-870C-201A-8EB3-4070A0C8DB31}"/>
+              </a:ext>
+            </a:extLst>
+          </p:cNvPr>
+          <p:cNvCxnSpPr>
+            <a:stCxn id="6" idx="6"/>
+          </p:cNvCxnSpPr>
+          <p:nvPr/>
+        </p:nvCxnSpPr>
+        <p:spPr>
+          <a:xfrm>
+            <a:off x="3284482" y="4987159"/>
+            <a:ext cx="930166" cy="0"/>
+          </a:xfrm>
+          <a:prstGeom prst="straightConnector1">
+            <a:avLst/>
+          </a:prstGeom>
+          <a:ln>
+            <a:tailEnd type="triangle"/>
+          </a:ln>
+        </p:spPr>
+        <p:style>
+          <a:lnRef idx="3">
+            <a:schemeClr val="accent6"/>
+          </a:lnRef>
+          <a:fillRef idx="0">
+            <a:schemeClr val="accent6"/>
+          </a:fillRef>
+          <a:effectRef idx="2">
+            <a:schemeClr val="accent6"/>
+          </a:effectRef>
+          <a:fontRef idx="minor">
+            <a:schemeClr val="tx1"/>
+          </a:fontRef>
+        </p:style>
+      </p:cxnSp>
+      <p:sp>
+        <p:nvSpPr>
+          <p:cNvPr id="27" name="Rectangle 26">
+            <a:extLst>
+              <a:ext uri="{FF2B5EF4-FFF2-40B4-BE49-F238E27FC236}">
+                <a16:creationId xmlns:a16="http://schemas.microsoft.com/office/drawing/2014/main" id="{685C435B-1C0B-79BA-70EA-D8F42180BF92}"/>
+              </a:ext>
+            </a:extLst>
+          </p:cNvPr>
+          <p:cNvSpPr/>
+          <p:nvPr/>
+        </p:nvSpPr>
+        <p:spPr>
+          <a:xfrm>
+            <a:off x="5570483" y="1733520"/>
+            <a:ext cx="451945" cy="3564375"/>
+          </a:xfrm>
+          <a:prstGeom prst="rect">
+            <a:avLst/>
+          </a:prstGeom>
+          <a:solidFill>
+            <a:schemeClr val="accent2"/>
+          </a:solidFill>
+        </p:spPr>
+        <p:style>
+          <a:lnRef idx="2">
+            <a:schemeClr val="accent1">
+              <a:shade val="15000"/>
+            </a:schemeClr>
+          </a:lnRef>
+          <a:fillRef idx="1">
+            <a:schemeClr val="accent1"/>
+          </a:fillRef>
+          <a:effectRef idx="0">
+            <a:schemeClr val="accent1"/>
+          </a:effectRef>
+          <a:fontRef idx="minor">
+            <a:schemeClr val="lt1"/>
+          </a:fontRef>
+        </p:style>
+        <p:txBody>
+          <a:bodyPr rtlCol="0" anchor="ctr"/>
+          <a:lstStyle/>
+          <a:p>
+            <a:pPr algn="ctr"/>
+            <a:endParaRPr lang="en-US"/>
+          </a:p>
+        </p:txBody>
+      </p:sp>
+      <p:sp>
+        <p:nvSpPr>
+          <p:cNvPr id="28" name="TextBox 27">
+            <a:extLst>
+              <a:ext uri="{FF2B5EF4-FFF2-40B4-BE49-F238E27FC236}">
+                <a16:creationId xmlns:a16="http://schemas.microsoft.com/office/drawing/2014/main" id="{765EDCE2-E5CD-D7AB-E22E-318331B1672B}"/>
+              </a:ext>
+            </a:extLst>
+          </p:cNvPr>
+          <p:cNvSpPr txBox="1"/>
+          <p:nvPr/>
+        </p:nvSpPr>
+        <p:spPr>
+          <a:xfrm rot="16200000">
+            <a:off x="4025513" y="3244334"/>
+            <a:ext cx="3564374" cy="369332"/>
+          </a:xfrm>
+          <a:prstGeom prst="rect">
+            <a:avLst/>
+          </a:prstGeom>
+          <a:noFill/>
+        </p:spPr>
+        <p:txBody>
+          <a:bodyPr wrap="none" rtlCol="0">
+            <a:spAutoFit/>
+          </a:bodyPr>
+          <a:lstStyle/>
+          <a:p>
+            <a:r>
+              <a:rPr lang="en-US" dirty="0"/>
+              <a:t>Graph Aggregation Layer (Sort </a:t>
+            </a:r>
+            <a:r>
+              <a:rPr lang="en-US" dirty="0" err="1"/>
+              <a:t>Aggr</a:t>
+            </a:r>
+            <a:r>
+              <a:rPr lang="en-US" dirty="0"/>
+              <a:t>)</a:t>
+            </a:r>
+          </a:p>
+        </p:txBody>
+      </p:sp>
+      <p:sp>
+        <p:nvSpPr>
+          <p:cNvPr id="29" name="Rectangle 28">
+            <a:extLst>
+              <a:ext uri="{FF2B5EF4-FFF2-40B4-BE49-F238E27FC236}">
+                <a16:creationId xmlns:a16="http://schemas.microsoft.com/office/drawing/2014/main" id="{534B0931-2737-D08B-AB88-9743964EA2C7}"/>
+              </a:ext>
+            </a:extLst>
+          </p:cNvPr>
+          <p:cNvSpPr/>
+          <p:nvPr/>
+        </p:nvSpPr>
+        <p:spPr>
+          <a:xfrm>
+            <a:off x="7032688" y="1808750"/>
+            <a:ext cx="441434" cy="3413918"/>
+          </a:xfrm>
+          <a:prstGeom prst="rect">
+            <a:avLst/>
+          </a:prstGeom>
+          <a:solidFill>
+            <a:schemeClr val="accent6"/>
+          </a:solidFill>
+        </p:spPr>
+        <p:style>
+          <a:lnRef idx="2">
+            <a:schemeClr val="accent1">
+              <a:shade val="15000"/>
+            </a:schemeClr>
+          </a:lnRef>
+          <a:fillRef idx="1">
+            <a:schemeClr val="accent1"/>
+          </a:fillRef>
+          <a:effectRef idx="0">
+            <a:schemeClr val="accent1"/>
+          </a:effectRef>
+          <a:fontRef idx="minor">
+            <a:schemeClr val="lt1"/>
+          </a:fontRef>
+        </p:style>
+        <p:txBody>
+          <a:bodyPr rtlCol="0" anchor="ctr"/>
+          <a:lstStyle/>
+          <a:p>
+            <a:pPr algn="ctr"/>
+            <a:endParaRPr lang="en-US"/>
+          </a:p>
+        </p:txBody>
+      </p:sp>
+      <p:sp>
+        <p:nvSpPr>
+          <p:cNvPr id="30" name="TextBox 29">
+            <a:extLst>
+              <a:ext uri="{FF2B5EF4-FFF2-40B4-BE49-F238E27FC236}">
+                <a16:creationId xmlns:a16="http://schemas.microsoft.com/office/drawing/2014/main" id="{9CC1279E-0679-FA5E-61DA-E905B32EF9A5}"/>
+              </a:ext>
+            </a:extLst>
+          </p:cNvPr>
+          <p:cNvSpPr txBox="1"/>
+          <p:nvPr/>
+        </p:nvSpPr>
+        <p:spPr>
+          <a:xfrm rot="16200000">
+            <a:off x="5986376" y="3331043"/>
+            <a:ext cx="2461956" cy="369332"/>
+          </a:xfrm>
+          <a:prstGeom prst="rect">
+            <a:avLst/>
+          </a:prstGeom>
+          <a:noFill/>
+        </p:spPr>
+        <p:txBody>
+          <a:bodyPr wrap="none" rtlCol="0">
+            <a:spAutoFit/>
+          </a:bodyPr>
+          <a:lstStyle/>
+          <a:p>
+            <a:r>
+              <a:rPr lang="en-US" dirty="0"/>
+              <a:t>1-D Conv, Pooling Layers</a:t>
+            </a:r>
+          </a:p>
+        </p:txBody>
+      </p:sp>
+      <p:sp>
+        <p:nvSpPr>
+          <p:cNvPr id="31" name="Rounded Rectangle 30">
+            <a:extLst>
+              <a:ext uri="{FF2B5EF4-FFF2-40B4-BE49-F238E27FC236}">
+                <a16:creationId xmlns:a16="http://schemas.microsoft.com/office/drawing/2014/main" id="{6D1ADFBB-F3B2-0115-4385-A7A81D1244C4}"/>
+              </a:ext>
+            </a:extLst>
+          </p:cNvPr>
+          <p:cNvSpPr/>
+          <p:nvPr/>
+        </p:nvSpPr>
+        <p:spPr>
+          <a:xfrm>
+            <a:off x="8200698" y="2551384"/>
+            <a:ext cx="2554013" cy="1928649"/>
+          </a:xfrm>
+          <a:prstGeom prst="roundRect">
+            <a:avLst/>
+          </a:prstGeom>
+          <a:solidFill>
+            <a:schemeClr val="accent4"/>
+          </a:solidFill>
+        </p:spPr>
+        <p:style>
+          <a:lnRef idx="2">
+            <a:schemeClr val="accent1">
+              <a:shade val="15000"/>
+            </a:schemeClr>
+          </a:lnRef>
+          <a:fillRef idx="1">
+            <a:schemeClr val="accent1"/>
+          </a:fillRef>
+          <a:effectRef idx="0">
+            <a:schemeClr val="accent1"/>
+          </a:effectRef>
+          <a:fontRef idx="minor">
+            <a:schemeClr val="lt1"/>
+          </a:fontRef>
+        </p:style>
+        <p:txBody>
+          <a:bodyPr rtlCol="0" anchor="ctr"/>
+          <a:lstStyle/>
+          <a:p>
+            <a:pPr algn="ctr"/>
+            <a:r>
+              <a:rPr lang="en-US" dirty="0"/>
+              <a:t>Dense Classifier</a:t>
+            </a:r>
+          </a:p>
+        </p:txBody>
+      </p:sp>
+      <p:cxnSp>
+        <p:nvCxnSpPr>
+          <p:cNvPr id="33" name="Straight Arrow Connector 32">
+            <a:extLst>
+              <a:ext uri="{FF2B5EF4-FFF2-40B4-BE49-F238E27FC236}">
+                <a16:creationId xmlns:a16="http://schemas.microsoft.com/office/drawing/2014/main" id="{BE729A49-B7D6-2016-A7FB-B458F9084137}"/>
+              </a:ext>
+            </a:extLst>
+          </p:cNvPr>
+          <p:cNvCxnSpPr>
+            <a:stCxn id="7" idx="3"/>
+            <a:endCxn id="27" idx="1"/>
+          </p:cNvCxnSpPr>
+          <p:nvPr/>
+        </p:nvCxnSpPr>
+        <p:spPr>
+          <a:xfrm flipV="1">
+            <a:off x="4656083" y="3515708"/>
+            <a:ext cx="914400" cy="2"/>
+          </a:xfrm>
+          <a:prstGeom prst="straightConnector1">
+            <a:avLst/>
+          </a:prstGeom>
+          <a:ln>
+            <a:tailEnd type="triangle"/>
+          </a:ln>
+        </p:spPr>
+        <p:style>
+          <a:lnRef idx="3">
+            <a:schemeClr val="accent6"/>
+          </a:lnRef>
+          <a:fillRef idx="0">
+            <a:schemeClr val="accent6"/>
+          </a:fillRef>
+          <a:effectRef idx="2">
+            <a:schemeClr val="accent6"/>
+          </a:effectRef>
+          <a:fontRef idx="minor">
+            <a:schemeClr val="tx1"/>
+          </a:fontRef>
+        </p:style>
+      </p:cxnSp>
+      <p:cxnSp>
+        <p:nvCxnSpPr>
+          <p:cNvPr id="35" name="Straight Arrow Connector 34">
+            <a:extLst>
+              <a:ext uri="{FF2B5EF4-FFF2-40B4-BE49-F238E27FC236}">
+                <a16:creationId xmlns:a16="http://schemas.microsoft.com/office/drawing/2014/main" id="{3E2EA846-0B33-80BF-E370-A72DAECC6F65}"/>
+              </a:ext>
+            </a:extLst>
+          </p:cNvPr>
+          <p:cNvCxnSpPr>
+            <a:stCxn id="27" idx="3"/>
+            <a:endCxn id="30" idx="0"/>
+          </p:cNvCxnSpPr>
+          <p:nvPr/>
+        </p:nvCxnSpPr>
+        <p:spPr>
+          <a:xfrm>
+            <a:off x="6022428" y="3515708"/>
+            <a:ext cx="1010260" cy="1"/>
+          </a:xfrm>
+          <a:prstGeom prst="straightConnector1">
+            <a:avLst/>
+          </a:prstGeom>
+          <a:ln>
+            <a:tailEnd type="triangle"/>
+          </a:ln>
+        </p:spPr>
+        <p:style>
+          <a:lnRef idx="3">
+            <a:schemeClr val="accent6"/>
+          </a:lnRef>
+          <a:fillRef idx="0">
+            <a:schemeClr val="accent6"/>
+          </a:fillRef>
+          <a:effectRef idx="2">
+            <a:schemeClr val="accent6"/>
+          </a:effectRef>
+          <a:fontRef idx="minor">
+            <a:schemeClr val="tx1"/>
+          </a:fontRef>
+        </p:style>
+      </p:cxnSp>
+      <p:cxnSp>
+        <p:nvCxnSpPr>
+          <p:cNvPr id="37" name="Straight Arrow Connector 36">
+            <a:extLst>
+              <a:ext uri="{FF2B5EF4-FFF2-40B4-BE49-F238E27FC236}">
+                <a16:creationId xmlns:a16="http://schemas.microsoft.com/office/drawing/2014/main" id="{3505CEC5-2E43-2893-236A-70A23DEEE12E}"/>
+              </a:ext>
+            </a:extLst>
+          </p:cNvPr>
+          <p:cNvCxnSpPr>
+            <a:stCxn id="29" idx="3"/>
+            <a:endCxn id="31" idx="1"/>
+          </p:cNvCxnSpPr>
+          <p:nvPr/>
+        </p:nvCxnSpPr>
+        <p:spPr>
+          <a:xfrm>
+            <a:off x="7474122" y="3515709"/>
+            <a:ext cx="726576" cy="0"/>
+          </a:xfrm>
+          <a:prstGeom prst="straightConnector1">
+            <a:avLst/>
+          </a:prstGeom>
+          <a:ln>
+            <a:tailEnd type="triangle"/>
+          </a:ln>
+        </p:spPr>
+        <p:style>
+          <a:lnRef idx="3">
+            <a:schemeClr val="accent6"/>
+          </a:lnRef>
+          <a:fillRef idx="0">
+            <a:schemeClr val="accent6"/>
+          </a:fillRef>
+          <a:effectRef idx="2">
+            <a:schemeClr val="accent6"/>
+          </a:effectRef>
+          <a:fontRef idx="minor">
+            <a:schemeClr val="tx1"/>
+          </a:fontRef>
+        </p:style>
+      </p:cxnSp>
+      <p:sp>
+        <p:nvSpPr>
+          <p:cNvPr id="41" name="Right Brace 40">
+            <a:extLst>
+              <a:ext uri="{FF2B5EF4-FFF2-40B4-BE49-F238E27FC236}">
+                <a16:creationId xmlns:a16="http://schemas.microsoft.com/office/drawing/2014/main" id="{AFD89638-0DAB-5EEB-4D22-E340FF7C3680}"/>
+              </a:ext>
+            </a:extLst>
+          </p:cNvPr>
+          <p:cNvSpPr/>
+          <p:nvPr/>
+        </p:nvSpPr>
+        <p:spPr>
+          <a:xfrm rot="5400000">
+            <a:off x="1904999" y="4721774"/>
+            <a:ext cx="475593" cy="2609192"/>
+          </a:xfrm>
+          <a:prstGeom prst="rightBrace">
+            <a:avLst/>
+          </a:prstGeom>
+        </p:spPr>
+        <p:style>
+          <a:lnRef idx="3">
+            <a:schemeClr val="dk1"/>
+          </a:lnRef>
+          <a:fillRef idx="0">
+            <a:schemeClr val="dk1"/>
+          </a:fillRef>
+          <a:effectRef idx="2">
+            <a:schemeClr val="dk1"/>
+          </a:effectRef>
+          <a:fontRef idx="minor">
+            <a:schemeClr val="tx1"/>
+          </a:fontRef>
+        </p:style>
+        <p:txBody>
+          <a:bodyPr rtlCol="0" anchor="ctr"/>
+          <a:lstStyle/>
+          <a:p>
+            <a:pPr algn="ctr"/>
+            <a:endParaRPr lang="en-US"/>
+          </a:p>
+        </p:txBody>
+      </p:sp>
+      <p:sp>
+        <p:nvSpPr>
+          <p:cNvPr id="42" name="TextBox 41">
+            <a:extLst>
+              <a:ext uri="{FF2B5EF4-FFF2-40B4-BE49-F238E27FC236}">
+                <a16:creationId xmlns:a16="http://schemas.microsoft.com/office/drawing/2014/main" id="{2B0A7BD4-ADFC-3B0C-CB41-88777C2FBDA6}"/>
+              </a:ext>
+            </a:extLst>
+          </p:cNvPr>
+          <p:cNvSpPr txBox="1"/>
+          <p:nvPr/>
+        </p:nvSpPr>
+        <p:spPr>
+          <a:xfrm>
+            <a:off x="1030476" y="6308209"/>
+            <a:ext cx="2543838" cy="369332"/>
+          </a:xfrm>
+          <a:prstGeom prst="rect">
+            <a:avLst/>
+          </a:prstGeom>
+          <a:noFill/>
+        </p:spPr>
+        <p:txBody>
+          <a:bodyPr wrap="none" rtlCol="0">
+            <a:spAutoFit/>
+          </a:bodyPr>
+          <a:lstStyle/>
+          <a:p>
+            <a:r>
+              <a:rPr lang="en-US" dirty="0"/>
+              <a:t>Message Passing Scheme</a:t>
+            </a:r>
+          </a:p>
+        </p:txBody>
+      </p:sp>
+      <p:sp>
+        <p:nvSpPr>
+          <p:cNvPr id="9" name="Slide Number Placeholder 8">
+            <a:extLst>
+              <a:ext uri="{FF2B5EF4-FFF2-40B4-BE49-F238E27FC236}">
+                <a16:creationId xmlns:a16="http://schemas.microsoft.com/office/drawing/2014/main" id="{6E10603C-1B37-EEB0-4377-F66808B29892}"/>
+              </a:ext>
+            </a:extLst>
+          </p:cNvPr>
+          <p:cNvSpPr>
+            <a:spLocks noGrp="1"/>
+          </p:cNvSpPr>
+          <p:nvPr>
+            <p:ph type="sldNum" sz="quarter" idx="12"/>
+          </p:nvPr>
+        </p:nvSpPr>
+        <p:spPr/>
+        <p:txBody>
+          <a:bodyPr/>
+          <a:lstStyle/>
+          <a:p>
+            <a:fld id="{673E80D0-5A67-47DD-9B76-4E24E60624C0}" type="slidenum">
+              <a:rPr lang="en-US" smtClean="0"/>
+              <a:t>18</a:t>
+            </a:fld>
+            <a:endParaRPr lang="en-US"/>
+          </a:p>
+        </p:txBody>
+      </p:sp>
+    </p:spTree>
+    <p:extLst>
+      <p:ext uri="{BB962C8B-B14F-4D97-AF65-F5344CB8AC3E}">
+        <p14:creationId xmlns:p14="http://schemas.microsoft.com/office/powerpoint/2010/main" val="1927160354"/>
       </p:ext>
     </p:extLst>
   </p:cSld>
@@ -11750,6 +16786,35 @@
           </a:p>
         </p:txBody>
       </p:sp>
+      <p:sp>
+        <p:nvSpPr>
+          <p:cNvPr id="9" name="Slide Number Placeholder 8">
+            <a:extLst>
+              <a:ext uri="{FF2B5EF4-FFF2-40B4-BE49-F238E27FC236}">
+                <a16:creationId xmlns:a16="http://schemas.microsoft.com/office/drawing/2014/main" id="{289F5268-9B30-A1F2-3E09-DEEBD2E57AD4}"/>
+              </a:ext>
+            </a:extLst>
+          </p:cNvPr>
+          <p:cNvSpPr>
+            <a:spLocks noGrp="1"/>
+          </p:cNvSpPr>
+          <p:nvPr>
+            <p:ph type="sldNum" sz="quarter" idx="12"/>
+          </p:nvPr>
+        </p:nvSpPr>
+        <p:spPr/>
+        <p:txBody>
+          <a:bodyPr/>
+          <a:lstStyle/>
+          <a:p>
+            <a:fld id="{673E80D0-5A67-47DD-9B76-4E24E60624C0}" type="slidenum">
+              <a:rPr lang="en-US" smtClean="0"/>
+              <a:t>2</a:t>
+            </a:fld>
+            <a:endParaRPr lang="en-US"/>
+          </a:p>
+        </p:txBody>
+      </p:sp>
     </p:spTree>
     <p:extLst>
       <p:ext uri="{BB962C8B-B14F-4D97-AF65-F5344CB8AC3E}">
@@ -12874,6 +17939,35 @@
           </a:p>
         </p:txBody>
       </p:sp>
+      <p:sp>
+        <p:nvSpPr>
+          <p:cNvPr id="3" name="Slide Number Placeholder 2">
+            <a:extLst>
+              <a:ext uri="{FF2B5EF4-FFF2-40B4-BE49-F238E27FC236}">
+                <a16:creationId xmlns:a16="http://schemas.microsoft.com/office/drawing/2014/main" id="{E21A7760-8A4B-7589-C09F-DF052C654009}"/>
+              </a:ext>
+            </a:extLst>
+          </p:cNvPr>
+          <p:cNvSpPr>
+            <a:spLocks noGrp="1"/>
+          </p:cNvSpPr>
+          <p:nvPr>
+            <p:ph type="sldNum" sz="quarter" idx="12"/>
+          </p:nvPr>
+        </p:nvSpPr>
+        <p:spPr/>
+        <p:txBody>
+          <a:bodyPr/>
+          <a:lstStyle/>
+          <a:p>
+            <a:fld id="{673E80D0-5A67-47DD-9B76-4E24E60624C0}" type="slidenum">
+              <a:rPr lang="en-US" smtClean="0"/>
+              <a:t>3</a:t>
+            </a:fld>
+            <a:endParaRPr lang="en-US"/>
+          </a:p>
+        </p:txBody>
+      </p:sp>
     </p:spTree>
     <p:extLst>
       <p:ext uri="{BB962C8B-B14F-4D97-AF65-F5344CB8AC3E}">
@@ -13464,6 +18558,35 @@
               <a:t>CC BY-SA</a:t>
             </a:r>
             <a:endParaRPr lang="en-US" sz="900"/>
+          </a:p>
+        </p:txBody>
+      </p:sp>
+      <p:sp>
+        <p:nvSpPr>
+          <p:cNvPr id="8" name="Slide Number Placeholder 7">
+            <a:extLst>
+              <a:ext uri="{FF2B5EF4-FFF2-40B4-BE49-F238E27FC236}">
+                <a16:creationId xmlns:a16="http://schemas.microsoft.com/office/drawing/2014/main" id="{A248A9C7-E14D-5725-E9C1-6437781A7BA8}"/>
+              </a:ext>
+            </a:extLst>
+          </p:cNvPr>
+          <p:cNvSpPr>
+            <a:spLocks noGrp="1"/>
+          </p:cNvSpPr>
+          <p:nvPr>
+            <p:ph type="sldNum" sz="quarter" idx="12"/>
+          </p:nvPr>
+        </p:nvSpPr>
+        <p:spPr/>
+        <p:txBody>
+          <a:bodyPr/>
+          <a:lstStyle/>
+          <a:p>
+            <a:fld id="{673E80D0-5A67-47DD-9B76-4E24E60624C0}" type="slidenum">
+              <a:rPr lang="en-US" smtClean="0"/>
+              <a:t>4</a:t>
+            </a:fld>
+            <a:endParaRPr lang="en-US"/>
           </a:p>
         </p:txBody>
       </p:sp>
@@ -13661,7 +18784,7 @@
           <a:lstStyle/>
           <a:p>
             <a:r>
-              <a:rPr lang="en-US" sz="4000" kern="1200">
+              <a:rPr lang="en-US" sz="4000" kern="1200" dirty="0">
                 <a:solidFill>
                   <a:schemeClr val="tx1"/>
                 </a:solidFill>
@@ -13697,7 +18820,7 @@
         </p:spPr>
         <p:txBody>
           <a:bodyPr vert="horz" lIns="91440" tIns="45720" rIns="91440" bIns="45720" rtlCol="0" anchor="ctr">
-            <a:normAutofit/>
+            <a:normAutofit lnSpcReduction="10000"/>
           </a:bodyPr>
           <a:lstStyle/>
           <a:p>
@@ -13712,8 +18835,16 @@
               <a:buChar char="•"/>
             </a:pPr>
             <a:r>
-              <a:rPr lang="en-US" sz="1700"/>
-              <a:t>First architecture to use this method – Weisfeiler-Lehman Neural Machine</a:t>
+              <a:rPr lang="en-US" sz="1700" dirty="0"/>
+              <a:t>First architecture to use this method – </a:t>
+            </a:r>
+            <a:r>
+              <a:rPr lang="en-US" sz="1700" dirty="0" err="1"/>
+              <a:t>Weisfeiler</a:t>
+            </a:r>
+            <a:r>
+              <a:rPr lang="en-US" sz="1700" dirty="0"/>
+              <a:t>-Lehman Neural Machine</a:t>
             </a:r>
           </a:p>
           <a:p>
@@ -13727,7 +18858,7 @@
               <a:buFont typeface="Arial" panose="020B0604020202020204" pitchFamily="34" charset="0"/>
               <a:buChar char="•"/>
             </a:pPr>
-            <a:endParaRPr lang="en-US" sz="1700"/>
+            <a:endParaRPr lang="en-US" sz="1700" dirty="0"/>
           </a:p>
           <a:p>
             <a:pPr indent="-228600">
@@ -13741,7 +18872,7 @@
               <a:buChar char="•"/>
             </a:pPr>
             <a:r>
-              <a:rPr lang="en-US" sz="1700"/>
+              <a:rPr lang="en-US" sz="1700" dirty="0"/>
               <a:t>Achieved state of the art prediction performance</a:t>
             </a:r>
           </a:p>
@@ -13756,7 +18887,7 @@
               <a:buFont typeface="Arial" panose="020B0604020202020204" pitchFamily="34" charset="0"/>
               <a:buChar char="•"/>
             </a:pPr>
-            <a:endParaRPr lang="en-US" sz="1700"/>
+            <a:endParaRPr lang="en-US" sz="1700" dirty="0"/>
           </a:p>
           <a:p>
             <a:pPr indent="-228600">
@@ -13770,8 +18901,16 @@
               <a:buChar char="•"/>
             </a:pPr>
             <a:r>
-              <a:rPr lang="en-US" sz="1700"/>
-              <a:t>Uses Weisfeiler-Lehman graph labeling to encode structural information in node label order</a:t>
+              <a:rPr lang="en-US" sz="1700" dirty="0"/>
+              <a:t>Uses </a:t>
+            </a:r>
+            <a:r>
+              <a:rPr lang="en-US" sz="1700" dirty="0" err="1"/>
+              <a:t>Weisfeiler</a:t>
+            </a:r>
+            <a:r>
+              <a:rPr lang="en-US" sz="1700" dirty="0"/>
+              <a:t>-Lehman graph labeling kernel to encode structural information in node label order</a:t>
             </a:r>
           </a:p>
           <a:p>
@@ -13785,7 +18924,7 @@
               <a:buFont typeface="Arial" panose="020B0604020202020204" pitchFamily="34" charset="0"/>
               <a:buChar char="•"/>
             </a:pPr>
-            <a:endParaRPr lang="en-US" sz="1700"/>
+            <a:endParaRPr lang="en-US" sz="1700" dirty="0"/>
           </a:p>
           <a:p>
             <a:pPr indent="-228600">
@@ -13799,7 +18938,7 @@
               <a:buChar char="•"/>
             </a:pPr>
             <a:r>
-              <a:rPr lang="en-US" sz="1700"/>
+              <a:rPr lang="en-US" sz="1700" dirty="0"/>
               <a:t>Limitations:</a:t>
             </a:r>
           </a:p>
@@ -13815,8 +18954,24 @@
               <a:buChar char="•"/>
             </a:pPr>
             <a:r>
-              <a:rPr lang="en-US" sz="1700"/>
-              <a:t>Uses DNN instead of GNN which misses out on attribute features of nodes &amp; limits learning of graph features. </a:t>
+              <a:rPr lang="en-US" sz="1700" dirty="0"/>
+              <a:t>DNN accepts fixed sized tensors, leading to loss of information due to truncating or dilution due to padding.</a:t>
+            </a:r>
+          </a:p>
+          <a:p>
+            <a:pPr indent="-228600">
+              <a:lnSpc>
+                <a:spcPct val="90000"/>
+              </a:lnSpc>
+              <a:spcAft>
+                <a:spcPts val="600"/>
+              </a:spcAft>
+              <a:buFont typeface="Arial" panose="020B0604020202020204" pitchFamily="34" charset="0"/>
+              <a:buChar char="•"/>
+            </a:pPr>
+            <a:r>
+              <a:rPr lang="en-US" sz="1700" dirty="0"/>
+              <a:t>Adjacency matrix representations can’t fully encapsulate explicit graph features.</a:t>
             </a:r>
           </a:p>
         </p:txBody>
@@ -13857,6 +19012,35 @@
           </a:prstGeom>
         </p:spPr>
       </p:pic>
+      <p:sp>
+        <p:nvSpPr>
+          <p:cNvPr id="4" name="Slide Number Placeholder 3">
+            <a:extLst>
+              <a:ext uri="{FF2B5EF4-FFF2-40B4-BE49-F238E27FC236}">
+                <a16:creationId xmlns:a16="http://schemas.microsoft.com/office/drawing/2014/main" id="{0525F5E2-1BDB-9590-E18B-8FB38A0F0E85}"/>
+              </a:ext>
+            </a:extLst>
+          </p:cNvPr>
+          <p:cNvSpPr>
+            <a:spLocks noGrp="1"/>
+          </p:cNvSpPr>
+          <p:nvPr>
+            <p:ph type="sldNum" sz="quarter" idx="12"/>
+          </p:nvPr>
+        </p:nvSpPr>
+        <p:spPr/>
+        <p:txBody>
+          <a:bodyPr/>
+          <a:lstStyle/>
+          <a:p>
+            <a:fld id="{673E80D0-5A67-47DD-9B76-4E24E60624C0}" type="slidenum">
+              <a:rPr lang="en-US" smtClean="0"/>
+              <a:t>5</a:t>
+            </a:fld>
+            <a:endParaRPr lang="en-US"/>
+          </a:p>
+        </p:txBody>
+      </p:sp>
     </p:spTree>
     <p:extLst>
       <p:ext uri="{BB962C8B-B14F-4D97-AF65-F5344CB8AC3E}">
@@ -13871,6 +19055,345 @@
 </file>
 
 <file path=ppt/slides/slide6.xml><?xml version="1.0" encoding="utf-8"?>
+<p:sld xmlns:a="http://schemas.openxmlformats.org/drawingml/2006/main" xmlns:r="http://schemas.openxmlformats.org/officeDocument/2006/relationships" xmlns:p="http://schemas.openxmlformats.org/presentationml/2006/main">
+  <p:cSld>
+    <p:spTree>
+      <p:nvGrpSpPr>
+        <p:cNvPr id="1" name=""/>
+        <p:cNvGrpSpPr/>
+        <p:nvPr/>
+      </p:nvGrpSpPr>
+      <p:grpSpPr>
+        <a:xfrm>
+          <a:off x="0" y="0"/>
+          <a:ext cx="0" cy="0"/>
+          <a:chOff x="0" y="0"/>
+          <a:chExt cx="0" cy="0"/>
+        </a:xfrm>
+      </p:grpSpPr>
+      <p:sp>
+        <p:nvSpPr>
+          <p:cNvPr id="2" name="Title 1">
+            <a:extLst>
+              <a:ext uri="{FF2B5EF4-FFF2-40B4-BE49-F238E27FC236}">
+                <a16:creationId xmlns:a16="http://schemas.microsoft.com/office/drawing/2014/main" id="{A5EEC751-178D-4A88-20B6-DFFF61B6727B}"/>
+              </a:ext>
+            </a:extLst>
+          </p:cNvPr>
+          <p:cNvSpPr>
+            <a:spLocks noGrp="1"/>
+          </p:cNvSpPr>
+          <p:nvPr>
+            <p:ph type="title"/>
+          </p:nvPr>
+        </p:nvSpPr>
+        <p:spPr/>
+        <p:txBody>
+          <a:bodyPr/>
+          <a:lstStyle/>
+          <a:p>
+            <a:r>
+              <a:rPr lang="en-US" dirty="0"/>
+              <a:t>Latent Feature Extraction</a:t>
+            </a:r>
+          </a:p>
+        </p:txBody>
+      </p:sp>
+      <p:sp>
+        <p:nvSpPr>
+          <p:cNvPr id="3" name="TextBox 2">
+            <a:extLst>
+              <a:ext uri="{FF2B5EF4-FFF2-40B4-BE49-F238E27FC236}">
+                <a16:creationId xmlns:a16="http://schemas.microsoft.com/office/drawing/2014/main" id="{AF424324-58DB-1C7E-3A51-7C3E0300957E}"/>
+              </a:ext>
+            </a:extLst>
+          </p:cNvPr>
+          <p:cNvSpPr txBox="1"/>
+          <p:nvPr/>
+        </p:nvSpPr>
+        <p:spPr>
+          <a:xfrm>
+            <a:off x="838200" y="2112579"/>
+            <a:ext cx="11382283" cy="1754326"/>
+          </a:xfrm>
+          <a:prstGeom prst="rect">
+            <a:avLst/>
+          </a:prstGeom>
+          <a:noFill/>
+        </p:spPr>
+        <p:txBody>
+          <a:bodyPr wrap="none" rtlCol="0">
+            <a:spAutoFit/>
+          </a:bodyPr>
+          <a:lstStyle/>
+          <a:p>
+            <a:r>
+              <a:rPr lang="en-US" dirty="0"/>
+              <a:t>Certain matrix factorizations extract low dimensional latent features of the network. E.g. Matrix factorization, stochastic</a:t>
+            </a:r>
+          </a:p>
+          <a:p>
+            <a:r>
+              <a:rPr lang="en-US" dirty="0"/>
+              <a:t>block model, etc.</a:t>
+            </a:r>
+          </a:p>
+          <a:p>
+            <a:endParaRPr lang="en-US" dirty="0"/>
+          </a:p>
+          <a:p>
+            <a:r>
+              <a:rPr lang="en-US" dirty="0"/>
+              <a:t>Other embedding techniques like </a:t>
+            </a:r>
+            <a:r>
+              <a:rPr lang="en-US" dirty="0" err="1"/>
+              <a:t>DeepWalk</a:t>
+            </a:r>
+            <a:r>
+              <a:rPr lang="en-US" dirty="0"/>
+              <a:t>, and Node2Vec implicitly factorize the matrix.</a:t>
+            </a:r>
+          </a:p>
+          <a:p>
+            <a:endParaRPr lang="en-US" dirty="0"/>
+          </a:p>
+          <a:p>
+            <a:r>
+              <a:rPr lang="en-US" dirty="0"/>
+              <a:t>The latent features can be combined with explicit and structural features to generate meaningful representations. </a:t>
+            </a:r>
+          </a:p>
+        </p:txBody>
+      </p:sp>
+      <p:sp>
+        <p:nvSpPr>
+          <p:cNvPr id="4" name="Slide Number Placeholder 3">
+            <a:extLst>
+              <a:ext uri="{FF2B5EF4-FFF2-40B4-BE49-F238E27FC236}">
+                <a16:creationId xmlns:a16="http://schemas.microsoft.com/office/drawing/2014/main" id="{8BC8DDB4-E2DC-5C50-DE29-B3E2936E5674}"/>
+              </a:ext>
+            </a:extLst>
+          </p:cNvPr>
+          <p:cNvSpPr>
+            <a:spLocks noGrp="1"/>
+          </p:cNvSpPr>
+          <p:nvPr>
+            <p:ph type="sldNum" sz="quarter" idx="12"/>
+          </p:nvPr>
+        </p:nvSpPr>
+        <p:spPr/>
+        <p:txBody>
+          <a:bodyPr/>
+          <a:lstStyle/>
+          <a:p>
+            <a:fld id="{673E80D0-5A67-47DD-9B76-4E24E60624C0}" type="slidenum">
+              <a:rPr lang="en-US" smtClean="0"/>
+              <a:t>6</a:t>
+            </a:fld>
+            <a:endParaRPr lang="en-US"/>
+          </a:p>
+        </p:txBody>
+      </p:sp>
+    </p:spTree>
+    <p:extLst>
+      <p:ext uri="{BB962C8B-B14F-4D97-AF65-F5344CB8AC3E}">
+        <p14:creationId xmlns:p14="http://schemas.microsoft.com/office/powerpoint/2010/main" val="1059156195"/>
+      </p:ext>
+    </p:extLst>
+  </p:cSld>
+  <p:clrMapOvr>
+    <a:masterClrMapping/>
+  </p:clrMapOvr>
+</p:sld>
+</file>
+
+<file path=ppt/slides/slide7.xml><?xml version="1.0" encoding="utf-8"?>
+<p:sld xmlns:a="http://schemas.openxmlformats.org/drawingml/2006/main" xmlns:r="http://schemas.openxmlformats.org/officeDocument/2006/relationships" xmlns:p="http://schemas.openxmlformats.org/presentationml/2006/main">
+  <p:cSld>
+    <p:spTree>
+      <p:nvGrpSpPr>
+        <p:cNvPr id="1" name=""/>
+        <p:cNvGrpSpPr/>
+        <p:nvPr/>
+      </p:nvGrpSpPr>
+      <p:grpSpPr>
+        <a:xfrm>
+          <a:off x="0" y="0"/>
+          <a:ext cx="0" cy="0"/>
+          <a:chOff x="0" y="0"/>
+          <a:chExt cx="0" cy="0"/>
+        </a:xfrm>
+      </p:grpSpPr>
+      <p:sp>
+        <p:nvSpPr>
+          <p:cNvPr id="2" name="Title 1">
+            <a:extLst>
+              <a:ext uri="{FF2B5EF4-FFF2-40B4-BE49-F238E27FC236}">
+                <a16:creationId xmlns:a16="http://schemas.microsoft.com/office/drawing/2014/main" id="{2F98FF42-954E-191E-0622-EADB5D82509F}"/>
+              </a:ext>
+            </a:extLst>
+          </p:cNvPr>
+          <p:cNvSpPr>
+            <a:spLocks noGrp="1"/>
+          </p:cNvSpPr>
+          <p:nvPr>
+            <p:ph type="title"/>
+          </p:nvPr>
+        </p:nvSpPr>
+        <p:spPr/>
+        <p:txBody>
+          <a:bodyPr/>
+          <a:lstStyle/>
+          <a:p>
+            <a:r>
+              <a:rPr lang="en-US" dirty="0"/>
+              <a:t>Computational Limitations</a:t>
+            </a:r>
+          </a:p>
+        </p:txBody>
+      </p:sp>
+      <p:sp>
+        <p:nvSpPr>
+          <p:cNvPr id="3" name="TextBox 2">
+            <a:extLst>
+              <a:ext uri="{FF2B5EF4-FFF2-40B4-BE49-F238E27FC236}">
+                <a16:creationId xmlns:a16="http://schemas.microsoft.com/office/drawing/2014/main" id="{E45AAE05-5048-71FC-D340-E1EDDC528C92}"/>
+              </a:ext>
+            </a:extLst>
+          </p:cNvPr>
+          <p:cNvSpPr txBox="1"/>
+          <p:nvPr/>
+        </p:nvSpPr>
+        <p:spPr>
+          <a:xfrm>
+            <a:off x="1019503" y="2070538"/>
+            <a:ext cx="9414629" cy="2862322"/>
+          </a:xfrm>
+          <a:prstGeom prst="rect">
+            <a:avLst/>
+          </a:prstGeom>
+          <a:noFill/>
+        </p:spPr>
+        <p:txBody>
+          <a:bodyPr wrap="none" rtlCol="0">
+            <a:spAutoFit/>
+          </a:bodyPr>
+          <a:lstStyle/>
+          <a:p>
+            <a:pPr marL="285750" indent="-285750">
+              <a:buFont typeface="Arial" panose="020B0604020202020204" pitchFamily="34" charset="0"/>
+              <a:buChar char="•"/>
+            </a:pPr>
+            <a:r>
+              <a:rPr lang="en-US" dirty="0"/>
+              <a:t>Very large graphs can be computationally infeasible for Neural processing.</a:t>
+            </a:r>
+          </a:p>
+          <a:p>
+            <a:pPr marL="285750" indent="-285750">
+              <a:buFont typeface="Arial" panose="020B0604020202020204" pitchFamily="34" charset="0"/>
+              <a:buChar char="•"/>
+            </a:pPr>
+            <a:endParaRPr lang="en-US" dirty="0"/>
+          </a:p>
+          <a:p>
+            <a:pPr marL="285750" indent="-285750">
+              <a:buFont typeface="Arial" panose="020B0604020202020204" pitchFamily="34" charset="0"/>
+              <a:buChar char="•"/>
+            </a:pPr>
+            <a:r>
+              <a:rPr lang="en-US" dirty="0"/>
+              <a:t>Can process subgraphs around the target nodes to encapsulate graph context.</a:t>
+            </a:r>
+          </a:p>
+          <a:p>
+            <a:pPr marL="285750" indent="-285750">
+              <a:buFont typeface="Arial" panose="020B0604020202020204" pitchFamily="34" charset="0"/>
+              <a:buChar char="•"/>
+            </a:pPr>
+            <a:endParaRPr lang="en-US" dirty="0"/>
+          </a:p>
+          <a:p>
+            <a:pPr marL="285750" indent="-285750">
+              <a:buFont typeface="Arial" panose="020B0604020202020204" pitchFamily="34" charset="0"/>
+              <a:buChar char="•"/>
+            </a:pPr>
+            <a:endParaRPr lang="en-US" dirty="0"/>
+          </a:p>
+          <a:p>
+            <a:pPr marL="285750" indent="-285750">
+              <a:buFont typeface="Arial" panose="020B0604020202020204" pitchFamily="34" charset="0"/>
+              <a:buChar char="•"/>
+            </a:pPr>
+            <a:r>
+              <a:rPr lang="en-US" dirty="0"/>
+              <a:t>However, this might seem to cause a loss of high-order heuristic learning, and high</a:t>
+            </a:r>
+          </a:p>
+          <a:p>
+            <a:r>
+              <a:rPr lang="en-US" dirty="0"/>
+              <a:t>Order heuristics perform better than low order ones.</a:t>
+            </a:r>
+          </a:p>
+          <a:p>
+            <a:endParaRPr lang="en-US" dirty="0"/>
+          </a:p>
+          <a:p>
+            <a:endParaRPr lang="en-US" dirty="0"/>
+          </a:p>
+          <a:p>
+            <a:r>
+              <a:rPr lang="en-US" dirty="0"/>
+              <a:t>SEAL shows that high order heuristic can be sufficiently approximated by local enclosing subgraphs.</a:t>
+            </a:r>
+          </a:p>
+        </p:txBody>
+      </p:sp>
+      <p:sp>
+        <p:nvSpPr>
+          <p:cNvPr id="4" name="Slide Number Placeholder 3">
+            <a:extLst>
+              <a:ext uri="{FF2B5EF4-FFF2-40B4-BE49-F238E27FC236}">
+                <a16:creationId xmlns:a16="http://schemas.microsoft.com/office/drawing/2014/main" id="{AEAC905C-DC67-D1B4-9DB0-FA1C263F2B72}"/>
+              </a:ext>
+            </a:extLst>
+          </p:cNvPr>
+          <p:cNvSpPr>
+            <a:spLocks noGrp="1"/>
+          </p:cNvSpPr>
+          <p:nvPr>
+            <p:ph type="sldNum" sz="quarter" idx="12"/>
+          </p:nvPr>
+        </p:nvSpPr>
+        <p:spPr/>
+        <p:txBody>
+          <a:bodyPr/>
+          <a:lstStyle/>
+          <a:p>
+            <a:fld id="{673E80D0-5A67-47DD-9B76-4E24E60624C0}" type="slidenum">
+              <a:rPr lang="en-US" smtClean="0"/>
+              <a:t>7</a:t>
+            </a:fld>
+            <a:endParaRPr lang="en-US"/>
+          </a:p>
+        </p:txBody>
+      </p:sp>
+    </p:spTree>
+    <p:extLst>
+      <p:ext uri="{BB962C8B-B14F-4D97-AF65-F5344CB8AC3E}">
+        <p14:creationId xmlns:p14="http://schemas.microsoft.com/office/powerpoint/2010/main" val="1734133949"/>
+      </p:ext>
+    </p:extLst>
+  </p:cSld>
+  <p:clrMapOvr>
+    <a:masterClrMapping/>
+  </p:clrMapOvr>
+</p:sld>
+</file>
+
+<file path=ppt/slides/slide8.xml><?xml version="1.0" encoding="utf-8"?>
 <p:sld xmlns:a="http://schemas.openxmlformats.org/drawingml/2006/main" xmlns:r="http://schemas.openxmlformats.org/officeDocument/2006/relationships" xmlns:p="http://schemas.openxmlformats.org/presentationml/2006/main">
   <p:cSld>
     <p:spTree>
@@ -15072,6 +20595,35 @@
           </p:sp>
         </mc:Fallback>
       </mc:AlternateContent>
+      <p:sp>
+        <p:nvSpPr>
+          <p:cNvPr id="3" name="Slide Number Placeholder 2">
+            <a:extLst>
+              <a:ext uri="{FF2B5EF4-FFF2-40B4-BE49-F238E27FC236}">
+                <a16:creationId xmlns:a16="http://schemas.microsoft.com/office/drawing/2014/main" id="{FC9230F0-8046-AB74-2807-1D31FBDF6637}"/>
+              </a:ext>
+            </a:extLst>
+          </p:cNvPr>
+          <p:cNvSpPr>
+            <a:spLocks noGrp="1"/>
+          </p:cNvSpPr>
+          <p:nvPr>
+            <p:ph type="sldNum" sz="quarter" idx="12"/>
+          </p:nvPr>
+        </p:nvSpPr>
+        <p:spPr/>
+        <p:txBody>
+          <a:bodyPr/>
+          <a:lstStyle/>
+          <a:p>
+            <a:fld id="{673E80D0-5A67-47DD-9B76-4E24E60624C0}" type="slidenum">
+              <a:rPr lang="en-US" smtClean="0"/>
+              <a:t>8</a:t>
+            </a:fld>
+            <a:endParaRPr lang="en-US"/>
+          </a:p>
+        </p:txBody>
+      </p:sp>
     </p:spTree>
     <p:extLst>
       <p:ext uri="{BB962C8B-B14F-4D97-AF65-F5344CB8AC3E}">
@@ -15085,7 +20637,7 @@
 </p:sld>
 </file>
 
-<file path=ppt/slides/slide7.xml><?xml version="1.0" encoding="utf-8"?>
+<file path=ppt/slides/slide9.xml><?xml version="1.0" encoding="utf-8"?>
 <p:sld xmlns:a="http://schemas.openxmlformats.org/drawingml/2006/main" xmlns:r="http://schemas.openxmlformats.org/officeDocument/2006/relationships" xmlns:p="http://schemas.openxmlformats.org/presentationml/2006/main">
   <p:cSld>
     <p:spTree>
@@ -17504,3150 +23056,12 @@
           </p:sp>
         </mc:Fallback>
       </mc:AlternateContent>
-    </p:spTree>
-    <p:extLst>
-      <p:ext uri="{BB962C8B-B14F-4D97-AF65-F5344CB8AC3E}">
-        <p14:creationId xmlns:p14="http://schemas.microsoft.com/office/powerpoint/2010/main" val="563850765"/>
-      </p:ext>
-    </p:extLst>
-  </p:cSld>
-  <p:clrMapOvr>
-    <a:masterClrMapping/>
-  </p:clrMapOvr>
-</p:sld>
-</file>
-
-<file path=ppt/slides/slide8.xml><?xml version="1.0" encoding="utf-8"?>
-<p:sld xmlns:a="http://schemas.openxmlformats.org/drawingml/2006/main" xmlns:r="http://schemas.openxmlformats.org/officeDocument/2006/relationships" xmlns:p="http://schemas.openxmlformats.org/presentationml/2006/main">
-  <p:cSld>
-    <p:spTree>
-      <p:nvGrpSpPr>
-        <p:cNvPr id="1" name=""/>
-        <p:cNvGrpSpPr/>
-        <p:nvPr/>
-      </p:nvGrpSpPr>
-      <p:grpSpPr>
-        <a:xfrm>
-          <a:off x="0" y="0"/>
-          <a:ext cx="0" cy="0"/>
-          <a:chOff x="0" y="0"/>
-          <a:chExt cx="0" cy="0"/>
-        </a:xfrm>
-      </p:grpSpPr>
-      <mc:AlternateContent xmlns:mc="http://schemas.openxmlformats.org/markup-compatibility/2006" xmlns:a14="http://schemas.microsoft.com/office/drawing/2010/main">
-        <mc:Choice Requires="a14">
-          <p:sp>
-            <p:nvSpPr>
-              <p:cNvPr id="2" name="Title 1">
-                <a:extLst>
-                  <a:ext uri="{FF2B5EF4-FFF2-40B4-BE49-F238E27FC236}">
-                    <a16:creationId xmlns:a16="http://schemas.microsoft.com/office/drawing/2014/main" id="{A3BCBA83-9409-0509-9965-A9ADD1304CFC}"/>
-                  </a:ext>
-                </a:extLst>
-              </p:cNvPr>
-              <p:cNvSpPr>
-                <a:spLocks noGrp="1"/>
-              </p:cNvSpPr>
-              <p:nvPr>
-                <p:ph type="title"/>
-              </p:nvPr>
-            </p:nvSpPr>
-            <p:spPr/>
-            <p:txBody>
-              <a:bodyPr/>
-              <a:lstStyle/>
-              <a:p>
-                <a:r>
-                  <a:rPr lang="en-US" dirty="0"/>
-                  <a:t>Proving that Katz index is </a:t>
-                </a:r>
-                <a14:m>
-                  <m:oMath xmlns:m="http://schemas.openxmlformats.org/officeDocument/2006/math">
-                    <m:r>
-                      <a:rPr lang="en-US" i="1" smtClean="0">
-                        <a:latin typeface="Cambria Math" panose="02040503050406030204" pitchFamily="18" charset="0"/>
-                        <a:ea typeface="Cambria Math" panose="02040503050406030204" pitchFamily="18" charset="0"/>
-                      </a:rPr>
-                      <m:t>𝛾</m:t>
-                    </m:r>
-                    <m:r>
-                      <a:rPr lang="en-US" b="0" i="1" smtClean="0">
-                        <a:latin typeface="Cambria Math" panose="02040503050406030204" pitchFamily="18" charset="0"/>
-                        <a:ea typeface="Cambria Math" panose="02040503050406030204" pitchFamily="18" charset="0"/>
-                      </a:rPr>
-                      <m:t>−</m:t>
-                    </m:r>
-                    <m:r>
-                      <a:rPr lang="en-US" b="0" i="1" smtClean="0">
-                        <a:latin typeface="Cambria Math" panose="02040503050406030204" pitchFamily="18" charset="0"/>
-                        <a:ea typeface="Cambria Math" panose="02040503050406030204" pitchFamily="18" charset="0"/>
-                      </a:rPr>
-                      <m:t>𝑑𝑒𝑐𝑎𝑦𝑖𝑛𝑔</m:t>
-                    </m:r>
-                  </m:oMath>
-                </a14:m>
-                <a:endParaRPr lang="en-US" dirty="0"/>
-              </a:p>
-            </p:txBody>
-          </p:sp>
-        </mc:Choice>
-        <mc:Fallback xmlns="">
-          <p:sp>
-            <p:nvSpPr>
-              <p:cNvPr id="2" name="Title 1">
-                <a:extLst>
-                  <a:ext uri="{FF2B5EF4-FFF2-40B4-BE49-F238E27FC236}">
-                    <a16:creationId xmlns:a16="http://schemas.microsoft.com/office/drawing/2014/main" id="{A3BCBA83-9409-0509-9965-A9ADD1304CFC}"/>
-                  </a:ext>
-                </a:extLst>
-              </p:cNvPr>
-              <p:cNvSpPr>
-                <a:spLocks noGrp="1" noRot="1" noChangeAspect="1" noMove="1" noResize="1" noEditPoints="1" noAdjustHandles="1" noChangeArrowheads="1" noChangeShapeType="1" noTextEdit="1"/>
-              </p:cNvSpPr>
-              <p:nvPr>
-                <p:ph type="title"/>
-              </p:nvPr>
-            </p:nvSpPr>
-            <p:spPr>
-              <a:blipFill>
-                <a:blip r:embed="rId2"/>
-                <a:stretch>
-                  <a:fillRect l="-2377"/>
-                </a:stretch>
-              </a:blipFill>
-            </p:spPr>
-            <p:txBody>
-              <a:bodyPr/>
-              <a:lstStyle/>
-              <a:p>
-                <a:r>
-                  <a:rPr lang="en-US">
-                    <a:noFill/>
-                  </a:rPr>
-                  <a:t> </a:t>
-                </a:r>
-              </a:p>
-            </p:txBody>
-          </p:sp>
-        </mc:Fallback>
-      </mc:AlternateContent>
-      <mc:AlternateContent xmlns:mc="http://schemas.openxmlformats.org/markup-compatibility/2006" xmlns:a14="http://schemas.microsoft.com/office/drawing/2010/main">
-        <mc:Choice Requires="a14">
-          <p:sp>
-            <p:nvSpPr>
-              <p:cNvPr id="3" name="TextBox 2">
-                <a:extLst>
-                  <a:ext uri="{FF2B5EF4-FFF2-40B4-BE49-F238E27FC236}">
-                    <a16:creationId xmlns:a16="http://schemas.microsoft.com/office/drawing/2014/main" id="{49E08EE0-1B5F-79C8-3FDE-03CC933AC366}"/>
-                  </a:ext>
-                </a:extLst>
-              </p:cNvPr>
-              <p:cNvSpPr txBox="1"/>
-              <p:nvPr/>
-            </p:nvSpPr>
-            <p:spPr>
-              <a:xfrm>
-                <a:off x="961053" y="1940767"/>
-                <a:ext cx="10207690" cy="4085670"/>
-              </a:xfrm>
-              <a:prstGeom prst="rect">
-                <a:avLst/>
-              </a:prstGeom>
-              <a:noFill/>
-            </p:spPr>
-            <p:txBody>
-              <a:bodyPr wrap="square" rtlCol="0">
-                <a:spAutoFit/>
-              </a:bodyPr>
-              <a:lstStyle/>
-              <a:p>
-                <a:pPr/>
-                <a14:m>
-                  <m:oMathPara xmlns:m="http://schemas.openxmlformats.org/officeDocument/2006/math">
-                    <m:oMathParaPr>
-                      <m:jc m:val="centerGroup"/>
-                    </m:oMathParaPr>
-                    <m:oMath xmlns:m="http://schemas.openxmlformats.org/officeDocument/2006/math">
-                      <m:r>
-                        <a:rPr lang="en-US" b="0" i="1" smtClean="0">
-                          <a:latin typeface="Cambria Math" panose="02040503050406030204" pitchFamily="18" charset="0"/>
-                        </a:rPr>
-                        <m:t>𝐾𝑎𝑡𝑧</m:t>
-                      </m:r>
-                      <m:r>
-                        <a:rPr lang="en-US" b="0" i="1" smtClean="0">
-                          <a:latin typeface="Cambria Math" panose="02040503050406030204" pitchFamily="18" charset="0"/>
-                        </a:rPr>
-                        <m:t> </m:t>
-                      </m:r>
-                      <m:r>
-                        <a:rPr lang="en-US" b="0" i="1" smtClean="0">
-                          <a:latin typeface="Cambria Math" panose="02040503050406030204" pitchFamily="18" charset="0"/>
-                        </a:rPr>
-                        <m:t>𝐼𝑛𝑑𝑒𝑥</m:t>
-                      </m:r>
-                      <m:r>
-                        <a:rPr lang="en-US" b="0" i="1" smtClean="0">
-                          <a:latin typeface="Cambria Math" panose="02040503050406030204" pitchFamily="18" charset="0"/>
-                        </a:rPr>
-                        <m:t> </m:t>
-                      </m:r>
-                      <m:r>
-                        <a:rPr lang="en-US" b="0" i="1" smtClean="0">
-                          <a:latin typeface="Cambria Math" panose="02040503050406030204" pitchFamily="18" charset="0"/>
-                        </a:rPr>
-                        <m:t>𝑖𝑠</m:t>
-                      </m:r>
-                      <m:r>
-                        <a:rPr lang="en-US" b="0" i="1" smtClean="0">
-                          <a:latin typeface="Cambria Math" panose="02040503050406030204" pitchFamily="18" charset="0"/>
-                        </a:rPr>
-                        <m:t> </m:t>
-                      </m:r>
-                      <m:r>
-                        <a:rPr lang="en-US" b="0" i="1" smtClean="0">
-                          <a:latin typeface="Cambria Math" panose="02040503050406030204" pitchFamily="18" charset="0"/>
-                        </a:rPr>
-                        <m:t>𝑑𝑒𝑓𝑖𝑛𝑒𝑑</m:t>
-                      </m:r>
-                      <m:r>
-                        <a:rPr lang="en-US" b="0" i="1" smtClean="0">
-                          <a:latin typeface="Cambria Math" panose="02040503050406030204" pitchFamily="18" charset="0"/>
-                        </a:rPr>
-                        <m:t> </m:t>
-                      </m:r>
-                      <m:r>
-                        <a:rPr lang="en-US" b="0" i="1" smtClean="0">
-                          <a:latin typeface="Cambria Math" panose="02040503050406030204" pitchFamily="18" charset="0"/>
-                        </a:rPr>
-                        <m:t>𝑎𝑠</m:t>
-                      </m:r>
-                      <m:r>
-                        <a:rPr lang="en-US" b="0" i="1" smtClean="0">
-                          <a:latin typeface="Cambria Math" panose="02040503050406030204" pitchFamily="18" charset="0"/>
-                        </a:rPr>
-                        <m:t> </m:t>
-                      </m:r>
-                      <m:sSub>
-                        <m:sSubPr>
-                          <m:ctrlPr>
-                            <a:rPr lang="en-US" b="0" i="1" smtClean="0">
-                              <a:latin typeface="Cambria Math" panose="02040503050406030204" pitchFamily="18" charset="0"/>
-                            </a:rPr>
-                          </m:ctrlPr>
-                        </m:sSubPr>
-                        <m:e>
-                          <m:r>
-                            <a:rPr lang="en-US" b="0" i="1" smtClean="0">
-                              <a:latin typeface="Cambria Math" panose="02040503050406030204" pitchFamily="18" charset="0"/>
-                            </a:rPr>
-                            <m:t>𝐾𝑎𝑡𝑧</m:t>
-                          </m:r>
-                        </m:e>
-                        <m:sub>
-                          <m:r>
-                            <a:rPr lang="en-US" b="0" i="1" smtClean="0">
-                              <a:latin typeface="Cambria Math" panose="02040503050406030204" pitchFamily="18" charset="0"/>
-                            </a:rPr>
-                            <m:t>𝑥</m:t>
-                          </m:r>
-                          <m:r>
-                            <a:rPr lang="en-US" b="0" i="1" smtClean="0">
-                              <a:latin typeface="Cambria Math" panose="02040503050406030204" pitchFamily="18" charset="0"/>
-                            </a:rPr>
-                            <m:t>,</m:t>
-                          </m:r>
-                          <m:r>
-                            <a:rPr lang="en-US" b="0" i="1" smtClean="0">
-                              <a:latin typeface="Cambria Math" panose="02040503050406030204" pitchFamily="18" charset="0"/>
-                            </a:rPr>
-                            <m:t>𝑦</m:t>
-                          </m:r>
-                        </m:sub>
-                      </m:sSub>
-                      <m:r>
-                        <a:rPr lang="en-US" b="0" i="1" smtClean="0">
-                          <a:latin typeface="Cambria Math" panose="02040503050406030204" pitchFamily="18" charset="0"/>
-                        </a:rPr>
-                        <m:t>=</m:t>
-                      </m:r>
-                      <m:nary>
-                        <m:naryPr>
-                          <m:chr m:val="∑"/>
-                          <m:ctrlPr>
-                            <a:rPr lang="en-US" b="0" i="1" smtClean="0">
-                              <a:latin typeface="Cambria Math" panose="02040503050406030204" pitchFamily="18" charset="0"/>
-                            </a:rPr>
-                          </m:ctrlPr>
-                        </m:naryPr>
-                        <m:sub>
-                          <m:r>
-                            <m:rPr>
-                              <m:brk m:alnAt="23"/>
-                            </m:rPr>
-                            <a:rPr lang="en-US" b="0" i="1" smtClean="0">
-                              <a:latin typeface="Cambria Math" panose="02040503050406030204" pitchFamily="18" charset="0"/>
-                            </a:rPr>
-                            <m:t>𝑙</m:t>
-                          </m:r>
-                          <m:r>
-                            <a:rPr lang="en-US" b="0" i="1" smtClean="0">
-                              <a:latin typeface="Cambria Math" panose="02040503050406030204" pitchFamily="18" charset="0"/>
-                            </a:rPr>
-                            <m:t>=1</m:t>
-                          </m:r>
-                        </m:sub>
-                        <m:sup>
-                          <m:r>
-                            <a:rPr lang="en-US" b="0" i="1" smtClean="0">
-                              <a:latin typeface="Cambria Math" panose="02040503050406030204" pitchFamily="18" charset="0"/>
-                              <a:ea typeface="Cambria Math" panose="02040503050406030204" pitchFamily="18" charset="0"/>
-                            </a:rPr>
-                            <m:t>∞</m:t>
-                          </m:r>
-                        </m:sup>
-                        <m:e>
-                          <m:sSup>
-                            <m:sSupPr>
-                              <m:ctrlPr>
-                                <a:rPr lang="en-US" b="0" i="1" smtClean="0">
-                                  <a:latin typeface="Cambria Math" panose="02040503050406030204" pitchFamily="18" charset="0"/>
-                                </a:rPr>
-                              </m:ctrlPr>
-                            </m:sSupPr>
-                            <m:e>
-                              <m:r>
-                                <a:rPr lang="en-US" b="0" i="1" smtClean="0">
-                                  <a:latin typeface="Cambria Math" panose="02040503050406030204" pitchFamily="18" charset="0"/>
-                                  <a:ea typeface="Cambria Math" panose="02040503050406030204" pitchFamily="18" charset="0"/>
-                                </a:rPr>
-                                <m:t>𝛽</m:t>
-                              </m:r>
-                            </m:e>
-                            <m:sup>
-                              <m:r>
-                                <a:rPr lang="en-US" b="0" i="1" smtClean="0">
-                                  <a:latin typeface="Cambria Math" panose="02040503050406030204" pitchFamily="18" charset="0"/>
-                                </a:rPr>
-                                <m:t>𝑙</m:t>
-                              </m:r>
-                            </m:sup>
-                          </m:sSup>
-                          <m:r>
-                            <a:rPr lang="en-US" b="0" i="1" smtClean="0">
-                              <a:latin typeface="Cambria Math" panose="02040503050406030204" pitchFamily="18" charset="0"/>
-                            </a:rPr>
-                            <m:t>|</m:t>
-                          </m:r>
-                          <m:sSup>
-                            <m:sSupPr>
-                              <m:ctrlPr>
-                                <a:rPr lang="en-US" b="0" i="1" smtClean="0">
-                                  <a:latin typeface="Cambria Math" panose="02040503050406030204" pitchFamily="18" charset="0"/>
-                                </a:rPr>
-                              </m:ctrlPr>
-                            </m:sSupPr>
-                            <m:e>
-                              <m:r>
-                                <a:rPr lang="en-US" b="0" i="1" smtClean="0">
-                                  <a:latin typeface="Cambria Math" panose="02040503050406030204" pitchFamily="18" charset="0"/>
-                                </a:rPr>
-                                <m:t>𝑤𝑎𝑙𝑘𝑠</m:t>
-                              </m:r>
-                            </m:e>
-                            <m:sup>
-                              <m:r>
-                                <a:rPr lang="en-US" b="0" i="1" smtClean="0">
-                                  <a:latin typeface="Cambria Math" panose="02040503050406030204" pitchFamily="18" charset="0"/>
-                                </a:rPr>
-                                <m:t>&lt;</m:t>
-                              </m:r>
-                              <m:r>
-                                <a:rPr lang="en-US" b="0" i="1" smtClean="0">
-                                  <a:latin typeface="Cambria Math" panose="02040503050406030204" pitchFamily="18" charset="0"/>
-                                </a:rPr>
-                                <m:t>𝑙</m:t>
-                              </m:r>
-                              <m:r>
-                                <a:rPr lang="en-US" b="0" i="1" smtClean="0">
-                                  <a:latin typeface="Cambria Math" panose="02040503050406030204" pitchFamily="18" charset="0"/>
-                                </a:rPr>
-                                <m:t>&gt;</m:t>
-                              </m:r>
-                            </m:sup>
-                          </m:sSup>
-                          <m:r>
-                            <a:rPr lang="en-US" b="0" i="1" smtClean="0">
-                              <a:latin typeface="Cambria Math" panose="02040503050406030204" pitchFamily="18" charset="0"/>
-                            </a:rPr>
-                            <m:t>(</m:t>
-                          </m:r>
-                          <m:r>
-                            <a:rPr lang="en-US" b="0" i="1" smtClean="0">
-                              <a:latin typeface="Cambria Math" panose="02040503050406030204" pitchFamily="18" charset="0"/>
-                            </a:rPr>
-                            <m:t>𝑥</m:t>
-                          </m:r>
-                          <m:r>
-                            <a:rPr lang="en-US" b="0" i="1" smtClean="0">
-                              <a:latin typeface="Cambria Math" panose="02040503050406030204" pitchFamily="18" charset="0"/>
-                            </a:rPr>
-                            <m:t>,</m:t>
-                          </m:r>
-                          <m:r>
-                            <a:rPr lang="en-US" b="0" i="1" smtClean="0">
-                              <a:latin typeface="Cambria Math" panose="02040503050406030204" pitchFamily="18" charset="0"/>
-                            </a:rPr>
-                            <m:t>𝑦</m:t>
-                          </m:r>
-                          <m:r>
-                            <a:rPr lang="en-US" b="0" i="1" smtClean="0">
-                              <a:latin typeface="Cambria Math" panose="02040503050406030204" pitchFamily="18" charset="0"/>
-                            </a:rPr>
-                            <m:t>)|</m:t>
-                          </m:r>
-                        </m:e>
-                      </m:nary>
-                      <m:r>
-                        <a:rPr lang="en-US" b="0" i="1" smtClean="0">
-                          <a:latin typeface="Cambria Math" panose="02040503050406030204" pitchFamily="18" charset="0"/>
-                        </a:rPr>
-                        <m:t>=</m:t>
-                      </m:r>
-                      <m:nary>
-                        <m:naryPr>
-                          <m:chr m:val="∑"/>
-                          <m:ctrlPr>
-                            <a:rPr lang="en-US" i="1">
-                              <a:latin typeface="Cambria Math" panose="02040503050406030204" pitchFamily="18" charset="0"/>
-                            </a:rPr>
-                          </m:ctrlPr>
-                        </m:naryPr>
-                        <m:sub>
-                          <m:r>
-                            <m:rPr>
-                              <m:brk m:alnAt="23"/>
-                            </m:rPr>
-                            <a:rPr lang="en-US" i="1">
-                              <a:latin typeface="Cambria Math" panose="02040503050406030204" pitchFamily="18" charset="0"/>
-                            </a:rPr>
-                            <m:t>𝑙</m:t>
-                          </m:r>
-                          <m:r>
-                            <a:rPr lang="en-US" i="1">
-                              <a:latin typeface="Cambria Math" panose="02040503050406030204" pitchFamily="18" charset="0"/>
-                            </a:rPr>
-                            <m:t>=1</m:t>
-                          </m:r>
-                        </m:sub>
-                        <m:sup>
-                          <m:r>
-                            <a:rPr lang="en-US" i="1">
-                              <a:latin typeface="Cambria Math" panose="02040503050406030204" pitchFamily="18" charset="0"/>
-                              <a:ea typeface="Cambria Math" panose="02040503050406030204" pitchFamily="18" charset="0"/>
-                            </a:rPr>
-                            <m:t>∞</m:t>
-                          </m:r>
-                        </m:sup>
-                        <m:e>
-                          <m:sSup>
-                            <m:sSupPr>
-                              <m:ctrlPr>
-                                <a:rPr lang="en-US" i="1">
-                                  <a:latin typeface="Cambria Math" panose="02040503050406030204" pitchFamily="18" charset="0"/>
-                                </a:rPr>
-                              </m:ctrlPr>
-                            </m:sSupPr>
-                            <m:e>
-                              <m:r>
-                                <a:rPr lang="en-US" i="1">
-                                  <a:latin typeface="Cambria Math" panose="02040503050406030204" pitchFamily="18" charset="0"/>
-                                  <a:ea typeface="Cambria Math" panose="02040503050406030204" pitchFamily="18" charset="0"/>
-                                </a:rPr>
-                                <m:t>𝛽</m:t>
-                              </m:r>
-                            </m:e>
-                            <m:sup>
-                              <m:r>
-                                <a:rPr lang="en-US" i="1">
-                                  <a:latin typeface="Cambria Math" panose="02040503050406030204" pitchFamily="18" charset="0"/>
-                                </a:rPr>
-                                <m:t>𝑙</m:t>
-                              </m:r>
-                            </m:sup>
-                          </m:sSup>
-                          <m:r>
-                            <a:rPr lang="en-US" i="1">
-                              <a:latin typeface="Cambria Math" panose="02040503050406030204" pitchFamily="18" charset="0"/>
-                            </a:rPr>
-                            <m:t>|</m:t>
-                          </m:r>
-                          <m:sSup>
-                            <m:sSupPr>
-                              <m:ctrlPr>
-                                <a:rPr lang="en-US" i="1" smtClean="0">
-                                  <a:latin typeface="Cambria Math" panose="02040503050406030204" pitchFamily="18" charset="0"/>
-                                </a:rPr>
-                              </m:ctrlPr>
-                            </m:sSupPr>
-                            <m:e>
-                              <m:r>
-                                <a:rPr lang="en-US" b="0" i="1" smtClean="0">
-                                  <a:latin typeface="Cambria Math" panose="02040503050406030204" pitchFamily="18" charset="0"/>
-                                </a:rPr>
-                                <m:t>[</m:t>
-                              </m:r>
-                              <m:r>
-                                <a:rPr lang="en-US" b="0" i="1" smtClean="0">
-                                  <a:latin typeface="Cambria Math" panose="02040503050406030204" pitchFamily="18" charset="0"/>
-                                </a:rPr>
-                                <m:t>𝐴</m:t>
-                              </m:r>
-                            </m:e>
-                            <m:sup>
-                              <m:r>
-                                <a:rPr lang="en-US" i="1">
-                                  <a:latin typeface="Cambria Math" panose="02040503050406030204" pitchFamily="18" charset="0"/>
-                                </a:rPr>
-                                <m:t>𝑙</m:t>
-                              </m:r>
-                            </m:sup>
-                          </m:sSup>
-                          <m:r>
-                            <a:rPr lang="en-US" b="0" i="1" smtClean="0">
-                              <a:latin typeface="Cambria Math" panose="02040503050406030204" pitchFamily="18" charset="0"/>
-                            </a:rPr>
-                            <m:t>]</m:t>
-                          </m:r>
-                          <m:r>
-                            <a:rPr lang="en-US" i="1">
-                              <a:latin typeface="Cambria Math" panose="02040503050406030204" pitchFamily="18" charset="0"/>
-                            </a:rPr>
-                            <m:t>(</m:t>
-                          </m:r>
-                          <m:r>
-                            <a:rPr lang="en-US" i="1">
-                              <a:latin typeface="Cambria Math" panose="02040503050406030204" pitchFamily="18" charset="0"/>
-                            </a:rPr>
-                            <m:t>𝑥</m:t>
-                          </m:r>
-                          <m:r>
-                            <a:rPr lang="en-US" i="1">
-                              <a:latin typeface="Cambria Math" panose="02040503050406030204" pitchFamily="18" charset="0"/>
-                            </a:rPr>
-                            <m:t>,</m:t>
-                          </m:r>
-                          <m:r>
-                            <a:rPr lang="en-US" i="1">
-                              <a:latin typeface="Cambria Math" panose="02040503050406030204" pitchFamily="18" charset="0"/>
-                            </a:rPr>
-                            <m:t>𝑦</m:t>
-                          </m:r>
-                          <m:r>
-                            <a:rPr lang="en-US" i="1">
-                              <a:latin typeface="Cambria Math" panose="02040503050406030204" pitchFamily="18" charset="0"/>
-                            </a:rPr>
-                            <m:t>)|</m:t>
-                          </m:r>
-                        </m:e>
-                      </m:nary>
-                      <m:r>
-                        <a:rPr lang="en-US" b="0" i="1" smtClean="0">
-                          <a:latin typeface="Cambria Math" panose="02040503050406030204" pitchFamily="18" charset="0"/>
-                        </a:rPr>
-                        <m:t> </m:t>
-                      </m:r>
-                      <m:r>
-                        <a:rPr lang="en-US" b="0" i="1" smtClean="0">
-                          <a:latin typeface="Cambria Math" panose="02040503050406030204" pitchFamily="18" charset="0"/>
-                        </a:rPr>
-                        <m:t>𝑤h𝑒𝑟𝑒</m:t>
-                      </m:r>
-                      <m:r>
-                        <a:rPr lang="en-US" b="0" i="1" smtClean="0">
-                          <a:latin typeface="Cambria Math" panose="02040503050406030204" pitchFamily="18" charset="0"/>
-                        </a:rPr>
-                        <m:t>, </m:t>
-                      </m:r>
-                      <m:sSup>
-                        <m:sSupPr>
-                          <m:ctrlPr>
-                            <a:rPr lang="en-US" i="1">
-                              <a:latin typeface="Cambria Math" panose="02040503050406030204" pitchFamily="18" charset="0"/>
-                            </a:rPr>
-                          </m:ctrlPr>
-                        </m:sSupPr>
-                        <m:e>
-                          <m:r>
-                            <a:rPr lang="en-US" i="1">
-                              <a:latin typeface="Cambria Math" panose="02040503050406030204" pitchFamily="18" charset="0"/>
-                            </a:rPr>
-                            <m:t>𝑤𝑎𝑙𝑘𝑠</m:t>
-                          </m:r>
-                        </m:e>
-                        <m:sup>
-                          <m:r>
-                            <a:rPr lang="en-US" i="1">
-                              <a:latin typeface="Cambria Math" panose="02040503050406030204" pitchFamily="18" charset="0"/>
-                            </a:rPr>
-                            <m:t>&lt;</m:t>
-                          </m:r>
-                          <m:r>
-                            <a:rPr lang="en-US" i="1">
-                              <a:latin typeface="Cambria Math" panose="02040503050406030204" pitchFamily="18" charset="0"/>
-                            </a:rPr>
-                            <m:t>𝑙</m:t>
-                          </m:r>
-                          <m:r>
-                            <a:rPr lang="en-US" i="1">
-                              <a:latin typeface="Cambria Math" panose="02040503050406030204" pitchFamily="18" charset="0"/>
-                            </a:rPr>
-                            <m:t>&gt;</m:t>
-                          </m:r>
-                        </m:sup>
-                      </m:sSup>
-                      <m:d>
-                        <m:dPr>
-                          <m:ctrlPr>
-                            <a:rPr lang="en-US" i="1">
-                              <a:latin typeface="Cambria Math" panose="02040503050406030204" pitchFamily="18" charset="0"/>
-                            </a:rPr>
-                          </m:ctrlPr>
-                        </m:dPr>
-                        <m:e>
-                          <m:r>
-                            <a:rPr lang="en-US" i="1">
-                              <a:latin typeface="Cambria Math" panose="02040503050406030204" pitchFamily="18" charset="0"/>
-                            </a:rPr>
-                            <m:t>𝑥</m:t>
-                          </m:r>
-                          <m:r>
-                            <a:rPr lang="en-US" i="1">
-                              <a:latin typeface="Cambria Math" panose="02040503050406030204" pitchFamily="18" charset="0"/>
-                            </a:rPr>
-                            <m:t>,</m:t>
-                          </m:r>
-                          <m:r>
-                            <a:rPr lang="en-US" i="1">
-                              <a:latin typeface="Cambria Math" panose="02040503050406030204" pitchFamily="18" charset="0"/>
-                            </a:rPr>
-                            <m:t>𝑦</m:t>
-                          </m:r>
-                        </m:e>
-                      </m:d>
-                    </m:oMath>
-                  </m:oMathPara>
-                </a14:m>
-                <a:endParaRPr lang="en-US" dirty="0"/>
-              </a:p>
-              <a:p>
-                <a:pPr/>
-                <a14:m>
-                  <m:oMathPara xmlns:m="http://schemas.openxmlformats.org/officeDocument/2006/math">
-                    <m:oMathParaPr>
-                      <m:jc m:val="centerGroup"/>
-                    </m:oMathParaPr>
-                    <m:oMath xmlns:m="http://schemas.openxmlformats.org/officeDocument/2006/math">
-                      <m:r>
-                        <a:rPr lang="en-US" b="0" i="1" smtClean="0">
-                          <a:latin typeface="Cambria Math" panose="02040503050406030204" pitchFamily="18" charset="0"/>
-                        </a:rPr>
-                        <m:t>𝑖𝑠</m:t>
-                      </m:r>
-                      <m:r>
-                        <a:rPr lang="en-US" b="0" i="1" smtClean="0">
-                          <a:latin typeface="Cambria Math" panose="02040503050406030204" pitchFamily="18" charset="0"/>
-                        </a:rPr>
-                        <m:t> </m:t>
-                      </m:r>
-                      <m:r>
-                        <a:rPr lang="en-US" b="0" i="1" smtClean="0">
-                          <a:latin typeface="Cambria Math" panose="02040503050406030204" pitchFamily="18" charset="0"/>
-                        </a:rPr>
-                        <m:t>𝑡h𝑒</m:t>
-                      </m:r>
-                      <m:r>
-                        <a:rPr lang="en-US" b="0" i="1" smtClean="0">
-                          <a:latin typeface="Cambria Math" panose="02040503050406030204" pitchFamily="18" charset="0"/>
-                        </a:rPr>
-                        <m:t> </m:t>
-                      </m:r>
-                      <m:r>
-                        <a:rPr lang="en-US" b="0" i="1" smtClean="0">
-                          <a:latin typeface="Cambria Math" panose="02040503050406030204" pitchFamily="18" charset="0"/>
-                        </a:rPr>
-                        <m:t>𝑠𝑒𝑡</m:t>
-                      </m:r>
-                      <m:r>
-                        <a:rPr lang="en-US" b="0" i="1" smtClean="0">
-                          <a:latin typeface="Cambria Math" panose="02040503050406030204" pitchFamily="18" charset="0"/>
-                        </a:rPr>
-                        <m:t> </m:t>
-                      </m:r>
-                      <m:r>
-                        <a:rPr lang="en-US" b="0" i="1" smtClean="0">
-                          <a:latin typeface="Cambria Math" panose="02040503050406030204" pitchFamily="18" charset="0"/>
-                        </a:rPr>
-                        <m:t>𝑜𝑓</m:t>
-                      </m:r>
-                      <m:r>
-                        <a:rPr lang="en-US" b="0" i="1" smtClean="0">
-                          <a:latin typeface="Cambria Math" panose="02040503050406030204" pitchFamily="18" charset="0"/>
-                        </a:rPr>
-                        <m:t> </m:t>
-                      </m:r>
-                      <m:r>
-                        <a:rPr lang="en-US" b="0" i="1" smtClean="0">
-                          <a:latin typeface="Cambria Math" panose="02040503050406030204" pitchFamily="18" charset="0"/>
-                        </a:rPr>
-                        <m:t>𝑙𝑒𝑛𝑔𝑡h</m:t>
-                      </m:r>
-                      <m:r>
-                        <a:rPr lang="en-US" b="0" i="1" smtClean="0">
-                          <a:latin typeface="Cambria Math" panose="02040503050406030204" pitchFamily="18" charset="0"/>
-                        </a:rPr>
-                        <m:t> </m:t>
-                      </m:r>
-                      <m:r>
-                        <a:rPr lang="en-US" b="0" i="1" smtClean="0">
-                          <a:latin typeface="Cambria Math" panose="02040503050406030204" pitchFamily="18" charset="0"/>
-                        </a:rPr>
-                        <m:t>𝑙</m:t>
-                      </m:r>
-                      <m:r>
-                        <a:rPr lang="en-US" b="0" i="1" smtClean="0">
-                          <a:latin typeface="Cambria Math" panose="02040503050406030204" pitchFamily="18" charset="0"/>
-                        </a:rPr>
-                        <m:t> </m:t>
-                      </m:r>
-                      <m:r>
-                        <a:rPr lang="en-US" b="0" i="1" smtClean="0">
-                          <a:latin typeface="Cambria Math" panose="02040503050406030204" pitchFamily="18" charset="0"/>
-                        </a:rPr>
-                        <m:t>𝑤𝑎𝑙𝑘𝑠</m:t>
-                      </m:r>
-                      <m:r>
-                        <a:rPr lang="en-US" b="0" i="1" smtClean="0">
-                          <a:latin typeface="Cambria Math" panose="02040503050406030204" pitchFamily="18" charset="0"/>
-                        </a:rPr>
-                        <m:t> </m:t>
-                      </m:r>
-                      <m:r>
-                        <a:rPr lang="en-US" b="0" i="1" smtClean="0">
-                          <a:latin typeface="Cambria Math" panose="02040503050406030204" pitchFamily="18" charset="0"/>
-                        </a:rPr>
-                        <m:t>𝑏𝑒𝑡𝑤𝑒𝑒𝑛</m:t>
-                      </m:r>
-                      <m:r>
-                        <a:rPr lang="en-US" b="0" i="1" smtClean="0">
-                          <a:latin typeface="Cambria Math" panose="02040503050406030204" pitchFamily="18" charset="0"/>
-                        </a:rPr>
-                        <m:t> </m:t>
-                      </m:r>
-                      <m:r>
-                        <a:rPr lang="en-US" b="0" i="1" smtClean="0">
-                          <a:latin typeface="Cambria Math" panose="02040503050406030204" pitchFamily="18" charset="0"/>
-                        </a:rPr>
-                        <m:t>𝑥</m:t>
-                      </m:r>
-                      <m:r>
-                        <a:rPr lang="en-US" b="0" i="1" smtClean="0">
-                          <a:latin typeface="Cambria Math" panose="02040503050406030204" pitchFamily="18" charset="0"/>
-                        </a:rPr>
-                        <m:t> &amp; </m:t>
-                      </m:r>
-                      <m:r>
-                        <a:rPr lang="en-US" b="0" i="1" smtClean="0">
-                          <a:latin typeface="Cambria Math" panose="02040503050406030204" pitchFamily="18" charset="0"/>
-                        </a:rPr>
-                        <m:t>𝑦</m:t>
-                      </m:r>
-                      <m:r>
-                        <a:rPr lang="en-US" b="0" i="1" smtClean="0">
-                          <a:latin typeface="Cambria Math" panose="02040503050406030204" pitchFamily="18" charset="0"/>
-                        </a:rPr>
-                        <m:t>, </m:t>
-                      </m:r>
-                      <m:r>
-                        <a:rPr lang="en-US" b="0" i="1" smtClean="0">
-                          <a:latin typeface="Cambria Math" panose="02040503050406030204" pitchFamily="18" charset="0"/>
-                        </a:rPr>
-                        <m:t>𝑎𝑛𝑑</m:t>
-                      </m:r>
-                      <m:r>
-                        <a:rPr lang="en-US" b="0" i="1" smtClean="0">
-                          <a:latin typeface="Cambria Math" panose="02040503050406030204" pitchFamily="18" charset="0"/>
-                        </a:rPr>
-                        <m:t> </m:t>
-                      </m:r>
-                      <m:sSup>
-                        <m:sSupPr>
-                          <m:ctrlPr>
-                            <a:rPr lang="en-US" b="0" i="1" smtClean="0">
-                              <a:latin typeface="Cambria Math" panose="02040503050406030204" pitchFamily="18" charset="0"/>
-                            </a:rPr>
-                          </m:ctrlPr>
-                        </m:sSupPr>
-                        <m:e>
-                          <m:r>
-                            <a:rPr lang="en-US" b="0" i="1" smtClean="0">
-                              <a:latin typeface="Cambria Math" panose="02040503050406030204" pitchFamily="18" charset="0"/>
-                            </a:rPr>
-                            <m:t>𝐴</m:t>
-                          </m:r>
-                        </m:e>
-                        <m:sup>
-                          <m:r>
-                            <a:rPr lang="en-US" b="0" i="1" smtClean="0">
-                              <a:latin typeface="Cambria Math" panose="02040503050406030204" pitchFamily="18" charset="0"/>
-                            </a:rPr>
-                            <m:t>𝑙</m:t>
-                          </m:r>
-                        </m:sup>
-                      </m:sSup>
-                      <m:r>
-                        <a:rPr lang="en-US" b="0" i="1" smtClean="0">
-                          <a:latin typeface="Cambria Math" panose="02040503050406030204" pitchFamily="18" charset="0"/>
-                        </a:rPr>
-                        <m:t> </m:t>
-                      </m:r>
-                      <m:r>
-                        <a:rPr lang="en-US" b="0" i="1" smtClean="0">
-                          <a:latin typeface="Cambria Math" panose="02040503050406030204" pitchFamily="18" charset="0"/>
-                        </a:rPr>
-                        <m:t>𝑖𝑠</m:t>
-                      </m:r>
-                      <m:r>
-                        <a:rPr lang="en-US" b="0" i="1" smtClean="0">
-                          <a:latin typeface="Cambria Math" panose="02040503050406030204" pitchFamily="18" charset="0"/>
-                        </a:rPr>
-                        <m:t> </m:t>
-                      </m:r>
-                      <m:r>
-                        <a:rPr lang="en-US" b="0" i="1" smtClean="0">
-                          <a:latin typeface="Cambria Math" panose="02040503050406030204" pitchFamily="18" charset="0"/>
-                        </a:rPr>
-                        <m:t>𝑡h𝑒</m:t>
-                      </m:r>
-                      <m:r>
-                        <a:rPr lang="en-US" b="0" i="1" smtClean="0">
-                          <a:latin typeface="Cambria Math" panose="02040503050406030204" pitchFamily="18" charset="0"/>
-                        </a:rPr>
-                        <m:t> </m:t>
-                      </m:r>
-                      <m:r>
-                        <a:rPr lang="en-US" b="0" i="1" smtClean="0">
-                          <a:latin typeface="Cambria Math" panose="02040503050406030204" pitchFamily="18" charset="0"/>
-                        </a:rPr>
-                        <m:t>𝑎𝑑𝑗𝑎𝑐𝑒𝑛𝑐𝑦</m:t>
-                      </m:r>
-                      <m:r>
-                        <a:rPr lang="en-US" b="0" i="1" smtClean="0">
-                          <a:latin typeface="Cambria Math" panose="02040503050406030204" pitchFamily="18" charset="0"/>
-                        </a:rPr>
-                        <m:t> </m:t>
-                      </m:r>
-                      <m:r>
-                        <a:rPr lang="en-US" b="0" i="1" smtClean="0">
-                          <a:latin typeface="Cambria Math" panose="02040503050406030204" pitchFamily="18" charset="0"/>
-                        </a:rPr>
-                        <m:t>𝑚𝑎𝑡𝑟𝑖𝑥</m:t>
-                      </m:r>
-                      <m:r>
-                        <a:rPr lang="en-US" b="0" i="1" smtClean="0">
-                          <a:latin typeface="Cambria Math" panose="02040503050406030204" pitchFamily="18" charset="0"/>
-                        </a:rPr>
-                        <m:t> </m:t>
-                      </m:r>
-                      <m:r>
-                        <a:rPr lang="en-US" b="0" i="1" smtClean="0">
-                          <a:latin typeface="Cambria Math" panose="02040503050406030204" pitchFamily="18" charset="0"/>
-                        </a:rPr>
-                        <m:t>𝑡𝑜</m:t>
-                      </m:r>
-                      <m:r>
-                        <a:rPr lang="en-US" b="0" i="1" smtClean="0">
-                          <a:latin typeface="Cambria Math" panose="02040503050406030204" pitchFamily="18" charset="0"/>
-                        </a:rPr>
-                        <m:t> </m:t>
-                      </m:r>
-                      <m:r>
-                        <a:rPr lang="en-US" b="0" i="1" smtClean="0">
-                          <a:latin typeface="Cambria Math" panose="02040503050406030204" pitchFamily="18" charset="0"/>
-                        </a:rPr>
-                        <m:t>𝑡h𝑒</m:t>
-                      </m:r>
-                      <m:r>
-                        <a:rPr lang="en-US" b="0" i="1" smtClean="0">
-                          <a:latin typeface="Cambria Math" panose="02040503050406030204" pitchFamily="18" charset="0"/>
-                        </a:rPr>
-                        <m:t> </m:t>
-                      </m:r>
-                      <m:r>
-                        <a:rPr lang="en-US" b="0" i="1" smtClean="0">
-                          <a:latin typeface="Cambria Math" panose="02040503050406030204" pitchFamily="18" charset="0"/>
-                        </a:rPr>
-                        <m:t>𝑙𝑡h</m:t>
-                      </m:r>
-                      <m:r>
-                        <a:rPr lang="en-US" b="0" i="1" smtClean="0">
-                          <a:latin typeface="Cambria Math" panose="02040503050406030204" pitchFamily="18" charset="0"/>
-                        </a:rPr>
-                        <m:t> </m:t>
-                      </m:r>
-                      <m:r>
-                        <a:rPr lang="en-US" b="0" i="1" smtClean="0">
-                          <a:latin typeface="Cambria Math" panose="02040503050406030204" pitchFamily="18" charset="0"/>
-                        </a:rPr>
-                        <m:t>𝑝𝑜𝑤𝑒𝑟</m:t>
-                      </m:r>
-                    </m:oMath>
-                  </m:oMathPara>
-                </a14:m>
-                <a:endParaRPr lang="en-US" b="0" dirty="0"/>
-              </a:p>
-              <a:p>
-                <a:pPr/>
-                <a14:m>
-                  <m:oMathPara xmlns:m="http://schemas.openxmlformats.org/officeDocument/2006/math">
-                    <m:oMathParaPr>
-                      <m:jc m:val="left"/>
-                    </m:oMathParaPr>
-                    <m:oMath xmlns:m="http://schemas.openxmlformats.org/officeDocument/2006/math">
-                      <m:r>
-                        <a:rPr lang="en-US" b="0" i="1" smtClean="0">
-                          <a:latin typeface="Cambria Math" panose="02040503050406030204" pitchFamily="18" charset="0"/>
-                        </a:rPr>
-                        <m:t>𝐿𝑒𝑚𝑚𝑎</m:t>
-                      </m:r>
-                      <m:r>
-                        <a:rPr lang="en-US" b="0" i="1" smtClean="0">
-                          <a:latin typeface="Cambria Math" panose="02040503050406030204" pitchFamily="18" charset="0"/>
-                        </a:rPr>
-                        <m:t>:</m:t>
-                      </m:r>
-                      <m:r>
-                        <a:rPr lang="en-US" b="0" i="1" smtClean="0">
-                          <a:latin typeface="Cambria Math" panose="02040503050406030204" pitchFamily="18" charset="0"/>
-                        </a:rPr>
-                        <m:t>𝐴𝑛𝑦</m:t>
-                      </m:r>
-                      <m:r>
-                        <a:rPr lang="en-US" b="0" i="1" smtClean="0">
-                          <a:latin typeface="Cambria Math" panose="02040503050406030204" pitchFamily="18" charset="0"/>
-                        </a:rPr>
-                        <m:t> </m:t>
-                      </m:r>
-                      <m:r>
-                        <a:rPr lang="en-US" b="0" i="1" smtClean="0">
-                          <a:latin typeface="Cambria Math" panose="02040503050406030204" pitchFamily="18" charset="0"/>
-                        </a:rPr>
-                        <m:t>𝑤𝑎𝑙𝑘</m:t>
-                      </m:r>
-                      <m:r>
-                        <a:rPr lang="en-US" b="0" i="1" smtClean="0">
-                          <a:latin typeface="Cambria Math" panose="02040503050406030204" pitchFamily="18" charset="0"/>
-                        </a:rPr>
-                        <m:t> </m:t>
-                      </m:r>
-                      <m:r>
-                        <a:rPr lang="en-US" b="0" i="1" smtClean="0">
-                          <a:latin typeface="Cambria Math" panose="02040503050406030204" pitchFamily="18" charset="0"/>
-                        </a:rPr>
-                        <m:t>𝑏𝑒𝑡𝑤𝑒𝑒𝑛</m:t>
-                      </m:r>
-                      <m:r>
-                        <a:rPr lang="en-US" b="0" i="1" smtClean="0">
-                          <a:latin typeface="Cambria Math" panose="02040503050406030204" pitchFamily="18" charset="0"/>
-                        </a:rPr>
-                        <m:t> </m:t>
-                      </m:r>
-                      <m:r>
-                        <a:rPr lang="en-US" b="0" i="1" smtClean="0">
-                          <a:latin typeface="Cambria Math" panose="02040503050406030204" pitchFamily="18" charset="0"/>
-                        </a:rPr>
-                        <m:t>𝑥</m:t>
-                      </m:r>
-                      <m:r>
-                        <a:rPr lang="en-US" b="0" i="1" smtClean="0">
-                          <a:latin typeface="Cambria Math" panose="02040503050406030204" pitchFamily="18" charset="0"/>
-                        </a:rPr>
-                        <m:t> &amp; </m:t>
-                      </m:r>
-                      <m:r>
-                        <a:rPr lang="en-US" b="0" i="1" smtClean="0">
-                          <a:latin typeface="Cambria Math" panose="02040503050406030204" pitchFamily="18" charset="0"/>
-                        </a:rPr>
-                        <m:t>𝑦</m:t>
-                      </m:r>
-                      <m:r>
-                        <a:rPr lang="en-US" b="0" i="1" smtClean="0">
-                          <a:latin typeface="Cambria Math" panose="02040503050406030204" pitchFamily="18" charset="0"/>
-                        </a:rPr>
-                        <m:t> </m:t>
-                      </m:r>
-                      <m:r>
-                        <a:rPr lang="en-US" b="0" i="1" smtClean="0">
-                          <a:latin typeface="Cambria Math" panose="02040503050406030204" pitchFamily="18" charset="0"/>
-                        </a:rPr>
-                        <m:t>𝑤𝑖𝑡h</m:t>
-                      </m:r>
-                      <m:r>
-                        <a:rPr lang="en-US" b="0" i="1" smtClean="0">
-                          <a:latin typeface="Cambria Math" panose="02040503050406030204" pitchFamily="18" charset="0"/>
-                        </a:rPr>
-                        <m:t> </m:t>
-                      </m:r>
-                      <m:r>
-                        <a:rPr lang="en-US" b="0" i="1" smtClean="0">
-                          <a:latin typeface="Cambria Math" panose="02040503050406030204" pitchFamily="18" charset="0"/>
-                        </a:rPr>
-                        <m:t>𝑙𝑒𝑛𝑔𝑡h</m:t>
-                      </m:r>
-                      <m:r>
-                        <a:rPr lang="en-US" b="0" i="1" smtClean="0">
-                          <a:latin typeface="Cambria Math" panose="02040503050406030204" pitchFamily="18" charset="0"/>
-                        </a:rPr>
-                        <m:t> </m:t>
-                      </m:r>
-                      <m:r>
-                        <a:rPr lang="en-US" b="0" i="1" smtClean="0">
-                          <a:latin typeface="Cambria Math" panose="02040503050406030204" pitchFamily="18" charset="0"/>
-                        </a:rPr>
-                        <m:t>𝑙</m:t>
-                      </m:r>
-                      <m:r>
-                        <a:rPr lang="en-US" b="0" i="1" smtClean="0">
-                          <a:latin typeface="Cambria Math" panose="02040503050406030204" pitchFamily="18" charset="0"/>
-                        </a:rPr>
-                        <m:t>≤2</m:t>
-                      </m:r>
-                      <m:r>
-                        <a:rPr lang="en-US" b="0" i="1" smtClean="0">
-                          <a:latin typeface="Cambria Math" panose="02040503050406030204" pitchFamily="18" charset="0"/>
-                        </a:rPr>
-                        <m:t>h</m:t>
-                      </m:r>
-                      <m:r>
-                        <a:rPr lang="en-US" b="0" i="1" smtClean="0">
-                          <a:latin typeface="Cambria Math" panose="02040503050406030204" pitchFamily="18" charset="0"/>
-                        </a:rPr>
-                        <m:t>+1 </m:t>
-                      </m:r>
-                      <m:r>
-                        <a:rPr lang="en-US" b="0" i="1" smtClean="0">
-                          <a:latin typeface="Cambria Math" panose="02040503050406030204" pitchFamily="18" charset="0"/>
-                        </a:rPr>
-                        <m:t>𝑖𝑠</m:t>
-                      </m:r>
-                      <m:r>
-                        <a:rPr lang="en-US" b="0" i="1" smtClean="0">
-                          <a:latin typeface="Cambria Math" panose="02040503050406030204" pitchFamily="18" charset="0"/>
-                        </a:rPr>
-                        <m:t> </m:t>
-                      </m:r>
-                      <m:r>
-                        <a:rPr lang="en-US" b="0" i="1" smtClean="0">
-                          <a:latin typeface="Cambria Math" panose="02040503050406030204" pitchFamily="18" charset="0"/>
-                        </a:rPr>
-                        <m:t>𝑖𝑛𝑐𝑙𝑢𝑑𝑒𝑑</m:t>
-                      </m:r>
-                      <m:r>
-                        <a:rPr lang="en-US" b="0" i="1" smtClean="0">
-                          <a:latin typeface="Cambria Math" panose="02040503050406030204" pitchFamily="18" charset="0"/>
-                        </a:rPr>
-                        <m:t> </m:t>
-                      </m:r>
-                      <m:r>
-                        <a:rPr lang="en-US" b="0" i="1" smtClean="0">
-                          <a:latin typeface="Cambria Math" panose="02040503050406030204" pitchFamily="18" charset="0"/>
-                        </a:rPr>
-                        <m:t>𝑖𝑛</m:t>
-                      </m:r>
-                      <m:r>
-                        <a:rPr lang="en-US" b="0" i="1" smtClean="0">
-                          <a:latin typeface="Cambria Math" panose="02040503050406030204" pitchFamily="18" charset="0"/>
-                        </a:rPr>
-                        <m:t> </m:t>
-                      </m:r>
-                      <m:sSubSup>
-                        <m:sSubSupPr>
-                          <m:ctrlPr>
-                            <a:rPr lang="en-US" b="0" i="1" smtClean="0">
-                              <a:latin typeface="Cambria Math" panose="02040503050406030204" pitchFamily="18" charset="0"/>
-                            </a:rPr>
-                          </m:ctrlPr>
-                        </m:sSubSupPr>
-                        <m:e>
-                          <m:r>
-                            <a:rPr lang="en-US" b="0" i="1" smtClean="0">
-                              <a:latin typeface="Cambria Math" panose="02040503050406030204" pitchFamily="18" charset="0"/>
-                            </a:rPr>
-                            <m:t>𝐺</m:t>
-                          </m:r>
-                        </m:e>
-                        <m:sub>
-                          <m:r>
-                            <a:rPr lang="en-US" b="0" i="1" smtClean="0">
-                              <a:latin typeface="Cambria Math" panose="02040503050406030204" pitchFamily="18" charset="0"/>
-                            </a:rPr>
-                            <m:t>𝑥</m:t>
-                          </m:r>
-                          <m:r>
-                            <a:rPr lang="en-US" b="0" i="1" smtClean="0">
-                              <a:latin typeface="Cambria Math" panose="02040503050406030204" pitchFamily="18" charset="0"/>
-                            </a:rPr>
-                            <m:t>,</m:t>
-                          </m:r>
-                          <m:r>
-                            <a:rPr lang="en-US" b="0" i="1" smtClean="0">
-                              <a:latin typeface="Cambria Math" panose="02040503050406030204" pitchFamily="18" charset="0"/>
-                            </a:rPr>
-                            <m:t>𝑦</m:t>
-                          </m:r>
-                        </m:sub>
-                        <m:sup>
-                          <m:r>
-                            <a:rPr lang="en-US" b="0" i="1" smtClean="0">
-                              <a:latin typeface="Cambria Math" panose="02040503050406030204" pitchFamily="18" charset="0"/>
-                            </a:rPr>
-                            <m:t>h</m:t>
-                          </m:r>
-                        </m:sup>
-                      </m:sSubSup>
-                    </m:oMath>
-                  </m:oMathPara>
-                </a14:m>
-                <a:endParaRPr lang="en-US" b="0" dirty="0"/>
-              </a:p>
-              <a:p>
-                <a:pPr/>
-                <a14:m>
-                  <m:oMathPara xmlns:m="http://schemas.openxmlformats.org/officeDocument/2006/math">
-                    <m:oMathParaPr>
-                      <m:jc m:val="left"/>
-                    </m:oMathParaPr>
-                    <m:oMath xmlns:m="http://schemas.openxmlformats.org/officeDocument/2006/math">
-                      <m:r>
-                        <a:rPr lang="en-US" b="0" i="1" smtClean="0">
-                          <a:latin typeface="Cambria Math" panose="02040503050406030204" pitchFamily="18" charset="0"/>
-                        </a:rPr>
-                        <m:t>𝑃𝑟𝑜𝑜𝑓</m:t>
-                      </m:r>
-                      <m:r>
-                        <a:rPr lang="en-US" b="0" i="1" smtClean="0">
-                          <a:latin typeface="Cambria Math" panose="02040503050406030204" pitchFamily="18" charset="0"/>
-                        </a:rPr>
-                        <m:t>:</m:t>
-                      </m:r>
-                      <m:r>
-                        <a:rPr lang="en-US" b="0" i="1" smtClean="0">
-                          <a:latin typeface="Cambria Math" panose="02040503050406030204" pitchFamily="18" charset="0"/>
-                        </a:rPr>
-                        <m:t>𝐿𝑒𝑡</m:t>
-                      </m:r>
-                      <m:r>
-                        <a:rPr lang="en-US" b="0" i="1" smtClean="0">
-                          <a:latin typeface="Cambria Math" panose="02040503050406030204" pitchFamily="18" charset="0"/>
-                        </a:rPr>
-                        <m:t> </m:t>
-                      </m:r>
-                      <m:r>
-                        <a:rPr lang="en-US" b="0" i="1" smtClean="0">
-                          <a:latin typeface="Cambria Math" panose="02040503050406030204" pitchFamily="18" charset="0"/>
-                        </a:rPr>
-                        <m:t>𝑤</m:t>
-                      </m:r>
-                      <m:r>
-                        <a:rPr lang="en-US" b="0" i="1" smtClean="0">
-                          <a:latin typeface="Cambria Math" panose="02040503050406030204" pitchFamily="18" charset="0"/>
-                        </a:rPr>
-                        <m:t>= &lt;</m:t>
-                      </m:r>
-                      <m:r>
-                        <a:rPr lang="en-US" b="0" i="1" smtClean="0">
-                          <a:latin typeface="Cambria Math" panose="02040503050406030204" pitchFamily="18" charset="0"/>
-                        </a:rPr>
-                        <m:t>𝑥</m:t>
-                      </m:r>
-                      <m:r>
-                        <a:rPr lang="en-US" b="0" i="1" smtClean="0">
-                          <a:latin typeface="Cambria Math" panose="02040503050406030204" pitchFamily="18" charset="0"/>
-                        </a:rPr>
-                        <m:t>,</m:t>
-                      </m:r>
-                      <m:sSub>
-                        <m:sSubPr>
-                          <m:ctrlPr>
-                            <a:rPr lang="en-US" b="0" i="1" smtClean="0">
-                              <a:latin typeface="Cambria Math" panose="02040503050406030204" pitchFamily="18" charset="0"/>
-                            </a:rPr>
-                          </m:ctrlPr>
-                        </m:sSubPr>
-                        <m:e>
-                          <m:r>
-                            <a:rPr lang="en-US" b="0" i="1" smtClean="0">
-                              <a:latin typeface="Cambria Math" panose="02040503050406030204" pitchFamily="18" charset="0"/>
-                            </a:rPr>
-                            <m:t>𝑣</m:t>
-                          </m:r>
-                        </m:e>
-                        <m:sub>
-                          <m:r>
-                            <a:rPr lang="en-US" b="0" i="1" smtClean="0">
-                              <a:latin typeface="Cambria Math" panose="02040503050406030204" pitchFamily="18" charset="0"/>
-                            </a:rPr>
-                            <m:t>1</m:t>
-                          </m:r>
-                        </m:sub>
-                      </m:sSub>
-                      <m:r>
-                        <a:rPr lang="en-US" b="0" i="1" smtClean="0">
-                          <a:latin typeface="Cambria Math" panose="02040503050406030204" pitchFamily="18" charset="0"/>
-                        </a:rPr>
-                        <m:t>,</m:t>
-                      </m:r>
-                      <m:sSub>
-                        <m:sSubPr>
-                          <m:ctrlPr>
-                            <a:rPr lang="en-US" i="1">
-                              <a:latin typeface="Cambria Math" panose="02040503050406030204" pitchFamily="18" charset="0"/>
-                            </a:rPr>
-                          </m:ctrlPr>
-                        </m:sSubPr>
-                        <m:e>
-                          <m:r>
-                            <a:rPr lang="en-US" i="1">
-                              <a:latin typeface="Cambria Math" panose="02040503050406030204" pitchFamily="18" charset="0"/>
-                            </a:rPr>
-                            <m:t>𝑣</m:t>
-                          </m:r>
-                        </m:e>
-                        <m:sub>
-                          <m:r>
-                            <a:rPr lang="en-US" b="0" i="1" smtClean="0">
-                              <a:latin typeface="Cambria Math" panose="02040503050406030204" pitchFamily="18" charset="0"/>
-                            </a:rPr>
-                            <m:t>2</m:t>
-                          </m:r>
-                        </m:sub>
-                      </m:sSub>
-                      <m:r>
-                        <a:rPr lang="en-US" b="0" i="1" smtClean="0">
-                          <a:latin typeface="Cambria Math" panose="02040503050406030204" pitchFamily="18" charset="0"/>
-                        </a:rPr>
-                        <m:t>,…,</m:t>
-                      </m:r>
-                      <m:sSub>
-                        <m:sSubPr>
-                          <m:ctrlPr>
-                            <a:rPr lang="en-US" i="1">
-                              <a:latin typeface="Cambria Math" panose="02040503050406030204" pitchFamily="18" charset="0"/>
-                            </a:rPr>
-                          </m:ctrlPr>
-                        </m:sSubPr>
-                        <m:e>
-                          <m:r>
-                            <a:rPr lang="en-US" i="1">
-                              <a:latin typeface="Cambria Math" panose="02040503050406030204" pitchFamily="18" charset="0"/>
-                            </a:rPr>
-                            <m:t>𝑣</m:t>
-                          </m:r>
-                        </m:e>
-                        <m:sub>
-                          <m:r>
-                            <a:rPr lang="en-US" b="0" i="1" smtClean="0">
-                              <a:latin typeface="Cambria Math" panose="02040503050406030204" pitchFamily="18" charset="0"/>
-                            </a:rPr>
-                            <m:t>𝑙</m:t>
-                          </m:r>
-                          <m:r>
-                            <a:rPr lang="en-US" b="0" i="1" smtClean="0">
-                              <a:latin typeface="Cambria Math" panose="02040503050406030204" pitchFamily="18" charset="0"/>
-                            </a:rPr>
-                            <m:t>−1</m:t>
-                          </m:r>
-                        </m:sub>
-                      </m:sSub>
-                      <m:r>
-                        <a:rPr lang="en-US" b="0" i="1" smtClean="0">
-                          <a:latin typeface="Cambria Math" panose="02040503050406030204" pitchFamily="18" charset="0"/>
-                        </a:rPr>
-                        <m:t>,</m:t>
-                      </m:r>
-                      <m:r>
-                        <a:rPr lang="en-US" b="0" i="1" smtClean="0">
-                          <a:latin typeface="Cambria Math" panose="02040503050406030204" pitchFamily="18" charset="0"/>
-                        </a:rPr>
-                        <m:t>𝑦</m:t>
-                      </m:r>
-                      <m:r>
-                        <a:rPr lang="en-US" b="0" i="1" smtClean="0">
-                          <a:latin typeface="Cambria Math" panose="02040503050406030204" pitchFamily="18" charset="0"/>
-                        </a:rPr>
-                        <m:t>&gt;</m:t>
-                      </m:r>
-                      <m:r>
-                        <a:rPr lang="en-US" b="0" i="1" smtClean="0">
-                          <a:latin typeface="Cambria Math" panose="02040503050406030204" pitchFamily="18" charset="0"/>
-                        </a:rPr>
-                        <m:t>𝑏𝑒</m:t>
-                      </m:r>
-                      <m:r>
-                        <a:rPr lang="en-US" b="0" i="1" smtClean="0">
-                          <a:latin typeface="Cambria Math" panose="02040503050406030204" pitchFamily="18" charset="0"/>
-                        </a:rPr>
-                        <m:t> </m:t>
-                      </m:r>
-                      <m:r>
-                        <a:rPr lang="en-US" b="0" i="1" smtClean="0">
-                          <a:latin typeface="Cambria Math" panose="02040503050406030204" pitchFamily="18" charset="0"/>
-                        </a:rPr>
-                        <m:t>𝑎</m:t>
-                      </m:r>
-                      <m:r>
-                        <a:rPr lang="en-US" b="0" i="1" smtClean="0">
-                          <a:latin typeface="Cambria Math" panose="02040503050406030204" pitchFamily="18" charset="0"/>
-                        </a:rPr>
-                        <m:t> </m:t>
-                      </m:r>
-                      <m:r>
-                        <a:rPr lang="en-US" b="0" i="1" smtClean="0">
-                          <a:latin typeface="Cambria Math" panose="02040503050406030204" pitchFamily="18" charset="0"/>
-                        </a:rPr>
-                        <m:t>𝑤𝑎𝑙𝑘</m:t>
-                      </m:r>
-                      <m:r>
-                        <a:rPr lang="en-US" b="0" i="1" smtClean="0">
-                          <a:latin typeface="Cambria Math" panose="02040503050406030204" pitchFamily="18" charset="0"/>
-                        </a:rPr>
-                        <m:t> </m:t>
-                      </m:r>
-                      <m:r>
-                        <a:rPr lang="en-US" b="0" i="1" smtClean="0">
-                          <a:latin typeface="Cambria Math" panose="02040503050406030204" pitchFamily="18" charset="0"/>
-                        </a:rPr>
-                        <m:t>𝑜𝑓</m:t>
-                      </m:r>
-                      <m:r>
-                        <a:rPr lang="en-US" b="0" i="1" smtClean="0">
-                          <a:latin typeface="Cambria Math" panose="02040503050406030204" pitchFamily="18" charset="0"/>
-                        </a:rPr>
-                        <m:t> </m:t>
-                      </m:r>
-                      <m:r>
-                        <a:rPr lang="en-US" b="0" i="1" smtClean="0">
-                          <a:latin typeface="Cambria Math" panose="02040503050406030204" pitchFamily="18" charset="0"/>
-                        </a:rPr>
-                        <m:t>𝑙𝑒𝑛𝑔𝑡h</m:t>
-                      </m:r>
-                      <m:r>
-                        <a:rPr lang="en-US" b="0" i="1" smtClean="0">
-                          <a:latin typeface="Cambria Math" panose="02040503050406030204" pitchFamily="18" charset="0"/>
-                        </a:rPr>
-                        <m:t> 2</m:t>
-                      </m:r>
-                      <m:r>
-                        <a:rPr lang="en-US" b="0" i="1" smtClean="0">
-                          <a:latin typeface="Cambria Math" panose="02040503050406030204" pitchFamily="18" charset="0"/>
-                        </a:rPr>
-                        <m:t>h</m:t>
-                      </m:r>
-                      <m:r>
-                        <a:rPr lang="en-US" b="0" i="1" smtClean="0">
-                          <a:latin typeface="Cambria Math" panose="02040503050406030204" pitchFamily="18" charset="0"/>
-                        </a:rPr>
-                        <m:t>+1, </m:t>
-                      </m:r>
-                      <m:r>
-                        <a:rPr lang="en-US" b="0" i="1" smtClean="0">
-                          <a:latin typeface="Cambria Math" panose="02040503050406030204" pitchFamily="18" charset="0"/>
-                        </a:rPr>
-                        <m:t>𝑠𝑜</m:t>
-                      </m:r>
-                      <m:r>
-                        <a:rPr lang="en-US" b="0" i="1" smtClean="0">
-                          <a:latin typeface="Cambria Math" panose="02040503050406030204" pitchFamily="18" charset="0"/>
-                        </a:rPr>
-                        <m:t>, </m:t>
-                      </m:r>
-                      <m:r>
-                        <a:rPr lang="en-US" b="0" i="1" smtClean="0">
-                          <a:latin typeface="Cambria Math" panose="02040503050406030204" pitchFamily="18" charset="0"/>
-                        </a:rPr>
-                        <m:t>𝑓𝑜𝑟</m:t>
-                      </m:r>
-                      <m:r>
-                        <a:rPr lang="en-US" b="0" i="1" smtClean="0">
-                          <a:latin typeface="Cambria Math" panose="02040503050406030204" pitchFamily="18" charset="0"/>
-                        </a:rPr>
-                        <m:t> </m:t>
-                      </m:r>
-                      <m:r>
-                        <a:rPr lang="en-US" b="0" i="1" smtClean="0">
-                          <a:latin typeface="Cambria Math" panose="02040503050406030204" pitchFamily="18" charset="0"/>
-                        </a:rPr>
-                        <m:t>𝑎𝑛𝑦</m:t>
-                      </m:r>
-                      <m:r>
-                        <a:rPr lang="en-US" b="0" i="1" smtClean="0">
-                          <a:latin typeface="Cambria Math" panose="02040503050406030204" pitchFamily="18" charset="0"/>
-                        </a:rPr>
-                        <m:t> </m:t>
-                      </m:r>
-                      <m:sSub>
-                        <m:sSubPr>
-                          <m:ctrlPr>
-                            <a:rPr lang="en-US" i="1">
-                              <a:latin typeface="Cambria Math" panose="02040503050406030204" pitchFamily="18" charset="0"/>
-                            </a:rPr>
-                          </m:ctrlPr>
-                        </m:sSubPr>
-                        <m:e>
-                          <m:r>
-                            <a:rPr lang="en-US" i="1">
-                              <a:latin typeface="Cambria Math" panose="02040503050406030204" pitchFamily="18" charset="0"/>
-                            </a:rPr>
-                            <m:t>𝑣</m:t>
-                          </m:r>
-                        </m:e>
-                        <m:sub>
-                          <m:r>
-                            <a:rPr lang="en-US" b="0" i="1" smtClean="0">
-                              <a:latin typeface="Cambria Math" panose="02040503050406030204" pitchFamily="18" charset="0"/>
-                            </a:rPr>
-                            <m:t>𝑖</m:t>
-                          </m:r>
-                        </m:sub>
-                      </m:sSub>
-                      <m:r>
-                        <a:rPr lang="en-US" i="1">
-                          <a:latin typeface="Cambria Math" panose="02040503050406030204" pitchFamily="18" charset="0"/>
-                          <a:ea typeface="Cambria Math" panose="02040503050406030204" pitchFamily="18" charset="0"/>
-                        </a:rPr>
-                        <m:t>∈</m:t>
-                      </m:r>
-                      <m:r>
-                        <a:rPr lang="en-US" b="0" i="1" smtClean="0">
-                          <a:latin typeface="Cambria Math" panose="02040503050406030204" pitchFamily="18" charset="0"/>
-                          <a:ea typeface="Cambria Math" panose="02040503050406030204" pitchFamily="18" charset="0"/>
-                        </a:rPr>
-                        <m:t>𝑤</m:t>
-                      </m:r>
-                      <m:r>
-                        <a:rPr lang="en-US" b="0" i="1" smtClean="0">
-                          <a:latin typeface="Cambria Math" panose="02040503050406030204" pitchFamily="18" charset="0"/>
-                          <a:ea typeface="Cambria Math" panose="02040503050406030204" pitchFamily="18" charset="0"/>
-                        </a:rPr>
-                        <m:t>, </m:t>
-                      </m:r>
-                      <m:r>
-                        <a:rPr lang="en-US" b="0" i="1" smtClean="0">
-                          <a:latin typeface="Cambria Math" panose="02040503050406030204" pitchFamily="18" charset="0"/>
-                          <a:ea typeface="Cambria Math" panose="02040503050406030204" pitchFamily="18" charset="0"/>
-                        </a:rPr>
-                        <m:t>𝑒𝑖𝑡h𝑒𝑟</m:t>
-                      </m:r>
-                      <m:r>
-                        <a:rPr lang="en-US" b="0" i="1" smtClean="0">
-                          <a:latin typeface="Cambria Math" panose="02040503050406030204" pitchFamily="18" charset="0"/>
-                          <a:ea typeface="Cambria Math" panose="02040503050406030204" pitchFamily="18" charset="0"/>
-                        </a:rPr>
-                        <m:t> </m:t>
-                      </m:r>
-                      <m:r>
-                        <a:rPr lang="en-US" b="0" i="1" smtClean="0">
-                          <a:latin typeface="Cambria Math" panose="02040503050406030204" pitchFamily="18" charset="0"/>
-                          <a:ea typeface="Cambria Math" panose="02040503050406030204" pitchFamily="18" charset="0"/>
-                        </a:rPr>
-                        <m:t>𝑑</m:t>
-                      </m:r>
-                      <m:d>
-                        <m:dPr>
-                          <m:ctrlPr>
-                            <a:rPr lang="en-US" b="0" i="1" smtClean="0">
-                              <a:latin typeface="Cambria Math" panose="02040503050406030204" pitchFamily="18" charset="0"/>
-                              <a:ea typeface="Cambria Math" panose="02040503050406030204" pitchFamily="18" charset="0"/>
-                            </a:rPr>
-                          </m:ctrlPr>
-                        </m:dPr>
-                        <m:e>
-                          <m:sSub>
-                            <m:sSubPr>
-                              <m:ctrlPr>
-                                <a:rPr lang="en-US" i="1">
-                                  <a:latin typeface="Cambria Math" panose="02040503050406030204" pitchFamily="18" charset="0"/>
-                                </a:rPr>
-                              </m:ctrlPr>
-                            </m:sSubPr>
-                            <m:e>
-                              <m:r>
-                                <a:rPr lang="en-US" i="1">
-                                  <a:latin typeface="Cambria Math" panose="02040503050406030204" pitchFamily="18" charset="0"/>
-                                </a:rPr>
-                                <m:t>𝑣</m:t>
-                              </m:r>
-                            </m:e>
-                            <m:sub>
-                              <m:r>
-                                <a:rPr lang="en-US" b="0" i="1" smtClean="0">
-                                  <a:latin typeface="Cambria Math" panose="02040503050406030204" pitchFamily="18" charset="0"/>
-                                </a:rPr>
-                                <m:t>𝑖</m:t>
-                              </m:r>
-                            </m:sub>
-                          </m:sSub>
-                          <m:r>
-                            <a:rPr lang="en-US" b="0" i="1" smtClean="0">
-                              <a:latin typeface="Cambria Math" panose="02040503050406030204" pitchFamily="18" charset="0"/>
-                            </a:rPr>
-                            <m:t>,</m:t>
-                          </m:r>
-                          <m:r>
-                            <a:rPr lang="en-US" b="0" i="1" smtClean="0">
-                              <a:latin typeface="Cambria Math" panose="02040503050406030204" pitchFamily="18" charset="0"/>
-                            </a:rPr>
-                            <m:t>𝑥</m:t>
-                          </m:r>
-                        </m:e>
-                      </m:d>
-                      <m:r>
-                        <a:rPr lang="en-US" b="0" i="1" smtClean="0">
-                          <a:latin typeface="Cambria Math" panose="02040503050406030204" pitchFamily="18" charset="0"/>
-                        </a:rPr>
-                        <m:t>≤</m:t>
-                      </m:r>
-                      <m:r>
-                        <a:rPr lang="en-US" b="0" i="1" smtClean="0">
-                          <a:latin typeface="Cambria Math" panose="02040503050406030204" pitchFamily="18" charset="0"/>
-                        </a:rPr>
-                        <m:t>h</m:t>
-                      </m:r>
-                      <m:r>
-                        <a:rPr lang="en-US" b="0" i="1" smtClean="0">
-                          <a:latin typeface="Cambria Math" panose="02040503050406030204" pitchFamily="18" charset="0"/>
-                        </a:rPr>
-                        <m:t> </m:t>
-                      </m:r>
-                      <m:r>
-                        <a:rPr lang="en-US" b="0" i="1" smtClean="0">
-                          <a:latin typeface="Cambria Math" panose="02040503050406030204" pitchFamily="18" charset="0"/>
-                        </a:rPr>
-                        <m:t>𝑜𝑟𝑑</m:t>
-                      </m:r>
-                      <m:d>
-                        <m:dPr>
-                          <m:ctrlPr>
-                            <a:rPr lang="en-US" i="1">
-                              <a:latin typeface="Cambria Math" panose="02040503050406030204" pitchFamily="18" charset="0"/>
-                              <a:ea typeface="Cambria Math" panose="02040503050406030204" pitchFamily="18" charset="0"/>
-                            </a:rPr>
-                          </m:ctrlPr>
-                        </m:dPr>
-                        <m:e>
-                          <m:sSub>
-                            <m:sSubPr>
-                              <m:ctrlPr>
-                                <a:rPr lang="en-US" i="1">
-                                  <a:latin typeface="Cambria Math" panose="02040503050406030204" pitchFamily="18" charset="0"/>
-                                </a:rPr>
-                              </m:ctrlPr>
-                            </m:sSubPr>
-                            <m:e>
-                              <m:r>
-                                <a:rPr lang="en-US" i="1">
-                                  <a:latin typeface="Cambria Math" panose="02040503050406030204" pitchFamily="18" charset="0"/>
-                                </a:rPr>
-                                <m:t>𝑣</m:t>
-                              </m:r>
-                            </m:e>
-                            <m:sub>
-                              <m:r>
-                                <a:rPr lang="en-US" i="1">
-                                  <a:latin typeface="Cambria Math" panose="02040503050406030204" pitchFamily="18" charset="0"/>
-                                </a:rPr>
-                                <m:t>𝑖</m:t>
-                              </m:r>
-                            </m:sub>
-                          </m:sSub>
-                          <m:r>
-                            <a:rPr lang="en-US" i="1">
-                              <a:latin typeface="Cambria Math" panose="02040503050406030204" pitchFamily="18" charset="0"/>
-                            </a:rPr>
-                            <m:t>,</m:t>
-                          </m:r>
-                          <m:r>
-                            <a:rPr lang="en-US" b="0" i="1" smtClean="0">
-                              <a:latin typeface="Cambria Math" panose="02040503050406030204" pitchFamily="18" charset="0"/>
-                            </a:rPr>
-                            <m:t>𝑦</m:t>
-                          </m:r>
-                        </m:e>
-                      </m:d>
-                      <m:r>
-                        <a:rPr lang="en-US" i="1">
-                          <a:latin typeface="Cambria Math" panose="02040503050406030204" pitchFamily="18" charset="0"/>
-                        </a:rPr>
-                        <m:t>≤</m:t>
-                      </m:r>
-                      <m:r>
-                        <a:rPr lang="en-US" i="1">
-                          <a:latin typeface="Cambria Math" panose="02040503050406030204" pitchFamily="18" charset="0"/>
-                        </a:rPr>
-                        <m:t>h</m:t>
-                      </m:r>
-                      <m:r>
-                        <a:rPr lang="en-US" b="0" i="1" smtClean="0">
-                          <a:latin typeface="Cambria Math" panose="02040503050406030204" pitchFamily="18" charset="0"/>
-                        </a:rPr>
-                        <m:t>, </m:t>
-                      </m:r>
-                      <m:r>
-                        <a:rPr lang="en-US" b="0" i="1" smtClean="0">
-                          <a:latin typeface="Cambria Math" panose="02040503050406030204" pitchFamily="18" charset="0"/>
-                        </a:rPr>
-                        <m:t>𝑎𝑛𝑑</m:t>
-                      </m:r>
-                      <m:r>
-                        <a:rPr lang="en-US" b="0" i="1" smtClean="0">
-                          <a:latin typeface="Cambria Math" panose="02040503050406030204" pitchFamily="18" charset="0"/>
-                        </a:rPr>
-                        <m:t> </m:t>
-                      </m:r>
-                      <m:r>
-                        <a:rPr lang="en-US" b="0" i="1" smtClean="0">
-                          <a:latin typeface="Cambria Math" panose="02040503050406030204" pitchFamily="18" charset="0"/>
-                        </a:rPr>
-                        <m:t>𝑡h𝑒𝑟𝑒𝑓𝑜𝑟𝑒</m:t>
-                      </m:r>
-                      <m:r>
-                        <a:rPr lang="en-US" b="0" i="1" smtClean="0">
-                          <a:latin typeface="Cambria Math" panose="02040503050406030204" pitchFamily="18" charset="0"/>
-                        </a:rPr>
-                        <m:t>,</m:t>
-                      </m:r>
-                      <m:sSub>
-                        <m:sSubPr>
-                          <m:ctrlPr>
-                            <a:rPr lang="en-US" i="1">
-                              <a:latin typeface="Cambria Math" panose="02040503050406030204" pitchFamily="18" charset="0"/>
-                            </a:rPr>
-                          </m:ctrlPr>
-                        </m:sSubPr>
-                        <m:e>
-                          <m:r>
-                            <a:rPr lang="en-US" i="1">
-                              <a:latin typeface="Cambria Math" panose="02040503050406030204" pitchFamily="18" charset="0"/>
-                            </a:rPr>
-                            <m:t>𝑣</m:t>
-                          </m:r>
-                        </m:e>
-                        <m:sub>
-                          <m:r>
-                            <a:rPr lang="en-US" i="1">
-                              <a:latin typeface="Cambria Math" panose="02040503050406030204" pitchFamily="18" charset="0"/>
-                            </a:rPr>
-                            <m:t>𝑖</m:t>
-                          </m:r>
-                        </m:sub>
-                      </m:sSub>
-                      <m:r>
-                        <a:rPr lang="en-US" i="1" smtClean="0">
-                          <a:latin typeface="Cambria Math" panose="02040503050406030204" pitchFamily="18" charset="0"/>
-                          <a:ea typeface="Cambria Math" panose="02040503050406030204" pitchFamily="18" charset="0"/>
-                        </a:rPr>
-                        <m:t>∈</m:t>
-                      </m:r>
-                      <m:d>
-                        <m:dPr>
-                          <m:begChr m:val="{"/>
-                          <m:endChr m:val="}"/>
-                          <m:ctrlPr>
-                            <a:rPr lang="en-US" b="0" i="1" smtClean="0">
-                              <a:latin typeface="Cambria Math" panose="02040503050406030204" pitchFamily="18" charset="0"/>
-                              <a:ea typeface="Cambria Math" panose="02040503050406030204" pitchFamily="18" charset="0"/>
-                            </a:rPr>
-                          </m:ctrlPr>
-                        </m:dPr>
-                        <m:e>
-                          <m:r>
-                            <a:rPr lang="en-US" b="0" i="1" smtClean="0">
-                              <a:latin typeface="Cambria Math" panose="02040503050406030204" pitchFamily="18" charset="0"/>
-                              <a:ea typeface="Cambria Math" panose="02040503050406030204" pitchFamily="18" charset="0"/>
-                            </a:rPr>
-                            <m:t>h</m:t>
-                          </m:r>
-                          <m:r>
-                            <a:rPr lang="en-US" b="0" i="1" smtClean="0">
-                              <a:latin typeface="Cambria Math" panose="02040503050406030204" pitchFamily="18" charset="0"/>
-                              <a:ea typeface="Cambria Math" panose="02040503050406030204" pitchFamily="18" charset="0"/>
-                            </a:rPr>
-                            <m:t>−</m:t>
-                          </m:r>
-                          <m:r>
-                            <a:rPr lang="en-US" b="0" i="1" smtClean="0">
-                              <a:latin typeface="Cambria Math" panose="02040503050406030204" pitchFamily="18" charset="0"/>
-                              <a:ea typeface="Cambria Math" panose="02040503050406030204" pitchFamily="18" charset="0"/>
-                            </a:rPr>
-                            <m:t>h𝑜𝑝</m:t>
-                          </m:r>
-                          <m:r>
-                            <a:rPr lang="en-US" b="0" i="1" smtClean="0">
-                              <a:latin typeface="Cambria Math" panose="02040503050406030204" pitchFamily="18" charset="0"/>
-                              <a:ea typeface="Cambria Math" panose="02040503050406030204" pitchFamily="18" charset="0"/>
-                            </a:rPr>
-                            <m:t> </m:t>
-                          </m:r>
-                          <m:r>
-                            <a:rPr lang="en-US" b="0" i="1" smtClean="0">
-                              <a:latin typeface="Cambria Math" panose="02040503050406030204" pitchFamily="18" charset="0"/>
-                              <a:ea typeface="Cambria Math" panose="02040503050406030204" pitchFamily="18" charset="0"/>
-                            </a:rPr>
-                            <m:t>𝑛𝑒𝑖𝑔h𝑏𝑜𝑟h𝑜𝑜𝑑</m:t>
-                          </m:r>
-                          <m:r>
-                            <a:rPr lang="en-US" b="0" i="1" smtClean="0">
-                              <a:latin typeface="Cambria Math" panose="02040503050406030204" pitchFamily="18" charset="0"/>
-                              <a:ea typeface="Cambria Math" panose="02040503050406030204" pitchFamily="18" charset="0"/>
-                            </a:rPr>
-                            <m:t> </m:t>
-                          </m:r>
-                          <m:r>
-                            <a:rPr lang="en-US" b="0" i="1" smtClean="0">
-                              <a:latin typeface="Cambria Math" panose="02040503050406030204" pitchFamily="18" charset="0"/>
-                              <a:ea typeface="Cambria Math" panose="02040503050406030204" pitchFamily="18" charset="0"/>
-                            </a:rPr>
-                            <m:t>𝑜𝑓</m:t>
-                          </m:r>
-                          <m:r>
-                            <a:rPr lang="en-US" b="0" i="1" smtClean="0">
-                              <a:latin typeface="Cambria Math" panose="02040503050406030204" pitchFamily="18" charset="0"/>
-                              <a:ea typeface="Cambria Math" panose="02040503050406030204" pitchFamily="18" charset="0"/>
-                            </a:rPr>
-                            <m:t> </m:t>
-                          </m:r>
-                          <m:r>
-                            <a:rPr lang="en-US" b="0" i="1" smtClean="0">
-                              <a:latin typeface="Cambria Math" panose="02040503050406030204" pitchFamily="18" charset="0"/>
-                              <a:ea typeface="Cambria Math" panose="02040503050406030204" pitchFamily="18" charset="0"/>
-                            </a:rPr>
-                            <m:t>𝑥</m:t>
-                          </m:r>
-                          <m:r>
-                            <a:rPr lang="en-US" b="0" i="1" smtClean="0">
-                              <a:latin typeface="Cambria Math" panose="02040503050406030204" pitchFamily="18" charset="0"/>
-                              <a:ea typeface="Cambria Math" panose="02040503050406030204" pitchFamily="18" charset="0"/>
-                            </a:rPr>
-                            <m:t> </m:t>
-                          </m:r>
-                          <m:r>
-                            <a:rPr lang="en-US" b="0" i="1" smtClean="0">
-                              <a:latin typeface="Cambria Math" panose="02040503050406030204" pitchFamily="18" charset="0"/>
-                              <a:ea typeface="Cambria Math" panose="02040503050406030204" pitchFamily="18" charset="0"/>
-                            </a:rPr>
-                            <m:t>𝑜𝑟</m:t>
-                          </m:r>
-                          <m:r>
-                            <a:rPr lang="en-US" b="0" i="1" smtClean="0">
-                              <a:latin typeface="Cambria Math" panose="02040503050406030204" pitchFamily="18" charset="0"/>
-                              <a:ea typeface="Cambria Math" panose="02040503050406030204" pitchFamily="18" charset="0"/>
-                            </a:rPr>
-                            <m:t> </m:t>
-                          </m:r>
-                          <m:r>
-                            <a:rPr lang="en-US" b="0" i="1" smtClean="0">
-                              <a:latin typeface="Cambria Math" panose="02040503050406030204" pitchFamily="18" charset="0"/>
-                              <a:ea typeface="Cambria Math" panose="02040503050406030204" pitchFamily="18" charset="0"/>
-                            </a:rPr>
-                            <m:t>𝑦</m:t>
-                          </m:r>
-                        </m:e>
-                      </m:d>
-                      <m:r>
-                        <a:rPr lang="en-US" b="0" i="1" smtClean="0">
-                          <a:latin typeface="Cambria Math" panose="02040503050406030204" pitchFamily="18" charset="0"/>
-                          <a:ea typeface="Cambria Math" panose="02040503050406030204" pitchFamily="18" charset="0"/>
-                        </a:rPr>
-                        <m:t> </m:t>
-                      </m:r>
-                      <m:r>
-                        <a:rPr lang="en-US" b="0" i="1" smtClean="0">
-                          <a:latin typeface="Cambria Math" panose="02040503050406030204" pitchFamily="18" charset="0"/>
-                          <a:ea typeface="Cambria Math" panose="02040503050406030204" pitchFamily="18" charset="0"/>
-                        </a:rPr>
-                        <m:t>𝑤h𝑖𝑐h</m:t>
-                      </m:r>
-                      <m:r>
-                        <a:rPr lang="en-US" b="0" i="1" smtClean="0">
-                          <a:latin typeface="Cambria Math" panose="02040503050406030204" pitchFamily="18" charset="0"/>
-                          <a:ea typeface="Cambria Math" panose="02040503050406030204" pitchFamily="18" charset="0"/>
-                        </a:rPr>
-                        <m:t> </m:t>
-                      </m:r>
-                      <m:r>
-                        <a:rPr lang="en-US" b="0" i="1" smtClean="0">
-                          <a:latin typeface="Cambria Math" panose="02040503050406030204" pitchFamily="18" charset="0"/>
-                          <a:ea typeface="Cambria Math" panose="02040503050406030204" pitchFamily="18" charset="0"/>
-                        </a:rPr>
-                        <m:t>𝑚𝑒𝑎𝑛𝑠</m:t>
-                      </m:r>
-                      <m:sSub>
-                        <m:sSubPr>
-                          <m:ctrlPr>
-                            <a:rPr lang="en-US" i="1">
-                              <a:latin typeface="Cambria Math" panose="02040503050406030204" pitchFamily="18" charset="0"/>
-                            </a:rPr>
-                          </m:ctrlPr>
-                        </m:sSubPr>
-                        <m:e>
-                          <m:r>
-                            <a:rPr lang="en-US" b="0" i="1" smtClean="0">
-                              <a:latin typeface="Cambria Math" panose="02040503050406030204" pitchFamily="18" charset="0"/>
-                            </a:rPr>
-                            <m:t> </m:t>
-                          </m:r>
-                          <m:r>
-                            <a:rPr lang="en-US" i="1">
-                              <a:latin typeface="Cambria Math" panose="02040503050406030204" pitchFamily="18" charset="0"/>
-                            </a:rPr>
-                            <m:t>𝑣</m:t>
-                          </m:r>
-                        </m:e>
-                        <m:sub>
-                          <m:r>
-                            <a:rPr lang="en-US" i="1">
-                              <a:latin typeface="Cambria Math" panose="02040503050406030204" pitchFamily="18" charset="0"/>
-                            </a:rPr>
-                            <m:t>𝑖</m:t>
-                          </m:r>
-                        </m:sub>
-                      </m:sSub>
-                      <m:r>
-                        <a:rPr lang="en-US" i="1" smtClean="0">
-                          <a:latin typeface="Cambria Math" panose="02040503050406030204" pitchFamily="18" charset="0"/>
-                          <a:ea typeface="Cambria Math" panose="02040503050406030204" pitchFamily="18" charset="0"/>
-                        </a:rPr>
-                        <m:t>∈</m:t>
-                      </m:r>
-                      <m:sSubSup>
-                        <m:sSubSupPr>
-                          <m:ctrlPr>
-                            <a:rPr lang="en-US" i="1">
-                              <a:latin typeface="Cambria Math" panose="02040503050406030204" pitchFamily="18" charset="0"/>
-                            </a:rPr>
-                          </m:ctrlPr>
-                        </m:sSubSupPr>
-                        <m:e>
-                          <m:r>
-                            <a:rPr lang="en-US" i="1">
-                              <a:latin typeface="Cambria Math" panose="02040503050406030204" pitchFamily="18" charset="0"/>
-                            </a:rPr>
-                            <m:t>𝐺</m:t>
-                          </m:r>
-                        </m:e>
-                        <m:sub>
-                          <m:r>
-                            <a:rPr lang="en-US" i="1">
-                              <a:latin typeface="Cambria Math" panose="02040503050406030204" pitchFamily="18" charset="0"/>
-                            </a:rPr>
-                            <m:t>𝑥</m:t>
-                          </m:r>
-                          <m:r>
-                            <a:rPr lang="en-US" i="1">
-                              <a:latin typeface="Cambria Math" panose="02040503050406030204" pitchFamily="18" charset="0"/>
-                            </a:rPr>
-                            <m:t>,</m:t>
-                          </m:r>
-                          <m:r>
-                            <a:rPr lang="en-US" i="1">
-                              <a:latin typeface="Cambria Math" panose="02040503050406030204" pitchFamily="18" charset="0"/>
-                            </a:rPr>
-                            <m:t>𝑦</m:t>
-                          </m:r>
-                        </m:sub>
-                        <m:sup>
-                          <m:r>
-                            <a:rPr lang="en-US" i="1">
-                              <a:latin typeface="Cambria Math" panose="02040503050406030204" pitchFamily="18" charset="0"/>
-                            </a:rPr>
-                            <m:t>h</m:t>
-                          </m:r>
-                        </m:sup>
-                      </m:sSubSup>
-                    </m:oMath>
-                  </m:oMathPara>
-                </a14:m>
-                <a:endParaRPr lang="en-US" b="0" dirty="0"/>
-              </a:p>
-              <a:p>
-                <a:pPr/>
-                <a14:m>
-                  <m:oMathPara xmlns:m="http://schemas.openxmlformats.org/officeDocument/2006/math">
-                    <m:oMathParaPr>
-                      <m:jc m:val="left"/>
-                    </m:oMathParaPr>
-                    <m:oMath xmlns:m="http://schemas.openxmlformats.org/officeDocument/2006/math">
-                      <m:r>
-                        <a:rPr lang="en-US" b="0" i="1" smtClean="0">
-                          <a:latin typeface="Cambria Math" panose="02040503050406030204" pitchFamily="18" charset="0"/>
-                        </a:rPr>
-                        <m:t>𝑆𝑒𝑡𝑡𝑖𝑛𝑔</m:t>
-                      </m:r>
-                      <m:r>
-                        <a:rPr lang="en-US" b="0" i="1" smtClean="0">
-                          <a:latin typeface="Cambria Math" panose="02040503050406030204" pitchFamily="18" charset="0"/>
-                        </a:rPr>
-                        <m:t> </m:t>
-                      </m:r>
-                      <m:r>
-                        <a:rPr lang="en-US" b="0" i="1" smtClean="0">
-                          <a:latin typeface="Cambria Math" panose="02040503050406030204" pitchFamily="18" charset="0"/>
-                          <a:ea typeface="Cambria Math" panose="02040503050406030204" pitchFamily="18" charset="0"/>
-                        </a:rPr>
-                        <m:t>𝛾</m:t>
-                      </m:r>
-                      <m:r>
-                        <a:rPr lang="en-US" b="0" i="1" smtClean="0">
-                          <a:latin typeface="Cambria Math" panose="02040503050406030204" pitchFamily="18" charset="0"/>
-                          <a:ea typeface="Cambria Math" panose="02040503050406030204" pitchFamily="18" charset="0"/>
-                        </a:rPr>
-                        <m:t>=</m:t>
-                      </m:r>
-                      <m:r>
-                        <a:rPr lang="en-US" b="0" i="1" smtClean="0">
-                          <a:latin typeface="Cambria Math" panose="02040503050406030204" pitchFamily="18" charset="0"/>
-                          <a:ea typeface="Cambria Math" panose="02040503050406030204" pitchFamily="18" charset="0"/>
-                        </a:rPr>
-                        <m:t>𝛽</m:t>
-                      </m:r>
-                      <m:r>
-                        <a:rPr lang="en-US" b="0" i="1" smtClean="0">
-                          <a:latin typeface="Cambria Math" panose="02040503050406030204" pitchFamily="18" charset="0"/>
-                          <a:ea typeface="Cambria Math" panose="02040503050406030204" pitchFamily="18" charset="0"/>
-                        </a:rPr>
-                        <m:t> &amp; </m:t>
-                      </m:r>
-                      <m:r>
-                        <a:rPr lang="en-US" b="0" i="1" smtClean="0">
-                          <a:latin typeface="Cambria Math" panose="02040503050406030204" pitchFamily="18" charset="0"/>
-                          <a:ea typeface="Cambria Math" panose="02040503050406030204" pitchFamily="18" charset="0"/>
-                        </a:rPr>
-                        <m:t>𝜂</m:t>
-                      </m:r>
-                      <m:r>
-                        <a:rPr lang="en-US" b="0" i="1" smtClean="0">
-                          <a:latin typeface="Cambria Math" panose="02040503050406030204" pitchFamily="18" charset="0"/>
-                          <a:ea typeface="Cambria Math" panose="02040503050406030204" pitchFamily="18" charset="0"/>
-                        </a:rPr>
-                        <m:t>=1 </m:t>
-                      </m:r>
-                      <m:r>
-                        <a:rPr lang="en-US" b="0" i="1" smtClean="0">
-                          <a:latin typeface="Cambria Math" panose="02040503050406030204" pitchFamily="18" charset="0"/>
-                          <a:ea typeface="Cambria Math" panose="02040503050406030204" pitchFamily="18" charset="0"/>
-                        </a:rPr>
-                        <m:t>𝑎𝑛𝑑</m:t>
-                      </m:r>
-                      <m:r>
-                        <a:rPr lang="en-US" b="0" i="1" smtClean="0">
-                          <a:latin typeface="Cambria Math" panose="02040503050406030204" pitchFamily="18" charset="0"/>
-                          <a:ea typeface="Cambria Math" panose="02040503050406030204" pitchFamily="18" charset="0"/>
-                        </a:rPr>
-                        <m:t> </m:t>
-                      </m:r>
-                      <m:r>
-                        <a:rPr lang="en-US" b="0" i="1" smtClean="0">
-                          <a:latin typeface="Cambria Math" panose="02040503050406030204" pitchFamily="18" charset="0"/>
-                          <a:ea typeface="Cambria Math" panose="02040503050406030204" pitchFamily="18" charset="0"/>
-                        </a:rPr>
-                        <m:t>𝑓</m:t>
-                      </m:r>
-                      <m:d>
-                        <m:dPr>
-                          <m:ctrlPr>
-                            <a:rPr lang="en-US" b="0" i="1" smtClean="0">
-                              <a:latin typeface="Cambria Math" panose="02040503050406030204" pitchFamily="18" charset="0"/>
-                              <a:ea typeface="Cambria Math" panose="02040503050406030204" pitchFamily="18" charset="0"/>
-                            </a:rPr>
-                          </m:ctrlPr>
-                        </m:dPr>
-                        <m:e>
-                          <m:r>
-                            <a:rPr lang="en-US" b="0" i="1" smtClean="0">
-                              <a:latin typeface="Cambria Math" panose="02040503050406030204" pitchFamily="18" charset="0"/>
-                              <a:ea typeface="Cambria Math" panose="02040503050406030204" pitchFamily="18" charset="0"/>
-                            </a:rPr>
-                            <m:t>𝑥</m:t>
-                          </m:r>
-                          <m:r>
-                            <a:rPr lang="en-US" b="0" i="1" smtClean="0">
-                              <a:latin typeface="Cambria Math" panose="02040503050406030204" pitchFamily="18" charset="0"/>
-                              <a:ea typeface="Cambria Math" panose="02040503050406030204" pitchFamily="18" charset="0"/>
-                            </a:rPr>
-                            <m:t>,</m:t>
-                          </m:r>
-                          <m:r>
-                            <a:rPr lang="en-US" b="0" i="1" smtClean="0">
-                              <a:latin typeface="Cambria Math" panose="02040503050406030204" pitchFamily="18" charset="0"/>
-                              <a:ea typeface="Cambria Math" panose="02040503050406030204" pitchFamily="18" charset="0"/>
-                            </a:rPr>
-                            <m:t>𝑦</m:t>
-                          </m:r>
-                          <m:r>
-                            <a:rPr lang="en-US" b="0" i="1" smtClean="0">
-                              <a:latin typeface="Cambria Math" panose="02040503050406030204" pitchFamily="18" charset="0"/>
-                              <a:ea typeface="Cambria Math" panose="02040503050406030204" pitchFamily="18" charset="0"/>
-                            </a:rPr>
-                            <m:t>,</m:t>
-                          </m:r>
-                          <m:r>
-                            <a:rPr lang="en-US" b="0" i="1" smtClean="0">
-                              <a:latin typeface="Cambria Math" panose="02040503050406030204" pitchFamily="18" charset="0"/>
-                              <a:ea typeface="Cambria Math" panose="02040503050406030204" pitchFamily="18" charset="0"/>
-                            </a:rPr>
-                            <m:t>𝑙</m:t>
-                          </m:r>
-                        </m:e>
-                      </m:d>
-                      <m:r>
-                        <a:rPr lang="en-US" b="0" i="1" smtClean="0">
-                          <a:latin typeface="Cambria Math" panose="02040503050406030204" pitchFamily="18" charset="0"/>
-                          <a:ea typeface="Cambria Math" panose="02040503050406030204" pitchFamily="18" charset="0"/>
-                        </a:rPr>
-                        <m:t>=</m:t>
-                      </m:r>
-                      <m:d>
-                        <m:dPr>
-                          <m:begChr m:val="|"/>
-                          <m:endChr m:val="|"/>
-                          <m:ctrlPr>
-                            <a:rPr lang="en-US" i="1">
-                              <a:latin typeface="Cambria Math" panose="02040503050406030204" pitchFamily="18" charset="0"/>
-                            </a:rPr>
-                          </m:ctrlPr>
-                        </m:dPr>
-                        <m:e>
-                          <m:sSup>
-                            <m:sSupPr>
-                              <m:ctrlPr>
-                                <a:rPr lang="en-US" i="1">
-                                  <a:latin typeface="Cambria Math" panose="02040503050406030204" pitchFamily="18" charset="0"/>
-                                </a:rPr>
-                              </m:ctrlPr>
-                            </m:sSupPr>
-                            <m:e>
-                              <m:r>
-                                <a:rPr lang="en-US" i="1">
-                                  <a:latin typeface="Cambria Math" panose="02040503050406030204" pitchFamily="18" charset="0"/>
-                                </a:rPr>
-                                <m:t>𝑤𝑎𝑙𝑘𝑠</m:t>
-                              </m:r>
-                            </m:e>
-                            <m:sup>
-                              <m:r>
-                                <a:rPr lang="en-US" i="1">
-                                  <a:latin typeface="Cambria Math" panose="02040503050406030204" pitchFamily="18" charset="0"/>
-                                </a:rPr>
-                                <m:t>&lt;</m:t>
-                              </m:r>
-                              <m:r>
-                                <a:rPr lang="en-US" i="1">
-                                  <a:latin typeface="Cambria Math" panose="02040503050406030204" pitchFamily="18" charset="0"/>
-                                </a:rPr>
-                                <m:t>𝑙</m:t>
-                              </m:r>
-                              <m:r>
-                                <a:rPr lang="en-US" i="1">
-                                  <a:latin typeface="Cambria Math" panose="02040503050406030204" pitchFamily="18" charset="0"/>
-                                </a:rPr>
-                                <m:t>&gt;</m:t>
-                              </m:r>
-                            </m:sup>
-                          </m:sSup>
-                          <m:d>
-                            <m:dPr>
-                              <m:ctrlPr>
-                                <a:rPr lang="en-US" i="1">
-                                  <a:latin typeface="Cambria Math" panose="02040503050406030204" pitchFamily="18" charset="0"/>
-                                </a:rPr>
-                              </m:ctrlPr>
-                            </m:dPr>
-                            <m:e>
-                              <m:r>
-                                <a:rPr lang="en-US" i="1">
-                                  <a:latin typeface="Cambria Math" panose="02040503050406030204" pitchFamily="18" charset="0"/>
-                                </a:rPr>
-                                <m:t>𝑥</m:t>
-                              </m:r>
-                              <m:r>
-                                <a:rPr lang="en-US" i="1">
-                                  <a:latin typeface="Cambria Math" panose="02040503050406030204" pitchFamily="18" charset="0"/>
-                                </a:rPr>
-                                <m:t>,</m:t>
-                              </m:r>
-                              <m:r>
-                                <a:rPr lang="en-US" i="1">
-                                  <a:latin typeface="Cambria Math" panose="02040503050406030204" pitchFamily="18" charset="0"/>
-                                </a:rPr>
-                                <m:t>𝑦</m:t>
-                              </m:r>
-                            </m:e>
-                          </m:d>
-                        </m:e>
-                      </m:d>
-                      <m:r>
-                        <a:rPr lang="en-US" b="0" i="1" smtClean="0">
-                          <a:latin typeface="Cambria Math" panose="02040503050406030204" pitchFamily="18" charset="0"/>
-                        </a:rPr>
-                        <m:t>, </m:t>
-                      </m:r>
-                      <m:r>
-                        <a:rPr lang="en-US" b="0" i="1" smtClean="0">
-                          <a:latin typeface="Cambria Math" panose="02040503050406030204" pitchFamily="18" charset="0"/>
-                        </a:rPr>
-                        <m:t>𝑏𝑦</m:t>
-                      </m:r>
-                      <m:r>
-                        <a:rPr lang="en-US" b="0" i="1" smtClean="0">
-                          <a:latin typeface="Cambria Math" panose="02040503050406030204" pitchFamily="18" charset="0"/>
-                        </a:rPr>
-                        <m:t> </m:t>
-                      </m:r>
-                      <m:r>
-                        <a:rPr lang="en-US" b="0" i="1" smtClean="0">
-                          <a:latin typeface="Cambria Math" panose="02040503050406030204" pitchFamily="18" charset="0"/>
-                        </a:rPr>
-                        <m:t>𝑙𝑒𝑚𝑚𝑎</m:t>
-                      </m:r>
-                      <m:r>
-                        <a:rPr lang="en-US" b="0" i="1" smtClean="0">
-                          <a:latin typeface="Cambria Math" panose="02040503050406030204" pitchFamily="18" charset="0"/>
-                        </a:rPr>
-                        <m:t>,  </m:t>
-                      </m:r>
-                      <m:d>
-                        <m:dPr>
-                          <m:begChr m:val="|"/>
-                          <m:endChr m:val="|"/>
-                          <m:ctrlPr>
-                            <a:rPr lang="en-US" i="1">
-                              <a:latin typeface="Cambria Math" panose="02040503050406030204" pitchFamily="18" charset="0"/>
-                            </a:rPr>
-                          </m:ctrlPr>
-                        </m:dPr>
-                        <m:e>
-                          <m:sSup>
-                            <m:sSupPr>
-                              <m:ctrlPr>
-                                <a:rPr lang="en-US" i="1">
-                                  <a:latin typeface="Cambria Math" panose="02040503050406030204" pitchFamily="18" charset="0"/>
-                                </a:rPr>
-                              </m:ctrlPr>
-                            </m:sSupPr>
-                            <m:e>
-                              <m:r>
-                                <a:rPr lang="en-US" i="1">
-                                  <a:latin typeface="Cambria Math" panose="02040503050406030204" pitchFamily="18" charset="0"/>
-                                </a:rPr>
-                                <m:t>𝑤𝑎𝑙𝑘𝑠</m:t>
-                              </m:r>
-                            </m:e>
-                            <m:sup>
-                              <m:r>
-                                <a:rPr lang="en-US" i="1">
-                                  <a:latin typeface="Cambria Math" panose="02040503050406030204" pitchFamily="18" charset="0"/>
-                                </a:rPr>
-                                <m:t>&lt;</m:t>
-                              </m:r>
-                              <m:r>
-                                <a:rPr lang="en-US" i="1">
-                                  <a:latin typeface="Cambria Math" panose="02040503050406030204" pitchFamily="18" charset="0"/>
-                                </a:rPr>
-                                <m:t>𝑙</m:t>
-                              </m:r>
-                              <m:r>
-                                <a:rPr lang="en-US" i="1">
-                                  <a:latin typeface="Cambria Math" panose="02040503050406030204" pitchFamily="18" charset="0"/>
-                                </a:rPr>
-                                <m:t>&gt;</m:t>
-                              </m:r>
-                            </m:sup>
-                          </m:sSup>
-                          <m:d>
-                            <m:dPr>
-                              <m:ctrlPr>
-                                <a:rPr lang="en-US" i="1">
-                                  <a:latin typeface="Cambria Math" panose="02040503050406030204" pitchFamily="18" charset="0"/>
-                                </a:rPr>
-                              </m:ctrlPr>
-                            </m:dPr>
-                            <m:e>
-                              <m:r>
-                                <a:rPr lang="en-US" i="1">
-                                  <a:latin typeface="Cambria Math" panose="02040503050406030204" pitchFamily="18" charset="0"/>
-                                </a:rPr>
-                                <m:t>𝑥</m:t>
-                              </m:r>
-                              <m:r>
-                                <a:rPr lang="en-US" i="1">
-                                  <a:latin typeface="Cambria Math" panose="02040503050406030204" pitchFamily="18" charset="0"/>
-                                </a:rPr>
-                                <m:t>,</m:t>
-                              </m:r>
-                              <m:r>
-                                <a:rPr lang="en-US" i="1">
-                                  <a:latin typeface="Cambria Math" panose="02040503050406030204" pitchFamily="18" charset="0"/>
-                                </a:rPr>
-                                <m:t>𝑦</m:t>
-                              </m:r>
-                            </m:e>
-                          </m:d>
-                        </m:e>
-                      </m:d>
-                      <m:r>
-                        <a:rPr lang="en-US" b="0" i="1" smtClean="0">
-                          <a:latin typeface="Cambria Math" panose="02040503050406030204" pitchFamily="18" charset="0"/>
-                        </a:rPr>
-                        <m:t> </m:t>
-                      </m:r>
-                      <m:r>
-                        <a:rPr lang="en-US" b="0" i="1" smtClean="0">
-                          <a:latin typeface="Cambria Math" panose="02040503050406030204" pitchFamily="18" charset="0"/>
-                        </a:rPr>
-                        <m:t>𝑖𝑠</m:t>
-                      </m:r>
-                      <m:r>
-                        <a:rPr lang="en-US" b="0" i="1" smtClean="0">
-                          <a:latin typeface="Cambria Math" panose="02040503050406030204" pitchFamily="18" charset="0"/>
-                        </a:rPr>
-                        <m:t> </m:t>
-                      </m:r>
-                      <m:r>
-                        <a:rPr lang="en-US" b="0" i="1" smtClean="0">
-                          <a:latin typeface="Cambria Math" panose="02040503050406030204" pitchFamily="18" charset="0"/>
-                        </a:rPr>
-                        <m:t>𝑐𝑎𝑙𝑐𝑢𝑙𝑎𝑏𝑙𝑒</m:t>
-                      </m:r>
-                      <m:r>
-                        <a:rPr lang="en-US" b="0" i="1" smtClean="0">
-                          <a:latin typeface="Cambria Math" panose="02040503050406030204" pitchFamily="18" charset="0"/>
-                        </a:rPr>
-                        <m:t> </m:t>
-                      </m:r>
-                      <m:r>
-                        <a:rPr lang="en-US" b="0" i="1" smtClean="0">
-                          <a:latin typeface="Cambria Math" panose="02040503050406030204" pitchFamily="18" charset="0"/>
-                        </a:rPr>
-                        <m:t>𝑓𝑟𝑜𝑚</m:t>
-                      </m:r>
-                      <m:sSubSup>
-                        <m:sSubSupPr>
-                          <m:ctrlPr>
-                            <a:rPr lang="en-US" i="1">
-                              <a:latin typeface="Cambria Math" panose="02040503050406030204" pitchFamily="18" charset="0"/>
-                            </a:rPr>
-                          </m:ctrlPr>
-                        </m:sSubSupPr>
-                        <m:e>
-                          <m:r>
-                            <a:rPr lang="en-US" b="0" i="1" smtClean="0">
-                              <a:latin typeface="Cambria Math" panose="02040503050406030204" pitchFamily="18" charset="0"/>
-                            </a:rPr>
-                            <m:t> </m:t>
-                          </m:r>
-                          <m:r>
-                            <a:rPr lang="en-US" i="1">
-                              <a:latin typeface="Cambria Math" panose="02040503050406030204" pitchFamily="18" charset="0"/>
-                            </a:rPr>
-                            <m:t>𝐺</m:t>
-                          </m:r>
-                        </m:e>
-                        <m:sub>
-                          <m:r>
-                            <a:rPr lang="en-US" i="1">
-                              <a:latin typeface="Cambria Math" panose="02040503050406030204" pitchFamily="18" charset="0"/>
-                            </a:rPr>
-                            <m:t>𝑥</m:t>
-                          </m:r>
-                          <m:r>
-                            <a:rPr lang="en-US" i="1">
-                              <a:latin typeface="Cambria Math" panose="02040503050406030204" pitchFamily="18" charset="0"/>
-                            </a:rPr>
-                            <m:t>,</m:t>
-                          </m:r>
-                          <m:r>
-                            <a:rPr lang="en-US" i="1">
-                              <a:latin typeface="Cambria Math" panose="02040503050406030204" pitchFamily="18" charset="0"/>
-                            </a:rPr>
-                            <m:t>𝑦</m:t>
-                          </m:r>
-                        </m:sub>
-                        <m:sup>
-                          <m:r>
-                            <a:rPr lang="en-US" i="1">
-                              <a:latin typeface="Cambria Math" panose="02040503050406030204" pitchFamily="18" charset="0"/>
-                            </a:rPr>
-                            <m:t>h</m:t>
-                          </m:r>
-                        </m:sup>
-                      </m:sSubSup>
-                      <m:r>
-                        <a:rPr lang="en-US" b="0" i="1" smtClean="0">
-                          <a:latin typeface="Cambria Math" panose="02040503050406030204" pitchFamily="18" charset="0"/>
-                        </a:rPr>
-                        <m:t> </m:t>
-                      </m:r>
-                      <m:r>
-                        <a:rPr lang="en-US" b="0" i="1" smtClean="0">
-                          <a:latin typeface="Cambria Math" panose="02040503050406030204" pitchFamily="18" charset="0"/>
-                        </a:rPr>
-                        <m:t>𝑎𝑛𝑑</m:t>
-                      </m:r>
-                      <m:r>
-                        <a:rPr lang="en-US" b="0" i="1" smtClean="0">
-                          <a:latin typeface="Cambria Math" panose="02040503050406030204" pitchFamily="18" charset="0"/>
-                        </a:rPr>
-                        <m:t> </m:t>
-                      </m:r>
-                      <m:r>
-                        <a:rPr lang="en-US" b="0" i="1" smtClean="0">
-                          <a:latin typeface="Cambria Math" panose="02040503050406030204" pitchFamily="18" charset="0"/>
-                        </a:rPr>
-                        <m:t>𝑠𝑜</m:t>
-                      </m:r>
-                      <m:r>
-                        <a:rPr lang="en-US" b="0" i="1" smtClean="0">
-                          <a:latin typeface="Cambria Math" panose="02040503050406030204" pitchFamily="18" charset="0"/>
-                        </a:rPr>
-                        <m:t> </m:t>
-                      </m:r>
-                      <m:r>
-                        <a:rPr lang="en-US" b="0" i="1" smtClean="0">
-                          <a:latin typeface="Cambria Math" panose="02040503050406030204" pitchFamily="18" charset="0"/>
-                        </a:rPr>
-                        <m:t>𝑖𝑡</m:t>
-                      </m:r>
-                      <m:r>
-                        <a:rPr lang="en-US" b="0" i="1" smtClean="0">
-                          <a:latin typeface="Cambria Math" panose="02040503050406030204" pitchFamily="18" charset="0"/>
-                        </a:rPr>
-                        <m:t> </m:t>
-                      </m:r>
-                      <m:r>
-                        <a:rPr lang="en-US" b="0" i="1" smtClean="0">
-                          <a:latin typeface="Cambria Math" panose="02040503050406030204" pitchFamily="18" charset="0"/>
-                        </a:rPr>
-                        <m:t>𝑠𝑎𝑡𝑖𝑠𝑓𝑖𝑒𝑠</m:t>
-                      </m:r>
-                      <m:r>
-                        <a:rPr lang="en-US" b="0" i="1" smtClean="0">
-                          <a:latin typeface="Cambria Math" panose="02040503050406030204" pitchFamily="18" charset="0"/>
-                        </a:rPr>
-                        <m:t> </m:t>
-                      </m:r>
-                      <m:r>
-                        <a:rPr lang="en-US" b="0" i="1" smtClean="0">
-                          <a:latin typeface="Cambria Math" panose="02040503050406030204" pitchFamily="18" charset="0"/>
-                        </a:rPr>
-                        <m:t>𝑝𝑟𝑜𝑝𝑒𝑟𝑡𝑦</m:t>
-                      </m:r>
-                      <m:r>
-                        <a:rPr lang="en-US" b="0" i="1" smtClean="0">
-                          <a:latin typeface="Cambria Math" panose="02040503050406030204" pitchFamily="18" charset="0"/>
-                        </a:rPr>
-                        <m:t> 2. </m:t>
-                      </m:r>
-                    </m:oMath>
-                  </m:oMathPara>
-                </a14:m>
-                <a:endParaRPr lang="en-US" b="0" i="1" dirty="0">
-                  <a:latin typeface="Cambria Math" panose="02040503050406030204" pitchFamily="18" charset="0"/>
-                </a:endParaRPr>
-              </a:p>
-              <a:p>
-                <a:pPr/>
-                <a14:m>
-                  <m:oMathPara xmlns:m="http://schemas.openxmlformats.org/officeDocument/2006/math">
-                    <m:oMathParaPr>
-                      <m:jc m:val="left"/>
-                    </m:oMathParaPr>
-                    <m:oMath xmlns:m="http://schemas.openxmlformats.org/officeDocument/2006/math">
-                      <m:r>
-                        <a:rPr lang="en-US" b="0" i="1" smtClean="0">
-                          <a:latin typeface="Cambria Math" panose="02040503050406030204" pitchFamily="18" charset="0"/>
-                        </a:rPr>
-                        <m:t>𝐼𝑡</m:t>
-                      </m:r>
-                      <m:r>
-                        <a:rPr lang="en-US" b="0" i="1" smtClean="0">
-                          <a:latin typeface="Cambria Math" panose="02040503050406030204" pitchFamily="18" charset="0"/>
-                        </a:rPr>
-                        <m:t> </m:t>
-                      </m:r>
-                      <m:r>
-                        <a:rPr lang="en-US" b="0" i="1" smtClean="0">
-                          <a:latin typeface="Cambria Math" panose="02040503050406030204" pitchFamily="18" charset="0"/>
-                        </a:rPr>
-                        <m:t>𝑠𝑎𝑡𝑖𝑠𝑓𝑖𝑒𝑠</m:t>
-                      </m:r>
-                      <m:r>
-                        <a:rPr lang="en-US" b="0" i="1" smtClean="0">
-                          <a:latin typeface="Cambria Math" panose="02040503050406030204" pitchFamily="18" charset="0"/>
-                        </a:rPr>
-                        <m:t> </m:t>
-                      </m:r>
-                      <m:r>
-                        <a:rPr lang="en-US" b="0" i="1" smtClean="0">
-                          <a:latin typeface="Cambria Math" panose="02040503050406030204" pitchFamily="18" charset="0"/>
-                        </a:rPr>
-                        <m:t>𝑝𝑟𝑜𝑝𝑒𝑟𝑡𝑦</m:t>
-                      </m:r>
-                      <m:r>
-                        <a:rPr lang="en-US" b="0" i="1" smtClean="0">
-                          <a:latin typeface="Cambria Math" panose="02040503050406030204" pitchFamily="18" charset="0"/>
-                        </a:rPr>
-                        <m:t> 1 </m:t>
-                      </m:r>
-                      <m:r>
-                        <a:rPr lang="en-US" b="0" i="1" smtClean="0">
-                          <a:latin typeface="Cambria Math" panose="02040503050406030204" pitchFamily="18" charset="0"/>
-                        </a:rPr>
-                        <m:t>𝑏𝑒𝑐𝑎𝑢𝑠𝑒</m:t>
-                      </m:r>
-                      <m:r>
-                        <a:rPr lang="en-US" b="0" i="1" smtClean="0">
-                          <a:latin typeface="Cambria Math" panose="02040503050406030204" pitchFamily="18" charset="0"/>
-                        </a:rPr>
-                        <m:t> </m:t>
-                      </m:r>
-                    </m:oMath>
-                  </m:oMathPara>
-                </a14:m>
-                <a:endParaRPr lang="en-US" b="0" dirty="0"/>
-              </a:p>
-              <a:p>
-                <a:pPr/>
-                <a14:m>
-                  <m:oMathPara xmlns:m="http://schemas.openxmlformats.org/officeDocument/2006/math">
-                    <m:oMathParaPr>
-                      <m:jc m:val="left"/>
-                    </m:oMathParaPr>
-                    <m:oMath xmlns:m="http://schemas.openxmlformats.org/officeDocument/2006/math">
-                      <m:d>
-                        <m:dPr>
-                          <m:begChr m:val="|"/>
-                          <m:endChr m:val="|"/>
-                          <m:ctrlPr>
-                            <a:rPr lang="en-US" b="0" i="1" smtClean="0">
-                              <a:latin typeface="Cambria Math" panose="02040503050406030204" pitchFamily="18" charset="0"/>
-                            </a:rPr>
-                          </m:ctrlPr>
-                        </m:dPr>
-                        <m:e>
-                          <m:sSup>
-                            <m:sSupPr>
-                              <m:ctrlPr>
-                                <a:rPr lang="en-US" i="1">
-                                  <a:latin typeface="Cambria Math" panose="02040503050406030204" pitchFamily="18" charset="0"/>
-                                </a:rPr>
-                              </m:ctrlPr>
-                            </m:sSupPr>
-                            <m:e>
-                              <m:r>
-                                <a:rPr lang="en-US" i="1">
-                                  <a:latin typeface="Cambria Math" panose="02040503050406030204" pitchFamily="18" charset="0"/>
-                                </a:rPr>
-                                <m:t>𝑤𝑎𝑙𝑘𝑠</m:t>
-                              </m:r>
-                            </m:e>
-                            <m:sup>
-                              <m:r>
-                                <a:rPr lang="en-US" i="1">
-                                  <a:latin typeface="Cambria Math" panose="02040503050406030204" pitchFamily="18" charset="0"/>
-                                </a:rPr>
-                                <m:t>&lt;</m:t>
-                              </m:r>
-                              <m:r>
-                                <a:rPr lang="en-US" i="1">
-                                  <a:latin typeface="Cambria Math" panose="02040503050406030204" pitchFamily="18" charset="0"/>
-                                </a:rPr>
-                                <m:t>𝑙</m:t>
-                              </m:r>
-                              <m:r>
-                                <a:rPr lang="en-US" i="1">
-                                  <a:latin typeface="Cambria Math" panose="02040503050406030204" pitchFamily="18" charset="0"/>
-                                </a:rPr>
-                                <m:t>&gt;</m:t>
-                              </m:r>
-                            </m:sup>
-                          </m:sSup>
-                          <m:d>
-                            <m:dPr>
-                              <m:ctrlPr>
-                                <a:rPr lang="en-US" i="1">
-                                  <a:latin typeface="Cambria Math" panose="02040503050406030204" pitchFamily="18" charset="0"/>
-                                </a:rPr>
-                              </m:ctrlPr>
-                            </m:dPr>
-                            <m:e>
-                              <m:r>
-                                <a:rPr lang="en-US" i="1">
-                                  <a:latin typeface="Cambria Math" panose="02040503050406030204" pitchFamily="18" charset="0"/>
-                                </a:rPr>
-                                <m:t>𝑥</m:t>
-                              </m:r>
-                              <m:r>
-                                <a:rPr lang="en-US" i="1">
-                                  <a:latin typeface="Cambria Math" panose="02040503050406030204" pitchFamily="18" charset="0"/>
-                                </a:rPr>
-                                <m:t>,</m:t>
-                              </m:r>
-                              <m:r>
-                                <a:rPr lang="en-US" i="1">
-                                  <a:latin typeface="Cambria Math" panose="02040503050406030204" pitchFamily="18" charset="0"/>
-                                </a:rPr>
-                                <m:t>𝑦</m:t>
-                              </m:r>
-                            </m:e>
-                          </m:d>
-                        </m:e>
-                      </m:d>
-                      <m:r>
-                        <a:rPr lang="en-US" b="0" i="1" smtClean="0">
-                          <a:latin typeface="Cambria Math" panose="02040503050406030204" pitchFamily="18" charset="0"/>
-                        </a:rPr>
-                        <m:t> </m:t>
-                      </m:r>
-                      <m:r>
-                        <a:rPr lang="en-US" b="0" i="1" smtClean="0">
-                          <a:latin typeface="Cambria Math" panose="02040503050406030204" pitchFamily="18" charset="0"/>
-                        </a:rPr>
-                        <m:t>𝑖𝑠</m:t>
-                      </m:r>
-                      <m:r>
-                        <a:rPr lang="en-US" b="0" i="1" smtClean="0">
-                          <a:latin typeface="Cambria Math" panose="02040503050406030204" pitchFamily="18" charset="0"/>
-                        </a:rPr>
-                        <m:t> </m:t>
-                      </m:r>
-                      <m:r>
-                        <a:rPr lang="en-US" b="0" i="1" smtClean="0">
-                          <a:latin typeface="Cambria Math" panose="02040503050406030204" pitchFamily="18" charset="0"/>
-                        </a:rPr>
-                        <m:t>𝑏𝑜𝑢𝑛𝑑𝑒𝑑</m:t>
-                      </m:r>
-                      <m:r>
-                        <a:rPr lang="en-US" b="0" i="1" smtClean="0">
-                          <a:latin typeface="Cambria Math" panose="02040503050406030204" pitchFamily="18" charset="0"/>
-                        </a:rPr>
-                        <m:t> </m:t>
-                      </m:r>
-                      <m:r>
-                        <a:rPr lang="en-US" b="0" i="1" smtClean="0">
-                          <a:latin typeface="Cambria Math" panose="02040503050406030204" pitchFamily="18" charset="0"/>
-                        </a:rPr>
-                        <m:t>𝑏𝑦</m:t>
-                      </m:r>
-                      <m:r>
-                        <a:rPr lang="en-US" b="0" i="1" smtClean="0">
-                          <a:latin typeface="Cambria Math" panose="02040503050406030204" pitchFamily="18" charset="0"/>
-                        </a:rPr>
-                        <m:t> </m:t>
-                      </m:r>
-                      <m:sSup>
-                        <m:sSupPr>
-                          <m:ctrlPr>
-                            <a:rPr lang="en-US" b="0" i="1" smtClean="0">
-                              <a:latin typeface="Cambria Math" panose="02040503050406030204" pitchFamily="18" charset="0"/>
-                            </a:rPr>
-                          </m:ctrlPr>
-                        </m:sSupPr>
-                        <m:e>
-                          <m:r>
-                            <a:rPr lang="en-US" b="0" i="1" smtClean="0">
-                              <a:latin typeface="Cambria Math" panose="02040503050406030204" pitchFamily="18" charset="0"/>
-                            </a:rPr>
-                            <m:t>𝑑</m:t>
-                          </m:r>
-                        </m:e>
-                        <m:sup>
-                          <m:r>
-                            <a:rPr lang="en-US" b="0" i="1" smtClean="0">
-                              <a:latin typeface="Cambria Math" panose="02040503050406030204" pitchFamily="18" charset="0"/>
-                            </a:rPr>
-                            <m:t>𝑙</m:t>
-                          </m:r>
-                        </m:sup>
-                      </m:sSup>
-                      <m:r>
-                        <a:rPr lang="en-US" b="0" i="1" smtClean="0">
-                          <a:latin typeface="Cambria Math" panose="02040503050406030204" pitchFamily="18" charset="0"/>
-                        </a:rPr>
-                        <m:t> </m:t>
-                      </m:r>
-                      <m:r>
-                        <a:rPr lang="en-US" b="0" i="1" smtClean="0">
-                          <a:latin typeface="Cambria Math" panose="02040503050406030204" pitchFamily="18" charset="0"/>
-                        </a:rPr>
-                        <m:t>𝑤h𝑒𝑟𝑒</m:t>
-                      </m:r>
-                      <m:r>
-                        <a:rPr lang="en-US" b="0" i="1" smtClean="0">
-                          <a:latin typeface="Cambria Math" panose="02040503050406030204" pitchFamily="18" charset="0"/>
-                        </a:rPr>
-                        <m:t> </m:t>
-                      </m:r>
-                      <m:r>
-                        <a:rPr lang="en-US" b="0" i="1" smtClean="0">
-                          <a:latin typeface="Cambria Math" panose="02040503050406030204" pitchFamily="18" charset="0"/>
-                        </a:rPr>
-                        <m:t>𝑑</m:t>
-                      </m:r>
-                      <m:r>
-                        <a:rPr lang="en-US" b="0" i="1" smtClean="0">
-                          <a:latin typeface="Cambria Math" panose="02040503050406030204" pitchFamily="18" charset="0"/>
-                        </a:rPr>
-                        <m:t> </m:t>
-                      </m:r>
-                      <m:r>
-                        <a:rPr lang="en-US" b="0" i="1" smtClean="0">
-                          <a:latin typeface="Cambria Math" panose="02040503050406030204" pitchFamily="18" charset="0"/>
-                        </a:rPr>
-                        <m:t>𝑖𝑠</m:t>
-                      </m:r>
-                      <m:r>
-                        <a:rPr lang="en-US" b="0" i="1" smtClean="0">
-                          <a:latin typeface="Cambria Math" panose="02040503050406030204" pitchFamily="18" charset="0"/>
-                        </a:rPr>
-                        <m:t> </m:t>
-                      </m:r>
-                      <m:r>
-                        <a:rPr lang="en-US" b="0" i="1" smtClean="0">
-                          <a:latin typeface="Cambria Math" panose="02040503050406030204" pitchFamily="18" charset="0"/>
-                        </a:rPr>
-                        <m:t>𝑡h𝑒</m:t>
-                      </m:r>
-                      <m:r>
-                        <a:rPr lang="en-US" b="0" i="1" smtClean="0">
-                          <a:latin typeface="Cambria Math" panose="02040503050406030204" pitchFamily="18" charset="0"/>
-                        </a:rPr>
-                        <m:t> </m:t>
-                      </m:r>
-                      <m:r>
-                        <a:rPr lang="en-US" b="0" i="1" smtClean="0">
-                          <a:latin typeface="Cambria Math" panose="02040503050406030204" pitchFamily="18" charset="0"/>
-                        </a:rPr>
-                        <m:t>𝑚𝑎𝑥𝑖𝑚𝑢𝑚</m:t>
-                      </m:r>
-                      <m:r>
-                        <a:rPr lang="en-US" b="0" i="1" smtClean="0">
-                          <a:latin typeface="Cambria Math" panose="02040503050406030204" pitchFamily="18" charset="0"/>
-                        </a:rPr>
-                        <m:t> </m:t>
-                      </m:r>
-                      <m:r>
-                        <a:rPr lang="en-US" b="0" i="1" smtClean="0">
-                          <a:latin typeface="Cambria Math" panose="02040503050406030204" pitchFamily="18" charset="0"/>
-                        </a:rPr>
-                        <m:t>𝑛𝑜𝑑𝑒</m:t>
-                      </m:r>
-                      <m:r>
-                        <a:rPr lang="en-US" b="0" i="1" smtClean="0">
-                          <a:latin typeface="Cambria Math" panose="02040503050406030204" pitchFamily="18" charset="0"/>
-                        </a:rPr>
-                        <m:t> </m:t>
-                      </m:r>
-                      <m:r>
-                        <a:rPr lang="en-US" b="0" i="1" smtClean="0">
-                          <a:latin typeface="Cambria Math" panose="02040503050406030204" pitchFamily="18" charset="0"/>
-                        </a:rPr>
-                        <m:t>𝑑𝑒𝑔𝑟𝑒𝑒</m:t>
-                      </m:r>
-                      <m:r>
-                        <a:rPr lang="en-US" b="0" i="1" smtClean="0">
-                          <a:latin typeface="Cambria Math" panose="02040503050406030204" pitchFamily="18" charset="0"/>
-                        </a:rPr>
-                        <m:t> </m:t>
-                      </m:r>
-                      <m:r>
-                        <a:rPr lang="en-US" b="0" i="1" smtClean="0">
-                          <a:latin typeface="Cambria Math" panose="02040503050406030204" pitchFamily="18" charset="0"/>
-                        </a:rPr>
-                        <m:t>𝑜𝑓</m:t>
-                      </m:r>
-                      <m:r>
-                        <a:rPr lang="en-US" b="0" i="1" smtClean="0">
-                          <a:latin typeface="Cambria Math" panose="02040503050406030204" pitchFamily="18" charset="0"/>
-                        </a:rPr>
-                        <m:t> </m:t>
-                      </m:r>
-                      <m:r>
-                        <a:rPr lang="en-US" b="0" i="1" smtClean="0">
-                          <a:latin typeface="Cambria Math" panose="02040503050406030204" pitchFamily="18" charset="0"/>
-                        </a:rPr>
-                        <m:t>𝑡h𝑒</m:t>
-                      </m:r>
-                      <m:r>
-                        <a:rPr lang="en-US" b="0" i="1" smtClean="0">
-                          <a:latin typeface="Cambria Math" panose="02040503050406030204" pitchFamily="18" charset="0"/>
-                        </a:rPr>
-                        <m:t> </m:t>
-                      </m:r>
-                      <m:r>
-                        <a:rPr lang="en-US" b="0" i="1" smtClean="0">
-                          <a:latin typeface="Cambria Math" panose="02040503050406030204" pitchFamily="18" charset="0"/>
-                        </a:rPr>
-                        <m:t>𝑛𝑒𝑡𝑤𝑜𝑟𝑘</m:t>
-                      </m:r>
-                      <m:r>
-                        <a:rPr lang="en-US" b="0" i="1" smtClean="0">
-                          <a:latin typeface="Cambria Math" panose="02040503050406030204" pitchFamily="18" charset="0"/>
-                        </a:rPr>
-                        <m:t>;</m:t>
-                      </m:r>
-                    </m:oMath>
-                  </m:oMathPara>
-                </a14:m>
-                <a:endParaRPr lang="en-US" b="0" dirty="0"/>
-              </a:p>
-              <a:p>
-                <a:pPr/>
-                <a14:m>
-                  <m:oMathPara xmlns:m="http://schemas.openxmlformats.org/officeDocument/2006/math">
-                    <m:oMathParaPr>
-                      <m:jc m:val="left"/>
-                    </m:oMathParaPr>
-                    <m:oMath xmlns:m="http://schemas.openxmlformats.org/officeDocument/2006/math">
-                      <m:r>
-                        <a:rPr lang="en-US" b="0" i="1" smtClean="0">
-                          <a:latin typeface="Cambria Math" panose="02040503050406030204" pitchFamily="18" charset="0"/>
-                        </a:rPr>
-                        <m:t>𝑆𝑒𝑡𝑡𝑖𝑛𝑔</m:t>
-                      </m:r>
-                      <m:r>
-                        <a:rPr lang="en-US" b="0" i="1" smtClean="0">
-                          <a:latin typeface="Cambria Math" panose="02040503050406030204" pitchFamily="18" charset="0"/>
-                        </a:rPr>
-                        <m:t> </m:t>
-                      </m:r>
-                      <m:r>
-                        <a:rPr lang="en-US" b="0" i="1" smtClean="0">
-                          <a:latin typeface="Cambria Math" panose="02040503050406030204" pitchFamily="18" charset="0"/>
-                          <a:ea typeface="Cambria Math" panose="02040503050406030204" pitchFamily="18" charset="0"/>
-                        </a:rPr>
-                        <m:t>𝜆</m:t>
-                      </m:r>
-                      <m:r>
-                        <a:rPr lang="en-US" b="0" i="1" smtClean="0">
-                          <a:latin typeface="Cambria Math" panose="02040503050406030204" pitchFamily="18" charset="0"/>
-                          <a:ea typeface="Cambria Math" panose="02040503050406030204" pitchFamily="18" charset="0"/>
-                        </a:rPr>
-                        <m:t>=</m:t>
-                      </m:r>
-                      <m:r>
-                        <a:rPr lang="en-US" b="0" i="1" smtClean="0">
-                          <a:latin typeface="Cambria Math" panose="02040503050406030204" pitchFamily="18" charset="0"/>
-                          <a:ea typeface="Cambria Math" panose="02040503050406030204" pitchFamily="18" charset="0"/>
-                        </a:rPr>
-                        <m:t>𝑑</m:t>
-                      </m:r>
-                      <m:r>
-                        <a:rPr lang="en-US" b="0" i="1" smtClean="0">
-                          <a:latin typeface="Cambria Math" panose="02040503050406030204" pitchFamily="18" charset="0"/>
-                          <a:ea typeface="Cambria Math" panose="02040503050406030204" pitchFamily="18" charset="0"/>
-                        </a:rPr>
-                        <m:t> </m:t>
-                      </m:r>
-                      <m:r>
-                        <a:rPr lang="en-US" b="0" i="1" smtClean="0">
-                          <a:latin typeface="Cambria Math" panose="02040503050406030204" pitchFamily="18" charset="0"/>
-                          <a:ea typeface="Cambria Math" panose="02040503050406030204" pitchFamily="18" charset="0"/>
-                        </a:rPr>
-                        <m:t>𝑦𝑖𝑒𝑙𝑑𝑠</m:t>
-                      </m:r>
-                      <m:r>
-                        <a:rPr lang="en-US" b="0" i="1" smtClean="0">
-                          <a:latin typeface="Cambria Math" panose="02040503050406030204" pitchFamily="18" charset="0"/>
-                          <a:ea typeface="Cambria Math" panose="02040503050406030204" pitchFamily="18" charset="0"/>
-                        </a:rPr>
-                        <m:t> </m:t>
-                      </m:r>
-                      <m:r>
-                        <a:rPr lang="en-US" b="0" i="1" smtClean="0">
-                          <a:latin typeface="Cambria Math" panose="02040503050406030204" pitchFamily="18" charset="0"/>
-                          <a:ea typeface="Cambria Math" panose="02040503050406030204" pitchFamily="18" charset="0"/>
-                        </a:rPr>
-                        <m:t>𝑎</m:t>
-                      </m:r>
-                      <m:r>
-                        <a:rPr lang="en-US" b="0" i="1" smtClean="0">
-                          <a:latin typeface="Cambria Math" panose="02040503050406030204" pitchFamily="18" charset="0"/>
-                          <a:ea typeface="Cambria Math" panose="02040503050406030204" pitchFamily="18" charset="0"/>
-                        </a:rPr>
-                        <m:t> </m:t>
-                      </m:r>
-                      <m:r>
-                        <a:rPr lang="en-US" b="0" i="1" smtClean="0">
-                          <a:latin typeface="Cambria Math" panose="02040503050406030204" pitchFamily="18" charset="0"/>
-                          <a:ea typeface="Cambria Math" panose="02040503050406030204" pitchFamily="18" charset="0"/>
-                        </a:rPr>
-                        <m:t>𝛾</m:t>
-                      </m:r>
-                      <m:r>
-                        <a:rPr lang="en-US" b="0" i="1" smtClean="0">
-                          <a:latin typeface="Cambria Math" panose="02040503050406030204" pitchFamily="18" charset="0"/>
-                          <a:ea typeface="Cambria Math" panose="02040503050406030204" pitchFamily="18" charset="0"/>
-                        </a:rPr>
-                        <m:t>−</m:t>
-                      </m:r>
-                      <m:r>
-                        <a:rPr lang="en-US" b="0" i="1" smtClean="0">
-                          <a:latin typeface="Cambria Math" panose="02040503050406030204" pitchFamily="18" charset="0"/>
-                          <a:ea typeface="Cambria Math" panose="02040503050406030204" pitchFamily="18" charset="0"/>
-                        </a:rPr>
-                        <m:t>𝑑𝑒𝑐𝑎𝑦𝑖𝑛𝑔</m:t>
-                      </m:r>
-                      <m:r>
-                        <a:rPr lang="en-US" b="0" i="1" smtClean="0">
-                          <a:latin typeface="Cambria Math" panose="02040503050406030204" pitchFamily="18" charset="0"/>
-                          <a:ea typeface="Cambria Math" panose="02040503050406030204" pitchFamily="18" charset="0"/>
-                        </a:rPr>
-                        <m:t> </m:t>
-                      </m:r>
-                      <m:r>
-                        <a:rPr lang="en-US" b="0" i="1" smtClean="0">
-                          <a:latin typeface="Cambria Math" panose="02040503050406030204" pitchFamily="18" charset="0"/>
-                          <a:ea typeface="Cambria Math" panose="02040503050406030204" pitchFamily="18" charset="0"/>
-                        </a:rPr>
-                        <m:t>h𝑒𝑢𝑟𝑖𝑠𝑡𝑖𝑐</m:t>
-                      </m:r>
-                      <m:r>
-                        <a:rPr lang="en-US" b="0" i="1" smtClean="0">
-                          <a:latin typeface="Cambria Math" panose="02040503050406030204" pitchFamily="18" charset="0"/>
-                          <a:ea typeface="Cambria Math" panose="02040503050406030204" pitchFamily="18" charset="0"/>
-                        </a:rPr>
-                        <m:t> </m:t>
-                      </m:r>
-                      <m:r>
-                        <a:rPr lang="en-US" b="0" i="1" smtClean="0">
-                          <a:latin typeface="Cambria Math" panose="02040503050406030204" pitchFamily="18" charset="0"/>
-                          <a:ea typeface="Cambria Math" panose="02040503050406030204" pitchFamily="18" charset="0"/>
-                        </a:rPr>
-                        <m:t>𝑎𝑠</m:t>
-                      </m:r>
-                      <m:r>
-                        <a:rPr lang="en-US" b="0" i="1" smtClean="0">
-                          <a:latin typeface="Cambria Math" panose="02040503050406030204" pitchFamily="18" charset="0"/>
-                          <a:ea typeface="Cambria Math" panose="02040503050406030204" pitchFamily="18" charset="0"/>
-                        </a:rPr>
-                        <m:t> </m:t>
-                      </m:r>
-                      <m:r>
-                        <a:rPr lang="en-US" b="0" i="1" smtClean="0">
-                          <a:latin typeface="Cambria Math" panose="02040503050406030204" pitchFamily="18" charset="0"/>
-                          <a:ea typeface="Cambria Math" panose="02040503050406030204" pitchFamily="18" charset="0"/>
-                        </a:rPr>
-                        <m:t>𝑙𝑜𝑛𝑔</m:t>
-                      </m:r>
-                      <m:r>
-                        <a:rPr lang="en-US" b="0" i="1" smtClean="0">
-                          <a:latin typeface="Cambria Math" panose="02040503050406030204" pitchFamily="18" charset="0"/>
-                          <a:ea typeface="Cambria Math" panose="02040503050406030204" pitchFamily="18" charset="0"/>
-                        </a:rPr>
-                        <m:t> </m:t>
-                      </m:r>
-                      <m:r>
-                        <a:rPr lang="en-US" b="0" i="1" smtClean="0">
-                          <a:latin typeface="Cambria Math" panose="02040503050406030204" pitchFamily="18" charset="0"/>
-                          <a:ea typeface="Cambria Math" panose="02040503050406030204" pitchFamily="18" charset="0"/>
-                        </a:rPr>
-                        <m:t>𝑎𝑠</m:t>
-                      </m:r>
-                      <m:r>
-                        <a:rPr lang="en-US" b="0" i="1" smtClean="0">
-                          <a:latin typeface="Cambria Math" panose="02040503050406030204" pitchFamily="18" charset="0"/>
-                          <a:ea typeface="Cambria Math" panose="02040503050406030204" pitchFamily="18" charset="0"/>
-                        </a:rPr>
-                        <m:t> </m:t>
-                      </m:r>
-                      <m:r>
-                        <a:rPr lang="en-US" b="0" i="1" smtClean="0">
-                          <a:latin typeface="Cambria Math" panose="02040503050406030204" pitchFamily="18" charset="0"/>
-                          <a:ea typeface="Cambria Math" panose="02040503050406030204" pitchFamily="18" charset="0"/>
-                        </a:rPr>
-                        <m:t>𝑑</m:t>
-                      </m:r>
-                      <m:r>
-                        <a:rPr lang="en-US" b="0" i="1" smtClean="0">
-                          <a:latin typeface="Cambria Math" panose="02040503050406030204" pitchFamily="18" charset="0"/>
-                          <a:ea typeface="Cambria Math" panose="02040503050406030204" pitchFamily="18" charset="0"/>
-                        </a:rPr>
-                        <m:t>&lt;</m:t>
-                      </m:r>
-                      <m:f>
-                        <m:fPr>
-                          <m:ctrlPr>
-                            <a:rPr lang="en-US" b="0" i="1" smtClean="0">
-                              <a:latin typeface="Cambria Math" panose="02040503050406030204" pitchFamily="18" charset="0"/>
-                              <a:ea typeface="Cambria Math" panose="02040503050406030204" pitchFamily="18" charset="0"/>
-                            </a:rPr>
-                          </m:ctrlPr>
-                        </m:fPr>
-                        <m:num>
-                          <m:r>
-                            <a:rPr lang="en-US" b="0" i="1" smtClean="0">
-                              <a:latin typeface="Cambria Math" panose="02040503050406030204" pitchFamily="18" charset="0"/>
-                              <a:ea typeface="Cambria Math" panose="02040503050406030204" pitchFamily="18" charset="0"/>
-                            </a:rPr>
-                            <m:t>1</m:t>
-                          </m:r>
-                        </m:num>
-                        <m:den>
-                          <m:r>
-                            <a:rPr lang="en-US" b="0" i="1" smtClean="0">
-                              <a:latin typeface="Cambria Math" panose="02040503050406030204" pitchFamily="18" charset="0"/>
-                              <a:ea typeface="Cambria Math" panose="02040503050406030204" pitchFamily="18" charset="0"/>
-                            </a:rPr>
-                            <m:t>𝛽</m:t>
-                          </m:r>
-                        </m:den>
-                      </m:f>
-                      <m:r>
-                        <a:rPr lang="en-US" b="0" i="1" smtClean="0">
-                          <a:latin typeface="Cambria Math" panose="02040503050406030204" pitchFamily="18" charset="0"/>
-                          <a:ea typeface="Cambria Math" panose="02040503050406030204" pitchFamily="18" charset="0"/>
-                        </a:rPr>
-                        <m:t>, </m:t>
-                      </m:r>
-                      <m:r>
-                        <a:rPr lang="en-US" b="0" i="1" smtClean="0">
-                          <a:latin typeface="Cambria Math" panose="02040503050406030204" pitchFamily="18" charset="0"/>
-                          <a:ea typeface="Cambria Math" panose="02040503050406030204" pitchFamily="18" charset="0"/>
-                        </a:rPr>
-                        <m:t>𝑖𝑛</m:t>
-                      </m:r>
-                      <m:r>
-                        <a:rPr lang="en-US" b="0" i="1" smtClean="0">
-                          <a:latin typeface="Cambria Math" panose="02040503050406030204" pitchFamily="18" charset="0"/>
-                          <a:ea typeface="Cambria Math" panose="02040503050406030204" pitchFamily="18" charset="0"/>
-                        </a:rPr>
-                        <m:t> </m:t>
-                      </m:r>
-                      <m:r>
-                        <a:rPr lang="en-US" b="0" i="1" smtClean="0">
-                          <a:latin typeface="Cambria Math" panose="02040503050406030204" pitchFamily="18" charset="0"/>
-                          <a:ea typeface="Cambria Math" panose="02040503050406030204" pitchFamily="18" charset="0"/>
-                        </a:rPr>
-                        <m:t>𝑚𝑜𝑠𝑡</m:t>
-                      </m:r>
-                      <m:r>
-                        <a:rPr lang="en-US" b="0" i="1" smtClean="0">
-                          <a:latin typeface="Cambria Math" panose="02040503050406030204" pitchFamily="18" charset="0"/>
-                          <a:ea typeface="Cambria Math" panose="02040503050406030204" pitchFamily="18" charset="0"/>
-                        </a:rPr>
-                        <m:t> </m:t>
-                      </m:r>
-                      <m:r>
-                        <a:rPr lang="en-US" b="0" i="1" smtClean="0">
-                          <a:latin typeface="Cambria Math" panose="02040503050406030204" pitchFamily="18" charset="0"/>
-                          <a:ea typeface="Cambria Math" panose="02040503050406030204" pitchFamily="18" charset="0"/>
-                        </a:rPr>
-                        <m:t>𝑐𝑎𝑠𝑒𝑠</m:t>
-                      </m:r>
-                      <m:r>
-                        <a:rPr lang="en-US" b="0" i="1" smtClean="0">
-                          <a:latin typeface="Cambria Math" panose="02040503050406030204" pitchFamily="18" charset="0"/>
-                          <a:ea typeface="Cambria Math" panose="02040503050406030204" pitchFamily="18" charset="0"/>
-                        </a:rPr>
-                        <m:t> </m:t>
-                      </m:r>
-                      <m:r>
-                        <a:rPr lang="en-US" b="0" i="1" smtClean="0">
-                          <a:latin typeface="Cambria Math" panose="02040503050406030204" pitchFamily="18" charset="0"/>
-                          <a:ea typeface="Cambria Math" panose="02040503050406030204" pitchFamily="18" charset="0"/>
-                        </a:rPr>
-                        <m:t>𝛽</m:t>
-                      </m:r>
-                      <m:r>
-                        <a:rPr lang="en-US" b="0" i="1" smtClean="0">
-                          <a:latin typeface="Cambria Math" panose="02040503050406030204" pitchFamily="18" charset="0"/>
-                          <a:ea typeface="Cambria Math" panose="02040503050406030204" pitchFamily="18" charset="0"/>
-                        </a:rPr>
-                        <m:t>≤5</m:t>
-                      </m:r>
-                      <m:r>
-                        <a:rPr lang="en-US" b="0" i="1" smtClean="0">
-                          <a:latin typeface="Cambria Math" panose="02040503050406030204" pitchFamily="18" charset="0"/>
-                          <a:ea typeface="Cambria Math" panose="02040503050406030204" pitchFamily="18" charset="0"/>
-                        </a:rPr>
-                        <m:t>𝑒</m:t>
-                      </m:r>
-                      <m:r>
-                        <a:rPr lang="en-US" b="0" i="1" smtClean="0">
-                          <a:latin typeface="Cambria Math" panose="02040503050406030204" pitchFamily="18" charset="0"/>
-                          <a:ea typeface="Cambria Math" panose="02040503050406030204" pitchFamily="18" charset="0"/>
-                        </a:rPr>
-                        <m:t>−4 </m:t>
-                      </m:r>
-                      <m:r>
-                        <a:rPr lang="en-US" b="0" i="1" smtClean="0">
-                          <a:latin typeface="Cambria Math" panose="02040503050406030204" pitchFamily="18" charset="0"/>
-                          <a:ea typeface="Cambria Math" panose="02040503050406030204" pitchFamily="18" charset="0"/>
-                        </a:rPr>
-                        <m:t>𝑎𝑛𝑑</m:t>
-                      </m:r>
-                      <m:r>
-                        <a:rPr lang="en-US" b="0" i="1" smtClean="0">
-                          <a:latin typeface="Cambria Math" panose="02040503050406030204" pitchFamily="18" charset="0"/>
-                          <a:ea typeface="Cambria Math" panose="02040503050406030204" pitchFamily="18" charset="0"/>
-                        </a:rPr>
-                        <m:t> </m:t>
-                      </m:r>
-                      <m:r>
-                        <a:rPr lang="en-US" b="0" i="1" smtClean="0">
-                          <a:latin typeface="Cambria Math" panose="02040503050406030204" pitchFamily="18" charset="0"/>
-                          <a:ea typeface="Cambria Math" panose="02040503050406030204" pitchFamily="18" charset="0"/>
-                        </a:rPr>
-                        <m:t>𝑡h𝑒</m:t>
-                      </m:r>
-                      <m:r>
-                        <a:rPr lang="en-US" b="0" i="1" smtClean="0">
-                          <a:latin typeface="Cambria Math" panose="02040503050406030204" pitchFamily="18" charset="0"/>
-                          <a:ea typeface="Cambria Math" panose="02040503050406030204" pitchFamily="18" charset="0"/>
-                        </a:rPr>
-                        <m:t> </m:t>
-                      </m:r>
-                      <m:r>
-                        <a:rPr lang="en-US" b="0" i="1" smtClean="0">
-                          <a:latin typeface="Cambria Math" panose="02040503050406030204" pitchFamily="18" charset="0"/>
-                          <a:ea typeface="Cambria Math" panose="02040503050406030204" pitchFamily="18" charset="0"/>
-                        </a:rPr>
-                        <m:t>𝑐𝑜𝑛𝑑𝑖𝑡𝑖𝑜𝑛</m:t>
-                      </m:r>
-                      <m:r>
-                        <a:rPr lang="en-US" b="0" i="1" smtClean="0">
-                          <a:latin typeface="Cambria Math" panose="02040503050406030204" pitchFamily="18" charset="0"/>
-                          <a:ea typeface="Cambria Math" panose="02040503050406030204" pitchFamily="18" charset="0"/>
-                        </a:rPr>
-                        <m:t> </m:t>
-                      </m:r>
-                      <m:r>
-                        <a:rPr lang="en-US" b="0" i="1" smtClean="0">
-                          <a:latin typeface="Cambria Math" panose="02040503050406030204" pitchFamily="18" charset="0"/>
-                          <a:ea typeface="Cambria Math" panose="02040503050406030204" pitchFamily="18" charset="0"/>
-                        </a:rPr>
-                        <m:t>𝑖𝑠</m:t>
-                      </m:r>
-                      <m:r>
-                        <a:rPr lang="en-US" b="0" i="1" smtClean="0">
-                          <a:latin typeface="Cambria Math" panose="02040503050406030204" pitchFamily="18" charset="0"/>
-                          <a:ea typeface="Cambria Math" panose="02040503050406030204" pitchFamily="18" charset="0"/>
-                        </a:rPr>
-                        <m:t> </m:t>
-                      </m:r>
-                      <m:r>
-                        <a:rPr lang="en-US" b="0" i="1" smtClean="0">
-                          <a:latin typeface="Cambria Math" panose="02040503050406030204" pitchFamily="18" charset="0"/>
-                          <a:ea typeface="Cambria Math" panose="02040503050406030204" pitchFamily="18" charset="0"/>
-                        </a:rPr>
-                        <m:t>𝑓𝑢𝑙𝑓𝑖𝑙𝑙𝑒𝑑</m:t>
-                      </m:r>
-                      <m:r>
-                        <a:rPr lang="en-US" b="0" i="1" smtClean="0">
-                          <a:latin typeface="Cambria Math" panose="02040503050406030204" pitchFamily="18" charset="0"/>
-                          <a:ea typeface="Cambria Math" panose="02040503050406030204" pitchFamily="18" charset="0"/>
-                        </a:rPr>
-                        <m:t>.</m:t>
-                      </m:r>
-                    </m:oMath>
-                  </m:oMathPara>
-                </a14:m>
-                <a:endParaRPr lang="en-US" b="0" dirty="0"/>
-              </a:p>
-            </p:txBody>
-          </p:sp>
-        </mc:Choice>
-        <mc:Fallback xmlns="">
-          <p:sp>
-            <p:nvSpPr>
-              <p:cNvPr id="3" name="TextBox 2">
-                <a:extLst>
-                  <a:ext uri="{FF2B5EF4-FFF2-40B4-BE49-F238E27FC236}">
-                    <a16:creationId xmlns:a16="http://schemas.microsoft.com/office/drawing/2014/main" id="{49E08EE0-1B5F-79C8-3FDE-03CC933AC366}"/>
-                  </a:ext>
-                </a:extLst>
-              </p:cNvPr>
-              <p:cNvSpPr txBox="1">
-                <a:spLocks noRot="1" noChangeAspect="1" noMove="1" noResize="1" noEditPoints="1" noAdjustHandles="1" noChangeArrowheads="1" noChangeShapeType="1" noTextEdit="1"/>
-              </p:cNvSpPr>
-              <p:nvPr/>
-            </p:nvSpPr>
-            <p:spPr>
-              <a:xfrm>
-                <a:off x="961053" y="1940767"/>
-                <a:ext cx="10207690" cy="4085670"/>
-              </a:xfrm>
-              <a:prstGeom prst="rect">
-                <a:avLst/>
-              </a:prstGeom>
-              <a:blipFill>
-                <a:blip r:embed="rId3"/>
-                <a:stretch>
-                  <a:fillRect l="-179" b="-298"/>
-                </a:stretch>
-              </a:blipFill>
-            </p:spPr>
-            <p:txBody>
-              <a:bodyPr/>
-              <a:lstStyle/>
-              <a:p>
-                <a:r>
-                  <a:rPr lang="en-US">
-                    <a:noFill/>
-                  </a:rPr>
-                  <a:t> </a:t>
-                </a:r>
-              </a:p>
-            </p:txBody>
-          </p:sp>
-        </mc:Fallback>
-      </mc:AlternateContent>
-    </p:spTree>
-    <p:extLst>
-      <p:ext uri="{BB962C8B-B14F-4D97-AF65-F5344CB8AC3E}">
-        <p14:creationId xmlns:p14="http://schemas.microsoft.com/office/powerpoint/2010/main" val="2344924657"/>
-      </p:ext>
-    </p:extLst>
-  </p:cSld>
-  <p:clrMapOvr>
-    <a:masterClrMapping/>
-  </p:clrMapOvr>
-</p:sld>
-</file>
-
-<file path=ppt/slides/slide9.xml><?xml version="1.0" encoding="utf-8"?>
-<p:sld xmlns:a="http://schemas.openxmlformats.org/drawingml/2006/main" xmlns:r="http://schemas.openxmlformats.org/officeDocument/2006/relationships" xmlns:p="http://schemas.openxmlformats.org/presentationml/2006/main">
-  <p:cSld>
-    <p:spTree>
-      <p:nvGrpSpPr>
-        <p:cNvPr id="1" name=""/>
-        <p:cNvGrpSpPr/>
-        <p:nvPr/>
-      </p:nvGrpSpPr>
-      <p:grpSpPr>
-        <a:xfrm>
-          <a:off x="0" y="0"/>
-          <a:ext cx="0" cy="0"/>
-          <a:chOff x="0" y="0"/>
-          <a:chExt cx="0" cy="0"/>
-        </a:xfrm>
-      </p:grpSpPr>
       <p:sp>
         <p:nvSpPr>
-          <p:cNvPr id="2" name="Title 1">
-            <a:extLst>
-              <a:ext uri="{FF2B5EF4-FFF2-40B4-BE49-F238E27FC236}">
-                <a16:creationId xmlns:a16="http://schemas.microsoft.com/office/drawing/2014/main" id="{53460740-BA33-CEE1-45C1-D620BCE2EBF8}"/>
+          <p:cNvPr id="3" name="Slide Number Placeholder 2">
+            <a:extLst>
+              <a:ext uri="{FF2B5EF4-FFF2-40B4-BE49-F238E27FC236}">
+                <a16:creationId xmlns:a16="http://schemas.microsoft.com/office/drawing/2014/main" id="{C76CF13E-3AF4-AAD6-57A0-FC9F0CB2DE8D}"/>
               </a:ext>
             </a:extLst>
           </p:cNvPr>
@@ -20655,7 +23069,7 @@
             <a:spLocks noGrp="1"/>
           </p:cNvSpPr>
           <p:nvPr>
-            <p:ph type="title"/>
+            <p:ph type="sldNum" sz="quarter" idx="12"/>
           </p:nvPr>
         </p:nvSpPr>
         <p:spPr/>
@@ -20663,160 +23077,18 @@
           <a:bodyPr/>
           <a:lstStyle/>
           <a:p>
-            <a:r>
-              <a:rPr lang="en-US" dirty="0"/>
-              <a:t>Important Conclusion</a:t>
-            </a:r>
+            <a:fld id="{673E80D0-5A67-47DD-9B76-4E24E60624C0}" type="slidenum">
+              <a:rPr lang="en-US" smtClean="0"/>
+              <a:t>9</a:t>
+            </a:fld>
+            <a:endParaRPr lang="en-US"/>
           </a:p>
         </p:txBody>
       </p:sp>
-      <mc:AlternateContent xmlns:mc="http://schemas.openxmlformats.org/markup-compatibility/2006" xmlns:a14="http://schemas.microsoft.com/office/drawing/2010/main">
-        <mc:Choice Requires="a14">
-          <p:sp>
-            <p:nvSpPr>
-              <p:cNvPr id="3" name="TextBox 2">
-                <a:extLst>
-                  <a:ext uri="{FF2B5EF4-FFF2-40B4-BE49-F238E27FC236}">
-                    <a16:creationId xmlns:a16="http://schemas.microsoft.com/office/drawing/2014/main" id="{EFDFEB1D-F712-C8A8-6388-CF1182EF0331}"/>
-                  </a:ext>
-                </a:extLst>
-              </p:cNvPr>
-              <p:cNvSpPr txBox="1"/>
-              <p:nvPr/>
-            </p:nvSpPr>
-            <p:spPr>
-              <a:xfrm>
-                <a:off x="838200" y="1856792"/>
-                <a:ext cx="10115939" cy="1200329"/>
-              </a:xfrm>
-              <a:prstGeom prst="rect">
-                <a:avLst/>
-              </a:prstGeom>
-              <a:noFill/>
-            </p:spPr>
-            <p:txBody>
-              <a:bodyPr wrap="square" rtlCol="0">
-                <a:spAutoFit/>
-              </a:bodyPr>
-              <a:lstStyle/>
-              <a:p>
-                <a:r>
-                  <a:rPr lang="en-US" dirty="0"/>
-                  <a:t>The paper contains proofs regarding PageRank &amp; </a:t>
-                </a:r>
-                <a:r>
-                  <a:rPr lang="en-US" dirty="0" err="1"/>
-                  <a:t>SimRank</a:t>
-                </a:r>
-                <a:r>
-                  <a:rPr lang="en-US" dirty="0"/>
-                  <a:t> being </a:t>
-                </a:r>
-                <a14:m>
-                  <m:oMath xmlns:m="http://schemas.openxmlformats.org/officeDocument/2006/math">
-                    <m:r>
-                      <a:rPr lang="en-US" i="1" smtClean="0">
-                        <a:latin typeface="Cambria Math" panose="02040503050406030204" pitchFamily="18" charset="0"/>
-                        <a:ea typeface="Cambria Math" panose="02040503050406030204" pitchFamily="18" charset="0"/>
-                      </a:rPr>
-                      <m:t>𝛾</m:t>
-                    </m:r>
-                    <m:r>
-                      <a:rPr lang="en-US" b="0" i="1" smtClean="0">
-                        <a:latin typeface="Cambria Math" panose="02040503050406030204" pitchFamily="18" charset="0"/>
-                        <a:ea typeface="Cambria Math" panose="02040503050406030204" pitchFamily="18" charset="0"/>
-                      </a:rPr>
-                      <m:t>−</m:t>
-                    </m:r>
-                    <m:r>
-                      <a:rPr lang="en-US" b="0" i="1" smtClean="0">
-                        <a:latin typeface="Cambria Math" panose="02040503050406030204" pitchFamily="18" charset="0"/>
-                        <a:ea typeface="Cambria Math" panose="02040503050406030204" pitchFamily="18" charset="0"/>
-                      </a:rPr>
-                      <m:t>𝑑𝑒𝑐𝑎𝑦𝑖𝑛𝑔</m:t>
-                    </m:r>
-                    <m:r>
-                      <a:rPr lang="en-US" b="0" i="1" smtClean="0">
-                        <a:latin typeface="Cambria Math" panose="02040503050406030204" pitchFamily="18" charset="0"/>
-                        <a:ea typeface="Cambria Math" panose="02040503050406030204" pitchFamily="18" charset="0"/>
-                      </a:rPr>
-                      <m:t> </m:t>
-                    </m:r>
-                    <m:r>
-                      <a:rPr lang="en-US" b="0" i="1" smtClean="0">
-                        <a:latin typeface="Cambria Math" panose="02040503050406030204" pitchFamily="18" charset="0"/>
-                        <a:ea typeface="Cambria Math" panose="02040503050406030204" pitchFamily="18" charset="0"/>
-                      </a:rPr>
-                      <m:t>h𝑒𝑢𝑟𝑖𝑠𝑡𝑖𝑐𝑠</m:t>
-                    </m:r>
-                  </m:oMath>
-                </a14:m>
-                <a:r>
-                  <a:rPr lang="en-US" dirty="0"/>
-                  <a:t> </a:t>
-                </a:r>
-              </a:p>
-              <a:p>
-                <a:endParaRPr lang="en-US" dirty="0"/>
-              </a:p>
-              <a:p>
-                <a:r>
-                  <a:rPr lang="en-US" dirty="0"/>
-                  <a:t>Therefore, high hop neighborhoods are not required for approximating high order heuristics and the neural networks can utilize low h-hop neighborhoods to yield high performance.</a:t>
-                </a:r>
-              </a:p>
-            </p:txBody>
-          </p:sp>
-        </mc:Choice>
-        <mc:Fallback xmlns="">
-          <p:sp>
-            <p:nvSpPr>
-              <p:cNvPr id="3" name="TextBox 2">
-                <a:extLst>
-                  <a:ext uri="{FF2B5EF4-FFF2-40B4-BE49-F238E27FC236}">
-                    <a16:creationId xmlns:a16="http://schemas.microsoft.com/office/drawing/2014/main" id="{EFDFEB1D-F712-C8A8-6388-CF1182EF0331}"/>
-                  </a:ext>
-                </a:extLst>
-              </p:cNvPr>
-              <p:cNvSpPr txBox="1">
-                <a:spLocks noRot="1" noChangeAspect="1" noMove="1" noResize="1" noEditPoints="1" noAdjustHandles="1" noChangeArrowheads="1" noChangeShapeType="1" noTextEdit="1"/>
-              </p:cNvSpPr>
-              <p:nvPr/>
-            </p:nvSpPr>
-            <p:spPr>
-              <a:xfrm>
-                <a:off x="838200" y="1856792"/>
-                <a:ext cx="10115939" cy="1200329"/>
-              </a:xfrm>
-              <a:prstGeom prst="rect">
-                <a:avLst/>
-              </a:prstGeom>
-              <a:blipFill>
-                <a:blip r:embed="rId2"/>
-                <a:stretch>
-                  <a:fillRect l="-542" t="-3061" b="-7653"/>
-                </a:stretch>
-              </a:blipFill>
-            </p:spPr>
-            <p:txBody>
-              <a:bodyPr/>
-              <a:lstStyle/>
-              <a:p>
-                <a:r>
-                  <a:rPr lang="en-US">
-                    <a:noFill/>
-                  </a:rPr>
-                  <a:t> </a:t>
-                </a:r>
-              </a:p>
-            </p:txBody>
-          </p:sp>
-        </mc:Fallback>
-      </mc:AlternateContent>
     </p:spTree>
     <p:extLst>
       <p:ext uri="{BB962C8B-B14F-4D97-AF65-F5344CB8AC3E}">
-        <p14:creationId xmlns:p14="http://schemas.microsoft.com/office/powerpoint/2010/main" val="3150898851"/>
+        <p14:creationId xmlns:p14="http://schemas.microsoft.com/office/powerpoint/2010/main" val="563850765"/>
       </p:ext>
     </p:extLst>
   </p:cSld>
@@ -21119,4 +23391,299 @@
     </a:ext>
   </a:extLst>
 </a:theme>
+</file>
+
+<file path=ppt/theme/theme2.xml><?xml version="1.0" encoding="utf-8"?>
+<a:theme xmlns:a="http://schemas.openxmlformats.org/drawingml/2006/main" name="Office Theme">
+  <a:themeElements>
+    <a:clrScheme name="Office">
+      <a:dk1>
+        <a:sysClr val="windowText" lastClr="000000"/>
+      </a:dk1>
+      <a:lt1>
+        <a:sysClr val="window" lastClr="FFFFFF"/>
+      </a:lt1>
+      <a:dk2>
+        <a:srgbClr val="44546A"/>
+      </a:dk2>
+      <a:lt2>
+        <a:srgbClr val="E7E6E6"/>
+      </a:lt2>
+      <a:accent1>
+        <a:srgbClr val="4472C4"/>
+      </a:accent1>
+      <a:accent2>
+        <a:srgbClr val="ED7D31"/>
+      </a:accent2>
+      <a:accent3>
+        <a:srgbClr val="A5A5A5"/>
+      </a:accent3>
+      <a:accent4>
+        <a:srgbClr val="FFC000"/>
+      </a:accent4>
+      <a:accent5>
+        <a:srgbClr val="5B9BD5"/>
+      </a:accent5>
+      <a:accent6>
+        <a:srgbClr val="70AD47"/>
+      </a:accent6>
+      <a:hlink>
+        <a:srgbClr val="0563C1"/>
+      </a:hlink>
+      <a:folHlink>
+        <a:srgbClr val="954F72"/>
+      </a:folHlink>
+    </a:clrScheme>
+    <a:fontScheme name="Office">
+      <a:majorFont>
+        <a:latin typeface="Calibri Light" panose="020F0302020204030204"/>
+        <a:ea typeface=""/>
+        <a:cs typeface=""/>
+        <a:font script="Jpan" typeface="游ゴシック Light"/>
+        <a:font script="Hang" typeface="맑은 고딕"/>
+        <a:font script="Hans" typeface="等线 Light"/>
+        <a:font script="Hant" typeface="新細明體"/>
+        <a:font script="Arab" typeface="Times New Roman"/>
+        <a:font script="Hebr" typeface="Times New Roman"/>
+        <a:font script="Thai" typeface="Angsana New"/>
+        <a:font script="Ethi" typeface="Nyala"/>
+        <a:font script="Beng" typeface="Vrinda"/>
+        <a:font script="Gujr" typeface="Shruti"/>
+        <a:font script="Khmr" typeface="MoolBoran"/>
+        <a:font script="Knda" typeface="Tunga"/>
+        <a:font script="Guru" typeface="Raavi"/>
+        <a:font script="Cans" typeface="Euphemia"/>
+        <a:font script="Cher" typeface="Plantagenet Cherokee"/>
+        <a:font script="Yiii" typeface="Microsoft Yi Baiti"/>
+        <a:font script="Tibt" typeface="Microsoft Himalaya"/>
+        <a:font script="Thaa" typeface="MV Boli"/>
+        <a:font script="Deva" typeface="Mangal"/>
+        <a:font script="Telu" typeface="Gautami"/>
+        <a:font script="Taml" typeface="Latha"/>
+        <a:font script="Syrc" typeface="Estrangelo Edessa"/>
+        <a:font script="Orya" typeface="Kalinga"/>
+        <a:font script="Mlym" typeface="Kartika"/>
+        <a:font script="Laoo" typeface="DokChampa"/>
+        <a:font script="Sinh" typeface="Iskoola Pota"/>
+        <a:font script="Mong" typeface="Mongolian Baiti"/>
+        <a:font script="Viet" typeface="Times New Roman"/>
+        <a:font script="Uigh" typeface="Microsoft Uighur"/>
+        <a:font script="Geor" typeface="Sylfaen"/>
+        <a:font script="Armn" typeface="Arial"/>
+        <a:font script="Bugi" typeface="Leelawadee UI"/>
+        <a:font script="Bopo" typeface="Microsoft JhengHei"/>
+        <a:font script="Java" typeface="Javanese Text"/>
+        <a:font script="Lisu" typeface="Segoe UI"/>
+        <a:font script="Mymr" typeface="Myanmar Text"/>
+        <a:font script="Nkoo" typeface="Ebrima"/>
+        <a:font script="Olck" typeface="Nirmala UI"/>
+        <a:font script="Osma" typeface="Ebrima"/>
+        <a:font script="Phag" typeface="Phagspa"/>
+        <a:font script="Syrn" typeface="Estrangelo Edessa"/>
+        <a:font script="Syrj" typeface="Estrangelo Edessa"/>
+        <a:font script="Syre" typeface="Estrangelo Edessa"/>
+        <a:font script="Sora" typeface="Nirmala UI"/>
+        <a:font script="Tale" typeface="Microsoft Tai Le"/>
+        <a:font script="Talu" typeface="Microsoft New Tai Lue"/>
+        <a:font script="Tfng" typeface="Ebrima"/>
+      </a:majorFont>
+      <a:minorFont>
+        <a:latin typeface="Calibri" panose="020F0502020204030204"/>
+        <a:ea typeface=""/>
+        <a:cs typeface=""/>
+        <a:font script="Jpan" typeface="游ゴシック"/>
+        <a:font script="Hang" typeface="맑은 고딕"/>
+        <a:font script="Hans" typeface="等线"/>
+        <a:font script="Hant" typeface="新細明體"/>
+        <a:font script="Arab" typeface="Arial"/>
+        <a:font script="Hebr" typeface="Arial"/>
+        <a:font script="Thai" typeface="Cordia New"/>
+        <a:font script="Ethi" typeface="Nyala"/>
+        <a:font script="Beng" typeface="Vrinda"/>
+        <a:font script="Gujr" typeface="Shruti"/>
+        <a:font script="Khmr" typeface="DaunPenh"/>
+        <a:font script="Knda" typeface="Tunga"/>
+        <a:font script="Guru" typeface="Raavi"/>
+        <a:font script="Cans" typeface="Euphemia"/>
+        <a:font script="Cher" typeface="Plantagenet Cherokee"/>
+        <a:font script="Yiii" typeface="Microsoft Yi Baiti"/>
+        <a:font script="Tibt" typeface="Microsoft Himalaya"/>
+        <a:font script="Thaa" typeface="MV Boli"/>
+        <a:font script="Deva" typeface="Mangal"/>
+        <a:font script="Telu" typeface="Gautami"/>
+        <a:font script="Taml" typeface="Latha"/>
+        <a:font script="Syrc" typeface="Estrangelo Edessa"/>
+        <a:font script="Orya" typeface="Kalinga"/>
+        <a:font script="Mlym" typeface="Kartika"/>
+        <a:font script="Laoo" typeface="DokChampa"/>
+        <a:font script="Sinh" typeface="Iskoola Pota"/>
+        <a:font script="Mong" typeface="Mongolian Baiti"/>
+        <a:font script="Viet" typeface="Arial"/>
+        <a:font script="Uigh" typeface="Microsoft Uighur"/>
+        <a:font script="Geor" typeface="Sylfaen"/>
+        <a:font script="Armn" typeface="Arial"/>
+        <a:font script="Bugi" typeface="Leelawadee UI"/>
+        <a:font script="Bopo" typeface="Microsoft JhengHei"/>
+        <a:font script="Java" typeface="Javanese Text"/>
+        <a:font script="Lisu" typeface="Segoe UI"/>
+        <a:font script="Mymr" typeface="Myanmar Text"/>
+        <a:font script="Nkoo" typeface="Ebrima"/>
+        <a:font script="Olck" typeface="Nirmala UI"/>
+        <a:font script="Osma" typeface="Ebrima"/>
+        <a:font script="Phag" typeface="Phagspa"/>
+        <a:font script="Syrn" typeface="Estrangelo Edessa"/>
+        <a:font script="Syrj" typeface="Estrangelo Edessa"/>
+        <a:font script="Syre" typeface="Estrangelo Edessa"/>
+        <a:font script="Sora" typeface="Nirmala UI"/>
+        <a:font script="Tale" typeface="Microsoft Tai Le"/>
+        <a:font script="Talu" typeface="Microsoft New Tai Lue"/>
+        <a:font script="Tfng" typeface="Ebrima"/>
+      </a:minorFont>
+    </a:fontScheme>
+    <a:fmtScheme name="Office">
+      <a:fillStyleLst>
+        <a:solidFill>
+          <a:schemeClr val="phClr"/>
+        </a:solidFill>
+        <a:gradFill rotWithShape="1">
+          <a:gsLst>
+            <a:gs pos="0">
+              <a:schemeClr val="phClr">
+                <a:lumMod val="110000"/>
+                <a:satMod val="105000"/>
+                <a:tint val="67000"/>
+              </a:schemeClr>
+            </a:gs>
+            <a:gs pos="50000">
+              <a:schemeClr val="phClr">
+                <a:lumMod val="105000"/>
+                <a:satMod val="103000"/>
+                <a:tint val="73000"/>
+              </a:schemeClr>
+            </a:gs>
+            <a:gs pos="100000">
+              <a:schemeClr val="phClr">
+                <a:lumMod val="105000"/>
+                <a:satMod val="109000"/>
+                <a:tint val="81000"/>
+              </a:schemeClr>
+            </a:gs>
+          </a:gsLst>
+          <a:lin ang="5400000" scaled="0"/>
+        </a:gradFill>
+        <a:gradFill rotWithShape="1">
+          <a:gsLst>
+            <a:gs pos="0">
+              <a:schemeClr val="phClr">
+                <a:satMod val="103000"/>
+                <a:lumMod val="102000"/>
+                <a:tint val="94000"/>
+              </a:schemeClr>
+            </a:gs>
+            <a:gs pos="50000">
+              <a:schemeClr val="phClr">
+                <a:satMod val="110000"/>
+                <a:lumMod val="100000"/>
+                <a:shade val="100000"/>
+              </a:schemeClr>
+            </a:gs>
+            <a:gs pos="100000">
+              <a:schemeClr val="phClr">
+                <a:lumMod val="99000"/>
+                <a:satMod val="120000"/>
+                <a:shade val="78000"/>
+              </a:schemeClr>
+            </a:gs>
+          </a:gsLst>
+          <a:lin ang="5400000" scaled="0"/>
+        </a:gradFill>
+      </a:fillStyleLst>
+      <a:lnStyleLst>
+        <a:ln w="6350" cap="flat" cmpd="sng" algn="ctr">
+          <a:solidFill>
+            <a:schemeClr val="phClr"/>
+          </a:solidFill>
+          <a:prstDash val="solid"/>
+          <a:miter lim="800000"/>
+        </a:ln>
+        <a:ln w="12700" cap="flat" cmpd="sng" algn="ctr">
+          <a:solidFill>
+            <a:schemeClr val="phClr"/>
+          </a:solidFill>
+          <a:prstDash val="solid"/>
+          <a:miter lim="800000"/>
+        </a:ln>
+        <a:ln w="19050" cap="flat" cmpd="sng" algn="ctr">
+          <a:solidFill>
+            <a:schemeClr val="phClr"/>
+          </a:solidFill>
+          <a:prstDash val="solid"/>
+          <a:miter lim="800000"/>
+        </a:ln>
+      </a:lnStyleLst>
+      <a:effectStyleLst>
+        <a:effectStyle>
+          <a:effectLst/>
+        </a:effectStyle>
+        <a:effectStyle>
+          <a:effectLst/>
+        </a:effectStyle>
+        <a:effectStyle>
+          <a:effectLst>
+            <a:outerShdw blurRad="57150" dist="19050" dir="5400000" algn="ctr" rotWithShape="0">
+              <a:srgbClr val="000000">
+                <a:alpha val="63000"/>
+              </a:srgbClr>
+            </a:outerShdw>
+          </a:effectLst>
+        </a:effectStyle>
+      </a:effectStyleLst>
+      <a:bgFillStyleLst>
+        <a:solidFill>
+          <a:schemeClr val="phClr"/>
+        </a:solidFill>
+        <a:solidFill>
+          <a:schemeClr val="phClr">
+            <a:tint val="95000"/>
+            <a:satMod val="170000"/>
+          </a:schemeClr>
+        </a:solidFill>
+        <a:gradFill rotWithShape="1">
+          <a:gsLst>
+            <a:gs pos="0">
+              <a:schemeClr val="phClr">
+                <a:tint val="93000"/>
+                <a:satMod val="150000"/>
+                <a:shade val="98000"/>
+                <a:lumMod val="102000"/>
+              </a:schemeClr>
+            </a:gs>
+            <a:gs pos="50000">
+              <a:schemeClr val="phClr">
+                <a:tint val="98000"/>
+                <a:satMod val="130000"/>
+                <a:shade val="90000"/>
+                <a:lumMod val="103000"/>
+              </a:schemeClr>
+            </a:gs>
+            <a:gs pos="100000">
+              <a:schemeClr val="phClr">
+                <a:shade val="63000"/>
+                <a:satMod val="120000"/>
+              </a:schemeClr>
+            </a:gs>
+          </a:gsLst>
+          <a:lin ang="5400000" scaled="0"/>
+        </a:gradFill>
+      </a:bgFillStyleLst>
+    </a:fmtScheme>
+  </a:themeElements>
+  <a:objectDefaults/>
+  <a:extraClrSchemeLst/>
+  <a:extLst>
+    <a:ext uri="{05A4C25C-085E-4340-85A3-A5531E510DB2}">
+      <thm15:themeFamily xmlns:thm15="http://schemas.microsoft.com/office/thememl/2012/main" name="Office Theme" id="{62F939B6-93AF-4DB8-9C6B-D6C7DFDC589F}" vid="{4A3C46E8-61CC-4603-A589-7422A47A8E4A}"/>
+    </a:ext>
+  </a:extLst>
+</a:theme>
 </file>